--- a/Defesa/slides_defesa.pptx
+++ b/Defesa/slides_defesa.pptx
@@ -23,6 +23,7 @@
     <p:sldId id="271" r:id="rId23"/>
     <p:sldId id="272" r:id="rId24"/>
     <p:sldId id="273" r:id="rId25"/>
+    <p:sldId id="274" r:id="rId26"/>
   </p:sldIdLst>
   <p:sldSz cx="12191695" cy="6858000" type="screen4x3"/>
   <p:notesSz cx="6858000" cy="9144000"/>
@@ -1360,6 +1361,111 @@
 </file>
 
 <file path=ppt/notesSlides/notesSlide18.xml><?xml version="1.0" encoding="utf-8"?>
+<p:notes xmlns:a="http://schemas.openxmlformats.org/drawingml/2006/main" xmlns:p="http://schemas.openxmlformats.org/presentationml/2006/main" xmlns:r="http://schemas.openxmlformats.org/officeDocument/2006/relationships">
+  <p:cSld>
+    <p:spTree>
+      <p:nvGrpSpPr>
+        <p:cNvPr id="1" name=""/>
+        <p:cNvGrpSpPr/>
+        <p:nvPr/>
+      </p:nvGrpSpPr>
+      <p:grpSpPr>
+        <a:xfrm>
+          <a:off x="0" y="0"/>
+          <a:ext cx="0" cy="0"/>
+          <a:chOff x="0" y="0"/>
+          <a:chExt cx="0" cy="0"/>
+        </a:xfrm>
+      </p:grpSpPr>
+      <p:sp>
+        <p:nvSpPr>
+          <p:cNvPr id="2" name="Slide Image Placeholder 1"/>
+          <p:cNvSpPr>
+            <a:spLocks noGrp="1"/>
+          </p:cNvSpPr>
+          <p:nvPr>
+            <p:ph type="sldImg" idx="2"/>
+          </p:nvPr>
+        </p:nvSpPr>
+        <p:spPr/>
+      </p:sp>
+      <p:sp>
+        <p:nvSpPr>
+          <p:cNvPr id="3" name="Notes Placeholder 2"/>
+          <p:cNvSpPr>
+            <a:spLocks noGrp="1"/>
+          </p:cNvSpPr>
+          <p:nvPr>
+            <p:ph type="body" idx="3" sz="quarter"/>
+          </p:nvPr>
+        </p:nvSpPr>
+        <p:spPr/>
+        <p:txBody>
+          <a:bodyPr/>
+          <a:lstStyle/>
+          <a:p>
+            <a:r>
+              <a:t>Antes das perguntas, um minuto ao vivo. Abro o painel na Apresentação, mapa dois:</a:t>
+            </a:r>
+          </a:p>
+          <a:p>
+            <a:r>
+              <a:t>o Muro em U. Três colunas com os modelos da campanha final — repare-se que cada</a:t>
+            </a:r>
+          </a:p>
+          <a:p>
+            <a:r>
+              <a:t>execução ou aprende o desvio ou fica a zero: três em sete, quatro em sete, duas</a:t>
+            </a:r>
+          </a:p>
+          <a:p>
+            <a:r>
+              <a:t>em sete. A quarta coluna é o GNN com novidade doseada adaptativamente: sete em</a:t>
+            </a:r>
+          </a:p>
+          <a:p>
+            <a:r>
+              <a:t>sete, setenta e oito recolhas. Carrego em Episódio 3D e os quatro enxames</a:t>
+            </a:r>
+          </a:p>
+          <a:p>
+            <a:r>
+              <a:t>correm ao mesmo tempo. Em baixo, o dot plot com a linha do adaptativo e as</a:t>
+            </a:r>
+          </a:p>
+          <a:p>
+            <a:r>
+              <a:t>curvas de treino. Qualquer número do painel tem proveniência: dois cliques até</a:t>
+            </a:r>
+          </a:p>
+          <a:p>
+            <a:r>
+              <a:t>ao CSV. Plano B se a rede ou o portátil falharem: o GIF do slide nove.</a:t>
+            </a:r>
+          </a:p>
+        </p:txBody>
+      </p:sp>
+      <p:sp>
+        <p:nvSpPr>
+          <p:cNvPr id="4" name="Slide Number Placeholder 3"/>
+          <p:cNvSpPr>
+            <a:spLocks noGrp="1"/>
+          </p:cNvSpPr>
+          <p:nvPr>
+            <p:ph type="sldNum" idx="5" sz="quarter"/>
+          </p:nvPr>
+        </p:nvSpPr>
+        <p:spPr/>
+      </p:sp>
+    </p:spTree>
+  </p:cSld>
+  <p:clrMapOvr>
+    <a:masterClrMapping/>
+  </p:clrMapOvr>
+</p:notes>
+</file>
+
+<file path=ppt/notesSlides/notesSlide19.xml><?xml version="1.0" encoding="utf-8"?>
 <p:notes xmlns:a="http://schemas.openxmlformats.org/drawingml/2006/main" xmlns:p="http://schemas.openxmlformats.org/presentationml/2006/main" xmlns:r="http://schemas.openxmlformats.org/officeDocument/2006/relationships">
   <p:cSld>
     <p:spTree>
@@ -9785,6 +9891,441 @@
         </p:nvSpPr>
         <p:spPr>
           <a:xfrm>
+            <a:off x="548640" y="320040"/>
+            <a:ext cx="11094415" cy="731520"/>
+          </a:xfrm>
+          <a:prstGeom prst="rect">
+            <a:avLst/>
+          </a:prstGeom>
+          <a:noFill/>
+        </p:spPr>
+        <p:txBody>
+          <a:bodyPr wrap="square" anchor="t">
+            <a:spAutoFit/>
+          </a:bodyPr>
+          <a:lstStyle/>
+          <a:p>
+            <a:pPr algn="l">
+              <a:spcAft>
+                <a:spcPts val="600"/>
+              </a:spcAft>
+            </a:pPr>
+            <a:r>
+              <a:rPr sz="3000" b="1">
+                <a:solidFill>
+                  <a:srgbClr val="1A1A1A"/>
+                </a:solidFill>
+                <a:latin typeface="Calibri"/>
+              </a:rPr>
+              <a:t>Demo ao vivo — o Muro em U no painel</a:t>
+            </a:r>
+          </a:p>
+        </p:txBody>
+      </p:sp>
+      <p:sp>
+        <p:nvSpPr>
+          <p:cNvPr id="3" name="TextBox 2"/>
+          <p:cNvSpPr txBox="1"/>
+          <p:nvPr/>
+        </p:nvSpPr>
+        <p:spPr>
+          <a:xfrm>
+            <a:off x="548640" y="960120"/>
+            <a:ext cx="11094415" cy="457200"/>
+          </a:xfrm>
+          <a:prstGeom prst="rect">
+            <a:avLst/>
+          </a:prstGeom>
+          <a:noFill/>
+        </p:spPr>
+        <p:txBody>
+          <a:bodyPr wrap="square" anchor="t">
+            <a:spAutoFit/>
+          </a:bodyPr>
+          <a:lstStyle/>
+          <a:p>
+            <a:pPr algn="l">
+              <a:spcAft>
+                <a:spcPts val="600"/>
+              </a:spcAft>
+            </a:pPr>
+            <a:r>
+              <a:rPr sz="1500" b="0">
+                <a:solidFill>
+                  <a:srgbClr val="6B6B6B"/>
+                </a:solidFill>
+                <a:latin typeface="Calibri"/>
+              </a:rPr>
+              <a:t>os três modelos a correr lado a lado, o vencedor em destaque, e a proveniência de cada número</a:t>
+            </a:r>
+          </a:p>
+        </p:txBody>
+      </p:sp>
+      <p:cxnSp>
+        <p:nvCxnSpPr>
+          <p:cNvPr id="4" name="Connector 3"/>
+          <p:cNvCxnSpPr/>
+          <p:nvPr/>
+        </p:nvCxnSpPr>
+        <p:spPr>
+          <a:xfrm>
+            <a:off x="548640" y="1371600"/>
+            <a:ext cx="1097280" cy="0"/>
+          </a:xfrm>
+          <a:prstGeom prst="line">
+            <a:avLst/>
+          </a:prstGeom>
+          <a:ln w="38100">
+            <a:solidFill>
+              <a:srgbClr val="0B3D91"/>
+            </a:solidFill>
+          </a:ln>
+        </p:spPr>
+        <p:style>
+          <a:lnRef idx="2">
+            <a:schemeClr val="accent1"/>
+          </a:lnRef>
+          <a:fillRef idx="0">
+            <a:schemeClr val="accent1"/>
+          </a:fillRef>
+          <a:effectRef idx="1">
+            <a:schemeClr val="accent1"/>
+          </a:effectRef>
+          <a:fontRef idx="minor">
+            <a:schemeClr val="tx1"/>
+          </a:fontRef>
+        </p:style>
+      </p:cxnSp>
+      <p:pic>
+        <p:nvPicPr>
+          <p:cNvPr id="5" name="Picture 4" descr="demo_muro_em_u.jpg"/>
+          <p:cNvPicPr>
+            <a:picLocks noChangeAspect="1"/>
+          </p:cNvPicPr>
+          <p:nvPr/>
+        </p:nvPicPr>
+        <p:blipFill>
+          <a:blip r:embed="rId2"/>
+          <a:stretch>
+            <a:fillRect/>
+          </a:stretch>
+        </p:blipFill>
+        <p:spPr>
+          <a:xfrm>
+            <a:off x="548640" y="1554480"/>
+            <a:ext cx="7589520" cy="3702795"/>
+          </a:xfrm>
+          <a:prstGeom prst="rect">
+            <a:avLst/>
+          </a:prstGeom>
+        </p:spPr>
+      </p:pic>
+      <p:sp>
+        <p:nvSpPr>
+          <p:cNvPr id="6" name="TextBox 5"/>
+          <p:cNvSpPr txBox="1"/>
+          <p:nvPr/>
+        </p:nvSpPr>
+        <p:spPr>
+          <a:xfrm>
+            <a:off x="8412480" y="1554480"/>
+            <a:ext cx="3230575" cy="4480560"/>
+          </a:xfrm>
+          <a:prstGeom prst="rect">
+            <a:avLst/>
+          </a:prstGeom>
+          <a:noFill/>
+        </p:spPr>
+        <p:txBody>
+          <a:bodyPr wrap="square" anchor="t">
+            <a:spAutoFit/>
+          </a:bodyPr>
+          <a:lstStyle/>
+          <a:p>
+            <a:pPr algn="l">
+              <a:spcAft>
+                <a:spcPts val="600"/>
+              </a:spcAft>
+            </a:pPr>
+            <a:r>
+              <a:rPr sz="1500" b="1">
+                <a:solidFill>
+                  <a:srgbClr val="0B3D91"/>
+                </a:solidFill>
+                <a:latin typeface="Calibri"/>
+              </a:rPr>
+              <a:t>O que mostrar, por esta ordem</a:t>
+            </a:r>
+          </a:p>
+          <a:p>
+            <a:pPr algn="l">
+              <a:spcAft>
+                <a:spcPts val="600"/>
+              </a:spcAft>
+            </a:pPr>
+            <a:r>
+              <a:rPr sz="1300" b="0">
+                <a:solidFill>
+                  <a:srgbClr val="1A1A1A"/>
+                </a:solidFill>
+                <a:latin typeface="Calibri"/>
+              </a:rPr>
+              <a:t>1. Os três da campanha final: 3/7, 4/7 e 2/7 — cada execução ou aprende o desvio ou fica a zero</a:t>
+            </a:r>
+          </a:p>
+          <a:p>
+            <a:pPr algn="l">
+              <a:spcAft>
+                <a:spcPts val="600"/>
+              </a:spcAft>
+            </a:pPr>
+            <a:r>
+              <a:rPr sz="1300" b="0">
+                <a:solidFill>
+                  <a:srgbClr val="1A1A1A"/>
+                </a:solidFill>
+                <a:latin typeface="Calibri"/>
+              </a:rPr>
+              <a:t>2. A 4.ª coluna: o GNN com novidade adaptativa — 7/7, 77,8 rec/ep (o «melhor»)</a:t>
+            </a:r>
+          </a:p>
+          <a:p>
+            <a:pPr algn="l">
+              <a:spcAft>
+                <a:spcPts val="600"/>
+              </a:spcAft>
+            </a:pPr>
+            <a:r>
+              <a:rPr sz="1300" b="0">
+                <a:solidFill>
+                  <a:srgbClr val="1A1A1A"/>
+                </a:solidFill>
+                <a:latin typeface="Calibri"/>
+              </a:rPr>
+              <a:t>3. Toggle «Episódio 3D»: os quatro enxames em 3D ao mesmo tempo; arrastar para rodar</a:t>
+            </a:r>
+          </a:p>
+          <a:p>
+            <a:pPr algn="l">
+              <a:spcAft>
+                <a:spcPts val="600"/>
+              </a:spcAft>
+            </a:pPr>
+            <a:r>
+              <a:rPr sz="1300" b="0">
+                <a:solidFill>
+                  <a:srgbClr val="1A1A1A"/>
+                </a:solidFill>
+                <a:latin typeface="Calibri"/>
+              </a:rPr>
+              <a:t>4. Em baixo: o dot plot com a linha do adaptativo, e as curvas de treino</a:t>
+            </a:r>
+          </a:p>
+          <a:p>
+            <a:pPr algn="l">
+              <a:spcAft>
+                <a:spcPts val="600"/>
+              </a:spcAft>
+            </a:pPr>
+            <a:r>
+              <a:rPr sz="1300" b="0">
+                <a:solidFill>
+                  <a:srgbClr val="1A1A1A"/>
+                </a:solidFill>
+                <a:latin typeface="Calibri"/>
+              </a:rPr>
+              <a:t>5. Se perguntarem «de onde vem este número?»: Proveniência — dois cliques até ao CSV</a:t>
+            </a:r>
+          </a:p>
+          <a:p>
+            <a:pPr algn="l">
+              <a:spcAft>
+                <a:spcPts val="600"/>
+              </a:spcAft>
+            </a:pPr>
+            <a:r>
+              <a:rPr sz="800" b="0">
+                <a:solidFill>
+                  <a:srgbClr val="1A1A1A"/>
+                </a:solidFill>
+                <a:latin typeface="Calibri"/>
+              </a:rPr>
+              <a:t/>
+            </a:r>
+          </a:p>
+          <a:p>
+            <a:pPr algn="l">
+              <a:spcAft>
+                <a:spcPts val="600"/>
+              </a:spcAft>
+            </a:pPr>
+            <a:r>
+              <a:rPr sz="1200" b="0">
+                <a:solidFill>
+                  <a:srgbClr val="6B6B6B"/>
+                </a:solidFill>
+                <a:latin typeface="Calibri"/>
+              </a:rPr>
+              <a:t>Painel: localhost:8080 (portátil) · swarmroboticsgs.duckdns.org (Pi)</a:t>
+            </a:r>
+          </a:p>
+          <a:p>
+            <a:pPr algn="l">
+              <a:spcAft>
+                <a:spcPts val="600"/>
+              </a:spcAft>
+            </a:pPr>
+            <a:r>
+              <a:rPr sz="1200" b="0">
+                <a:solidFill>
+                  <a:srgbClr val="6B6B6B"/>
+                </a:solidFill>
+                <a:latin typeface="Calibri"/>
+              </a:rPr>
+              <a:t>Setas do teclado mudam de mapa · plano B: o GIF do Muro em U no slide 9</a:t>
+            </a:r>
+          </a:p>
+        </p:txBody>
+      </p:sp>
+      <p:cxnSp>
+        <p:nvCxnSpPr>
+          <p:cNvPr id="7" name="Connector 6"/>
+          <p:cNvCxnSpPr/>
+          <p:nvPr/>
+        </p:nvCxnSpPr>
+        <p:spPr>
+          <a:xfrm>
+            <a:off x="548640" y="6355080"/>
+            <a:ext cx="11094415" cy="0"/>
+          </a:xfrm>
+          <a:prstGeom prst="line">
+            <a:avLst/>
+          </a:prstGeom>
+          <a:ln w="9525">
+            <a:solidFill>
+              <a:srgbClr val="D0D0D0"/>
+            </a:solidFill>
+          </a:ln>
+        </p:spPr>
+        <p:style>
+          <a:lnRef idx="2">
+            <a:schemeClr val="accent1"/>
+          </a:lnRef>
+          <a:fillRef idx="0">
+            <a:schemeClr val="accent1"/>
+          </a:fillRef>
+          <a:effectRef idx="1">
+            <a:schemeClr val="accent1"/>
+          </a:effectRef>
+          <a:fontRef idx="minor">
+            <a:schemeClr val="tx1"/>
+          </a:fontRef>
+        </p:style>
+      </p:cxnSp>
+      <p:sp>
+        <p:nvSpPr>
+          <p:cNvPr id="8" name="TextBox 7"/>
+          <p:cNvSpPr txBox="1"/>
+          <p:nvPr/>
+        </p:nvSpPr>
+        <p:spPr>
+          <a:xfrm>
+            <a:off x="548640" y="6400800"/>
+            <a:ext cx="8229600" cy="365760"/>
+          </a:xfrm>
+          <a:prstGeom prst="rect">
+            <a:avLst/>
+          </a:prstGeom>
+          <a:noFill/>
+        </p:spPr>
+        <p:txBody>
+          <a:bodyPr wrap="square" anchor="t">
+            <a:spAutoFit/>
+          </a:bodyPr>
+          <a:lstStyle/>
+          <a:p>
+            <a:pPr algn="l">
+              <a:spcAft>
+                <a:spcPts val="600"/>
+              </a:spcAft>
+            </a:pPr>
+            <a:r>
+              <a:rPr sz="1000" b="0">
+                <a:solidFill>
+                  <a:srgbClr val="6B6B6B"/>
+                </a:solidFill>
+                <a:latin typeface="Calibri"/>
+              </a:rPr>
+              <a:t>Aprendizagem por Reforço para Controlo de Enxames · ISCTE-IUL 2026</a:t>
+            </a:r>
+          </a:p>
+        </p:txBody>
+      </p:sp>
+      <p:sp>
+        <p:nvSpPr>
+          <p:cNvPr id="9" name="TextBox 8"/>
+          <p:cNvSpPr txBox="1"/>
+          <p:nvPr/>
+        </p:nvSpPr>
+        <p:spPr>
+          <a:xfrm>
+            <a:off x="10728655" y="6400800"/>
+            <a:ext cx="914400" cy="365760"/>
+          </a:xfrm>
+          <a:prstGeom prst="rect">
+            <a:avLst/>
+          </a:prstGeom>
+          <a:noFill/>
+        </p:spPr>
+        <p:txBody>
+          <a:bodyPr wrap="square" anchor="t">
+            <a:spAutoFit/>
+          </a:bodyPr>
+          <a:lstStyle/>
+          <a:p>
+            <a:pPr algn="r">
+              <a:spcAft>
+                <a:spcPts val="600"/>
+              </a:spcAft>
+            </a:pPr>
+            <a:r>
+              <a:rPr sz="1000" b="0">
+                <a:solidFill>
+                  <a:srgbClr val="6B6B6B"/>
+                </a:solidFill>
+                <a:latin typeface="Calibri"/>
+              </a:rPr>
+              <a:t>17</a:t>
+            </a:r>
+          </a:p>
+        </p:txBody>
+      </p:sp>
+    </p:spTree>
+  </p:cSld>
+  <p:clrMapOvr>
+    <a:masterClrMapping/>
+  </p:clrMapOvr>
+</p:sld>
+</file>
+
+<file path=ppt/slides/slide19.xml><?xml version="1.0" encoding="utf-8"?>
+<p:sld xmlns:a="http://schemas.openxmlformats.org/drawingml/2006/main" xmlns:p="http://schemas.openxmlformats.org/presentationml/2006/main" xmlns:r="http://schemas.openxmlformats.org/officeDocument/2006/relationships">
+  <p:cSld>
+    <p:spTree>
+      <p:nvGrpSpPr>
+        <p:cNvPr id="1" name=""/>
+        <p:cNvGrpSpPr/>
+        <p:nvPr/>
+      </p:nvGrpSpPr>
+      <p:grpSpPr/>
+      <p:sp>
+        <p:nvSpPr>
+          <p:cNvPr id="2" name="TextBox 1"/>
+          <p:cNvSpPr txBox="1"/>
+          <p:nvPr/>
+        </p:nvSpPr>
+        <p:spPr>
+          <a:xfrm>
             <a:off x="548640" y="2194560"/>
             <a:ext cx="11094415" cy="1097280"/>
           </a:xfrm>

--- a/Defesa/slides_defesa.pptx
+++ b/Defesa/slides_defesa.pptx
@@ -24,6 +24,12 @@
     <p:sldId id="272" r:id="rId24"/>
     <p:sldId id="273" r:id="rId25"/>
     <p:sldId id="274" r:id="rId26"/>
+    <p:sldId id="275" r:id="rId27"/>
+    <p:sldId id="276" r:id="rId28"/>
+    <p:sldId id="277" r:id="rId29"/>
+    <p:sldId id="278" r:id="rId30"/>
+    <p:sldId id="279" r:id="rId31"/>
+    <p:sldId id="280" r:id="rId32"/>
   </p:sldIdLst>
   <p:sldSz cx="12191695" cy="6858000" type="screen4x3"/>
   <p:notesSz cx="6858000" cy="9144000"/>
@@ -520,6 +526,12 @@
           <a:lstStyle/>
           <a:p>
             <a:r>
+              <a:t>[0:00 → 0:25 · 25 s]</a:t>
+            </a:r>
+          </a:p>
+          <a:p/>
+          <a:p>
+            <a:r>
               <a:t>Bom dia. Vou apresentar a dissertação «Aprendizagem por Reforço para Controlo de</a:t>
             </a:r>
           </a:p>
@@ -610,6 +622,12 @@
           <a:lstStyle/>
           <a:p>
             <a:r>
+              <a:t>[7:25 → 8:40 · 75 s]</a:t>
+            </a:r>
+          </a:p>
+          <a:p/>
+          <a:p>
+            <a:r>
               <a:t>A hibridização com procura por novidade, com orçamento igualado, resolve o</a:t>
             </a:r>
           </a:p>
@@ -720,6 +738,12 @@
           <a:lstStyle/>
           <a:p>
             <a:r>
+              <a:t>[8:40 → 9:30 · 50 s]</a:t>
+            </a:r>
+          </a:p>
+          <a:p/>
+          <a:p>
+            <a:r>
               <a:t>Escalabilidade. A política do controlador de grafo, treinada com vinte agentes,</a:t>
             </a:r>
           </a:p>
@@ -820,6 +844,12 @@
           <a:lstStyle/>
           <a:p>
             <a:r>
+              <a:t>[9:30 → 10:00 · 30 s]</a:t>
+            </a:r>
+          </a:p>
+          <a:p/>
+          <a:p>
+            <a:r>
               <a:t>Robustez: dez por cento dos agentes falham a meio do episódio e ficam inertes.</a:t>
             </a:r>
           </a:p>
@@ -915,6 +945,12 @@
           <a:lstStyle/>
           <a:p>
             <a:r>
+              <a:t>[10:00 → 11:00 · 60 s]</a:t>
+            </a:r>
+          </a:p>
+          <a:p/>
+          <a:p>
+            <a:r>
               <a:t>A última pergunta testa a objeção mais natural a um benchmark por cenários</a:t>
             </a:r>
           </a:p>
@@ -1025,6 +1061,12 @@
           <a:lstStyle/>
           <a:p>
             <a:r>
+              <a:t>[11:00 → 11:40 · 40 s]</a:t>
+            </a:r>
+          </a:p>
+          <a:p/>
+          <a:p>
+            <a:r>
               <a:t>A síntese prática. Dimensão fixa e cómputo barato: PPO. Dimensão variável ou</a:t>
             </a:r>
           </a:p>
@@ -1115,6 +1157,12 @@
           <a:lstStyle/>
           <a:p>
             <a:r>
+              <a:t>[11:40 → 12:20 · 40 s]</a:t>
+            </a:r>
+          </a:p>
+          <a:p/>
+          <a:p>
+            <a:r>
               <a:t>As limitações vêm antes das perguntas. A arquitetura difere entre paradigmas —</a:t>
             </a:r>
           </a:p>
@@ -1140,12 +1188,32 @@
           </a:p>
           <a:p>
             <a:r>
-              <a:t>física tem duas costuras nas paredes que uma minoria de modelos explora — medi</a:t>
-            </a:r>
-          </a:p>
-          <a:p>
-            <a:r>
-              <a:t>todos os modelos arquivados; nenhuma conclusão depende disso.</a:t>
+              <a:t>física tem duas costuras nas paredes que uma minoria de modelos explora. Medi</a:t>
+            </a:r>
+          </a:p>
+          <a:p>
+            <a:r>
+              <a:t>todos os modelos arquivados, um a um: onze atravessam, todos do evolutivo, e na</a:t>
+            </a:r>
+          </a:p>
+          <a:p>
+            <a:r>
+              <a:t>campanha final são três, nas Quatro Salas — que não ficam melhores por isso, e</a:t>
+            </a:r>
+          </a:p>
+          <a:p>
+            <a:r>
+              <a:t>continuam muito acima do PPO nesse cenário. Onde a costura pesa mesmo é numa</a:t>
+            </a:r>
+          </a:p>
+          <a:p>
+            <a:r>
+              <a:t>célula da campanha de dosagem adaptativa, e essa está declarada como</a:t>
+            </a:r>
+          </a:p>
+          <a:p>
+            <a:r>
+              <a:t>contaminada, não usada como evidência.</a:t>
             </a:r>
           </a:p>
         </p:txBody>
@@ -1215,6 +1283,12 @@
           <a:lstStyle/>
           <a:p>
             <a:r>
+              <a:t>[12:20 → 12:50 · 30 s]</a:t>
+            </a:r>
+          </a:p>
+          <a:p/>
+          <a:p>
+            <a:r>
               <a:t>Quatro contributos. O primeiro é metodológico: o colapso do evolutivo era o</a:t>
             </a:r>
           </a:p>
@@ -1310,6 +1384,12 @@
           <a:lstStyle/>
           <a:p>
             <a:r>
+              <a:t>[12:50 → 13:25 · 35 s]</a:t>
+            </a:r>
+          </a:p>
+          <a:p/>
+          <a:p>
+            <a:r>
               <a:t>A hipótese de que a inteligência adaptativa supera a robustez estática</a:t>
             </a:r>
           </a:p>
@@ -1405,6 +1485,12 @@
           <a:lstStyle/>
           <a:p>
             <a:r>
+              <a:t>[13:25 → 14:25 · 60 s]</a:t>
+            </a:r>
+          </a:p>
+          <a:p/>
+          <a:p>
+            <a:r>
               <a:t>Antes das perguntas, um minuto ao vivo. Abro o painel na Apresentação, mapa dois:</a:t>
             </a:r>
           </a:p>
@@ -1440,7 +1526,12 @@
           </a:p>
           <a:p>
             <a:r>
-              <a:t>ao CSV. Plano B se a rede ou o portátil falharem: o GIF do slide nove.</a:t>
+              <a:t>ao CSV. Plano B, se a rede ou o portátil falharem: a captura que está neste</a:t>
+            </a:r>
+          </a:p>
+          <a:p>
+            <a:r>
+              <a:t>slide, e a figura dos quatro braços — o slide com o rótulo 09 no rodapé.</a:t>
             </a:r>
           </a:p>
         </p:txBody>
@@ -1510,6 +1601,12 @@
           <a:lstStyle/>
           <a:p>
             <a:r>
+              <a:t>[14:25 → 14:40 · 15 s]</a:t>
+            </a:r>
+          </a:p>
+          <a:p/>
+          <a:p>
+            <a:r>
               <a:t>Obrigado. O painel tem as trinta campanhas, os vídeos, os episódios em 3D e a</a:t>
             </a:r>
           </a:p>
@@ -1590,6 +1687,12 @@
           <a:lstStyle/>
           <a:p>
             <a:r>
+              <a:t>[0:25 → 1:15 · 50 s]</a:t>
+            </a:r>
+          </a:p>
+          <a:p/>
+          <a:p>
+            <a:r>
               <a:t>O campo organiza-se em duas escolas. A bio-inspirada trata o controlador como um</a:t>
             </a:r>
           </a:p>
@@ -1621,6 +1724,587 @@
           <a:p>
             <a:r>
               <a:t>onde a hipótese a punha.</a:t>
+            </a:r>
+          </a:p>
+        </p:txBody>
+      </p:sp>
+      <p:sp>
+        <p:nvSpPr>
+          <p:cNvPr id="4" name="Slide Number Placeholder 3"/>
+          <p:cNvSpPr>
+            <a:spLocks noGrp="1"/>
+          </p:cNvSpPr>
+          <p:nvPr>
+            <p:ph type="sldNum" idx="5" sz="quarter"/>
+          </p:nvPr>
+        </p:nvSpPr>
+        <p:spPr/>
+      </p:sp>
+    </p:spTree>
+  </p:cSld>
+  <p:clrMapOvr>
+    <a:masterClrMapping/>
+  </p:clrMapOvr>
+</p:notes>
+</file>
+
+<file path=ppt/notesSlides/notesSlide20.xml><?xml version="1.0" encoding="utf-8"?>
+<p:notes xmlns:a="http://schemas.openxmlformats.org/drawingml/2006/main" xmlns:p="http://schemas.openxmlformats.org/presentationml/2006/main" xmlns:r="http://schemas.openxmlformats.org/officeDocument/2006/relationships">
+  <p:cSld>
+    <p:spTree>
+      <p:nvGrpSpPr>
+        <p:cNvPr id="1" name=""/>
+        <p:cNvGrpSpPr/>
+        <p:nvPr/>
+      </p:nvGrpSpPr>
+      <p:grpSpPr>
+        <a:xfrm>
+          <a:off x="0" y="0"/>
+          <a:ext cx="0" cy="0"/>
+          <a:chOff x="0" y="0"/>
+          <a:chExt cx="0" cy="0"/>
+        </a:xfrm>
+      </p:grpSpPr>
+      <p:sp>
+        <p:nvSpPr>
+          <p:cNvPr id="2" name="Slide Image Placeholder 1"/>
+          <p:cNvSpPr>
+            <a:spLocks noGrp="1"/>
+          </p:cNvSpPr>
+          <p:nvPr>
+            <p:ph type="sldImg" idx="2"/>
+          </p:nvPr>
+        </p:nvSpPr>
+        <p:spPr/>
+      </p:sp>
+      <p:sp>
+        <p:nvSpPr>
+          <p:cNvPr id="3" name="Notes Placeholder 2"/>
+          <p:cNvSpPr>
+            <a:spLocks noGrp="1"/>
+          </p:cNvSpPr>
+          <p:nvPr>
+            <p:ph type="body" idx="3" sz="quarter"/>
+          </p:nvPr>
+        </p:nvSpPr>
+        <p:spPr/>
+        <p:txBody>
+          <a:bodyPr/>
+          <a:lstStyle/>
+          <a:p>
+            <a:r>
+              <a:t>[reserva — fora do tempo da apresentação; só se a pergunta vier]</a:t>
+            </a:r>
+          </a:p>
+          <a:p/>
+          <a:p>
+            <a:r>
+              <a:t>A tabela inteira, para quando a pergunta for por uma célula concreta. Quinze das</a:t>
+            </a:r>
+          </a:p>
+          <a:p>
+            <a:r>
+              <a:t>vinte e uma estão a cem por cento. As três parcelas de cada célula são recolhas</a:t>
+            </a:r>
+          </a:p>
+          <a:p>
+            <a:r>
+              <a:t>por episódio, taxa de sucesso e quantas das sete execuções chegaram aos cem por</a:t>
+            </a:r>
+          </a:p>
+          <a:p>
+            <a:r>
+              <a:t>cento — é a terceira que conta a história, porque é nela que a bimodalidade</a:t>
+            </a:r>
+          </a:p>
+          <a:p>
+            <a:r>
+              <a:t>aparece.</a:t>
+            </a:r>
+          </a:p>
+        </p:txBody>
+      </p:sp>
+      <p:sp>
+        <p:nvSpPr>
+          <p:cNvPr id="4" name="Slide Number Placeholder 3"/>
+          <p:cNvSpPr>
+            <a:spLocks noGrp="1"/>
+          </p:cNvSpPr>
+          <p:nvPr>
+            <p:ph type="sldNum" idx="5" sz="quarter"/>
+          </p:nvPr>
+        </p:nvSpPr>
+        <p:spPr/>
+      </p:sp>
+    </p:spTree>
+  </p:cSld>
+  <p:clrMapOvr>
+    <a:masterClrMapping/>
+  </p:clrMapOvr>
+</p:notes>
+</file>
+
+<file path=ppt/notesSlides/notesSlide21.xml><?xml version="1.0" encoding="utf-8"?>
+<p:notes xmlns:a="http://schemas.openxmlformats.org/drawingml/2006/main" xmlns:p="http://schemas.openxmlformats.org/presentationml/2006/main" xmlns:r="http://schemas.openxmlformats.org/officeDocument/2006/relationships">
+  <p:cSld>
+    <p:spTree>
+      <p:nvGrpSpPr>
+        <p:cNvPr id="1" name=""/>
+        <p:cNvGrpSpPr/>
+        <p:nvPr/>
+      </p:nvGrpSpPr>
+      <p:grpSpPr>
+        <a:xfrm>
+          <a:off x="0" y="0"/>
+          <a:ext cx="0" cy="0"/>
+          <a:chOff x="0" y="0"/>
+          <a:chExt cx="0" cy="0"/>
+        </a:xfrm>
+      </p:grpSpPr>
+      <p:sp>
+        <p:nvSpPr>
+          <p:cNvPr id="2" name="Slide Image Placeholder 1"/>
+          <p:cNvSpPr>
+            <a:spLocks noGrp="1"/>
+          </p:cNvSpPr>
+          <p:nvPr>
+            <p:ph type="sldImg" idx="2"/>
+          </p:nvPr>
+        </p:nvSpPr>
+        <p:spPr/>
+      </p:sp>
+      <p:sp>
+        <p:nvSpPr>
+          <p:cNvPr id="3" name="Notes Placeholder 2"/>
+          <p:cNvSpPr>
+            <a:spLocks noGrp="1"/>
+          </p:cNvSpPr>
+          <p:nvPr>
+            <p:ph type="body" idx="3" sz="quarter"/>
+          </p:nvPr>
+        </p:nvSpPr>
+        <p:spPr/>
+        <p:txBody>
+          <a:bodyPr/>
+          <a:lstStyle/>
+          <a:p>
+            <a:r>
+              <a:t>[reserva — fora do tempo da apresentação; só se a pergunta vier]</a:t>
+            </a:r>
+          </a:p>
+          <a:p/>
+          <a:p>
+            <a:r>
+              <a:t>Os quatro braços lado a lado. A coluna do meio é a replicação com vinte e oito</a:t>
+            </a:r>
+          </a:p>
+          <a:p>
+            <a:r>
+              <a:t>execuções por braço, que é onde uma leitura por contagens ganha poder. A última</a:t>
+            </a:r>
+          </a:p>
+          <a:p>
+            <a:r>
+              <a:t>coluna é o preço: com peso fixo, delta menos um; doseada adaptativamente, o</a:t>
+            </a:r>
+          </a:p>
+          <a:p>
+            <a:r>
+              <a:t>preço desaparece.</a:t>
+            </a:r>
+          </a:p>
+        </p:txBody>
+      </p:sp>
+      <p:sp>
+        <p:nvSpPr>
+          <p:cNvPr id="4" name="Slide Number Placeholder 3"/>
+          <p:cNvSpPr>
+            <a:spLocks noGrp="1"/>
+          </p:cNvSpPr>
+          <p:nvPr>
+            <p:ph type="sldNum" idx="5" sz="quarter"/>
+          </p:nvPr>
+        </p:nvSpPr>
+        <p:spPr/>
+      </p:sp>
+    </p:spTree>
+  </p:cSld>
+  <p:clrMapOvr>
+    <a:masterClrMapping/>
+  </p:clrMapOvr>
+</p:notes>
+</file>
+
+<file path=ppt/notesSlides/notesSlide22.xml><?xml version="1.0" encoding="utf-8"?>
+<p:notes xmlns:a="http://schemas.openxmlformats.org/drawingml/2006/main" xmlns:p="http://schemas.openxmlformats.org/presentationml/2006/main" xmlns:r="http://schemas.openxmlformats.org/officeDocument/2006/relationships">
+  <p:cSld>
+    <p:spTree>
+      <p:nvGrpSpPr>
+        <p:cNvPr id="1" name=""/>
+        <p:cNvGrpSpPr/>
+        <p:nvPr/>
+      </p:nvGrpSpPr>
+      <p:grpSpPr>
+        <a:xfrm>
+          <a:off x="0" y="0"/>
+          <a:ext cx="0" cy="0"/>
+          <a:chOff x="0" y="0"/>
+          <a:chExt cx="0" cy="0"/>
+        </a:xfrm>
+      </p:grpSpPr>
+      <p:sp>
+        <p:nvSpPr>
+          <p:cNvPr id="2" name="Slide Image Placeholder 1"/>
+          <p:cNvSpPr>
+            <a:spLocks noGrp="1"/>
+          </p:cNvSpPr>
+          <p:nvPr>
+            <p:ph type="sldImg" idx="2"/>
+          </p:nvPr>
+        </p:nvSpPr>
+        <p:spPr/>
+      </p:sp>
+      <p:sp>
+        <p:nvSpPr>
+          <p:cNvPr id="3" name="Notes Placeholder 2"/>
+          <p:cNvSpPr>
+            <a:spLocks noGrp="1"/>
+          </p:cNvSpPr>
+          <p:nvPr>
+            <p:ph type="body" idx="3" sz="quarter"/>
+          </p:nvPr>
+        </p:nvSpPr>
+        <p:spPr/>
+        <p:txBody>
+          <a:bodyPr/>
+          <a:lstStyle/>
+          <a:p>
+            <a:r>
+              <a:t>[reserva — fora do tempo da apresentação; só se a pergunta vier]</a:t>
+            </a:r>
+          </a:p>
+          <a:p/>
+          <a:p>
+            <a:r>
+              <a:t>O negativo, com os números que o sustentam. A ordem importa: primeiro o zero em</a:t>
+            </a:r>
+          </a:p>
+          <a:p>
+            <a:r>
+              <a:t>oitenta e quatro células, depois a prova de que o mapa é resolúvel — cinquenta e</a:t>
+            </a:r>
+          </a:p>
+          <a:p>
+            <a:r>
+              <a:t>três recolhas de um navegador que não aprende nada —, e só então o limiar</a:t>
+            </a:r>
+          </a:p>
+          <a:p>
+            <a:r>
+              <a:t>pré-registado que não foi atingido. Sem o controlo do meio, o zero seria ambíguo.</a:t>
+            </a:r>
+          </a:p>
+        </p:txBody>
+      </p:sp>
+      <p:sp>
+        <p:nvSpPr>
+          <p:cNvPr id="4" name="Slide Number Placeholder 3"/>
+          <p:cNvSpPr>
+            <a:spLocks noGrp="1"/>
+          </p:cNvSpPr>
+          <p:nvPr>
+            <p:ph type="sldNum" idx="5" sz="quarter"/>
+          </p:nvPr>
+        </p:nvSpPr>
+        <p:spPr/>
+      </p:sp>
+    </p:spTree>
+  </p:cSld>
+  <p:clrMapOvr>
+    <a:masterClrMapping/>
+  </p:clrMapOvr>
+</p:notes>
+</file>
+
+<file path=ppt/notesSlides/notesSlide23.xml><?xml version="1.0" encoding="utf-8"?>
+<p:notes xmlns:a="http://schemas.openxmlformats.org/drawingml/2006/main" xmlns:p="http://schemas.openxmlformats.org/presentationml/2006/main" xmlns:r="http://schemas.openxmlformats.org/officeDocument/2006/relationships">
+  <p:cSld>
+    <p:spTree>
+      <p:nvGrpSpPr>
+        <p:cNvPr id="1" name=""/>
+        <p:cNvGrpSpPr/>
+        <p:nvPr/>
+      </p:nvGrpSpPr>
+      <p:grpSpPr>
+        <a:xfrm>
+          <a:off x="0" y="0"/>
+          <a:ext cx="0" cy="0"/>
+          <a:chOff x="0" y="0"/>
+          <a:chExt cx="0" cy="0"/>
+        </a:xfrm>
+      </p:grpSpPr>
+      <p:sp>
+        <p:nvSpPr>
+          <p:cNvPr id="2" name="Slide Image Placeholder 1"/>
+          <p:cNvSpPr>
+            <a:spLocks noGrp="1"/>
+          </p:cNvSpPr>
+          <p:nvPr>
+            <p:ph type="sldImg" idx="2"/>
+          </p:nvPr>
+        </p:nvSpPr>
+        <p:spPr/>
+      </p:sp>
+      <p:sp>
+        <p:nvSpPr>
+          <p:cNvPr id="3" name="Notes Placeholder 2"/>
+          <p:cNvSpPr>
+            <a:spLocks noGrp="1"/>
+          </p:cNvSpPr>
+          <p:nvPr>
+            <p:ph type="body" idx="3" sz="quarter"/>
+          </p:nvPr>
+        </p:nvSpPr>
+        <p:spPr/>
+        <p:txBody>
+          <a:bodyPr/>
+          <a:lstStyle/>
+          <a:p>
+            <a:r>
+              <a:t>[reserva — fora do tempo da apresentação; só se a pergunta vier]</a:t>
+            </a:r>
+          </a:p>
+          <a:p/>
+          <a:p>
+            <a:r>
+              <a:t>Se a pergunta for pela justiça da comparação, é este o slide. A assimetria está</a:t>
+            </a:r>
+          </a:p>
+          <a:p>
+            <a:r>
+              <a:t>medida, e a conclusão que dela se tira é a que desfavorece o evolutivo: mesmo</a:t>
+            </a:r>
+          </a:p>
+          <a:p>
+            <a:r>
+              <a:t>custando oito vezes mais, não domina. E a configuração do SAC está declarada —</a:t>
+            </a:r>
+          </a:p>
+          <a:p>
+            <a:r>
+              <a:t>temperatura fixa, sem o ajuste dual —, pelo que os seus valores são um limite</a:t>
+            </a:r>
+          </a:p>
+          <a:p>
+            <a:r>
+              <a:t>inferior e não um veredicto sobre o algoritmo.</a:t>
+            </a:r>
+          </a:p>
+        </p:txBody>
+      </p:sp>
+      <p:sp>
+        <p:nvSpPr>
+          <p:cNvPr id="4" name="Slide Number Placeholder 3"/>
+          <p:cNvSpPr>
+            <a:spLocks noGrp="1"/>
+          </p:cNvSpPr>
+          <p:nvPr>
+            <p:ph type="sldNum" idx="5" sz="quarter"/>
+          </p:nvPr>
+        </p:nvSpPr>
+        <p:spPr/>
+      </p:sp>
+    </p:spTree>
+  </p:cSld>
+  <p:clrMapOvr>
+    <a:masterClrMapping/>
+  </p:clrMapOvr>
+</p:notes>
+</file>
+
+<file path=ppt/notesSlides/notesSlide24.xml><?xml version="1.0" encoding="utf-8"?>
+<p:notes xmlns:a="http://schemas.openxmlformats.org/drawingml/2006/main" xmlns:p="http://schemas.openxmlformats.org/presentationml/2006/main" xmlns:r="http://schemas.openxmlformats.org/officeDocument/2006/relationships">
+  <p:cSld>
+    <p:spTree>
+      <p:nvGrpSpPr>
+        <p:cNvPr id="1" name=""/>
+        <p:cNvGrpSpPr/>
+        <p:nvPr/>
+      </p:nvGrpSpPr>
+      <p:grpSpPr>
+        <a:xfrm>
+          <a:off x="0" y="0"/>
+          <a:ext cx="0" cy="0"/>
+          <a:chOff x="0" y="0"/>
+          <a:chExt cx="0" cy="0"/>
+        </a:xfrm>
+      </p:grpSpPr>
+      <p:sp>
+        <p:nvSpPr>
+          <p:cNvPr id="2" name="Slide Image Placeholder 1"/>
+          <p:cNvSpPr>
+            <a:spLocks noGrp="1"/>
+          </p:cNvSpPr>
+          <p:nvPr>
+            <p:ph type="sldImg" idx="2"/>
+          </p:nvPr>
+        </p:nvSpPr>
+        <p:spPr/>
+      </p:sp>
+      <p:sp>
+        <p:nvSpPr>
+          <p:cNvPr id="3" name="Notes Placeholder 2"/>
+          <p:cNvSpPr>
+            <a:spLocks noGrp="1"/>
+          </p:cNvSpPr>
+          <p:nvPr>
+            <p:ph type="body" idx="3" sz="quarter"/>
+          </p:nvPr>
+        </p:nvSpPr>
+        <p:spPr/>
+        <p:txBody>
+          <a:bodyPr/>
+          <a:lstStyle/>
+          <a:p>
+            <a:r>
+              <a:t>[reserva — fora do tempo da apresentação; só se a pergunta vier]</a:t>
+            </a:r>
+          </a:p>
+          <a:p/>
+          <a:p>
+            <a:r>
+              <a:t>Se perguntarem o que é, ao certo, resolver o Muro em U: é isto. O mapa de calor</a:t>
+            </a:r>
+          </a:p>
+          <a:p>
+            <a:r>
+              <a:t>mostra onde o enxame passa o episódio, no modelo campeão de cada algoritmo. O GNN</a:t>
+            </a:r>
+          </a:p>
+          <a:p>
+            <a:r>
+              <a:t>e o PPO desenham um corredor que sai do beco, contorna o muro e chega ao ninho —</a:t>
+            </a:r>
+          </a:p>
+          <a:p>
+            <a:r>
+              <a:t>quatrocentas e setenta e três e quatrocentas e doze recolhas em seis episódios. O</a:t>
+            </a:r>
+          </a:p>
+          <a:p>
+            <a:r>
+              <a:t>SAC nunca encontra esse corredor: a ocupação espalha-se pela arena toda e o total</a:t>
+            </a:r>
+          </a:p>
+          <a:p>
+            <a:r>
+              <a:t>é zero. Não é uma diferença de magnitude, é outro comportamento — e é esta a</a:t>
+            </a:r>
+          </a:p>
+          <a:p>
+            <a:r>
+              <a:t>forma da falha que uma média esconde.</a:t>
+            </a:r>
+          </a:p>
+        </p:txBody>
+      </p:sp>
+      <p:sp>
+        <p:nvSpPr>
+          <p:cNvPr id="4" name="Slide Number Placeholder 3"/>
+          <p:cNvSpPr>
+            <a:spLocks noGrp="1"/>
+          </p:cNvSpPr>
+          <p:nvPr>
+            <p:ph type="sldNum" idx="5" sz="quarter"/>
+          </p:nvPr>
+        </p:nvSpPr>
+        <p:spPr/>
+      </p:sp>
+    </p:spTree>
+  </p:cSld>
+  <p:clrMapOvr>
+    <a:masterClrMapping/>
+  </p:clrMapOvr>
+</p:notes>
+</file>
+
+<file path=ppt/notesSlides/notesSlide25.xml><?xml version="1.0" encoding="utf-8"?>
+<p:notes xmlns:a="http://schemas.openxmlformats.org/drawingml/2006/main" xmlns:p="http://schemas.openxmlformats.org/presentationml/2006/main" xmlns:r="http://schemas.openxmlformats.org/officeDocument/2006/relationships">
+  <p:cSld>
+    <p:spTree>
+      <p:nvGrpSpPr>
+        <p:cNvPr id="1" name=""/>
+        <p:cNvGrpSpPr/>
+        <p:nvPr/>
+      </p:nvGrpSpPr>
+      <p:grpSpPr>
+        <a:xfrm>
+          <a:off x="0" y="0"/>
+          <a:ext cx="0" cy="0"/>
+          <a:chOff x="0" y="0"/>
+          <a:chExt cx="0" cy="0"/>
+        </a:xfrm>
+      </p:grpSpPr>
+      <p:sp>
+        <p:nvSpPr>
+          <p:cNvPr id="2" name="Slide Image Placeholder 1"/>
+          <p:cNvSpPr>
+            <a:spLocks noGrp="1"/>
+          </p:cNvSpPr>
+          <p:nvPr>
+            <p:ph type="sldImg" idx="2"/>
+          </p:nvPr>
+        </p:nvSpPr>
+        <p:spPr/>
+      </p:sp>
+      <p:sp>
+        <p:nvSpPr>
+          <p:cNvPr id="3" name="Notes Placeholder 2"/>
+          <p:cNvSpPr>
+            <a:spLocks noGrp="1"/>
+          </p:cNvSpPr>
+          <p:nvPr>
+            <p:ph type="body" idx="3" sz="quarter"/>
+          </p:nvPr>
+        </p:nvSpPr>
+        <p:spPr/>
+        <p:txBody>
+          <a:bodyPr/>
+          <a:lstStyle/>
+          <a:p>
+            <a:r>
+              <a:t>[reserva — fora do tempo da apresentação; só se a pergunta vier]</a:t>
+            </a:r>
+          </a:p>
+          <a:p/>
+          <a:p>
+            <a:r>
+              <a:t>A resposta longa à pergunta da confiança. Não é que eu tenha conferido os</a:t>
+            </a:r>
+          </a:p>
+          <a:p>
+            <a:r>
+              <a:t>números: é que eles são recalculados a cada commit, e o commit é recusado se</a:t>
+            </a:r>
+          </a:p>
+          <a:p>
+            <a:r>
+              <a:t>algum deixar de bater. E os próprios verificadores são postos à prova — noventa</a:t>
+            </a:r>
+          </a:p>
+          <a:p>
+            <a:r>
+              <a:t>e duas mutações injetadas na tese, uma de cada vez, cada uma tem de ser</a:t>
+            </a:r>
+          </a:p>
+          <a:p>
+            <a:r>
+              <a:t>apanhada. A cobertura está medida e publicada, com a lista do que ainda falta,</a:t>
+            </a:r>
+          </a:p>
+          <a:p>
+            <a:r>
+              <a:t>porque um número de cobertura sem essa lista é uma alegação.</a:t>
             </a:r>
           </a:p>
         </p:txBody>
@@ -1690,6 +2374,12 @@
           <a:lstStyle/>
           <a:p>
             <a:r>
+              <a:t>[1:15 → 1:55 · 40 s]</a:t>
+            </a:r>
+          </a:p>
+          <a:p/>
+          <a:p>
+            <a:r>
               <a:t>Sete questões em dois níveis. As quatro primeiras comparam paradigmas:</a:t>
             </a:r>
           </a:p>
@@ -1780,6 +2470,12 @@
           <a:lstStyle/>
           <a:p>
             <a:r>
+              <a:t>[1:55 → 2:55 · 60 s]</a:t>
+            </a:r>
+          </a:p>
+          <a:p/>
+          <a:p>
+            <a:r>
               <a:t>O simulador foi construído de raiz em Python: tridimensional, com física de</a:t>
             </a:r>
           </a:p>
@@ -1875,6 +2571,12 @@
           <a:lstStyle/>
           <a:p>
             <a:r>
+              <a:t>[2:55 → 3:45 · 50 s]</a:t>
+            </a:r>
+          </a:p>
+          <a:p/>
+          <a:p>
+            <a:r>
               <a:t>Os dois lados partilham o simulador, a observação e o protocolo de avaliação.</a:t>
             </a:r>
           </a:p>
@@ -1975,6 +2677,12 @@
           <a:lstStyle/>
           <a:p>
             <a:r>
+              <a:t>[3:45 → 4:35 · 50 s]</a:t>
+            </a:r>
+          </a:p>
+          <a:p/>
+          <a:p>
+            <a:r>
               <a:t>Cento e quarenta e sete treinos, cada modelo avaliado em vinte episódios</a:t>
             </a:r>
           </a:p>
@@ -2075,6 +2783,12 @@
           <a:lstStyle/>
           <a:p>
             <a:r>
+              <a:t>[4:35 → 5:45 · 70 s]</a:t>
+            </a:r>
+          </a:p>
+          <a:p/>
+          <a:p>
+            <a:r>
               <a:t>Primeira resposta: não há vencedor universal. Quinze das vinte e uma células</a:t>
             </a:r>
           </a:p>
@@ -2180,6 +2894,12 @@
           <a:lstStyle/>
           <a:p>
             <a:r>
+              <a:t>[5:45 → 6:25 · 40 s]</a:t>
+            </a:r>
+          </a:p>
+          <a:p/>
+          <a:p>
+            <a:r>
               <a:t>Um ponto de método que muda a leitura. Com sete execuções, um boxplot esconde a</a:t>
             </a:r>
           </a:p>
@@ -2273,6 +2993,12 @@
         <p:txBody>
           <a:bodyPr/>
           <a:lstStyle/>
+          <a:p>
+            <a:r>
+              <a:t>[6:25 → 7:25 · 60 s]</a:t>
+            </a:r>
+          </a:p>
+          <a:p/>
           <a:p>
             <a:r>
               <a:t>A primeira das questões de mecanismo. Nas campanhas exploratórias o evolutivo</a:t>
@@ -11654,7 +12380,7 @@
                 </a:solidFill>
                 <a:latin typeface="Segoe UI"/>
               </a:rPr>
-              <a:t>Dimensão vertical não observada mas usada; duas costuras na física das paredes (11 de 343 modelos atravessam-nas; nenhuma conclusão depende deles)</a:t>
+              <a:t>Dimensão vertical usada mas não observada; duas costuras na física das paredes — 11 de 343 modelos arquivados atravessam-nas, todos do evolutivo; na campanha final são 3 de 70 (Quatro Salas), e não as tornam melhores (55,7 vs 60,3 rec/ep). Onde a costura pesa é numa célula da campanha adaptativa — Quatro Salas —, declarada como contaminada</a:t>
             </a:r>
           </a:p>
           <a:p>
@@ -12186,7 +12912,7 @@
                 </a:solidFill>
                 <a:latin typeface="Segoe UI"/>
               </a:rPr>
-              <a:t>  simulador, oito cenários, RS2C e neuroevolução; 18 verificadores ligam cada número aos dados</a:t>
+              <a:t>  simulador, oito cenários, RS2C e neuroevolução; 27 verificadores ligam cada número aos dados</a:t>
             </a:r>
           </a:p>
         </p:txBody>
@@ -13230,7 +13956,7 @@
                 </a:solidFill>
                 <a:latin typeface="Segoe UI"/>
               </a:rPr>
-              <a:t>Setas do teclado mudam de mapa · plano B: o GIF do Muro em U no slide 9</a:t>
+              <a:t>Setas do teclado mudam de mapa · plano B: a captura aqui ao lado, e a figura dos quatro braços do rodapé 09</a:t>
             </a:r>
           </a:p>
         </p:txBody>
@@ -14142,6 +14868,7192 @@
                 <a:latin typeface="Consolas"/>
               </a:rPr>
               <a:t>01</a:t>
+            </a:r>
+          </a:p>
+        </p:txBody>
+      </p:sp>
+    </p:spTree>
+  </p:cSld>
+  <p:clrMapOvr>
+    <a:masterClrMapping/>
+  </p:clrMapOvr>
+</p:sld>
+</file>
+
+<file path=ppt/slides/slide20.xml><?xml version="1.0" encoding="utf-8"?>
+<p:sld xmlns:a="http://schemas.openxmlformats.org/drawingml/2006/main" xmlns:p="http://schemas.openxmlformats.org/presentationml/2006/main" xmlns:r="http://schemas.openxmlformats.org/officeDocument/2006/relationships">
+  <p:cSld>
+    <p:spTree>
+      <p:nvGrpSpPr>
+        <p:cNvPr id="1" name=""/>
+        <p:cNvGrpSpPr/>
+        <p:nvPr/>
+      </p:nvGrpSpPr>
+      <p:grpSpPr/>
+      <p:sp>
+        <p:nvSpPr>
+          <p:cNvPr id="2" name="Rectangle 1"/>
+          <p:cNvSpPr/>
+          <p:nvPr/>
+        </p:nvSpPr>
+        <p:spPr>
+          <a:xfrm>
+            <a:off x="0" y="0"/>
+            <a:ext cx="12191695" cy="6858000"/>
+          </a:xfrm>
+          <a:prstGeom prst="rect">
+            <a:avLst/>
+          </a:prstGeom>
+          <a:solidFill>
+            <a:srgbClr val="050505"/>
+          </a:solidFill>
+          <a:ln>
+            <a:noFill/>
+          </a:ln>
+          <a:effectLst/>
+        </p:spPr>
+        <p:style>
+          <a:lnRef idx="1">
+            <a:schemeClr val="accent1"/>
+          </a:lnRef>
+          <a:fillRef idx="3">
+            <a:schemeClr val="accent1"/>
+          </a:fillRef>
+          <a:effectRef idx="2">
+            <a:schemeClr val="accent1"/>
+          </a:effectRef>
+          <a:fontRef idx="minor">
+            <a:schemeClr val="lt1"/>
+          </a:fontRef>
+        </p:style>
+        <p:txBody>
+          <a:bodyPr rtlCol="0" anchor="ctr"/>
+          <a:lstStyle/>
+          <a:p>
+            <a:pPr algn="ctr"/>
+          </a:p>
+        </p:txBody>
+      </p:sp>
+      <p:sp>
+        <p:nvSpPr>
+          <p:cNvPr id="3" name="TextBox 2"/>
+          <p:cNvSpPr txBox="1"/>
+          <p:nvPr/>
+        </p:nvSpPr>
+        <p:spPr>
+          <a:xfrm>
+            <a:off x="548640" y="292608"/>
+            <a:ext cx="11094415" cy="777240"/>
+          </a:xfrm>
+          <a:prstGeom prst="rect">
+            <a:avLst/>
+          </a:prstGeom>
+          <a:noFill/>
+        </p:spPr>
+        <p:txBody>
+          <a:bodyPr wrap="square" anchor="t">
+            <a:spAutoFit/>
+          </a:bodyPr>
+          <a:lstStyle/>
+          <a:p>
+            <a:pPr algn="l">
+              <a:spcAft>
+                <a:spcPts val="600"/>
+              </a:spcAft>
+            </a:pPr>
+            <a:r>
+              <a:rPr sz="3000" b="1">
+                <a:solidFill>
+                  <a:srgbClr val="F5F5F5"/>
+                </a:solidFill>
+                <a:latin typeface="Segoe UI Semibold"/>
+              </a:rPr>
+              <a:t>Reserva · A tabela de avaliação, na íntegra</a:t>
+            </a:r>
+          </a:p>
+        </p:txBody>
+      </p:sp>
+      <p:sp>
+        <p:nvSpPr>
+          <p:cNvPr id="4" name="TextBox 3"/>
+          <p:cNvSpPr txBox="1"/>
+          <p:nvPr/>
+        </p:nvSpPr>
+        <p:spPr>
+          <a:xfrm>
+            <a:off x="548640" y="932688"/>
+            <a:ext cx="11094415" cy="457200"/>
+          </a:xfrm>
+          <a:prstGeom prst="rect">
+            <a:avLst/>
+          </a:prstGeom>
+          <a:noFill/>
+        </p:spPr>
+        <p:txBody>
+          <a:bodyPr wrap="square" anchor="t">
+            <a:spAutoFit/>
+          </a:bodyPr>
+          <a:lstStyle/>
+          <a:p>
+            <a:pPr algn="l">
+              <a:spcAft>
+                <a:spcPts val="600"/>
+              </a:spcAft>
+            </a:pPr>
+            <a:r>
+              <a:rPr sz="1500" b="0">
+                <a:solidFill>
+                  <a:srgbClr val="9A9A9A"/>
+                </a:solidFill>
+                <a:latin typeface="Segoe UI"/>
+              </a:rPr>
+              <a:t>recolhas/ep · taxa de sucesso · execuções a 100 %  —  7 execuções por célula, 20 episódios determinísticos cada</a:t>
+            </a:r>
+          </a:p>
+        </p:txBody>
+      </p:sp>
+      <p:cxnSp>
+        <p:nvCxnSpPr>
+          <p:cNvPr id="5" name="Connector 4"/>
+          <p:cNvCxnSpPr/>
+          <p:nvPr/>
+        </p:nvCxnSpPr>
+        <p:spPr>
+          <a:xfrm>
+            <a:off x="548640" y="1371600"/>
+            <a:ext cx="11094415" cy="0"/>
+          </a:xfrm>
+          <a:prstGeom prst="line">
+            <a:avLst/>
+          </a:prstGeom>
+          <a:ln w="9525">
+            <a:solidFill>
+              <a:srgbClr val="2E2E2E"/>
+            </a:solidFill>
+          </a:ln>
+        </p:spPr>
+        <p:style>
+          <a:lnRef idx="2">
+            <a:schemeClr val="accent1"/>
+          </a:lnRef>
+          <a:fillRef idx="0">
+            <a:schemeClr val="accent1"/>
+          </a:fillRef>
+          <a:effectRef idx="1">
+            <a:schemeClr val="accent1"/>
+          </a:effectRef>
+          <a:fontRef idx="minor">
+            <a:schemeClr val="tx1"/>
+          </a:fontRef>
+        </p:style>
+      </p:cxnSp>
+      <p:cxnSp>
+        <p:nvCxnSpPr>
+          <p:cNvPr id="6" name="Connector 5"/>
+          <p:cNvCxnSpPr/>
+          <p:nvPr/>
+        </p:nvCxnSpPr>
+        <p:spPr>
+          <a:xfrm>
+            <a:off x="548640" y="1371600"/>
+            <a:ext cx="1005840" cy="0"/>
+          </a:xfrm>
+          <a:prstGeom prst="line">
+            <a:avLst/>
+          </a:prstGeom>
+          <a:ln w="31750">
+            <a:solidFill>
+              <a:srgbClr val="F5F5F5"/>
+            </a:solidFill>
+          </a:ln>
+        </p:spPr>
+        <p:style>
+          <a:lnRef idx="2">
+            <a:schemeClr val="accent1"/>
+          </a:lnRef>
+          <a:fillRef idx="0">
+            <a:schemeClr val="accent1"/>
+          </a:fillRef>
+          <a:effectRef idx="1">
+            <a:schemeClr val="accent1"/>
+          </a:effectRef>
+          <a:fontRef idx="minor">
+            <a:schemeClr val="tx1"/>
+          </a:fontRef>
+        </p:style>
+      </p:cxnSp>
+      <p:sp>
+        <p:nvSpPr>
+          <p:cNvPr id="7" name="TextBox 6"/>
+          <p:cNvSpPr txBox="1"/>
+          <p:nvPr/>
+        </p:nvSpPr>
+        <p:spPr>
+          <a:xfrm>
+            <a:off x="548640" y="1600200"/>
+            <a:ext cx="11094415" cy="1097280"/>
+          </a:xfrm>
+          <a:prstGeom prst="rect">
+            <a:avLst/>
+          </a:prstGeom>
+          <a:noFill/>
+        </p:spPr>
+        <p:txBody>
+          <a:bodyPr wrap="square" anchor="t">
+            <a:spAutoFit/>
+          </a:bodyPr>
+          <a:lstStyle/>
+          <a:p>
+            <a:pPr algn="l">
+              <a:spcAft>
+                <a:spcPts val="600"/>
+              </a:spcAft>
+            </a:pPr>
+            <a:r>
+              <a:rPr sz="1400" b="0">
+                <a:solidFill>
+                  <a:srgbClr val="9A9A9A"/>
+                </a:solidFill>
+                <a:latin typeface="Segoe UI"/>
+              </a:rPr>
+              <a:t>Significância (Mann-Whitney sobre as médias por execução, n = 7; δ de Cliff): GNN &gt; PPO e SAC nas Quatro Salas, Porta Cooperativa e Perceção (δ ≥ +0,71) · GNN &gt; SAC no Gargalo e na Porta com Alternativa (δ = +1,00), empate com o PPO (p = 0,21) · PPO e SAC &gt; GNN no Sandbox (δ = ±1,00) · Muro em U: nada significativo, nos três.</a:t>
+            </a:r>
+          </a:p>
+        </p:txBody>
+      </p:sp>
+      <p:graphicFrame>
+        <p:nvGraphicFramePr>
+          <p:cNvPr id="8" name="Table 7"/>
+          <p:cNvGraphicFramePr>
+            <a:graphicFrameLocks noGrp="1"/>
+          </p:cNvGraphicFramePr>
+          <p:nvPr/>
+        </p:nvGraphicFramePr>
+        <p:xfrm>
+          <a:off x="548640" y="2999232"/>
+          <a:ext cx="11064240" cy="3072384"/>
+        </p:xfrm>
+        <a:graphic>
+          <a:graphicData uri="http://schemas.openxmlformats.org/drawingml/2006/table">
+            <a:tbl>
+              <a:tblPr>
+                <a:tableStyleId>{5C22544A-7EE6-4342-B048-85BDC9FD1C3A}</a:tableStyleId>
+              </a:tblPr>
+              <a:tblGrid>
+                <a:gridCol w="2651760"/>
+                <a:gridCol w="2834640"/>
+                <a:gridCol w="2788920"/>
+                <a:gridCol w="2788920"/>
+              </a:tblGrid>
+              <a:tr h="384048">
+                <a:tc>
+                  <a:txBody>
+                    <a:bodyPr/>
+                    <a:lstStyle/>
+                    <a:p>
+                      <a:pPr>
+                        <a:defRPr sz="1000" b="1">
+                          <a:solidFill>
+                            <a:srgbClr val="9A9A9A"/>
+                          </a:solidFill>
+                          <a:latin typeface="Consolas"/>
+                        </a:defRPr>
+                      </a:pPr>
+                      <a:r>
+                        <a:t>CENÁRIO</a:t>
+                      </a:r>
+                    </a:p>
+                  </a:txBody>
+                  <a:tcPr>
+                    <a:solidFill>
+                      <a:srgbClr val="050505"/>
+                    </a:solidFill>
+                    <a:lnL w="9525" cap="flat" cmpd="sng" algn="ctr">
+                      <a:solidFill>
+                        <a:srgbClr val="2E2E2E"/>
+                      </a:solidFill>
+                      <a:prstDash val="solid"/>
+                    </a:lnL>
+                    <a:lnR w="9525" cap="flat" cmpd="sng" algn="ctr">
+                      <a:solidFill>
+                        <a:srgbClr val="2E2E2E"/>
+                      </a:solidFill>
+                      <a:prstDash val="solid"/>
+                    </a:lnR>
+                    <a:lnT w="9525" cap="flat" cmpd="sng" algn="ctr">
+                      <a:solidFill>
+                        <a:srgbClr val="2E2E2E"/>
+                      </a:solidFill>
+                      <a:prstDash val="solid"/>
+                    </a:lnT>
+                    <a:lnB w="9525" cap="flat" cmpd="sng" algn="ctr">
+                      <a:solidFill>
+                        <a:srgbClr val="2E2E2E"/>
+                      </a:solidFill>
+                      <a:prstDash val="solid"/>
+                    </a:lnB>
+                  </a:tcPr>
+                </a:tc>
+                <a:tc>
+                  <a:txBody>
+                    <a:bodyPr/>
+                    <a:lstStyle/>
+                    <a:p>
+                      <a:pPr>
+                        <a:defRPr sz="1000" b="1">
+                          <a:solidFill>
+                            <a:srgbClr val="9A9A9A"/>
+                          </a:solidFill>
+                          <a:latin typeface="Consolas"/>
+                        </a:defRPr>
+                      </a:pPr>
+                      <a:r>
+                        <a:t>GNN EVOLUTIVO</a:t>
+                      </a:r>
+                    </a:p>
+                  </a:txBody>
+                  <a:tcPr>
+                    <a:solidFill>
+                      <a:srgbClr val="050505"/>
+                    </a:solidFill>
+                    <a:lnL w="9525" cap="flat" cmpd="sng" algn="ctr">
+                      <a:solidFill>
+                        <a:srgbClr val="2E2E2E"/>
+                      </a:solidFill>
+                      <a:prstDash val="solid"/>
+                    </a:lnL>
+                    <a:lnR w="9525" cap="flat" cmpd="sng" algn="ctr">
+                      <a:solidFill>
+                        <a:srgbClr val="2E2E2E"/>
+                      </a:solidFill>
+                      <a:prstDash val="solid"/>
+                    </a:lnR>
+                    <a:lnT w="9525" cap="flat" cmpd="sng" algn="ctr">
+                      <a:solidFill>
+                        <a:srgbClr val="2E2E2E"/>
+                      </a:solidFill>
+                      <a:prstDash val="solid"/>
+                    </a:lnT>
+                    <a:lnB w="9525" cap="flat" cmpd="sng" algn="ctr">
+                      <a:solidFill>
+                        <a:srgbClr val="2E2E2E"/>
+                      </a:solidFill>
+                      <a:prstDash val="solid"/>
+                    </a:lnB>
+                  </a:tcPr>
+                </a:tc>
+                <a:tc>
+                  <a:txBody>
+                    <a:bodyPr/>
+                    <a:lstStyle/>
+                    <a:p>
+                      <a:pPr>
+                        <a:defRPr sz="1000" b="1">
+                          <a:solidFill>
+                            <a:srgbClr val="9A9A9A"/>
+                          </a:solidFill>
+                          <a:latin typeface="Consolas"/>
+                        </a:defRPr>
+                      </a:pPr>
+                      <a:r>
+                        <a:t>PPO</a:t>
+                      </a:r>
+                    </a:p>
+                  </a:txBody>
+                  <a:tcPr>
+                    <a:solidFill>
+                      <a:srgbClr val="050505"/>
+                    </a:solidFill>
+                    <a:lnL w="9525" cap="flat" cmpd="sng" algn="ctr">
+                      <a:solidFill>
+                        <a:srgbClr val="2E2E2E"/>
+                      </a:solidFill>
+                      <a:prstDash val="solid"/>
+                    </a:lnL>
+                    <a:lnR w="9525" cap="flat" cmpd="sng" algn="ctr">
+                      <a:solidFill>
+                        <a:srgbClr val="2E2E2E"/>
+                      </a:solidFill>
+                      <a:prstDash val="solid"/>
+                    </a:lnR>
+                    <a:lnT w="9525" cap="flat" cmpd="sng" algn="ctr">
+                      <a:solidFill>
+                        <a:srgbClr val="2E2E2E"/>
+                      </a:solidFill>
+                      <a:prstDash val="solid"/>
+                    </a:lnT>
+                    <a:lnB w="9525" cap="flat" cmpd="sng" algn="ctr">
+                      <a:solidFill>
+                        <a:srgbClr val="2E2E2E"/>
+                      </a:solidFill>
+                      <a:prstDash val="solid"/>
+                    </a:lnB>
+                  </a:tcPr>
+                </a:tc>
+                <a:tc>
+                  <a:txBody>
+                    <a:bodyPr/>
+                    <a:lstStyle/>
+                    <a:p>
+                      <a:pPr>
+                        <a:defRPr sz="1000" b="1">
+                          <a:solidFill>
+                            <a:srgbClr val="9A9A9A"/>
+                          </a:solidFill>
+                          <a:latin typeface="Consolas"/>
+                        </a:defRPr>
+                      </a:pPr>
+                      <a:r>
+                        <a:t>SAC</a:t>
+                      </a:r>
+                    </a:p>
+                  </a:txBody>
+                  <a:tcPr>
+                    <a:solidFill>
+                      <a:srgbClr val="050505"/>
+                    </a:solidFill>
+                    <a:lnL w="9525" cap="flat" cmpd="sng" algn="ctr">
+                      <a:solidFill>
+                        <a:srgbClr val="2E2E2E"/>
+                      </a:solidFill>
+                      <a:prstDash val="solid"/>
+                    </a:lnL>
+                    <a:lnR w="9525" cap="flat" cmpd="sng" algn="ctr">
+                      <a:solidFill>
+                        <a:srgbClr val="2E2E2E"/>
+                      </a:solidFill>
+                      <a:prstDash val="solid"/>
+                    </a:lnR>
+                    <a:lnT w="9525" cap="flat" cmpd="sng" algn="ctr">
+                      <a:solidFill>
+                        <a:srgbClr val="2E2E2E"/>
+                      </a:solidFill>
+                      <a:prstDash val="solid"/>
+                    </a:lnT>
+                    <a:lnB w="9525" cap="flat" cmpd="sng" algn="ctr">
+                      <a:solidFill>
+                        <a:srgbClr val="2E2E2E"/>
+                      </a:solidFill>
+                      <a:prstDash val="solid"/>
+                    </a:lnB>
+                  </a:tcPr>
+                </a:tc>
+              </a:tr>
+              <a:tr h="384048">
+                <a:tc>
+                  <a:txBody>
+                    <a:bodyPr/>
+                    <a:lstStyle/>
+                    <a:p>
+                      <a:pPr>
+                        <a:defRPr sz="1200" b="1">
+                          <a:solidFill>
+                            <a:srgbClr val="F5F5F5"/>
+                          </a:solidFill>
+                          <a:latin typeface="Segoe UI"/>
+                        </a:defRPr>
+                      </a:pPr>
+                      <a:r>
+                        <a:t>Sandbox</a:t>
+                      </a:r>
+                    </a:p>
+                  </a:txBody>
+                  <a:tcPr>
+                    <a:solidFill>
+                      <a:srgbClr val="161616"/>
+                    </a:solidFill>
+                    <a:lnL w="9525" cap="flat" cmpd="sng" algn="ctr">
+                      <a:solidFill>
+                        <a:srgbClr val="2E2E2E"/>
+                      </a:solidFill>
+                      <a:prstDash val="solid"/>
+                    </a:lnL>
+                    <a:lnR w="9525" cap="flat" cmpd="sng" algn="ctr">
+                      <a:solidFill>
+                        <a:srgbClr val="2E2E2E"/>
+                      </a:solidFill>
+                      <a:prstDash val="solid"/>
+                    </a:lnR>
+                    <a:lnT w="9525" cap="flat" cmpd="sng" algn="ctr">
+                      <a:solidFill>
+                        <a:srgbClr val="2E2E2E"/>
+                      </a:solidFill>
+                      <a:prstDash val="solid"/>
+                    </a:lnT>
+                    <a:lnB w="9525" cap="flat" cmpd="sng" algn="ctr">
+                      <a:solidFill>
+                        <a:srgbClr val="2E2E2E"/>
+                      </a:solidFill>
+                      <a:prstDash val="solid"/>
+                    </a:lnB>
+                  </a:tcPr>
+                </a:tc>
+                <a:tc>
+                  <a:txBody>
+                    <a:bodyPr/>
+                    <a:lstStyle/>
+                    <a:p>
+                      <a:pPr>
+                        <a:defRPr sz="1200" b="0">
+                          <a:solidFill>
+                            <a:srgbClr val="E2E2E2"/>
+                          </a:solidFill>
+                          <a:latin typeface="Consolas"/>
+                        </a:defRPr>
+                      </a:pPr>
+                      <a:r>
+                        <a:t>38,3 · 86 % · 5/7</a:t>
+                      </a:r>
+                    </a:p>
+                  </a:txBody>
+                  <a:tcPr>
+                    <a:solidFill>
+                      <a:srgbClr val="161616"/>
+                    </a:solidFill>
+                    <a:lnL w="9525" cap="flat" cmpd="sng" algn="ctr">
+                      <a:solidFill>
+                        <a:srgbClr val="2E2E2E"/>
+                      </a:solidFill>
+                      <a:prstDash val="solid"/>
+                    </a:lnL>
+                    <a:lnR w="9525" cap="flat" cmpd="sng" algn="ctr">
+                      <a:solidFill>
+                        <a:srgbClr val="2E2E2E"/>
+                      </a:solidFill>
+                      <a:prstDash val="solid"/>
+                    </a:lnR>
+                    <a:lnT w="9525" cap="flat" cmpd="sng" algn="ctr">
+                      <a:solidFill>
+                        <a:srgbClr val="2E2E2E"/>
+                      </a:solidFill>
+                      <a:prstDash val="solid"/>
+                    </a:lnT>
+                    <a:lnB w="9525" cap="flat" cmpd="sng" algn="ctr">
+                      <a:solidFill>
+                        <a:srgbClr val="2E2E2E"/>
+                      </a:solidFill>
+                      <a:prstDash val="solid"/>
+                    </a:lnB>
+                  </a:tcPr>
+                </a:tc>
+                <a:tc>
+                  <a:txBody>
+                    <a:bodyPr/>
+                    <a:lstStyle/>
+                    <a:p>
+                      <a:pPr>
+                        <a:defRPr sz="1200" b="0">
+                          <a:solidFill>
+                            <a:srgbClr val="E2E2E2"/>
+                          </a:solidFill>
+                          <a:latin typeface="Consolas"/>
+                        </a:defRPr>
+                      </a:pPr>
+                      <a:r>
+                        <a:t>71,5 · 100 % · 7/7</a:t>
+                      </a:r>
+                    </a:p>
+                  </a:txBody>
+                  <a:tcPr>
+                    <a:solidFill>
+                      <a:srgbClr val="161616"/>
+                    </a:solidFill>
+                    <a:lnL w="9525" cap="flat" cmpd="sng" algn="ctr">
+                      <a:solidFill>
+                        <a:srgbClr val="2E2E2E"/>
+                      </a:solidFill>
+                      <a:prstDash val="solid"/>
+                    </a:lnL>
+                    <a:lnR w="9525" cap="flat" cmpd="sng" algn="ctr">
+                      <a:solidFill>
+                        <a:srgbClr val="2E2E2E"/>
+                      </a:solidFill>
+                      <a:prstDash val="solid"/>
+                    </a:lnR>
+                    <a:lnT w="9525" cap="flat" cmpd="sng" algn="ctr">
+                      <a:solidFill>
+                        <a:srgbClr val="2E2E2E"/>
+                      </a:solidFill>
+                      <a:prstDash val="solid"/>
+                    </a:lnT>
+                    <a:lnB w="9525" cap="flat" cmpd="sng" algn="ctr">
+                      <a:solidFill>
+                        <a:srgbClr val="2E2E2E"/>
+                      </a:solidFill>
+                      <a:prstDash val="solid"/>
+                    </a:lnB>
+                  </a:tcPr>
+                </a:tc>
+                <a:tc>
+                  <a:txBody>
+                    <a:bodyPr/>
+                    <a:lstStyle/>
+                    <a:p>
+                      <a:pPr>
+                        <a:defRPr sz="1200" b="0">
+                          <a:solidFill>
+                            <a:srgbClr val="E2E2E2"/>
+                          </a:solidFill>
+                          <a:latin typeface="Consolas"/>
+                        </a:defRPr>
+                      </a:pPr>
+                      <a:r>
+                        <a:t>69,2 · 100 % · 7/7</a:t>
+                      </a:r>
+                    </a:p>
+                  </a:txBody>
+                  <a:tcPr>
+                    <a:solidFill>
+                      <a:srgbClr val="161616"/>
+                    </a:solidFill>
+                    <a:lnL w="9525" cap="flat" cmpd="sng" algn="ctr">
+                      <a:solidFill>
+                        <a:srgbClr val="2E2E2E"/>
+                      </a:solidFill>
+                      <a:prstDash val="solid"/>
+                    </a:lnL>
+                    <a:lnR w="9525" cap="flat" cmpd="sng" algn="ctr">
+                      <a:solidFill>
+                        <a:srgbClr val="2E2E2E"/>
+                      </a:solidFill>
+                      <a:prstDash val="solid"/>
+                    </a:lnR>
+                    <a:lnT w="9525" cap="flat" cmpd="sng" algn="ctr">
+                      <a:solidFill>
+                        <a:srgbClr val="2E2E2E"/>
+                      </a:solidFill>
+                      <a:prstDash val="solid"/>
+                    </a:lnT>
+                    <a:lnB w="9525" cap="flat" cmpd="sng" algn="ctr">
+                      <a:solidFill>
+                        <a:srgbClr val="2E2E2E"/>
+                      </a:solidFill>
+                      <a:prstDash val="solid"/>
+                    </a:lnB>
+                  </a:tcPr>
+                </a:tc>
+              </a:tr>
+              <a:tr h="384048">
+                <a:tc>
+                  <a:txBody>
+                    <a:bodyPr/>
+                    <a:lstStyle/>
+                    <a:p>
+                      <a:pPr>
+                        <a:defRPr sz="1200" b="1">
+                          <a:solidFill>
+                            <a:srgbClr val="F5F5F5"/>
+                          </a:solidFill>
+                          <a:latin typeface="Segoe UI"/>
+                        </a:defRPr>
+                      </a:pPr>
+                      <a:r>
+                        <a:t>Muro em U</a:t>
+                      </a:r>
+                    </a:p>
+                  </a:txBody>
+                  <a:tcPr>
+                    <a:solidFill>
+                      <a:srgbClr val="0E0E0E"/>
+                    </a:solidFill>
+                    <a:lnL w="9525" cap="flat" cmpd="sng" algn="ctr">
+                      <a:solidFill>
+                        <a:srgbClr val="2E2E2E"/>
+                      </a:solidFill>
+                      <a:prstDash val="solid"/>
+                    </a:lnL>
+                    <a:lnR w="9525" cap="flat" cmpd="sng" algn="ctr">
+                      <a:solidFill>
+                        <a:srgbClr val="2E2E2E"/>
+                      </a:solidFill>
+                      <a:prstDash val="solid"/>
+                    </a:lnR>
+                    <a:lnT w="9525" cap="flat" cmpd="sng" algn="ctr">
+                      <a:solidFill>
+                        <a:srgbClr val="2E2E2E"/>
+                      </a:solidFill>
+                      <a:prstDash val="solid"/>
+                    </a:lnT>
+                    <a:lnB w="9525" cap="flat" cmpd="sng" algn="ctr">
+                      <a:solidFill>
+                        <a:srgbClr val="2E2E2E"/>
+                      </a:solidFill>
+                      <a:prstDash val="solid"/>
+                    </a:lnB>
+                  </a:tcPr>
+                </a:tc>
+                <a:tc>
+                  <a:txBody>
+                    <a:bodyPr/>
+                    <a:lstStyle/>
+                    <a:p>
+                      <a:pPr>
+                        <a:defRPr sz="1200" b="0">
+                          <a:solidFill>
+                            <a:srgbClr val="E2E2E2"/>
+                          </a:solidFill>
+                          <a:latin typeface="Consolas"/>
+                        </a:defRPr>
+                      </a:pPr>
+                      <a:r>
+                        <a:t>24,5 · 43 % · 3/7</a:t>
+                      </a:r>
+                    </a:p>
+                  </a:txBody>
+                  <a:tcPr>
+                    <a:solidFill>
+                      <a:srgbClr val="0E0E0E"/>
+                    </a:solidFill>
+                    <a:lnL w="9525" cap="flat" cmpd="sng" algn="ctr">
+                      <a:solidFill>
+                        <a:srgbClr val="2E2E2E"/>
+                      </a:solidFill>
+                      <a:prstDash val="solid"/>
+                    </a:lnL>
+                    <a:lnR w="9525" cap="flat" cmpd="sng" algn="ctr">
+                      <a:solidFill>
+                        <a:srgbClr val="2E2E2E"/>
+                      </a:solidFill>
+                      <a:prstDash val="solid"/>
+                    </a:lnR>
+                    <a:lnT w="9525" cap="flat" cmpd="sng" algn="ctr">
+                      <a:solidFill>
+                        <a:srgbClr val="2E2E2E"/>
+                      </a:solidFill>
+                      <a:prstDash val="solid"/>
+                    </a:lnT>
+                    <a:lnB w="9525" cap="flat" cmpd="sng" algn="ctr">
+                      <a:solidFill>
+                        <a:srgbClr val="2E2E2E"/>
+                      </a:solidFill>
+                      <a:prstDash val="solid"/>
+                    </a:lnB>
+                  </a:tcPr>
+                </a:tc>
+                <a:tc>
+                  <a:txBody>
+                    <a:bodyPr/>
+                    <a:lstStyle/>
+                    <a:p>
+                      <a:pPr>
+                        <a:defRPr sz="1200" b="0">
+                          <a:solidFill>
+                            <a:srgbClr val="E2E2E2"/>
+                          </a:solidFill>
+                          <a:latin typeface="Consolas"/>
+                        </a:defRPr>
+                      </a:pPr>
+                      <a:r>
+                        <a:t>39,6 · 71 % · 4/7</a:t>
+                      </a:r>
+                    </a:p>
+                  </a:txBody>
+                  <a:tcPr>
+                    <a:solidFill>
+                      <a:srgbClr val="0E0E0E"/>
+                    </a:solidFill>
+                    <a:lnL w="9525" cap="flat" cmpd="sng" algn="ctr">
+                      <a:solidFill>
+                        <a:srgbClr val="2E2E2E"/>
+                      </a:solidFill>
+                      <a:prstDash val="solid"/>
+                    </a:lnL>
+                    <a:lnR w="9525" cap="flat" cmpd="sng" algn="ctr">
+                      <a:solidFill>
+                        <a:srgbClr val="2E2E2E"/>
+                      </a:solidFill>
+                      <a:prstDash val="solid"/>
+                    </a:lnR>
+                    <a:lnT w="9525" cap="flat" cmpd="sng" algn="ctr">
+                      <a:solidFill>
+                        <a:srgbClr val="2E2E2E"/>
+                      </a:solidFill>
+                      <a:prstDash val="solid"/>
+                    </a:lnT>
+                    <a:lnB w="9525" cap="flat" cmpd="sng" algn="ctr">
+                      <a:solidFill>
+                        <a:srgbClr val="2E2E2E"/>
+                      </a:solidFill>
+                      <a:prstDash val="solid"/>
+                    </a:lnB>
+                  </a:tcPr>
+                </a:tc>
+                <a:tc>
+                  <a:txBody>
+                    <a:bodyPr/>
+                    <a:lstStyle/>
+                    <a:p>
+                      <a:pPr>
+                        <a:defRPr sz="1200" b="0">
+                          <a:solidFill>
+                            <a:srgbClr val="E2E2E2"/>
+                          </a:solidFill>
+                          <a:latin typeface="Consolas"/>
+                        </a:defRPr>
+                      </a:pPr>
+                      <a:r>
+                        <a:t>9,0 · 34 % · 2/7</a:t>
+                      </a:r>
+                    </a:p>
+                  </a:txBody>
+                  <a:tcPr>
+                    <a:solidFill>
+                      <a:srgbClr val="0E0E0E"/>
+                    </a:solidFill>
+                    <a:lnL w="9525" cap="flat" cmpd="sng" algn="ctr">
+                      <a:solidFill>
+                        <a:srgbClr val="2E2E2E"/>
+                      </a:solidFill>
+                      <a:prstDash val="solid"/>
+                    </a:lnL>
+                    <a:lnR w="9525" cap="flat" cmpd="sng" algn="ctr">
+                      <a:solidFill>
+                        <a:srgbClr val="2E2E2E"/>
+                      </a:solidFill>
+                      <a:prstDash val="solid"/>
+                    </a:lnR>
+                    <a:lnT w="9525" cap="flat" cmpd="sng" algn="ctr">
+                      <a:solidFill>
+                        <a:srgbClr val="2E2E2E"/>
+                      </a:solidFill>
+                      <a:prstDash val="solid"/>
+                    </a:lnT>
+                    <a:lnB w="9525" cap="flat" cmpd="sng" algn="ctr">
+                      <a:solidFill>
+                        <a:srgbClr val="2E2E2E"/>
+                      </a:solidFill>
+                      <a:prstDash val="solid"/>
+                    </a:lnB>
+                  </a:tcPr>
+                </a:tc>
+              </a:tr>
+              <a:tr h="384048">
+                <a:tc>
+                  <a:txBody>
+                    <a:bodyPr/>
+                    <a:lstStyle/>
+                    <a:p>
+                      <a:pPr>
+                        <a:defRPr sz="1200" b="1">
+                          <a:solidFill>
+                            <a:srgbClr val="F5F5F5"/>
+                          </a:solidFill>
+                          <a:latin typeface="Segoe UI"/>
+                        </a:defRPr>
+                      </a:pPr>
+                      <a:r>
+                        <a:t>Gargalo</a:t>
+                      </a:r>
+                    </a:p>
+                  </a:txBody>
+                  <a:tcPr>
+                    <a:solidFill>
+                      <a:srgbClr val="161616"/>
+                    </a:solidFill>
+                    <a:lnL w="9525" cap="flat" cmpd="sng" algn="ctr">
+                      <a:solidFill>
+                        <a:srgbClr val="2E2E2E"/>
+                      </a:solidFill>
+                      <a:prstDash val="solid"/>
+                    </a:lnL>
+                    <a:lnR w="9525" cap="flat" cmpd="sng" algn="ctr">
+                      <a:solidFill>
+                        <a:srgbClr val="2E2E2E"/>
+                      </a:solidFill>
+                      <a:prstDash val="solid"/>
+                    </a:lnR>
+                    <a:lnT w="9525" cap="flat" cmpd="sng" algn="ctr">
+                      <a:solidFill>
+                        <a:srgbClr val="2E2E2E"/>
+                      </a:solidFill>
+                      <a:prstDash val="solid"/>
+                    </a:lnT>
+                    <a:lnB w="9525" cap="flat" cmpd="sng" algn="ctr">
+                      <a:solidFill>
+                        <a:srgbClr val="2E2E2E"/>
+                      </a:solidFill>
+                      <a:prstDash val="solid"/>
+                    </a:lnB>
+                  </a:tcPr>
+                </a:tc>
+                <a:tc>
+                  <a:txBody>
+                    <a:bodyPr/>
+                    <a:lstStyle/>
+                    <a:p>
+                      <a:pPr>
+                        <a:defRPr sz="1200" b="0">
+                          <a:solidFill>
+                            <a:srgbClr val="E2E2E2"/>
+                          </a:solidFill>
+                          <a:latin typeface="Consolas"/>
+                        </a:defRPr>
+                      </a:pPr>
+                      <a:r>
+                        <a:t>121,4 · 100 % · 7/7</a:t>
+                      </a:r>
+                    </a:p>
+                  </a:txBody>
+                  <a:tcPr>
+                    <a:solidFill>
+                      <a:srgbClr val="161616"/>
+                    </a:solidFill>
+                    <a:lnL w="9525" cap="flat" cmpd="sng" algn="ctr">
+                      <a:solidFill>
+                        <a:srgbClr val="2E2E2E"/>
+                      </a:solidFill>
+                      <a:prstDash val="solid"/>
+                    </a:lnL>
+                    <a:lnR w="9525" cap="flat" cmpd="sng" algn="ctr">
+                      <a:solidFill>
+                        <a:srgbClr val="2E2E2E"/>
+                      </a:solidFill>
+                      <a:prstDash val="solid"/>
+                    </a:lnR>
+                    <a:lnT w="9525" cap="flat" cmpd="sng" algn="ctr">
+                      <a:solidFill>
+                        <a:srgbClr val="2E2E2E"/>
+                      </a:solidFill>
+                      <a:prstDash val="solid"/>
+                    </a:lnT>
+                    <a:lnB w="9525" cap="flat" cmpd="sng" algn="ctr">
+                      <a:solidFill>
+                        <a:srgbClr val="2E2E2E"/>
+                      </a:solidFill>
+                      <a:prstDash val="solid"/>
+                    </a:lnB>
+                  </a:tcPr>
+                </a:tc>
+                <a:tc>
+                  <a:txBody>
+                    <a:bodyPr/>
+                    <a:lstStyle/>
+                    <a:p>
+                      <a:pPr>
+                        <a:defRPr sz="1200" b="0">
+                          <a:solidFill>
+                            <a:srgbClr val="E2E2E2"/>
+                          </a:solidFill>
+                          <a:latin typeface="Consolas"/>
+                        </a:defRPr>
+                      </a:pPr>
+                      <a:r>
+                        <a:t>123,2 · 100 % · 7/7</a:t>
+                      </a:r>
+                    </a:p>
+                  </a:txBody>
+                  <a:tcPr>
+                    <a:solidFill>
+                      <a:srgbClr val="161616"/>
+                    </a:solidFill>
+                    <a:lnL w="9525" cap="flat" cmpd="sng" algn="ctr">
+                      <a:solidFill>
+                        <a:srgbClr val="2E2E2E"/>
+                      </a:solidFill>
+                      <a:prstDash val="solid"/>
+                    </a:lnL>
+                    <a:lnR w="9525" cap="flat" cmpd="sng" algn="ctr">
+                      <a:solidFill>
+                        <a:srgbClr val="2E2E2E"/>
+                      </a:solidFill>
+                      <a:prstDash val="solid"/>
+                    </a:lnR>
+                    <a:lnT w="9525" cap="flat" cmpd="sng" algn="ctr">
+                      <a:solidFill>
+                        <a:srgbClr val="2E2E2E"/>
+                      </a:solidFill>
+                      <a:prstDash val="solid"/>
+                    </a:lnT>
+                    <a:lnB w="9525" cap="flat" cmpd="sng" algn="ctr">
+                      <a:solidFill>
+                        <a:srgbClr val="2E2E2E"/>
+                      </a:solidFill>
+                      <a:prstDash val="solid"/>
+                    </a:lnB>
+                  </a:tcPr>
+                </a:tc>
+                <a:tc>
+                  <a:txBody>
+                    <a:bodyPr/>
+                    <a:lstStyle/>
+                    <a:p>
+                      <a:pPr>
+                        <a:defRPr sz="1200" b="0">
+                          <a:solidFill>
+                            <a:srgbClr val="E2E2E2"/>
+                          </a:solidFill>
+                          <a:latin typeface="Consolas"/>
+                        </a:defRPr>
+                      </a:pPr>
+                      <a:r>
+                        <a:t>41,4 · 72 % · 5/7</a:t>
+                      </a:r>
+                    </a:p>
+                  </a:txBody>
+                  <a:tcPr>
+                    <a:solidFill>
+                      <a:srgbClr val="161616"/>
+                    </a:solidFill>
+                    <a:lnL w="9525" cap="flat" cmpd="sng" algn="ctr">
+                      <a:solidFill>
+                        <a:srgbClr val="2E2E2E"/>
+                      </a:solidFill>
+                      <a:prstDash val="solid"/>
+                    </a:lnL>
+                    <a:lnR w="9525" cap="flat" cmpd="sng" algn="ctr">
+                      <a:solidFill>
+                        <a:srgbClr val="2E2E2E"/>
+                      </a:solidFill>
+                      <a:prstDash val="solid"/>
+                    </a:lnR>
+                    <a:lnT w="9525" cap="flat" cmpd="sng" algn="ctr">
+                      <a:solidFill>
+                        <a:srgbClr val="2E2E2E"/>
+                      </a:solidFill>
+                      <a:prstDash val="solid"/>
+                    </a:lnT>
+                    <a:lnB w="9525" cap="flat" cmpd="sng" algn="ctr">
+                      <a:solidFill>
+                        <a:srgbClr val="2E2E2E"/>
+                      </a:solidFill>
+                      <a:prstDash val="solid"/>
+                    </a:lnB>
+                  </a:tcPr>
+                </a:tc>
+              </a:tr>
+              <a:tr h="384048">
+                <a:tc>
+                  <a:txBody>
+                    <a:bodyPr/>
+                    <a:lstStyle/>
+                    <a:p>
+                      <a:pPr>
+                        <a:defRPr sz="1200" b="1">
+                          <a:solidFill>
+                            <a:srgbClr val="F5F5F5"/>
+                          </a:solidFill>
+                          <a:latin typeface="Segoe UI"/>
+                        </a:defRPr>
+                      </a:pPr>
+                      <a:r>
+                        <a:t>Quatro Salas</a:t>
+                      </a:r>
+                    </a:p>
+                  </a:txBody>
+                  <a:tcPr>
+                    <a:solidFill>
+                      <a:srgbClr val="0E0E0E"/>
+                    </a:solidFill>
+                    <a:lnL w="9525" cap="flat" cmpd="sng" algn="ctr">
+                      <a:solidFill>
+                        <a:srgbClr val="2E2E2E"/>
+                      </a:solidFill>
+                      <a:prstDash val="solid"/>
+                    </a:lnL>
+                    <a:lnR w="9525" cap="flat" cmpd="sng" algn="ctr">
+                      <a:solidFill>
+                        <a:srgbClr val="2E2E2E"/>
+                      </a:solidFill>
+                      <a:prstDash val="solid"/>
+                    </a:lnR>
+                    <a:lnT w="9525" cap="flat" cmpd="sng" algn="ctr">
+                      <a:solidFill>
+                        <a:srgbClr val="2E2E2E"/>
+                      </a:solidFill>
+                      <a:prstDash val="solid"/>
+                    </a:lnT>
+                    <a:lnB w="9525" cap="flat" cmpd="sng" algn="ctr">
+                      <a:solidFill>
+                        <a:srgbClr val="2E2E2E"/>
+                      </a:solidFill>
+                      <a:prstDash val="solid"/>
+                    </a:lnB>
+                  </a:tcPr>
+                </a:tc>
+                <a:tc>
+                  <a:txBody>
+                    <a:bodyPr/>
+                    <a:lstStyle/>
+                    <a:p>
+                      <a:pPr>
+                        <a:defRPr sz="1200" b="0">
+                          <a:solidFill>
+                            <a:srgbClr val="E2E2E2"/>
+                          </a:solidFill>
+                          <a:latin typeface="Consolas"/>
+                        </a:defRPr>
+                      </a:pPr>
+                      <a:r>
+                        <a:t>59,8 · 100 % · 7/7</a:t>
+                      </a:r>
+                    </a:p>
+                  </a:txBody>
+                  <a:tcPr>
+                    <a:solidFill>
+                      <a:srgbClr val="0E0E0E"/>
+                    </a:solidFill>
+                    <a:lnL w="9525" cap="flat" cmpd="sng" algn="ctr">
+                      <a:solidFill>
+                        <a:srgbClr val="2E2E2E"/>
+                      </a:solidFill>
+                      <a:prstDash val="solid"/>
+                    </a:lnL>
+                    <a:lnR w="9525" cap="flat" cmpd="sng" algn="ctr">
+                      <a:solidFill>
+                        <a:srgbClr val="2E2E2E"/>
+                      </a:solidFill>
+                      <a:prstDash val="solid"/>
+                    </a:lnR>
+                    <a:lnT w="9525" cap="flat" cmpd="sng" algn="ctr">
+                      <a:solidFill>
+                        <a:srgbClr val="2E2E2E"/>
+                      </a:solidFill>
+                      <a:prstDash val="solid"/>
+                    </a:lnT>
+                    <a:lnB w="9525" cap="flat" cmpd="sng" algn="ctr">
+                      <a:solidFill>
+                        <a:srgbClr val="2E2E2E"/>
+                      </a:solidFill>
+                      <a:prstDash val="solid"/>
+                    </a:lnB>
+                  </a:tcPr>
+                </a:tc>
+                <a:tc>
+                  <a:txBody>
+                    <a:bodyPr/>
+                    <a:lstStyle/>
+                    <a:p>
+                      <a:pPr>
+                        <a:defRPr sz="1200" b="0">
+                          <a:solidFill>
+                            <a:srgbClr val="E2E2E2"/>
+                          </a:solidFill>
+                          <a:latin typeface="Consolas"/>
+                        </a:defRPr>
+                      </a:pPr>
+                      <a:r>
+                        <a:t>33,6 · 100 % · 7/7</a:t>
+                      </a:r>
+                    </a:p>
+                  </a:txBody>
+                  <a:tcPr>
+                    <a:solidFill>
+                      <a:srgbClr val="0E0E0E"/>
+                    </a:solidFill>
+                    <a:lnL w="9525" cap="flat" cmpd="sng" algn="ctr">
+                      <a:solidFill>
+                        <a:srgbClr val="2E2E2E"/>
+                      </a:solidFill>
+                      <a:prstDash val="solid"/>
+                    </a:lnL>
+                    <a:lnR w="9525" cap="flat" cmpd="sng" algn="ctr">
+                      <a:solidFill>
+                        <a:srgbClr val="2E2E2E"/>
+                      </a:solidFill>
+                      <a:prstDash val="solid"/>
+                    </a:lnR>
+                    <a:lnT w="9525" cap="flat" cmpd="sng" algn="ctr">
+                      <a:solidFill>
+                        <a:srgbClr val="2E2E2E"/>
+                      </a:solidFill>
+                      <a:prstDash val="solid"/>
+                    </a:lnT>
+                    <a:lnB w="9525" cap="flat" cmpd="sng" algn="ctr">
+                      <a:solidFill>
+                        <a:srgbClr val="2E2E2E"/>
+                      </a:solidFill>
+                      <a:prstDash val="solid"/>
+                    </a:lnB>
+                  </a:tcPr>
+                </a:tc>
+                <a:tc>
+                  <a:txBody>
+                    <a:bodyPr/>
+                    <a:lstStyle/>
+                    <a:p>
+                      <a:pPr>
+                        <a:defRPr sz="1200" b="0">
+                          <a:solidFill>
+                            <a:srgbClr val="E2E2E2"/>
+                          </a:solidFill>
+                          <a:latin typeface="Consolas"/>
+                        </a:defRPr>
+                      </a:pPr>
+                      <a:r>
+                        <a:t>31,8 · 100 % · 7/7</a:t>
+                      </a:r>
+                    </a:p>
+                  </a:txBody>
+                  <a:tcPr>
+                    <a:solidFill>
+                      <a:srgbClr val="0E0E0E"/>
+                    </a:solidFill>
+                    <a:lnL w="9525" cap="flat" cmpd="sng" algn="ctr">
+                      <a:solidFill>
+                        <a:srgbClr val="2E2E2E"/>
+                      </a:solidFill>
+                      <a:prstDash val="solid"/>
+                    </a:lnL>
+                    <a:lnR w="9525" cap="flat" cmpd="sng" algn="ctr">
+                      <a:solidFill>
+                        <a:srgbClr val="2E2E2E"/>
+                      </a:solidFill>
+                      <a:prstDash val="solid"/>
+                    </a:lnR>
+                    <a:lnT w="9525" cap="flat" cmpd="sng" algn="ctr">
+                      <a:solidFill>
+                        <a:srgbClr val="2E2E2E"/>
+                      </a:solidFill>
+                      <a:prstDash val="solid"/>
+                    </a:lnT>
+                    <a:lnB w="9525" cap="flat" cmpd="sng" algn="ctr">
+                      <a:solidFill>
+                        <a:srgbClr val="2E2E2E"/>
+                      </a:solidFill>
+                      <a:prstDash val="solid"/>
+                    </a:lnB>
+                  </a:tcPr>
+                </a:tc>
+              </a:tr>
+              <a:tr h="384048">
+                <a:tc>
+                  <a:txBody>
+                    <a:bodyPr/>
+                    <a:lstStyle/>
+                    <a:p>
+                      <a:pPr>
+                        <a:defRPr sz="1200" b="1">
+                          <a:solidFill>
+                            <a:srgbClr val="F5F5F5"/>
+                          </a:solidFill>
+                          <a:latin typeface="Segoe UI"/>
+                        </a:defRPr>
+                      </a:pPr>
+                      <a:r>
+                        <a:t>Porta Cooperativa</a:t>
+                      </a:r>
+                    </a:p>
+                  </a:txBody>
+                  <a:tcPr>
+                    <a:solidFill>
+                      <a:srgbClr val="161616"/>
+                    </a:solidFill>
+                    <a:lnL w="9525" cap="flat" cmpd="sng" algn="ctr">
+                      <a:solidFill>
+                        <a:srgbClr val="2E2E2E"/>
+                      </a:solidFill>
+                      <a:prstDash val="solid"/>
+                    </a:lnL>
+                    <a:lnR w="9525" cap="flat" cmpd="sng" algn="ctr">
+                      <a:solidFill>
+                        <a:srgbClr val="2E2E2E"/>
+                      </a:solidFill>
+                      <a:prstDash val="solid"/>
+                    </a:lnR>
+                    <a:lnT w="9525" cap="flat" cmpd="sng" algn="ctr">
+                      <a:solidFill>
+                        <a:srgbClr val="2E2E2E"/>
+                      </a:solidFill>
+                      <a:prstDash val="solid"/>
+                    </a:lnT>
+                    <a:lnB w="9525" cap="flat" cmpd="sng" algn="ctr">
+                      <a:solidFill>
+                        <a:srgbClr val="2E2E2E"/>
+                      </a:solidFill>
+                      <a:prstDash val="solid"/>
+                    </a:lnB>
+                  </a:tcPr>
+                </a:tc>
+                <a:tc>
+                  <a:txBody>
+                    <a:bodyPr/>
+                    <a:lstStyle/>
+                    <a:p>
+                      <a:pPr>
+                        <a:defRPr sz="1200" b="0">
+                          <a:solidFill>
+                            <a:srgbClr val="E2E2E2"/>
+                          </a:solidFill>
+                          <a:latin typeface="Consolas"/>
+                        </a:defRPr>
+                      </a:pPr>
+                      <a:r>
+                        <a:t>69,8 · 100 % · 7/7</a:t>
+                      </a:r>
+                    </a:p>
+                  </a:txBody>
+                  <a:tcPr>
+                    <a:solidFill>
+                      <a:srgbClr val="161616"/>
+                    </a:solidFill>
+                    <a:lnL w="9525" cap="flat" cmpd="sng" algn="ctr">
+                      <a:solidFill>
+                        <a:srgbClr val="2E2E2E"/>
+                      </a:solidFill>
+                      <a:prstDash val="solid"/>
+                    </a:lnL>
+                    <a:lnR w="9525" cap="flat" cmpd="sng" algn="ctr">
+                      <a:solidFill>
+                        <a:srgbClr val="2E2E2E"/>
+                      </a:solidFill>
+                      <a:prstDash val="solid"/>
+                    </a:lnR>
+                    <a:lnT w="9525" cap="flat" cmpd="sng" algn="ctr">
+                      <a:solidFill>
+                        <a:srgbClr val="2E2E2E"/>
+                      </a:solidFill>
+                      <a:prstDash val="solid"/>
+                    </a:lnT>
+                    <a:lnB w="9525" cap="flat" cmpd="sng" algn="ctr">
+                      <a:solidFill>
+                        <a:srgbClr val="2E2E2E"/>
+                      </a:solidFill>
+                      <a:prstDash val="solid"/>
+                    </a:lnB>
+                  </a:tcPr>
+                </a:tc>
+                <a:tc>
+                  <a:txBody>
+                    <a:bodyPr/>
+                    <a:lstStyle/>
+                    <a:p>
+                      <a:pPr>
+                        <a:defRPr sz="1200" b="0">
+                          <a:solidFill>
+                            <a:srgbClr val="E2E2E2"/>
+                          </a:solidFill>
+                          <a:latin typeface="Consolas"/>
+                        </a:defRPr>
+                      </a:pPr>
+                      <a:r>
+                        <a:t>67,1 · 100 % · 7/7</a:t>
+                      </a:r>
+                    </a:p>
+                  </a:txBody>
+                  <a:tcPr>
+                    <a:solidFill>
+                      <a:srgbClr val="161616"/>
+                    </a:solidFill>
+                    <a:lnL w="9525" cap="flat" cmpd="sng" algn="ctr">
+                      <a:solidFill>
+                        <a:srgbClr val="2E2E2E"/>
+                      </a:solidFill>
+                      <a:prstDash val="solid"/>
+                    </a:lnL>
+                    <a:lnR w="9525" cap="flat" cmpd="sng" algn="ctr">
+                      <a:solidFill>
+                        <a:srgbClr val="2E2E2E"/>
+                      </a:solidFill>
+                      <a:prstDash val="solid"/>
+                    </a:lnR>
+                    <a:lnT w="9525" cap="flat" cmpd="sng" algn="ctr">
+                      <a:solidFill>
+                        <a:srgbClr val="2E2E2E"/>
+                      </a:solidFill>
+                      <a:prstDash val="solid"/>
+                    </a:lnT>
+                    <a:lnB w="9525" cap="flat" cmpd="sng" algn="ctr">
+                      <a:solidFill>
+                        <a:srgbClr val="2E2E2E"/>
+                      </a:solidFill>
+                      <a:prstDash val="solid"/>
+                    </a:lnB>
+                  </a:tcPr>
+                </a:tc>
+                <a:tc>
+                  <a:txBody>
+                    <a:bodyPr/>
+                    <a:lstStyle/>
+                    <a:p>
+                      <a:pPr>
+                        <a:defRPr sz="1200" b="0">
+                          <a:solidFill>
+                            <a:srgbClr val="E2E2E2"/>
+                          </a:solidFill>
+                          <a:latin typeface="Consolas"/>
+                        </a:defRPr>
+                      </a:pPr>
+                      <a:r>
+                        <a:t>62,1 · 100 % · 7/7</a:t>
+                      </a:r>
+                    </a:p>
+                  </a:txBody>
+                  <a:tcPr>
+                    <a:solidFill>
+                      <a:srgbClr val="161616"/>
+                    </a:solidFill>
+                    <a:lnL w="9525" cap="flat" cmpd="sng" algn="ctr">
+                      <a:solidFill>
+                        <a:srgbClr val="2E2E2E"/>
+                      </a:solidFill>
+                      <a:prstDash val="solid"/>
+                    </a:lnL>
+                    <a:lnR w="9525" cap="flat" cmpd="sng" algn="ctr">
+                      <a:solidFill>
+                        <a:srgbClr val="2E2E2E"/>
+                      </a:solidFill>
+                      <a:prstDash val="solid"/>
+                    </a:lnR>
+                    <a:lnT w="9525" cap="flat" cmpd="sng" algn="ctr">
+                      <a:solidFill>
+                        <a:srgbClr val="2E2E2E"/>
+                      </a:solidFill>
+                      <a:prstDash val="solid"/>
+                    </a:lnT>
+                    <a:lnB w="9525" cap="flat" cmpd="sng" algn="ctr">
+                      <a:solidFill>
+                        <a:srgbClr val="2E2E2E"/>
+                      </a:solidFill>
+                      <a:prstDash val="solid"/>
+                    </a:lnB>
+                  </a:tcPr>
+                </a:tc>
+              </a:tr>
+              <a:tr h="384048">
+                <a:tc>
+                  <a:txBody>
+                    <a:bodyPr/>
+                    <a:lstStyle/>
+                    <a:p>
+                      <a:pPr>
+                        <a:defRPr sz="1200" b="1">
+                          <a:solidFill>
+                            <a:srgbClr val="F5F5F5"/>
+                          </a:solidFill>
+                          <a:latin typeface="Segoe UI"/>
+                        </a:defRPr>
+                      </a:pPr>
+                      <a:r>
+                        <a:t>Perceção Cooperativa</a:t>
+                      </a:r>
+                    </a:p>
+                  </a:txBody>
+                  <a:tcPr>
+                    <a:solidFill>
+                      <a:srgbClr val="0E0E0E"/>
+                    </a:solidFill>
+                    <a:lnL w="9525" cap="flat" cmpd="sng" algn="ctr">
+                      <a:solidFill>
+                        <a:srgbClr val="2E2E2E"/>
+                      </a:solidFill>
+                      <a:prstDash val="solid"/>
+                    </a:lnL>
+                    <a:lnR w="9525" cap="flat" cmpd="sng" algn="ctr">
+                      <a:solidFill>
+                        <a:srgbClr val="2E2E2E"/>
+                      </a:solidFill>
+                      <a:prstDash val="solid"/>
+                    </a:lnR>
+                    <a:lnT w="9525" cap="flat" cmpd="sng" algn="ctr">
+                      <a:solidFill>
+                        <a:srgbClr val="2E2E2E"/>
+                      </a:solidFill>
+                      <a:prstDash val="solid"/>
+                    </a:lnT>
+                    <a:lnB w="9525" cap="flat" cmpd="sng" algn="ctr">
+                      <a:solidFill>
+                        <a:srgbClr val="2E2E2E"/>
+                      </a:solidFill>
+                      <a:prstDash val="solid"/>
+                    </a:lnB>
+                  </a:tcPr>
+                </a:tc>
+                <a:tc>
+                  <a:txBody>
+                    <a:bodyPr/>
+                    <a:lstStyle/>
+                    <a:p>
+                      <a:pPr>
+                        <a:defRPr sz="1200" b="0">
+                          <a:solidFill>
+                            <a:srgbClr val="E2E2E2"/>
+                          </a:solidFill>
+                          <a:latin typeface="Consolas"/>
+                        </a:defRPr>
+                      </a:pPr>
+                      <a:r>
+                        <a:t>19,0 · 91 % · 6/7</a:t>
+                      </a:r>
+                    </a:p>
+                  </a:txBody>
+                  <a:tcPr>
+                    <a:solidFill>
+                      <a:srgbClr val="0E0E0E"/>
+                    </a:solidFill>
+                    <a:lnL w="9525" cap="flat" cmpd="sng" algn="ctr">
+                      <a:solidFill>
+                        <a:srgbClr val="2E2E2E"/>
+                      </a:solidFill>
+                      <a:prstDash val="solid"/>
+                    </a:lnL>
+                    <a:lnR w="9525" cap="flat" cmpd="sng" algn="ctr">
+                      <a:solidFill>
+                        <a:srgbClr val="2E2E2E"/>
+                      </a:solidFill>
+                      <a:prstDash val="solid"/>
+                    </a:lnR>
+                    <a:lnT w="9525" cap="flat" cmpd="sng" algn="ctr">
+                      <a:solidFill>
+                        <a:srgbClr val="2E2E2E"/>
+                      </a:solidFill>
+                      <a:prstDash val="solid"/>
+                    </a:lnT>
+                    <a:lnB w="9525" cap="flat" cmpd="sng" algn="ctr">
+                      <a:solidFill>
+                        <a:srgbClr val="2E2E2E"/>
+                      </a:solidFill>
+                      <a:prstDash val="solid"/>
+                    </a:lnB>
+                  </a:tcPr>
+                </a:tc>
+                <a:tc>
+                  <a:txBody>
+                    <a:bodyPr/>
+                    <a:lstStyle/>
+                    <a:p>
+                      <a:pPr>
+                        <a:defRPr sz="1200" b="0">
+                          <a:solidFill>
+                            <a:srgbClr val="E2E2E2"/>
+                          </a:solidFill>
+                          <a:latin typeface="Consolas"/>
+                        </a:defRPr>
+                      </a:pPr>
+                      <a:r>
+                        <a:t>15,3 · 100 % · 7/7</a:t>
+                      </a:r>
+                    </a:p>
+                  </a:txBody>
+                  <a:tcPr>
+                    <a:solidFill>
+                      <a:srgbClr val="0E0E0E"/>
+                    </a:solidFill>
+                    <a:lnL w="9525" cap="flat" cmpd="sng" algn="ctr">
+                      <a:solidFill>
+                        <a:srgbClr val="2E2E2E"/>
+                      </a:solidFill>
+                      <a:prstDash val="solid"/>
+                    </a:lnL>
+                    <a:lnR w="9525" cap="flat" cmpd="sng" algn="ctr">
+                      <a:solidFill>
+                        <a:srgbClr val="2E2E2E"/>
+                      </a:solidFill>
+                      <a:prstDash val="solid"/>
+                    </a:lnR>
+                    <a:lnT w="9525" cap="flat" cmpd="sng" algn="ctr">
+                      <a:solidFill>
+                        <a:srgbClr val="2E2E2E"/>
+                      </a:solidFill>
+                      <a:prstDash val="solid"/>
+                    </a:lnT>
+                    <a:lnB w="9525" cap="flat" cmpd="sng" algn="ctr">
+                      <a:solidFill>
+                        <a:srgbClr val="2E2E2E"/>
+                      </a:solidFill>
+                      <a:prstDash val="solid"/>
+                    </a:lnB>
+                  </a:tcPr>
+                </a:tc>
+                <a:tc>
+                  <a:txBody>
+                    <a:bodyPr/>
+                    <a:lstStyle/>
+                    <a:p>
+                      <a:pPr>
+                        <a:defRPr sz="1200" b="0">
+                          <a:solidFill>
+                            <a:srgbClr val="E2E2E2"/>
+                          </a:solidFill>
+                          <a:latin typeface="Consolas"/>
+                        </a:defRPr>
+                      </a:pPr>
+                      <a:r>
+                        <a:t>16,1 · 100 % · 7/7</a:t>
+                      </a:r>
+                    </a:p>
+                  </a:txBody>
+                  <a:tcPr>
+                    <a:solidFill>
+                      <a:srgbClr val="0E0E0E"/>
+                    </a:solidFill>
+                    <a:lnL w="9525" cap="flat" cmpd="sng" algn="ctr">
+                      <a:solidFill>
+                        <a:srgbClr val="2E2E2E"/>
+                      </a:solidFill>
+                      <a:prstDash val="solid"/>
+                    </a:lnL>
+                    <a:lnR w="9525" cap="flat" cmpd="sng" algn="ctr">
+                      <a:solidFill>
+                        <a:srgbClr val="2E2E2E"/>
+                      </a:solidFill>
+                      <a:prstDash val="solid"/>
+                    </a:lnR>
+                    <a:lnT w="9525" cap="flat" cmpd="sng" algn="ctr">
+                      <a:solidFill>
+                        <a:srgbClr val="2E2E2E"/>
+                      </a:solidFill>
+                      <a:prstDash val="solid"/>
+                    </a:lnT>
+                    <a:lnB w="9525" cap="flat" cmpd="sng" algn="ctr">
+                      <a:solidFill>
+                        <a:srgbClr val="2E2E2E"/>
+                      </a:solidFill>
+                      <a:prstDash val="solid"/>
+                    </a:lnB>
+                  </a:tcPr>
+                </a:tc>
+              </a:tr>
+              <a:tr h="384048">
+                <a:tc>
+                  <a:txBody>
+                    <a:bodyPr/>
+                    <a:lstStyle/>
+                    <a:p>
+                      <a:pPr>
+                        <a:defRPr sz="1200" b="1">
+                          <a:solidFill>
+                            <a:srgbClr val="F5F5F5"/>
+                          </a:solidFill>
+                          <a:latin typeface="Segoe UI"/>
+                        </a:defRPr>
+                      </a:pPr>
+                      <a:r>
+                        <a:t>Porta com Alternativa</a:t>
+                      </a:r>
+                    </a:p>
+                  </a:txBody>
+                  <a:tcPr>
+                    <a:solidFill>
+                      <a:srgbClr val="161616"/>
+                    </a:solidFill>
+                    <a:lnL w="9525" cap="flat" cmpd="sng" algn="ctr">
+                      <a:solidFill>
+                        <a:srgbClr val="2E2E2E"/>
+                      </a:solidFill>
+                      <a:prstDash val="solid"/>
+                    </a:lnL>
+                    <a:lnR w="9525" cap="flat" cmpd="sng" algn="ctr">
+                      <a:solidFill>
+                        <a:srgbClr val="2E2E2E"/>
+                      </a:solidFill>
+                      <a:prstDash val="solid"/>
+                    </a:lnR>
+                    <a:lnT w="9525" cap="flat" cmpd="sng" algn="ctr">
+                      <a:solidFill>
+                        <a:srgbClr val="2E2E2E"/>
+                      </a:solidFill>
+                      <a:prstDash val="solid"/>
+                    </a:lnT>
+                    <a:lnB w="9525" cap="flat" cmpd="sng" algn="ctr">
+                      <a:solidFill>
+                        <a:srgbClr val="2E2E2E"/>
+                      </a:solidFill>
+                      <a:prstDash val="solid"/>
+                    </a:lnB>
+                  </a:tcPr>
+                </a:tc>
+                <a:tc>
+                  <a:txBody>
+                    <a:bodyPr/>
+                    <a:lstStyle/>
+                    <a:p>
+                      <a:pPr>
+                        <a:defRPr sz="1200" b="0">
+                          <a:solidFill>
+                            <a:srgbClr val="E2E2E2"/>
+                          </a:solidFill>
+                          <a:latin typeface="Consolas"/>
+                        </a:defRPr>
+                      </a:pPr>
+                      <a:r>
+                        <a:t>86,7 · 100 % · 7/7</a:t>
+                      </a:r>
+                    </a:p>
+                  </a:txBody>
+                  <a:tcPr>
+                    <a:solidFill>
+                      <a:srgbClr val="161616"/>
+                    </a:solidFill>
+                    <a:lnL w="9525" cap="flat" cmpd="sng" algn="ctr">
+                      <a:solidFill>
+                        <a:srgbClr val="2E2E2E"/>
+                      </a:solidFill>
+                      <a:prstDash val="solid"/>
+                    </a:lnL>
+                    <a:lnR w="9525" cap="flat" cmpd="sng" algn="ctr">
+                      <a:solidFill>
+                        <a:srgbClr val="2E2E2E"/>
+                      </a:solidFill>
+                      <a:prstDash val="solid"/>
+                    </a:lnR>
+                    <a:lnT w="9525" cap="flat" cmpd="sng" algn="ctr">
+                      <a:solidFill>
+                        <a:srgbClr val="2E2E2E"/>
+                      </a:solidFill>
+                      <a:prstDash val="solid"/>
+                    </a:lnT>
+                    <a:lnB w="9525" cap="flat" cmpd="sng" algn="ctr">
+                      <a:solidFill>
+                        <a:srgbClr val="2E2E2E"/>
+                      </a:solidFill>
+                      <a:prstDash val="solid"/>
+                    </a:lnB>
+                  </a:tcPr>
+                </a:tc>
+                <a:tc>
+                  <a:txBody>
+                    <a:bodyPr/>
+                    <a:lstStyle/>
+                    <a:p>
+                      <a:pPr>
+                        <a:defRPr sz="1200" b="0">
+                          <a:solidFill>
+                            <a:srgbClr val="E2E2E2"/>
+                          </a:solidFill>
+                          <a:latin typeface="Consolas"/>
+                        </a:defRPr>
+                      </a:pPr>
+                      <a:r>
+                        <a:t>85,3 · 100 % · 7/7</a:t>
+                      </a:r>
+                    </a:p>
+                  </a:txBody>
+                  <a:tcPr>
+                    <a:solidFill>
+                      <a:srgbClr val="161616"/>
+                    </a:solidFill>
+                    <a:lnL w="9525" cap="flat" cmpd="sng" algn="ctr">
+                      <a:solidFill>
+                        <a:srgbClr val="2E2E2E"/>
+                      </a:solidFill>
+                      <a:prstDash val="solid"/>
+                    </a:lnL>
+                    <a:lnR w="9525" cap="flat" cmpd="sng" algn="ctr">
+                      <a:solidFill>
+                        <a:srgbClr val="2E2E2E"/>
+                      </a:solidFill>
+                      <a:prstDash val="solid"/>
+                    </a:lnR>
+                    <a:lnT w="9525" cap="flat" cmpd="sng" algn="ctr">
+                      <a:solidFill>
+                        <a:srgbClr val="2E2E2E"/>
+                      </a:solidFill>
+                      <a:prstDash val="solid"/>
+                    </a:lnT>
+                    <a:lnB w="9525" cap="flat" cmpd="sng" algn="ctr">
+                      <a:solidFill>
+                        <a:srgbClr val="2E2E2E"/>
+                      </a:solidFill>
+                      <a:prstDash val="solid"/>
+                    </a:lnB>
+                  </a:tcPr>
+                </a:tc>
+                <a:tc>
+                  <a:txBody>
+                    <a:bodyPr/>
+                    <a:lstStyle/>
+                    <a:p>
+                      <a:pPr>
+                        <a:defRPr sz="1200" b="0">
+                          <a:solidFill>
+                            <a:srgbClr val="E2E2E2"/>
+                          </a:solidFill>
+                          <a:latin typeface="Consolas"/>
+                        </a:defRPr>
+                      </a:pPr>
+                      <a:r>
+                        <a:t>68,6 · 100 % · 7/7</a:t>
+                      </a:r>
+                    </a:p>
+                  </a:txBody>
+                  <a:tcPr>
+                    <a:solidFill>
+                      <a:srgbClr val="161616"/>
+                    </a:solidFill>
+                    <a:lnL w="9525" cap="flat" cmpd="sng" algn="ctr">
+                      <a:solidFill>
+                        <a:srgbClr val="2E2E2E"/>
+                      </a:solidFill>
+                      <a:prstDash val="solid"/>
+                    </a:lnL>
+                    <a:lnR w="9525" cap="flat" cmpd="sng" algn="ctr">
+                      <a:solidFill>
+                        <a:srgbClr val="2E2E2E"/>
+                      </a:solidFill>
+                      <a:prstDash val="solid"/>
+                    </a:lnR>
+                    <a:lnT w="9525" cap="flat" cmpd="sng" algn="ctr">
+                      <a:solidFill>
+                        <a:srgbClr val="2E2E2E"/>
+                      </a:solidFill>
+                      <a:prstDash val="solid"/>
+                    </a:lnT>
+                    <a:lnB w="9525" cap="flat" cmpd="sng" algn="ctr">
+                      <a:solidFill>
+                        <a:srgbClr val="2E2E2E"/>
+                      </a:solidFill>
+                      <a:prstDash val="solid"/>
+                    </a:lnB>
+                  </a:tcPr>
+                </a:tc>
+              </a:tr>
+            </a:tbl>
+          </a:graphicData>
+        </a:graphic>
+      </p:graphicFrame>
+      <p:cxnSp>
+        <p:nvCxnSpPr>
+          <p:cNvPr id="9" name="Connector 8"/>
+          <p:cNvCxnSpPr/>
+          <p:nvPr/>
+        </p:nvCxnSpPr>
+        <p:spPr>
+          <a:xfrm>
+            <a:off x="548640" y="6355080"/>
+            <a:ext cx="11094415" cy="0"/>
+          </a:xfrm>
+          <a:prstGeom prst="line">
+            <a:avLst/>
+          </a:prstGeom>
+          <a:ln w="9525">
+            <a:solidFill>
+              <a:srgbClr val="2E2E2E"/>
+            </a:solidFill>
+          </a:ln>
+        </p:spPr>
+        <p:style>
+          <a:lnRef idx="2">
+            <a:schemeClr val="accent1"/>
+          </a:lnRef>
+          <a:fillRef idx="0">
+            <a:schemeClr val="accent1"/>
+          </a:fillRef>
+          <a:effectRef idx="1">
+            <a:schemeClr val="accent1"/>
+          </a:effectRef>
+          <a:fontRef idx="minor">
+            <a:schemeClr val="tx1"/>
+          </a:fontRef>
+        </p:style>
+      </p:cxnSp>
+      <p:sp>
+        <p:nvSpPr>
+          <p:cNvPr id="10" name="TextBox 9"/>
+          <p:cNvSpPr txBox="1"/>
+          <p:nvPr/>
+        </p:nvSpPr>
+        <p:spPr>
+          <a:xfrm>
+            <a:off x="548640" y="6400800"/>
+            <a:ext cx="8229600" cy="365760"/>
+          </a:xfrm>
+          <a:prstGeom prst="rect">
+            <a:avLst/>
+          </a:prstGeom>
+          <a:noFill/>
+        </p:spPr>
+        <p:txBody>
+          <a:bodyPr wrap="square" anchor="t">
+            <a:spAutoFit/>
+          </a:bodyPr>
+          <a:lstStyle/>
+          <a:p>
+            <a:pPr algn="l">
+              <a:spcAft>
+                <a:spcPts val="600"/>
+              </a:spcAft>
+            </a:pPr>
+            <a:r>
+              <a:rPr sz="1000" b="0">
+                <a:solidFill>
+                  <a:srgbClr val="9A9A9A"/>
+                </a:solidFill>
+                <a:latin typeface="Segoe UI"/>
+              </a:rPr>
+              <a:t>Slide de reserva · não faz parte da apresentação</a:t>
+            </a:r>
+          </a:p>
+        </p:txBody>
+      </p:sp>
+      <p:sp>
+        <p:nvSpPr>
+          <p:cNvPr id="11" name="TextBox 10"/>
+          <p:cNvSpPr txBox="1"/>
+          <p:nvPr/>
+        </p:nvSpPr>
+        <p:spPr>
+          <a:xfrm>
+            <a:off x="10728655" y="6400800"/>
+            <a:ext cx="914400" cy="365760"/>
+          </a:xfrm>
+          <a:prstGeom prst="rect">
+            <a:avLst/>
+          </a:prstGeom>
+          <a:noFill/>
+        </p:spPr>
+        <p:txBody>
+          <a:bodyPr wrap="square" anchor="t">
+            <a:spAutoFit/>
+          </a:bodyPr>
+          <a:lstStyle/>
+          <a:p>
+            <a:pPr algn="r">
+              <a:spcAft>
+                <a:spcPts val="600"/>
+              </a:spcAft>
+            </a:pPr>
+            <a:r>
+              <a:rPr sz="1000" b="0">
+                <a:solidFill>
+                  <a:srgbClr val="9A9A9A"/>
+                </a:solidFill>
+                <a:latin typeface="Consolas"/>
+              </a:rPr>
+              <a:t>A1</a:t>
+            </a:r>
+          </a:p>
+        </p:txBody>
+      </p:sp>
+    </p:spTree>
+  </p:cSld>
+  <p:clrMapOvr>
+    <a:masterClrMapping/>
+  </p:clrMapOvr>
+</p:sld>
+</file>
+
+<file path=ppt/slides/slide21.xml><?xml version="1.0" encoding="utf-8"?>
+<p:sld xmlns:a="http://schemas.openxmlformats.org/drawingml/2006/main" xmlns:p="http://schemas.openxmlformats.org/presentationml/2006/main" xmlns:r="http://schemas.openxmlformats.org/officeDocument/2006/relationships">
+  <p:cSld>
+    <p:spTree>
+      <p:nvGrpSpPr>
+        <p:cNvPr id="1" name=""/>
+        <p:cNvGrpSpPr/>
+        <p:nvPr/>
+      </p:nvGrpSpPr>
+      <p:grpSpPr/>
+      <p:sp>
+        <p:nvSpPr>
+          <p:cNvPr id="2" name="Rectangle 1"/>
+          <p:cNvSpPr/>
+          <p:nvPr/>
+        </p:nvSpPr>
+        <p:spPr>
+          <a:xfrm>
+            <a:off x="0" y="0"/>
+            <a:ext cx="12191695" cy="6858000"/>
+          </a:xfrm>
+          <a:prstGeom prst="rect">
+            <a:avLst/>
+          </a:prstGeom>
+          <a:solidFill>
+            <a:srgbClr val="050505"/>
+          </a:solidFill>
+          <a:ln>
+            <a:noFill/>
+          </a:ln>
+          <a:effectLst/>
+        </p:spPr>
+        <p:style>
+          <a:lnRef idx="1">
+            <a:schemeClr val="accent1"/>
+          </a:lnRef>
+          <a:fillRef idx="3">
+            <a:schemeClr val="accent1"/>
+          </a:fillRef>
+          <a:effectRef idx="2">
+            <a:schemeClr val="accent1"/>
+          </a:effectRef>
+          <a:fontRef idx="minor">
+            <a:schemeClr val="lt1"/>
+          </a:fontRef>
+        </p:style>
+        <p:txBody>
+          <a:bodyPr rtlCol="0" anchor="ctr"/>
+          <a:lstStyle/>
+          <a:p>
+            <a:pPr algn="ctr"/>
+          </a:p>
+        </p:txBody>
+      </p:sp>
+      <p:sp>
+        <p:nvSpPr>
+          <p:cNvPr id="3" name="TextBox 2"/>
+          <p:cNvSpPr txBox="1"/>
+          <p:nvPr/>
+        </p:nvSpPr>
+        <p:spPr>
+          <a:xfrm>
+            <a:off x="548640" y="292608"/>
+            <a:ext cx="11094415" cy="777240"/>
+          </a:xfrm>
+          <a:prstGeom prst="rect">
+            <a:avLst/>
+          </a:prstGeom>
+          <a:noFill/>
+        </p:spPr>
+        <p:txBody>
+          <a:bodyPr wrap="square" anchor="t">
+            <a:spAutoFit/>
+          </a:bodyPr>
+          <a:lstStyle/>
+          <a:p>
+            <a:pPr algn="l">
+              <a:spcAft>
+                <a:spcPts val="600"/>
+              </a:spcAft>
+            </a:pPr>
+            <a:r>
+              <a:rPr sz="3000" b="1">
+                <a:solidFill>
+                  <a:srgbClr val="F5F5F5"/>
+                </a:solidFill>
+                <a:latin typeface="Segoe UI Semibold"/>
+              </a:rPr>
+              <a:t>Reserva · Novidade e mega-treino, braço a braço</a:t>
+            </a:r>
+          </a:p>
+        </p:txBody>
+      </p:sp>
+      <p:sp>
+        <p:nvSpPr>
+          <p:cNvPr id="4" name="TextBox 3"/>
+          <p:cNvSpPr txBox="1"/>
+          <p:nvPr/>
+        </p:nvSpPr>
+        <p:spPr>
+          <a:xfrm>
+            <a:off x="548640" y="932688"/>
+            <a:ext cx="11094415" cy="457200"/>
+          </a:xfrm>
+          <a:prstGeom prst="rect">
+            <a:avLst/>
+          </a:prstGeom>
+          <a:noFill/>
+        </p:spPr>
+        <p:txBody>
+          <a:bodyPr wrap="square" anchor="t">
+            <a:spAutoFit/>
+          </a:bodyPr>
+          <a:lstStyle/>
+          <a:p>
+            <a:pPr algn="l">
+              <a:spcAft>
+                <a:spcPts val="600"/>
+              </a:spcAft>
+            </a:pPr>
+            <a:r>
+              <a:rPr sz="1500" b="0">
+                <a:solidFill>
+                  <a:srgbClr val="9A9A9A"/>
+                </a:solidFill>
+                <a:latin typeface="Segoe UI"/>
+              </a:rPr>
+              <a:t>orçamento igualado a 195 min por execução, salvo indicação em contrário</a:t>
+            </a:r>
+          </a:p>
+        </p:txBody>
+      </p:sp>
+      <p:cxnSp>
+        <p:nvCxnSpPr>
+          <p:cNvPr id="5" name="Connector 4"/>
+          <p:cNvCxnSpPr/>
+          <p:nvPr/>
+        </p:nvCxnSpPr>
+        <p:spPr>
+          <a:xfrm>
+            <a:off x="548640" y="1371600"/>
+            <a:ext cx="11094415" cy="0"/>
+          </a:xfrm>
+          <a:prstGeom prst="line">
+            <a:avLst/>
+          </a:prstGeom>
+          <a:ln w="9525">
+            <a:solidFill>
+              <a:srgbClr val="2E2E2E"/>
+            </a:solidFill>
+          </a:ln>
+        </p:spPr>
+        <p:style>
+          <a:lnRef idx="2">
+            <a:schemeClr val="accent1"/>
+          </a:lnRef>
+          <a:fillRef idx="0">
+            <a:schemeClr val="accent1"/>
+          </a:fillRef>
+          <a:effectRef idx="1">
+            <a:schemeClr val="accent1"/>
+          </a:effectRef>
+          <a:fontRef idx="minor">
+            <a:schemeClr val="tx1"/>
+          </a:fontRef>
+        </p:style>
+      </p:cxnSp>
+      <p:cxnSp>
+        <p:nvCxnSpPr>
+          <p:cNvPr id="6" name="Connector 5"/>
+          <p:cNvCxnSpPr/>
+          <p:nvPr/>
+        </p:nvCxnSpPr>
+        <p:spPr>
+          <a:xfrm>
+            <a:off x="548640" y="1371600"/>
+            <a:ext cx="1005840" cy="0"/>
+          </a:xfrm>
+          <a:prstGeom prst="line">
+            <a:avLst/>
+          </a:prstGeom>
+          <a:ln w="31750">
+            <a:solidFill>
+              <a:srgbClr val="F5F5F5"/>
+            </a:solidFill>
+          </a:ln>
+        </p:spPr>
+        <p:style>
+          <a:lnRef idx="2">
+            <a:schemeClr val="accent1"/>
+          </a:lnRef>
+          <a:fillRef idx="0">
+            <a:schemeClr val="accent1"/>
+          </a:fillRef>
+          <a:effectRef idx="1">
+            <a:schemeClr val="accent1"/>
+          </a:effectRef>
+          <a:fontRef idx="minor">
+            <a:schemeClr val="tx1"/>
+          </a:fontRef>
+        </p:style>
+      </p:cxnSp>
+      <p:sp>
+        <p:nvSpPr>
+          <p:cNvPr id="7" name="TextBox 6"/>
+          <p:cNvSpPr txBox="1"/>
+          <p:nvPr/>
+        </p:nvSpPr>
+        <p:spPr>
+          <a:xfrm>
+            <a:off x="548640" y="1600200"/>
+            <a:ext cx="11094415" cy="1371600"/>
+          </a:xfrm>
+          <a:prstGeom prst="rect">
+            <a:avLst/>
+          </a:prstGeom>
+          <a:noFill/>
+        </p:spPr>
+        <p:txBody>
+          <a:bodyPr wrap="square" anchor="t">
+            <a:spAutoFit/>
+          </a:bodyPr>
+          <a:lstStyle/>
+          <a:p>
+            <a:pPr algn="l">
+              <a:spcAft>
+                <a:spcPts val="600"/>
+              </a:spcAft>
+            </a:pPr>
+            <a:r>
+              <a:rPr sz="1600">
+                <a:solidFill>
+                  <a:srgbClr val="9A9A9A"/>
+                </a:solidFill>
+                <a:latin typeface="Segoe UI"/>
+              </a:rPr>
+              <a:t>▸  </a:t>
+            </a:r>
+            <a:r>
+              <a:rPr sz="1600" b="0">
+                <a:solidFill>
+                  <a:srgbClr val="E2E2E2"/>
+                </a:solidFill>
+                <a:latin typeface="Segoe UI"/>
+              </a:rPr>
+              <a:t>A n = 28: Fisher exato, adaptativo vs. objetivo, p &lt; 0,0001. GNN objetivo vs. PPO, p = 0,088 — indistinguíveis. Nenhuma das 28 execuções do SAC passa de 45,4 rec/ep: é uniformemente fraco, e não bimodal.</a:t>
+            </a:r>
+          </a:p>
+          <a:p>
+            <a:pPr algn="l">
+              <a:spcAft>
+                <a:spcPts val="600"/>
+              </a:spcAft>
+            </a:pPr>
+            <a:r>
+              <a:rPr sz="1600">
+                <a:solidFill>
+                  <a:srgbClr val="9A9A9A"/>
+                </a:solidFill>
+                <a:latin typeface="Segoe UI"/>
+              </a:rPr>
+              <a:t>▸  </a:t>
+            </a:r>
+            <a:r>
+              <a:rPr sz="1600" b="0">
+                <a:solidFill>
+                  <a:srgbClr val="E2E2E2"/>
+                </a:solidFill>
+                <a:latin typeface="Segoe UI"/>
+              </a:rPr>
+              <a:t>Não se compra com orçamento: o objetivo puro com 390 min continua bimodal (4/7, 31,5 ± 35,0); o adaptativo com 390 min faz 88,7 ± 0,6 na Porta com Alternativa — o melhor resultado da tese.</a:t>
+            </a:r>
+          </a:p>
+          <a:p>
+            <a:pPr algn="l">
+              <a:spcAft>
+                <a:spcPts val="600"/>
+              </a:spcAft>
+            </a:pPr>
+            <a:r>
+              <a:rPr sz="1600">
+                <a:solidFill>
+                  <a:srgbClr val="9A9A9A"/>
+                </a:solidFill>
+                <a:latin typeface="Segoe UI"/>
+              </a:rPr>
+              <a:t>▸  </a:t>
+            </a:r>
+            <a:r>
+              <a:rPr sz="1600" b="0">
+                <a:solidFill>
+                  <a:srgbClr val="E2E2E2"/>
+                </a:solidFill>
+                <a:latin typeface="Segoe UI"/>
+              </a:rPr>
+              <a:t>Ablação da temperagem, 4 variantes: 7/7 nos dois cenários — o mecanismo não vive da afinação.</a:t>
+            </a:r>
+          </a:p>
+        </p:txBody>
+      </p:sp>
+      <p:graphicFrame>
+        <p:nvGraphicFramePr>
+          <p:cNvPr id="8" name="Table 7"/>
+          <p:cNvGraphicFramePr>
+            <a:graphicFrameLocks noGrp="1"/>
+          </p:cNvGraphicFramePr>
+          <p:nvPr/>
+        </p:nvGraphicFramePr>
+        <p:xfrm>
+          <a:off x="548640" y="3291840"/>
+          <a:ext cx="11064240" cy="2304288"/>
+        </p:xfrm>
+        <a:graphic>
+          <a:graphicData uri="http://schemas.openxmlformats.org/drawingml/2006/table">
+            <a:tbl>
+              <a:tblPr>
+                <a:tableStyleId>{5C22544A-7EE6-4342-B048-85BDC9FD1C3A}</a:tableStyleId>
+              </a:tblPr>
+              <a:tblGrid>
+                <a:gridCol w="3200400"/>
+                <a:gridCol w="2651760"/>
+                <a:gridCol w="2697480"/>
+                <a:gridCol w="2514600"/>
+              </a:tblGrid>
+              <a:tr h="384048">
+                <a:tc>
+                  <a:txBody>
+                    <a:bodyPr/>
+                    <a:lstStyle/>
+                    <a:p>
+                      <a:pPr>
+                        <a:defRPr sz="1100" b="1">
+                          <a:solidFill>
+                            <a:srgbClr val="9A9A9A"/>
+                          </a:solidFill>
+                          <a:latin typeface="Consolas"/>
+                        </a:defRPr>
+                      </a:pPr>
+                      <a:r>
+                        <a:t>BRAÇO</a:t>
+                      </a:r>
+                    </a:p>
+                  </a:txBody>
+                  <a:tcPr>
+                    <a:solidFill>
+                      <a:srgbClr val="050505"/>
+                    </a:solidFill>
+                    <a:lnL w="9525" cap="flat" cmpd="sng" algn="ctr">
+                      <a:solidFill>
+                        <a:srgbClr val="2E2E2E"/>
+                      </a:solidFill>
+                      <a:prstDash val="solid"/>
+                    </a:lnL>
+                    <a:lnR w="9525" cap="flat" cmpd="sng" algn="ctr">
+                      <a:solidFill>
+                        <a:srgbClr val="2E2E2E"/>
+                      </a:solidFill>
+                      <a:prstDash val="solid"/>
+                    </a:lnR>
+                    <a:lnT w="9525" cap="flat" cmpd="sng" algn="ctr">
+                      <a:solidFill>
+                        <a:srgbClr val="2E2E2E"/>
+                      </a:solidFill>
+                      <a:prstDash val="solid"/>
+                    </a:lnT>
+                    <a:lnB w="9525" cap="flat" cmpd="sng" algn="ctr">
+                      <a:solidFill>
+                        <a:srgbClr val="2E2E2E"/>
+                      </a:solidFill>
+                      <a:prstDash val="solid"/>
+                    </a:lnB>
+                  </a:tcPr>
+                </a:tc>
+                <a:tc>
+                  <a:txBody>
+                    <a:bodyPr/>
+                    <a:lstStyle/>
+                    <a:p>
+                      <a:pPr>
+                        <a:defRPr sz="1100" b="1">
+                          <a:solidFill>
+                            <a:srgbClr val="9A9A9A"/>
+                          </a:solidFill>
+                          <a:latin typeface="Consolas"/>
+                        </a:defRPr>
+                      </a:pPr>
+                      <a:r>
+                        <a:t>MURO EM U (N = 7)</a:t>
+                      </a:r>
+                    </a:p>
+                  </a:txBody>
+                  <a:tcPr>
+                    <a:solidFill>
+                      <a:srgbClr val="050505"/>
+                    </a:solidFill>
+                    <a:lnL w="9525" cap="flat" cmpd="sng" algn="ctr">
+                      <a:solidFill>
+                        <a:srgbClr val="2E2E2E"/>
+                      </a:solidFill>
+                      <a:prstDash val="solid"/>
+                    </a:lnL>
+                    <a:lnR w="9525" cap="flat" cmpd="sng" algn="ctr">
+                      <a:solidFill>
+                        <a:srgbClr val="2E2E2E"/>
+                      </a:solidFill>
+                      <a:prstDash val="solid"/>
+                    </a:lnR>
+                    <a:lnT w="9525" cap="flat" cmpd="sng" algn="ctr">
+                      <a:solidFill>
+                        <a:srgbClr val="2E2E2E"/>
+                      </a:solidFill>
+                      <a:prstDash val="solid"/>
+                    </a:lnT>
+                    <a:lnB w="9525" cap="flat" cmpd="sng" algn="ctr">
+                      <a:solidFill>
+                        <a:srgbClr val="2E2E2E"/>
+                      </a:solidFill>
+                      <a:prstDash val="solid"/>
+                    </a:lnB>
+                  </a:tcPr>
+                </a:tc>
+                <a:tc>
+                  <a:txBody>
+                    <a:bodyPr/>
+                    <a:lstStyle/>
+                    <a:p>
+                      <a:pPr>
+                        <a:defRPr sz="1100" b="1">
+                          <a:solidFill>
+                            <a:srgbClr val="9A9A9A"/>
+                          </a:solidFill>
+                          <a:latin typeface="Consolas"/>
+                        </a:defRPr>
+                      </a:pPr>
+                      <a:r>
+                        <a:t>MURO EM U (N = 28)</a:t>
+                      </a:r>
+                    </a:p>
+                  </a:txBody>
+                  <a:tcPr>
+                    <a:solidFill>
+                      <a:srgbClr val="050505"/>
+                    </a:solidFill>
+                    <a:lnL w="9525" cap="flat" cmpd="sng" algn="ctr">
+                      <a:solidFill>
+                        <a:srgbClr val="2E2E2E"/>
+                      </a:solidFill>
+                      <a:prstDash val="solid"/>
+                    </a:lnL>
+                    <a:lnR w="9525" cap="flat" cmpd="sng" algn="ctr">
+                      <a:solidFill>
+                        <a:srgbClr val="2E2E2E"/>
+                      </a:solidFill>
+                      <a:prstDash val="solid"/>
+                    </a:lnR>
+                    <a:lnT w="9525" cap="flat" cmpd="sng" algn="ctr">
+                      <a:solidFill>
+                        <a:srgbClr val="2E2E2E"/>
+                      </a:solidFill>
+                      <a:prstDash val="solid"/>
+                    </a:lnT>
+                    <a:lnB w="9525" cap="flat" cmpd="sng" algn="ctr">
+                      <a:solidFill>
+                        <a:srgbClr val="2E2E2E"/>
+                      </a:solidFill>
+                      <a:prstDash val="solid"/>
+                    </a:lnB>
+                  </a:tcPr>
+                </a:tc>
+                <a:tc>
+                  <a:txBody>
+                    <a:bodyPr/>
+                    <a:lstStyle/>
+                    <a:p>
+                      <a:pPr>
+                        <a:defRPr sz="1100" b="1">
+                          <a:solidFill>
+                            <a:srgbClr val="9A9A9A"/>
+                          </a:solidFill>
+                          <a:latin typeface="Consolas"/>
+                        </a:defRPr>
+                      </a:pPr>
+                      <a:r>
+                        <a:t>PORTA C/ ALT. (N = 7)</a:t>
+                      </a:r>
+                    </a:p>
+                  </a:txBody>
+                  <a:tcPr>
+                    <a:solidFill>
+                      <a:srgbClr val="050505"/>
+                    </a:solidFill>
+                    <a:lnL w="9525" cap="flat" cmpd="sng" algn="ctr">
+                      <a:solidFill>
+                        <a:srgbClr val="2E2E2E"/>
+                      </a:solidFill>
+                      <a:prstDash val="solid"/>
+                    </a:lnL>
+                    <a:lnR w="9525" cap="flat" cmpd="sng" algn="ctr">
+                      <a:solidFill>
+                        <a:srgbClr val="2E2E2E"/>
+                      </a:solidFill>
+                      <a:prstDash val="solid"/>
+                    </a:lnR>
+                    <a:lnT w="9525" cap="flat" cmpd="sng" algn="ctr">
+                      <a:solidFill>
+                        <a:srgbClr val="2E2E2E"/>
+                      </a:solidFill>
+                      <a:prstDash val="solid"/>
+                    </a:lnT>
+                    <a:lnB w="9525" cap="flat" cmpd="sng" algn="ctr">
+                      <a:solidFill>
+                        <a:srgbClr val="2E2E2E"/>
+                      </a:solidFill>
+                      <a:prstDash val="solid"/>
+                    </a:lnB>
+                  </a:tcPr>
+                </a:tc>
+              </a:tr>
+              <a:tr h="384048">
+                <a:tc>
+                  <a:txBody>
+                    <a:bodyPr/>
+                    <a:lstStyle/>
+                    <a:p>
+                      <a:pPr>
+                        <a:defRPr sz="1300" b="1">
+                          <a:solidFill>
+                            <a:srgbClr val="F5F5F5"/>
+                          </a:solidFill>
+                          <a:latin typeface="Segoe UI"/>
+                        </a:defRPr>
+                      </a:pPr>
+                      <a:r>
+                        <a:t>GNN + novidade adaptativa</a:t>
+                      </a:r>
+                    </a:p>
+                  </a:txBody>
+                  <a:tcPr>
+                    <a:solidFill>
+                      <a:srgbClr val="161616"/>
+                    </a:solidFill>
+                    <a:lnL w="9525" cap="flat" cmpd="sng" algn="ctr">
+                      <a:solidFill>
+                        <a:srgbClr val="2E2E2E"/>
+                      </a:solidFill>
+                      <a:prstDash val="solid"/>
+                    </a:lnL>
+                    <a:lnR w="9525" cap="flat" cmpd="sng" algn="ctr">
+                      <a:solidFill>
+                        <a:srgbClr val="2E2E2E"/>
+                      </a:solidFill>
+                      <a:prstDash val="solid"/>
+                    </a:lnR>
+                    <a:lnT w="9525" cap="flat" cmpd="sng" algn="ctr">
+                      <a:solidFill>
+                        <a:srgbClr val="2E2E2E"/>
+                      </a:solidFill>
+                      <a:prstDash val="solid"/>
+                    </a:lnT>
+                    <a:lnB w="9525" cap="flat" cmpd="sng" algn="ctr">
+                      <a:solidFill>
+                        <a:srgbClr val="2E2E2E"/>
+                      </a:solidFill>
+                      <a:prstDash val="solid"/>
+                    </a:lnB>
+                  </a:tcPr>
+                </a:tc>
+                <a:tc>
+                  <a:txBody>
+                    <a:bodyPr/>
+                    <a:lstStyle/>
+                    <a:p>
+                      <a:pPr>
+                        <a:defRPr sz="1300" b="0">
+                          <a:solidFill>
+                            <a:srgbClr val="E2E2E2"/>
+                          </a:solidFill>
+                          <a:latin typeface="Consolas"/>
+                        </a:defRPr>
+                      </a:pPr>
+                      <a:r>
+                        <a:t>7/7 · 68,5 ± 13,1</a:t>
+                      </a:r>
+                    </a:p>
+                  </a:txBody>
+                  <a:tcPr>
+                    <a:solidFill>
+                      <a:srgbClr val="161616"/>
+                    </a:solidFill>
+                    <a:lnL w="9525" cap="flat" cmpd="sng" algn="ctr">
+                      <a:solidFill>
+                        <a:srgbClr val="2E2E2E"/>
+                      </a:solidFill>
+                      <a:prstDash val="solid"/>
+                    </a:lnL>
+                    <a:lnR w="9525" cap="flat" cmpd="sng" algn="ctr">
+                      <a:solidFill>
+                        <a:srgbClr val="2E2E2E"/>
+                      </a:solidFill>
+                      <a:prstDash val="solid"/>
+                    </a:lnR>
+                    <a:lnT w="9525" cap="flat" cmpd="sng" algn="ctr">
+                      <a:solidFill>
+                        <a:srgbClr val="2E2E2E"/>
+                      </a:solidFill>
+                      <a:prstDash val="solid"/>
+                    </a:lnT>
+                    <a:lnB w="9525" cap="flat" cmpd="sng" algn="ctr">
+                      <a:solidFill>
+                        <a:srgbClr val="2E2E2E"/>
+                      </a:solidFill>
+                      <a:prstDash val="solid"/>
+                    </a:lnB>
+                  </a:tcPr>
+                </a:tc>
+                <a:tc>
+                  <a:txBody>
+                    <a:bodyPr/>
+                    <a:lstStyle/>
+                    <a:p>
+                      <a:pPr>
+                        <a:defRPr sz="1300" b="0">
+                          <a:solidFill>
+                            <a:srgbClr val="E2E2E2"/>
+                          </a:solidFill>
+                          <a:latin typeface="Consolas"/>
+                        </a:defRPr>
+                      </a:pPr>
+                      <a:r>
+                        <a:t>28/28 · 67,4 ± 13,4</a:t>
+                      </a:r>
+                    </a:p>
+                  </a:txBody>
+                  <a:tcPr>
+                    <a:solidFill>
+                      <a:srgbClr val="161616"/>
+                    </a:solidFill>
+                    <a:lnL w="9525" cap="flat" cmpd="sng" algn="ctr">
+                      <a:solidFill>
+                        <a:srgbClr val="2E2E2E"/>
+                      </a:solidFill>
+                      <a:prstDash val="solid"/>
+                    </a:lnL>
+                    <a:lnR w="9525" cap="flat" cmpd="sng" algn="ctr">
+                      <a:solidFill>
+                        <a:srgbClr val="2E2E2E"/>
+                      </a:solidFill>
+                      <a:prstDash val="solid"/>
+                    </a:lnR>
+                    <a:lnT w="9525" cap="flat" cmpd="sng" algn="ctr">
+                      <a:solidFill>
+                        <a:srgbClr val="2E2E2E"/>
+                      </a:solidFill>
+                      <a:prstDash val="solid"/>
+                    </a:lnT>
+                    <a:lnB w="9525" cap="flat" cmpd="sng" algn="ctr">
+                      <a:solidFill>
+                        <a:srgbClr val="2E2E2E"/>
+                      </a:solidFill>
+                      <a:prstDash val="solid"/>
+                    </a:lnB>
+                  </a:tcPr>
+                </a:tc>
+                <a:tc>
+                  <a:txBody>
+                    <a:bodyPr/>
+                    <a:lstStyle/>
+                    <a:p>
+                      <a:pPr>
+                        <a:defRPr sz="1300" b="0">
+                          <a:solidFill>
+                            <a:srgbClr val="E2E2E2"/>
+                          </a:solidFill>
+                          <a:latin typeface="Segoe UI"/>
+                        </a:defRPr>
+                      </a:pPr>
+                      <a:r>
+                        <a:t>77,2 ± 16,7  (n.s.)</a:t>
+                      </a:r>
+                    </a:p>
+                  </a:txBody>
+                  <a:tcPr>
+                    <a:solidFill>
+                      <a:srgbClr val="161616"/>
+                    </a:solidFill>
+                    <a:lnL w="9525" cap="flat" cmpd="sng" algn="ctr">
+                      <a:solidFill>
+                        <a:srgbClr val="2E2E2E"/>
+                      </a:solidFill>
+                      <a:prstDash val="solid"/>
+                    </a:lnL>
+                    <a:lnR w="9525" cap="flat" cmpd="sng" algn="ctr">
+                      <a:solidFill>
+                        <a:srgbClr val="2E2E2E"/>
+                      </a:solidFill>
+                      <a:prstDash val="solid"/>
+                    </a:lnR>
+                    <a:lnT w="9525" cap="flat" cmpd="sng" algn="ctr">
+                      <a:solidFill>
+                        <a:srgbClr val="2E2E2E"/>
+                      </a:solidFill>
+                      <a:prstDash val="solid"/>
+                    </a:lnT>
+                    <a:lnB w="9525" cap="flat" cmpd="sng" algn="ctr">
+                      <a:solidFill>
+                        <a:srgbClr val="2E2E2E"/>
+                      </a:solidFill>
+                      <a:prstDash val="solid"/>
+                    </a:lnB>
+                  </a:tcPr>
+                </a:tc>
+              </a:tr>
+              <a:tr h="384048">
+                <a:tc>
+                  <a:txBody>
+                    <a:bodyPr/>
+                    <a:lstStyle/>
+                    <a:p>
+                      <a:pPr>
+                        <a:defRPr sz="1300" b="1">
+                          <a:solidFill>
+                            <a:srgbClr val="F5F5F5"/>
+                          </a:solidFill>
+                          <a:latin typeface="Segoe UI"/>
+                        </a:defRPr>
+                      </a:pPr>
+                      <a:r>
+                        <a:t>GNN + novidade w = 0,5 fixo</a:t>
+                      </a:r>
+                    </a:p>
+                  </a:txBody>
+                  <a:tcPr>
+                    <a:solidFill>
+                      <a:srgbClr val="0E0E0E"/>
+                    </a:solidFill>
+                    <a:lnL w="9525" cap="flat" cmpd="sng" algn="ctr">
+                      <a:solidFill>
+                        <a:srgbClr val="2E2E2E"/>
+                      </a:solidFill>
+                      <a:prstDash val="solid"/>
+                    </a:lnL>
+                    <a:lnR w="9525" cap="flat" cmpd="sng" algn="ctr">
+                      <a:solidFill>
+                        <a:srgbClr val="2E2E2E"/>
+                      </a:solidFill>
+                      <a:prstDash val="solid"/>
+                    </a:lnR>
+                    <a:lnT w="9525" cap="flat" cmpd="sng" algn="ctr">
+                      <a:solidFill>
+                        <a:srgbClr val="2E2E2E"/>
+                      </a:solidFill>
+                      <a:prstDash val="solid"/>
+                    </a:lnT>
+                    <a:lnB w="9525" cap="flat" cmpd="sng" algn="ctr">
+                      <a:solidFill>
+                        <a:srgbClr val="2E2E2E"/>
+                      </a:solidFill>
+                      <a:prstDash val="solid"/>
+                    </a:lnB>
+                  </a:tcPr>
+                </a:tc>
+                <a:tc>
+                  <a:txBody>
+                    <a:bodyPr/>
+                    <a:lstStyle/>
+                    <a:p>
+                      <a:pPr>
+                        <a:defRPr sz="1300" b="0">
+                          <a:solidFill>
+                            <a:srgbClr val="E2E2E2"/>
+                          </a:solidFill>
+                          <a:latin typeface="Consolas"/>
+                        </a:defRPr>
+                      </a:pPr>
+                      <a:r>
+                        <a:t>7/7 · 69,8 ± 5,9</a:t>
+                      </a:r>
+                    </a:p>
+                  </a:txBody>
+                  <a:tcPr>
+                    <a:solidFill>
+                      <a:srgbClr val="0E0E0E"/>
+                    </a:solidFill>
+                    <a:lnL w="9525" cap="flat" cmpd="sng" algn="ctr">
+                      <a:solidFill>
+                        <a:srgbClr val="2E2E2E"/>
+                      </a:solidFill>
+                      <a:prstDash val="solid"/>
+                    </a:lnL>
+                    <a:lnR w="9525" cap="flat" cmpd="sng" algn="ctr">
+                      <a:solidFill>
+                        <a:srgbClr val="2E2E2E"/>
+                      </a:solidFill>
+                      <a:prstDash val="solid"/>
+                    </a:lnR>
+                    <a:lnT w="9525" cap="flat" cmpd="sng" algn="ctr">
+                      <a:solidFill>
+                        <a:srgbClr val="2E2E2E"/>
+                      </a:solidFill>
+                      <a:prstDash val="solid"/>
+                    </a:lnT>
+                    <a:lnB w="9525" cap="flat" cmpd="sng" algn="ctr">
+                      <a:solidFill>
+                        <a:srgbClr val="2E2E2E"/>
+                      </a:solidFill>
+                      <a:prstDash val="solid"/>
+                    </a:lnB>
+                  </a:tcPr>
+                </a:tc>
+                <a:tc>
+                  <a:txBody>
+                    <a:bodyPr/>
+                    <a:lstStyle/>
+                    <a:p>
+                      <a:pPr>
+                        <a:defRPr sz="1300" b="0">
+                          <a:solidFill>
+                            <a:srgbClr val="E2E2E2"/>
+                          </a:solidFill>
+                          <a:latin typeface="Segoe UI"/>
+                        </a:defRPr>
+                      </a:pPr>
+                      <a:r>
+                        <a:t>—</a:t>
+                      </a:r>
+                    </a:p>
+                  </a:txBody>
+                  <a:tcPr>
+                    <a:solidFill>
+                      <a:srgbClr val="0E0E0E"/>
+                    </a:solidFill>
+                    <a:lnL w="9525" cap="flat" cmpd="sng" algn="ctr">
+                      <a:solidFill>
+                        <a:srgbClr val="2E2E2E"/>
+                      </a:solidFill>
+                      <a:prstDash val="solid"/>
+                    </a:lnL>
+                    <a:lnR w="9525" cap="flat" cmpd="sng" algn="ctr">
+                      <a:solidFill>
+                        <a:srgbClr val="2E2E2E"/>
+                      </a:solidFill>
+                      <a:prstDash val="solid"/>
+                    </a:lnR>
+                    <a:lnT w="9525" cap="flat" cmpd="sng" algn="ctr">
+                      <a:solidFill>
+                        <a:srgbClr val="2E2E2E"/>
+                      </a:solidFill>
+                      <a:prstDash val="solid"/>
+                    </a:lnT>
+                    <a:lnB w="9525" cap="flat" cmpd="sng" algn="ctr">
+                      <a:solidFill>
+                        <a:srgbClr val="2E2E2E"/>
+                      </a:solidFill>
+                      <a:prstDash val="solid"/>
+                    </a:lnB>
+                  </a:tcPr>
+                </a:tc>
+                <a:tc>
+                  <a:txBody>
+                    <a:bodyPr/>
+                    <a:lstStyle/>
+                    <a:p>
+                      <a:pPr>
+                        <a:defRPr sz="1300" b="0">
+                          <a:solidFill>
+                            <a:srgbClr val="E2E2E2"/>
+                          </a:solidFill>
+                          <a:latin typeface="Segoe UI"/>
+                        </a:defRPr>
+                      </a:pPr>
+                      <a:r>
+                        <a:t>63,0 ± 21,9  (δ = −1,00)</a:t>
+                      </a:r>
+                    </a:p>
+                  </a:txBody>
+                  <a:tcPr>
+                    <a:solidFill>
+                      <a:srgbClr val="0E0E0E"/>
+                    </a:solidFill>
+                    <a:lnL w="9525" cap="flat" cmpd="sng" algn="ctr">
+                      <a:solidFill>
+                        <a:srgbClr val="2E2E2E"/>
+                      </a:solidFill>
+                      <a:prstDash val="solid"/>
+                    </a:lnL>
+                    <a:lnR w="9525" cap="flat" cmpd="sng" algn="ctr">
+                      <a:solidFill>
+                        <a:srgbClr val="2E2E2E"/>
+                      </a:solidFill>
+                      <a:prstDash val="solid"/>
+                    </a:lnR>
+                    <a:lnT w="9525" cap="flat" cmpd="sng" algn="ctr">
+                      <a:solidFill>
+                        <a:srgbClr val="2E2E2E"/>
+                      </a:solidFill>
+                      <a:prstDash val="solid"/>
+                    </a:lnT>
+                    <a:lnB w="9525" cap="flat" cmpd="sng" algn="ctr">
+                      <a:solidFill>
+                        <a:srgbClr val="2E2E2E"/>
+                      </a:solidFill>
+                      <a:prstDash val="solid"/>
+                    </a:lnB>
+                  </a:tcPr>
+                </a:tc>
+              </a:tr>
+              <a:tr h="384048">
+                <a:tc>
+                  <a:txBody>
+                    <a:bodyPr/>
+                    <a:lstStyle/>
+                    <a:p>
+                      <a:pPr>
+                        <a:defRPr sz="1300" b="1">
+                          <a:solidFill>
+                            <a:srgbClr val="F5F5F5"/>
+                          </a:solidFill>
+                          <a:latin typeface="Segoe UI"/>
+                        </a:defRPr>
+                      </a:pPr>
+                      <a:r>
+                        <a:t>GNN objetivo puro</a:t>
+                      </a:r>
+                    </a:p>
+                  </a:txBody>
+                  <a:tcPr>
+                    <a:solidFill>
+                      <a:srgbClr val="161616"/>
+                    </a:solidFill>
+                    <a:lnL w="9525" cap="flat" cmpd="sng" algn="ctr">
+                      <a:solidFill>
+                        <a:srgbClr val="2E2E2E"/>
+                      </a:solidFill>
+                      <a:prstDash val="solid"/>
+                    </a:lnL>
+                    <a:lnR w="9525" cap="flat" cmpd="sng" algn="ctr">
+                      <a:solidFill>
+                        <a:srgbClr val="2E2E2E"/>
+                      </a:solidFill>
+                      <a:prstDash val="solid"/>
+                    </a:lnR>
+                    <a:lnT w="9525" cap="flat" cmpd="sng" algn="ctr">
+                      <a:solidFill>
+                        <a:srgbClr val="2E2E2E"/>
+                      </a:solidFill>
+                      <a:prstDash val="solid"/>
+                    </a:lnT>
+                    <a:lnB w="9525" cap="flat" cmpd="sng" algn="ctr">
+                      <a:solidFill>
+                        <a:srgbClr val="2E2E2E"/>
+                      </a:solidFill>
+                      <a:prstDash val="solid"/>
+                    </a:lnB>
+                  </a:tcPr>
+                </a:tc>
+                <a:tc>
+                  <a:txBody>
+                    <a:bodyPr/>
+                    <a:lstStyle/>
+                    <a:p>
+                      <a:pPr>
+                        <a:defRPr sz="1300" b="0">
+                          <a:solidFill>
+                            <a:srgbClr val="E2E2E2"/>
+                          </a:solidFill>
+                          <a:latin typeface="Consolas"/>
+                        </a:defRPr>
+                      </a:pPr>
+                      <a:r>
+                        <a:t>3/7 · 24,5 ± 32,6</a:t>
+                      </a:r>
+                    </a:p>
+                  </a:txBody>
+                  <a:tcPr>
+                    <a:solidFill>
+                      <a:srgbClr val="161616"/>
+                    </a:solidFill>
+                    <a:lnL w="9525" cap="flat" cmpd="sng" algn="ctr">
+                      <a:solidFill>
+                        <a:srgbClr val="2E2E2E"/>
+                      </a:solidFill>
+                      <a:prstDash val="solid"/>
+                    </a:lnL>
+                    <a:lnR w="9525" cap="flat" cmpd="sng" algn="ctr">
+                      <a:solidFill>
+                        <a:srgbClr val="2E2E2E"/>
+                      </a:solidFill>
+                      <a:prstDash val="solid"/>
+                    </a:lnR>
+                    <a:lnT w="9525" cap="flat" cmpd="sng" algn="ctr">
+                      <a:solidFill>
+                        <a:srgbClr val="2E2E2E"/>
+                      </a:solidFill>
+                      <a:prstDash val="solid"/>
+                    </a:lnT>
+                    <a:lnB w="9525" cap="flat" cmpd="sng" algn="ctr">
+                      <a:solidFill>
+                        <a:srgbClr val="2E2E2E"/>
+                      </a:solidFill>
+                      <a:prstDash val="solid"/>
+                    </a:lnB>
+                  </a:tcPr>
+                </a:tc>
+                <a:tc>
+                  <a:txBody>
+                    <a:bodyPr/>
+                    <a:lstStyle/>
+                    <a:p>
+                      <a:pPr>
+                        <a:defRPr sz="1300" b="0">
+                          <a:solidFill>
+                            <a:srgbClr val="E2E2E2"/>
+                          </a:solidFill>
+                          <a:latin typeface="Consolas"/>
+                        </a:defRPr>
+                      </a:pPr>
+                      <a:r>
+                        <a:t>15/28 · 32,5</a:t>
+                      </a:r>
+                    </a:p>
+                  </a:txBody>
+                  <a:tcPr>
+                    <a:solidFill>
+                      <a:srgbClr val="161616"/>
+                    </a:solidFill>
+                    <a:lnL w="9525" cap="flat" cmpd="sng" algn="ctr">
+                      <a:solidFill>
+                        <a:srgbClr val="2E2E2E"/>
+                      </a:solidFill>
+                      <a:prstDash val="solid"/>
+                    </a:lnL>
+                    <a:lnR w="9525" cap="flat" cmpd="sng" algn="ctr">
+                      <a:solidFill>
+                        <a:srgbClr val="2E2E2E"/>
+                      </a:solidFill>
+                      <a:prstDash val="solid"/>
+                    </a:lnR>
+                    <a:lnT w="9525" cap="flat" cmpd="sng" algn="ctr">
+                      <a:solidFill>
+                        <a:srgbClr val="2E2E2E"/>
+                      </a:solidFill>
+                      <a:prstDash val="solid"/>
+                    </a:lnT>
+                    <a:lnB w="9525" cap="flat" cmpd="sng" algn="ctr">
+                      <a:solidFill>
+                        <a:srgbClr val="2E2E2E"/>
+                      </a:solidFill>
+                      <a:prstDash val="solid"/>
+                    </a:lnB>
+                  </a:tcPr>
+                </a:tc>
+                <a:tc>
+                  <a:txBody>
+                    <a:bodyPr/>
+                    <a:lstStyle/>
+                    <a:p>
+                      <a:pPr>
+                        <a:defRPr sz="1300" b="0">
+                          <a:solidFill>
+                            <a:srgbClr val="E2E2E2"/>
+                          </a:solidFill>
+                          <a:latin typeface="Consolas"/>
+                        </a:defRPr>
+                      </a:pPr>
+                      <a:r>
+                        <a:t>86,7 ± 2,0</a:t>
+                      </a:r>
+                    </a:p>
+                  </a:txBody>
+                  <a:tcPr>
+                    <a:solidFill>
+                      <a:srgbClr val="161616"/>
+                    </a:solidFill>
+                    <a:lnL w="9525" cap="flat" cmpd="sng" algn="ctr">
+                      <a:solidFill>
+                        <a:srgbClr val="2E2E2E"/>
+                      </a:solidFill>
+                      <a:prstDash val="solid"/>
+                    </a:lnL>
+                    <a:lnR w="9525" cap="flat" cmpd="sng" algn="ctr">
+                      <a:solidFill>
+                        <a:srgbClr val="2E2E2E"/>
+                      </a:solidFill>
+                      <a:prstDash val="solid"/>
+                    </a:lnR>
+                    <a:lnT w="9525" cap="flat" cmpd="sng" algn="ctr">
+                      <a:solidFill>
+                        <a:srgbClr val="2E2E2E"/>
+                      </a:solidFill>
+                      <a:prstDash val="solid"/>
+                    </a:lnT>
+                    <a:lnB w="9525" cap="flat" cmpd="sng" algn="ctr">
+                      <a:solidFill>
+                        <a:srgbClr val="2E2E2E"/>
+                      </a:solidFill>
+                      <a:prstDash val="solid"/>
+                    </a:lnB>
+                  </a:tcPr>
+                </a:tc>
+              </a:tr>
+              <a:tr h="384048">
+                <a:tc>
+                  <a:txBody>
+                    <a:bodyPr/>
+                    <a:lstStyle/>
+                    <a:p>
+                      <a:pPr>
+                        <a:defRPr sz="1300" b="1">
+                          <a:solidFill>
+                            <a:srgbClr val="F5F5F5"/>
+                          </a:solidFill>
+                          <a:latin typeface="Segoe UI"/>
+                        </a:defRPr>
+                      </a:pPr>
+                      <a:r>
+                        <a:t>PPO</a:t>
+                      </a:r>
+                    </a:p>
+                  </a:txBody>
+                  <a:tcPr>
+                    <a:solidFill>
+                      <a:srgbClr val="0E0E0E"/>
+                    </a:solidFill>
+                    <a:lnL w="9525" cap="flat" cmpd="sng" algn="ctr">
+                      <a:solidFill>
+                        <a:srgbClr val="2E2E2E"/>
+                      </a:solidFill>
+                      <a:prstDash val="solid"/>
+                    </a:lnL>
+                    <a:lnR w="9525" cap="flat" cmpd="sng" algn="ctr">
+                      <a:solidFill>
+                        <a:srgbClr val="2E2E2E"/>
+                      </a:solidFill>
+                      <a:prstDash val="solid"/>
+                    </a:lnR>
+                    <a:lnT w="9525" cap="flat" cmpd="sng" algn="ctr">
+                      <a:solidFill>
+                        <a:srgbClr val="2E2E2E"/>
+                      </a:solidFill>
+                      <a:prstDash val="solid"/>
+                    </a:lnT>
+                    <a:lnB w="9525" cap="flat" cmpd="sng" algn="ctr">
+                      <a:solidFill>
+                        <a:srgbClr val="2E2E2E"/>
+                      </a:solidFill>
+                      <a:prstDash val="solid"/>
+                    </a:lnB>
+                  </a:tcPr>
+                </a:tc>
+                <a:tc>
+                  <a:txBody>
+                    <a:bodyPr/>
+                    <a:lstStyle/>
+                    <a:p>
+                      <a:pPr>
+                        <a:defRPr sz="1300" b="0">
+                          <a:solidFill>
+                            <a:srgbClr val="E2E2E2"/>
+                          </a:solidFill>
+                          <a:latin typeface="Consolas"/>
+                        </a:defRPr>
+                      </a:pPr>
+                      <a:r>
+                        <a:t>4/7 · 39,6</a:t>
+                      </a:r>
+                    </a:p>
+                  </a:txBody>
+                  <a:tcPr>
+                    <a:solidFill>
+                      <a:srgbClr val="0E0E0E"/>
+                    </a:solidFill>
+                    <a:lnL w="9525" cap="flat" cmpd="sng" algn="ctr">
+                      <a:solidFill>
+                        <a:srgbClr val="2E2E2E"/>
+                      </a:solidFill>
+                      <a:prstDash val="solid"/>
+                    </a:lnL>
+                    <a:lnR w="9525" cap="flat" cmpd="sng" algn="ctr">
+                      <a:solidFill>
+                        <a:srgbClr val="2E2E2E"/>
+                      </a:solidFill>
+                      <a:prstDash val="solid"/>
+                    </a:lnR>
+                    <a:lnT w="9525" cap="flat" cmpd="sng" algn="ctr">
+                      <a:solidFill>
+                        <a:srgbClr val="2E2E2E"/>
+                      </a:solidFill>
+                      <a:prstDash val="solid"/>
+                    </a:lnT>
+                    <a:lnB w="9525" cap="flat" cmpd="sng" algn="ctr">
+                      <a:solidFill>
+                        <a:srgbClr val="2E2E2E"/>
+                      </a:solidFill>
+                      <a:prstDash val="solid"/>
+                    </a:lnB>
+                  </a:tcPr>
+                </a:tc>
+                <a:tc>
+                  <a:txBody>
+                    <a:bodyPr/>
+                    <a:lstStyle/>
+                    <a:p>
+                      <a:pPr>
+                        <a:defRPr sz="1300" b="0">
+                          <a:solidFill>
+                            <a:srgbClr val="E2E2E2"/>
+                          </a:solidFill>
+                          <a:latin typeface="Consolas"/>
+                        </a:defRPr>
+                      </a:pPr>
+                      <a:r>
+                        <a:t>14/28 · 35,6</a:t>
+                      </a:r>
+                    </a:p>
+                  </a:txBody>
+                  <a:tcPr>
+                    <a:solidFill>
+                      <a:srgbClr val="0E0E0E"/>
+                    </a:solidFill>
+                    <a:lnL w="9525" cap="flat" cmpd="sng" algn="ctr">
+                      <a:solidFill>
+                        <a:srgbClr val="2E2E2E"/>
+                      </a:solidFill>
+                      <a:prstDash val="solid"/>
+                    </a:lnL>
+                    <a:lnR w="9525" cap="flat" cmpd="sng" algn="ctr">
+                      <a:solidFill>
+                        <a:srgbClr val="2E2E2E"/>
+                      </a:solidFill>
+                      <a:prstDash val="solid"/>
+                    </a:lnR>
+                    <a:lnT w="9525" cap="flat" cmpd="sng" algn="ctr">
+                      <a:solidFill>
+                        <a:srgbClr val="2E2E2E"/>
+                      </a:solidFill>
+                      <a:prstDash val="solid"/>
+                    </a:lnT>
+                    <a:lnB w="9525" cap="flat" cmpd="sng" algn="ctr">
+                      <a:solidFill>
+                        <a:srgbClr val="2E2E2E"/>
+                      </a:solidFill>
+                      <a:prstDash val="solid"/>
+                    </a:lnB>
+                  </a:tcPr>
+                </a:tc>
+                <a:tc>
+                  <a:txBody>
+                    <a:bodyPr/>
+                    <a:lstStyle/>
+                    <a:p>
+                      <a:pPr>
+                        <a:defRPr sz="1300" b="0">
+                          <a:solidFill>
+                            <a:srgbClr val="E2E2E2"/>
+                          </a:solidFill>
+                          <a:latin typeface="Consolas"/>
+                        </a:defRPr>
+                      </a:pPr>
+                      <a:r>
+                        <a:t>85,3</a:t>
+                      </a:r>
+                    </a:p>
+                  </a:txBody>
+                  <a:tcPr>
+                    <a:solidFill>
+                      <a:srgbClr val="0E0E0E"/>
+                    </a:solidFill>
+                    <a:lnL w="9525" cap="flat" cmpd="sng" algn="ctr">
+                      <a:solidFill>
+                        <a:srgbClr val="2E2E2E"/>
+                      </a:solidFill>
+                      <a:prstDash val="solid"/>
+                    </a:lnL>
+                    <a:lnR w="9525" cap="flat" cmpd="sng" algn="ctr">
+                      <a:solidFill>
+                        <a:srgbClr val="2E2E2E"/>
+                      </a:solidFill>
+                      <a:prstDash val="solid"/>
+                    </a:lnR>
+                    <a:lnT w="9525" cap="flat" cmpd="sng" algn="ctr">
+                      <a:solidFill>
+                        <a:srgbClr val="2E2E2E"/>
+                      </a:solidFill>
+                      <a:prstDash val="solid"/>
+                    </a:lnT>
+                    <a:lnB w="9525" cap="flat" cmpd="sng" algn="ctr">
+                      <a:solidFill>
+                        <a:srgbClr val="2E2E2E"/>
+                      </a:solidFill>
+                      <a:prstDash val="solid"/>
+                    </a:lnB>
+                  </a:tcPr>
+                </a:tc>
+              </a:tr>
+              <a:tr h="384048">
+                <a:tc>
+                  <a:txBody>
+                    <a:bodyPr/>
+                    <a:lstStyle/>
+                    <a:p>
+                      <a:pPr>
+                        <a:defRPr sz="1300" b="1">
+                          <a:solidFill>
+                            <a:srgbClr val="F5F5F5"/>
+                          </a:solidFill>
+                          <a:latin typeface="Segoe UI"/>
+                        </a:defRPr>
+                      </a:pPr>
+                      <a:r>
+                        <a:t>SAC</a:t>
+                      </a:r>
+                    </a:p>
+                  </a:txBody>
+                  <a:tcPr>
+                    <a:solidFill>
+                      <a:srgbClr val="161616"/>
+                    </a:solidFill>
+                    <a:lnL w="9525" cap="flat" cmpd="sng" algn="ctr">
+                      <a:solidFill>
+                        <a:srgbClr val="2E2E2E"/>
+                      </a:solidFill>
+                      <a:prstDash val="solid"/>
+                    </a:lnL>
+                    <a:lnR w="9525" cap="flat" cmpd="sng" algn="ctr">
+                      <a:solidFill>
+                        <a:srgbClr val="2E2E2E"/>
+                      </a:solidFill>
+                      <a:prstDash val="solid"/>
+                    </a:lnR>
+                    <a:lnT w="9525" cap="flat" cmpd="sng" algn="ctr">
+                      <a:solidFill>
+                        <a:srgbClr val="2E2E2E"/>
+                      </a:solidFill>
+                      <a:prstDash val="solid"/>
+                    </a:lnT>
+                    <a:lnB w="9525" cap="flat" cmpd="sng" algn="ctr">
+                      <a:solidFill>
+                        <a:srgbClr val="2E2E2E"/>
+                      </a:solidFill>
+                      <a:prstDash val="solid"/>
+                    </a:lnB>
+                  </a:tcPr>
+                </a:tc>
+                <a:tc>
+                  <a:txBody>
+                    <a:bodyPr/>
+                    <a:lstStyle/>
+                    <a:p>
+                      <a:pPr>
+                        <a:defRPr sz="1300" b="0">
+                          <a:solidFill>
+                            <a:srgbClr val="E2E2E2"/>
+                          </a:solidFill>
+                          <a:latin typeface="Consolas"/>
+                        </a:defRPr>
+                      </a:pPr>
+                      <a:r>
+                        <a:t>2/7 · 9,0</a:t>
+                      </a:r>
+                    </a:p>
+                  </a:txBody>
+                  <a:tcPr>
+                    <a:solidFill>
+                      <a:srgbClr val="161616"/>
+                    </a:solidFill>
+                    <a:lnL w="9525" cap="flat" cmpd="sng" algn="ctr">
+                      <a:solidFill>
+                        <a:srgbClr val="2E2E2E"/>
+                      </a:solidFill>
+                      <a:prstDash val="solid"/>
+                    </a:lnL>
+                    <a:lnR w="9525" cap="flat" cmpd="sng" algn="ctr">
+                      <a:solidFill>
+                        <a:srgbClr val="2E2E2E"/>
+                      </a:solidFill>
+                      <a:prstDash val="solid"/>
+                    </a:lnR>
+                    <a:lnT w="9525" cap="flat" cmpd="sng" algn="ctr">
+                      <a:solidFill>
+                        <a:srgbClr val="2E2E2E"/>
+                      </a:solidFill>
+                      <a:prstDash val="solid"/>
+                    </a:lnT>
+                    <a:lnB w="9525" cap="flat" cmpd="sng" algn="ctr">
+                      <a:solidFill>
+                        <a:srgbClr val="2E2E2E"/>
+                      </a:solidFill>
+                      <a:prstDash val="solid"/>
+                    </a:lnB>
+                  </a:tcPr>
+                </a:tc>
+                <a:tc>
+                  <a:txBody>
+                    <a:bodyPr/>
+                    <a:lstStyle/>
+                    <a:p>
+                      <a:pPr>
+                        <a:defRPr sz="1300" b="0">
+                          <a:solidFill>
+                            <a:srgbClr val="E2E2E2"/>
+                          </a:solidFill>
+                          <a:latin typeface="Consolas"/>
+                        </a:defRPr>
+                      </a:pPr>
+                      <a:r>
+                        <a:t>14/28 · 10,1</a:t>
+                      </a:r>
+                    </a:p>
+                  </a:txBody>
+                  <a:tcPr>
+                    <a:solidFill>
+                      <a:srgbClr val="161616"/>
+                    </a:solidFill>
+                    <a:lnL w="9525" cap="flat" cmpd="sng" algn="ctr">
+                      <a:solidFill>
+                        <a:srgbClr val="2E2E2E"/>
+                      </a:solidFill>
+                      <a:prstDash val="solid"/>
+                    </a:lnL>
+                    <a:lnR w="9525" cap="flat" cmpd="sng" algn="ctr">
+                      <a:solidFill>
+                        <a:srgbClr val="2E2E2E"/>
+                      </a:solidFill>
+                      <a:prstDash val="solid"/>
+                    </a:lnR>
+                    <a:lnT w="9525" cap="flat" cmpd="sng" algn="ctr">
+                      <a:solidFill>
+                        <a:srgbClr val="2E2E2E"/>
+                      </a:solidFill>
+                      <a:prstDash val="solid"/>
+                    </a:lnT>
+                    <a:lnB w="9525" cap="flat" cmpd="sng" algn="ctr">
+                      <a:solidFill>
+                        <a:srgbClr val="2E2E2E"/>
+                      </a:solidFill>
+                      <a:prstDash val="solid"/>
+                    </a:lnB>
+                  </a:tcPr>
+                </a:tc>
+                <a:tc>
+                  <a:txBody>
+                    <a:bodyPr/>
+                    <a:lstStyle/>
+                    <a:p>
+                      <a:pPr>
+                        <a:defRPr sz="1300" b="0">
+                          <a:solidFill>
+                            <a:srgbClr val="E2E2E2"/>
+                          </a:solidFill>
+                          <a:latin typeface="Consolas"/>
+                        </a:defRPr>
+                      </a:pPr>
+                      <a:r>
+                        <a:t>68,6</a:t>
+                      </a:r>
+                    </a:p>
+                  </a:txBody>
+                  <a:tcPr>
+                    <a:solidFill>
+                      <a:srgbClr val="161616"/>
+                    </a:solidFill>
+                    <a:lnL w="9525" cap="flat" cmpd="sng" algn="ctr">
+                      <a:solidFill>
+                        <a:srgbClr val="2E2E2E"/>
+                      </a:solidFill>
+                      <a:prstDash val="solid"/>
+                    </a:lnL>
+                    <a:lnR w="9525" cap="flat" cmpd="sng" algn="ctr">
+                      <a:solidFill>
+                        <a:srgbClr val="2E2E2E"/>
+                      </a:solidFill>
+                      <a:prstDash val="solid"/>
+                    </a:lnR>
+                    <a:lnT w="9525" cap="flat" cmpd="sng" algn="ctr">
+                      <a:solidFill>
+                        <a:srgbClr val="2E2E2E"/>
+                      </a:solidFill>
+                      <a:prstDash val="solid"/>
+                    </a:lnT>
+                    <a:lnB w="9525" cap="flat" cmpd="sng" algn="ctr">
+                      <a:solidFill>
+                        <a:srgbClr val="2E2E2E"/>
+                      </a:solidFill>
+                      <a:prstDash val="solid"/>
+                    </a:lnB>
+                  </a:tcPr>
+                </a:tc>
+              </a:tr>
+            </a:tbl>
+          </a:graphicData>
+        </a:graphic>
+      </p:graphicFrame>
+      <p:cxnSp>
+        <p:nvCxnSpPr>
+          <p:cNvPr id="9" name="Connector 8"/>
+          <p:cNvCxnSpPr/>
+          <p:nvPr/>
+        </p:nvCxnSpPr>
+        <p:spPr>
+          <a:xfrm>
+            <a:off x="548640" y="6355080"/>
+            <a:ext cx="11094415" cy="0"/>
+          </a:xfrm>
+          <a:prstGeom prst="line">
+            <a:avLst/>
+          </a:prstGeom>
+          <a:ln w="9525">
+            <a:solidFill>
+              <a:srgbClr val="2E2E2E"/>
+            </a:solidFill>
+          </a:ln>
+        </p:spPr>
+        <p:style>
+          <a:lnRef idx="2">
+            <a:schemeClr val="accent1"/>
+          </a:lnRef>
+          <a:fillRef idx="0">
+            <a:schemeClr val="accent1"/>
+          </a:fillRef>
+          <a:effectRef idx="1">
+            <a:schemeClr val="accent1"/>
+          </a:effectRef>
+          <a:fontRef idx="minor">
+            <a:schemeClr val="tx1"/>
+          </a:fontRef>
+        </p:style>
+      </p:cxnSp>
+      <p:sp>
+        <p:nvSpPr>
+          <p:cNvPr id="10" name="TextBox 9"/>
+          <p:cNvSpPr txBox="1"/>
+          <p:nvPr/>
+        </p:nvSpPr>
+        <p:spPr>
+          <a:xfrm>
+            <a:off x="548640" y="6400800"/>
+            <a:ext cx="8229600" cy="365760"/>
+          </a:xfrm>
+          <a:prstGeom prst="rect">
+            <a:avLst/>
+          </a:prstGeom>
+          <a:noFill/>
+        </p:spPr>
+        <p:txBody>
+          <a:bodyPr wrap="square" anchor="t">
+            <a:spAutoFit/>
+          </a:bodyPr>
+          <a:lstStyle/>
+          <a:p>
+            <a:pPr algn="l">
+              <a:spcAft>
+                <a:spcPts val="600"/>
+              </a:spcAft>
+            </a:pPr>
+            <a:r>
+              <a:rPr sz="1000" b="0">
+                <a:solidFill>
+                  <a:srgbClr val="9A9A9A"/>
+                </a:solidFill>
+                <a:latin typeface="Segoe UI"/>
+              </a:rPr>
+              <a:t>Slide de reserva · não faz parte da apresentação</a:t>
+            </a:r>
+          </a:p>
+        </p:txBody>
+      </p:sp>
+      <p:sp>
+        <p:nvSpPr>
+          <p:cNvPr id="11" name="TextBox 10"/>
+          <p:cNvSpPr txBox="1"/>
+          <p:nvPr/>
+        </p:nvSpPr>
+        <p:spPr>
+          <a:xfrm>
+            <a:off x="10728655" y="6400800"/>
+            <a:ext cx="914400" cy="365760"/>
+          </a:xfrm>
+          <a:prstGeom prst="rect">
+            <a:avLst/>
+          </a:prstGeom>
+          <a:noFill/>
+        </p:spPr>
+        <p:txBody>
+          <a:bodyPr wrap="square" anchor="t">
+            <a:spAutoFit/>
+          </a:bodyPr>
+          <a:lstStyle/>
+          <a:p>
+            <a:pPr algn="r">
+              <a:spcAft>
+                <a:spcPts val="600"/>
+              </a:spcAft>
+            </a:pPr>
+            <a:r>
+              <a:rPr sz="1000" b="0">
+                <a:solidFill>
+                  <a:srgbClr val="9A9A9A"/>
+                </a:solidFill>
+                <a:latin typeface="Consolas"/>
+              </a:rPr>
+              <a:t>A2</a:t>
+            </a:r>
+          </a:p>
+        </p:txBody>
+      </p:sp>
+    </p:spTree>
+  </p:cSld>
+  <p:clrMapOvr>
+    <a:masterClrMapping/>
+  </p:clrMapOvr>
+</p:sld>
+</file>
+
+<file path=ppt/slides/slide22.xml><?xml version="1.0" encoding="utf-8"?>
+<p:sld xmlns:a="http://schemas.openxmlformats.org/drawingml/2006/main" xmlns:p="http://schemas.openxmlformats.org/presentationml/2006/main" xmlns:r="http://schemas.openxmlformats.org/officeDocument/2006/relationships">
+  <p:cSld>
+    <p:spTree>
+      <p:nvGrpSpPr>
+        <p:cNvPr id="1" name=""/>
+        <p:cNvGrpSpPr/>
+        <p:nvPr/>
+      </p:nvGrpSpPr>
+      <p:grpSpPr/>
+      <p:sp>
+        <p:nvSpPr>
+          <p:cNvPr id="2" name="Rectangle 1"/>
+          <p:cNvSpPr/>
+          <p:nvPr/>
+        </p:nvSpPr>
+        <p:spPr>
+          <a:xfrm>
+            <a:off x="0" y="0"/>
+            <a:ext cx="12191695" cy="6858000"/>
+          </a:xfrm>
+          <a:prstGeom prst="rect">
+            <a:avLst/>
+          </a:prstGeom>
+          <a:solidFill>
+            <a:srgbClr val="050505"/>
+          </a:solidFill>
+          <a:ln>
+            <a:noFill/>
+          </a:ln>
+          <a:effectLst/>
+        </p:spPr>
+        <p:style>
+          <a:lnRef idx="1">
+            <a:schemeClr val="accent1"/>
+          </a:lnRef>
+          <a:fillRef idx="3">
+            <a:schemeClr val="accent1"/>
+          </a:fillRef>
+          <a:effectRef idx="2">
+            <a:schemeClr val="accent1"/>
+          </a:effectRef>
+          <a:fontRef idx="minor">
+            <a:schemeClr val="lt1"/>
+          </a:fontRef>
+        </p:style>
+        <p:txBody>
+          <a:bodyPr rtlCol="0" anchor="ctr"/>
+          <a:lstStyle/>
+          <a:p>
+            <a:pPr algn="ctr"/>
+          </a:p>
+        </p:txBody>
+      </p:sp>
+      <p:sp>
+        <p:nvSpPr>
+          <p:cNvPr id="3" name="TextBox 2"/>
+          <p:cNvSpPr txBox="1"/>
+          <p:nvPr/>
+        </p:nvSpPr>
+        <p:spPr>
+          <a:xfrm>
+            <a:off x="548640" y="292608"/>
+            <a:ext cx="11094415" cy="777240"/>
+          </a:xfrm>
+          <a:prstGeom prst="rect">
+            <a:avLst/>
+          </a:prstGeom>
+          <a:noFill/>
+        </p:spPr>
+        <p:txBody>
+          <a:bodyPr wrap="square" anchor="t">
+            <a:spAutoFit/>
+          </a:bodyPr>
+          <a:lstStyle/>
+          <a:p>
+            <a:pPr algn="l">
+              <a:spcAft>
+                <a:spcPts val="600"/>
+              </a:spcAft>
+            </a:pPr>
+            <a:r>
+              <a:rPr sz="3000" b="1">
+                <a:solidFill>
+                  <a:srgbClr val="F5F5F5"/>
+                </a:solidFill>
+                <a:latin typeface="Segoe UI Semibold"/>
+              </a:rPr>
+              <a:t>Reserva · QI7, o mapa composto em números</a:t>
+            </a:r>
+          </a:p>
+        </p:txBody>
+      </p:sp>
+      <p:sp>
+        <p:nvSpPr>
+          <p:cNvPr id="4" name="TextBox 3"/>
+          <p:cNvSpPr txBox="1"/>
+          <p:nvPr/>
+        </p:nvSpPr>
+        <p:spPr>
+          <a:xfrm>
+            <a:off x="548640" y="932688"/>
+            <a:ext cx="11094415" cy="457200"/>
+          </a:xfrm>
+          <a:prstGeom prst="rect">
+            <a:avLst/>
+          </a:prstGeom>
+          <a:noFill/>
+        </p:spPr>
+        <p:txBody>
+          <a:bodyPr wrap="square" anchor="t">
+            <a:spAutoFit/>
+          </a:bodyPr>
+          <a:lstStyle/>
+          <a:p>
+            <a:pPr algn="l">
+              <a:spcAft>
+                <a:spcPts val="600"/>
+              </a:spcAft>
+            </a:pPr>
+            <a:r>
+              <a:rPr sz="1500" b="0">
+                <a:solidFill>
+                  <a:srgbClr val="9A9A9A"/>
+                </a:solidFill>
+                <a:latin typeface="Segoe UI"/>
+              </a:rPr>
+              <a:t>103 × 62 m · raio 60 m (contra 15 dos cenários isolados) · 128,8 m do spawn ao ninho · 106 obstáculos</a:t>
+            </a:r>
+          </a:p>
+        </p:txBody>
+      </p:sp>
+      <p:cxnSp>
+        <p:nvCxnSpPr>
+          <p:cNvPr id="5" name="Connector 4"/>
+          <p:cNvCxnSpPr/>
+          <p:nvPr/>
+        </p:nvCxnSpPr>
+        <p:spPr>
+          <a:xfrm>
+            <a:off x="548640" y="1371600"/>
+            <a:ext cx="11094415" cy="0"/>
+          </a:xfrm>
+          <a:prstGeom prst="line">
+            <a:avLst/>
+          </a:prstGeom>
+          <a:ln w="9525">
+            <a:solidFill>
+              <a:srgbClr val="2E2E2E"/>
+            </a:solidFill>
+          </a:ln>
+        </p:spPr>
+        <p:style>
+          <a:lnRef idx="2">
+            <a:schemeClr val="accent1"/>
+          </a:lnRef>
+          <a:fillRef idx="0">
+            <a:schemeClr val="accent1"/>
+          </a:fillRef>
+          <a:effectRef idx="1">
+            <a:schemeClr val="accent1"/>
+          </a:effectRef>
+          <a:fontRef idx="minor">
+            <a:schemeClr val="tx1"/>
+          </a:fontRef>
+        </p:style>
+      </p:cxnSp>
+      <p:cxnSp>
+        <p:nvCxnSpPr>
+          <p:cNvPr id="6" name="Connector 5"/>
+          <p:cNvCxnSpPr/>
+          <p:nvPr/>
+        </p:nvCxnSpPr>
+        <p:spPr>
+          <a:xfrm>
+            <a:off x="548640" y="1371600"/>
+            <a:ext cx="1005840" cy="0"/>
+          </a:xfrm>
+          <a:prstGeom prst="line">
+            <a:avLst/>
+          </a:prstGeom>
+          <a:ln w="31750">
+            <a:solidFill>
+              <a:srgbClr val="F5F5F5"/>
+            </a:solidFill>
+          </a:ln>
+        </p:spPr>
+        <p:style>
+          <a:lnRef idx="2">
+            <a:schemeClr val="accent1"/>
+          </a:lnRef>
+          <a:fillRef idx="0">
+            <a:schemeClr val="accent1"/>
+          </a:fillRef>
+          <a:effectRef idx="1">
+            <a:schemeClr val="accent1"/>
+          </a:effectRef>
+          <a:fontRef idx="minor">
+            <a:schemeClr val="tx1"/>
+          </a:fontRef>
+        </p:style>
+      </p:cxnSp>
+      <p:sp>
+        <p:nvSpPr>
+          <p:cNvPr id="7" name="TextBox 6"/>
+          <p:cNvSpPr txBox="1"/>
+          <p:nvPr/>
+        </p:nvSpPr>
+        <p:spPr>
+          <a:xfrm>
+            <a:off x="548640" y="1600200"/>
+            <a:ext cx="11094415" cy="548640"/>
+          </a:xfrm>
+          <a:prstGeom prst="rect">
+            <a:avLst/>
+          </a:prstGeom>
+          <a:noFill/>
+        </p:spPr>
+        <p:txBody>
+          <a:bodyPr wrap="square" anchor="t">
+            <a:spAutoFit/>
+          </a:bodyPr>
+          <a:lstStyle/>
+          <a:p>
+            <a:pPr algn="l">
+              <a:spcAft>
+                <a:spcPts val="600"/>
+              </a:spcAft>
+            </a:pPr>
+            <a:r>
+              <a:rPr sz="1400" b="0">
+                <a:solidFill>
+                  <a:srgbClr val="9A9A9A"/>
+                </a:solidFill>
+                <a:latin typeface="Segoe UI"/>
+              </a:rPr>
+              <a:t>As 4 condições de controlo excluem a escala da observação, os obstáculos e as features da porta como causa do zero. O que a composição degrada é a fiabilidade, não a magnitude.</a:t>
+            </a:r>
+          </a:p>
+        </p:txBody>
+      </p:sp>
+      <p:graphicFrame>
+        <p:nvGraphicFramePr>
+          <p:cNvPr id="8" name="Table 7"/>
+          <p:cNvGraphicFramePr>
+            <a:graphicFrameLocks noGrp="1"/>
+          </p:cNvGraphicFramePr>
+          <p:nvPr/>
+        </p:nvGraphicFramePr>
+        <p:xfrm>
+          <a:off x="548640" y="2414016"/>
+          <a:ext cx="11064240" cy="2304288"/>
+        </p:xfrm>
+        <a:graphic>
+          <a:graphicData uri="http://schemas.openxmlformats.org/drawingml/2006/table">
+            <a:tbl>
+              <a:tblPr>
+                <a:tableStyleId>{5C22544A-7EE6-4342-B048-85BDC9FD1C3A}</a:tableStyleId>
+              </a:tblPr>
+              <a:tblGrid>
+                <a:gridCol w="2103120"/>
+                <a:gridCol w="4114800"/>
+                <a:gridCol w="4846320"/>
+              </a:tblGrid>
+              <a:tr h="384048">
+                <a:tc>
+                  <a:txBody>
+                    <a:bodyPr/>
+                    <a:lstStyle/>
+                    <a:p>
+                      <a:pPr>
+                        <a:defRPr sz="1000" b="1">
+                          <a:solidFill>
+                            <a:srgbClr val="9A9A9A"/>
+                          </a:solidFill>
+                          <a:latin typeface="Consolas"/>
+                        </a:defRPr>
+                      </a:pPr>
+                      <a:r>
+                        <a:t>FASE</a:t>
+                      </a:r>
+                    </a:p>
+                  </a:txBody>
+                  <a:tcPr>
+                    <a:solidFill>
+                      <a:srgbClr val="050505"/>
+                    </a:solidFill>
+                    <a:lnL w="9525" cap="flat" cmpd="sng" algn="ctr">
+                      <a:solidFill>
+                        <a:srgbClr val="2E2E2E"/>
+                      </a:solidFill>
+                      <a:prstDash val="solid"/>
+                    </a:lnL>
+                    <a:lnR w="9525" cap="flat" cmpd="sng" algn="ctr">
+                      <a:solidFill>
+                        <a:srgbClr val="2E2E2E"/>
+                      </a:solidFill>
+                      <a:prstDash val="solid"/>
+                    </a:lnR>
+                    <a:lnT w="9525" cap="flat" cmpd="sng" algn="ctr">
+                      <a:solidFill>
+                        <a:srgbClr val="2E2E2E"/>
+                      </a:solidFill>
+                      <a:prstDash val="solid"/>
+                    </a:lnT>
+                    <a:lnB w="9525" cap="flat" cmpd="sng" algn="ctr">
+                      <a:solidFill>
+                        <a:srgbClr val="2E2E2E"/>
+                      </a:solidFill>
+                      <a:prstDash val="solid"/>
+                    </a:lnB>
+                  </a:tcPr>
+                </a:tc>
+                <a:tc>
+                  <a:txBody>
+                    <a:bodyPr/>
+                    <a:lstStyle/>
+                    <a:p>
+                      <a:pPr>
+                        <a:defRPr sz="1000" b="1">
+                          <a:solidFill>
+                            <a:srgbClr val="9A9A9A"/>
+                          </a:solidFill>
+                          <a:latin typeface="Consolas"/>
+                        </a:defRPr>
+                      </a:pPr>
+                      <a:r>
+                        <a:t>O QUE SE MEDIU</a:t>
+                      </a:r>
+                    </a:p>
+                  </a:txBody>
+                  <a:tcPr>
+                    <a:solidFill>
+                      <a:srgbClr val="050505"/>
+                    </a:solidFill>
+                    <a:lnL w="9525" cap="flat" cmpd="sng" algn="ctr">
+                      <a:solidFill>
+                        <a:srgbClr val="2E2E2E"/>
+                      </a:solidFill>
+                      <a:prstDash val="solid"/>
+                    </a:lnL>
+                    <a:lnR w="9525" cap="flat" cmpd="sng" algn="ctr">
+                      <a:solidFill>
+                        <a:srgbClr val="2E2E2E"/>
+                      </a:solidFill>
+                      <a:prstDash val="solid"/>
+                    </a:lnR>
+                    <a:lnT w="9525" cap="flat" cmpd="sng" algn="ctr">
+                      <a:solidFill>
+                        <a:srgbClr val="2E2E2E"/>
+                      </a:solidFill>
+                      <a:prstDash val="solid"/>
+                    </a:lnT>
+                    <a:lnB w="9525" cap="flat" cmpd="sng" algn="ctr">
+                      <a:solidFill>
+                        <a:srgbClr val="2E2E2E"/>
+                      </a:solidFill>
+                      <a:prstDash val="solid"/>
+                    </a:lnB>
+                  </a:tcPr>
+                </a:tc>
+                <a:tc>
+                  <a:txBody>
+                    <a:bodyPr/>
+                    <a:lstStyle/>
+                    <a:p>
+                      <a:pPr>
+                        <a:defRPr sz="1000" b="1">
+                          <a:solidFill>
+                            <a:srgbClr val="9A9A9A"/>
+                          </a:solidFill>
+                          <a:latin typeface="Consolas"/>
+                        </a:defRPr>
+                      </a:pPr>
+                      <a:r>
+                        <a:t>RESULTADO</a:t>
+                      </a:r>
+                    </a:p>
+                  </a:txBody>
+                  <a:tcPr>
+                    <a:solidFill>
+                      <a:srgbClr val="050505"/>
+                    </a:solidFill>
+                    <a:lnL w="9525" cap="flat" cmpd="sng" algn="ctr">
+                      <a:solidFill>
+                        <a:srgbClr val="2E2E2E"/>
+                      </a:solidFill>
+                      <a:prstDash val="solid"/>
+                    </a:lnL>
+                    <a:lnR w="9525" cap="flat" cmpd="sng" algn="ctr">
+                      <a:solidFill>
+                        <a:srgbClr val="2E2E2E"/>
+                      </a:solidFill>
+                      <a:prstDash val="solid"/>
+                    </a:lnR>
+                    <a:lnT w="9525" cap="flat" cmpd="sng" algn="ctr">
+                      <a:solidFill>
+                        <a:srgbClr val="2E2E2E"/>
+                      </a:solidFill>
+                      <a:prstDash val="solid"/>
+                    </a:lnT>
+                    <a:lnB w="9525" cap="flat" cmpd="sng" algn="ctr">
+                      <a:solidFill>
+                        <a:srgbClr val="2E2E2E"/>
+                      </a:solidFill>
+                      <a:prstDash val="solid"/>
+                    </a:lnB>
+                  </a:tcPr>
+                </a:tc>
+              </a:tr>
+              <a:tr h="384048">
+                <a:tc>
+                  <a:txBody>
+                    <a:bodyPr/>
+                    <a:lstStyle/>
+                    <a:p>
+                      <a:pPr>
+                        <a:defRPr sz="1200" b="1">
+                          <a:solidFill>
+                            <a:srgbClr val="F5F5F5"/>
+                          </a:solidFill>
+                          <a:latin typeface="Segoe UI"/>
+                        </a:defRPr>
+                      </a:pPr>
+                      <a:r>
+                        <a:t>Fase 1 — zero-shot</a:t>
+                      </a:r>
+                    </a:p>
+                  </a:txBody>
+                  <a:tcPr>
+                    <a:solidFill>
+                      <a:srgbClr val="161616"/>
+                    </a:solidFill>
+                    <a:lnL w="9525" cap="flat" cmpd="sng" algn="ctr">
+                      <a:solidFill>
+                        <a:srgbClr val="2E2E2E"/>
+                      </a:solidFill>
+                      <a:prstDash val="solid"/>
+                    </a:lnL>
+                    <a:lnR w="9525" cap="flat" cmpd="sng" algn="ctr">
+                      <a:solidFill>
+                        <a:srgbClr val="2E2E2E"/>
+                      </a:solidFill>
+                      <a:prstDash val="solid"/>
+                    </a:lnR>
+                    <a:lnT w="9525" cap="flat" cmpd="sng" algn="ctr">
+                      <a:solidFill>
+                        <a:srgbClr val="2E2E2E"/>
+                      </a:solidFill>
+                      <a:prstDash val="solid"/>
+                    </a:lnT>
+                    <a:lnB w="9525" cap="flat" cmpd="sng" algn="ctr">
+                      <a:solidFill>
+                        <a:srgbClr val="2E2E2E"/>
+                      </a:solidFill>
+                      <a:prstDash val="solid"/>
+                    </a:lnB>
+                  </a:tcPr>
+                </a:tc>
+                <a:tc>
+                  <a:txBody>
+                    <a:bodyPr/>
+                    <a:lstStyle/>
+                    <a:p>
+                      <a:pPr>
+                        <a:defRPr sz="1200" b="0">
+                          <a:solidFill>
+                            <a:srgbClr val="E2E2E2"/>
+                          </a:solidFill>
+                          <a:latin typeface="Segoe UI"/>
+                        </a:defRPr>
+                      </a:pPr>
+                      <a:r>
+                        <a:t>transferência sem retreino, com 4 condições de controlo</a:t>
+                      </a:r>
+                    </a:p>
+                  </a:txBody>
+                  <a:tcPr>
+                    <a:solidFill>
+                      <a:srgbClr val="161616"/>
+                    </a:solidFill>
+                    <a:lnL w="9525" cap="flat" cmpd="sng" algn="ctr">
+                      <a:solidFill>
+                        <a:srgbClr val="2E2E2E"/>
+                      </a:solidFill>
+                      <a:prstDash val="solid"/>
+                    </a:lnL>
+                    <a:lnR w="9525" cap="flat" cmpd="sng" algn="ctr">
+                      <a:solidFill>
+                        <a:srgbClr val="2E2E2E"/>
+                      </a:solidFill>
+                      <a:prstDash val="solid"/>
+                    </a:lnR>
+                    <a:lnT w="9525" cap="flat" cmpd="sng" algn="ctr">
+                      <a:solidFill>
+                        <a:srgbClr val="2E2E2E"/>
+                      </a:solidFill>
+                      <a:prstDash val="solid"/>
+                    </a:lnT>
+                    <a:lnB w="9525" cap="flat" cmpd="sng" algn="ctr">
+                      <a:solidFill>
+                        <a:srgbClr val="2E2E2E"/>
+                      </a:solidFill>
+                      <a:prstDash val="solid"/>
+                    </a:lnB>
+                  </a:tcPr>
+                </a:tc>
+                <a:tc>
+                  <a:txBody>
+                    <a:bodyPr/>
+                    <a:lstStyle/>
+                    <a:p>
+                      <a:pPr>
+                        <a:defRPr sz="1200" b="0">
+                          <a:solidFill>
+                            <a:srgbClr val="E2E2E2"/>
+                          </a:solidFill>
+                          <a:latin typeface="Segoe UI"/>
+                        </a:defRPr>
+                      </a:pPr>
+                      <a:r>
+                        <a:t>zero recolhas em 84/84 células · 1 680 episódios</a:t>
+                      </a:r>
+                    </a:p>
+                  </a:txBody>
+                  <a:tcPr>
+                    <a:solidFill>
+                      <a:srgbClr val="161616"/>
+                    </a:solidFill>
+                    <a:lnL w="9525" cap="flat" cmpd="sng" algn="ctr">
+                      <a:solidFill>
+                        <a:srgbClr val="2E2E2E"/>
+                      </a:solidFill>
+                      <a:prstDash val="solid"/>
+                    </a:lnL>
+                    <a:lnR w="9525" cap="flat" cmpd="sng" algn="ctr">
+                      <a:solidFill>
+                        <a:srgbClr val="2E2E2E"/>
+                      </a:solidFill>
+                      <a:prstDash val="solid"/>
+                    </a:lnR>
+                    <a:lnT w="9525" cap="flat" cmpd="sng" algn="ctr">
+                      <a:solidFill>
+                        <a:srgbClr val="2E2E2E"/>
+                      </a:solidFill>
+                      <a:prstDash val="solid"/>
+                    </a:lnT>
+                    <a:lnB w="9525" cap="flat" cmpd="sng" algn="ctr">
+                      <a:solidFill>
+                        <a:srgbClr val="2E2E2E"/>
+                      </a:solidFill>
+                      <a:prstDash val="solid"/>
+                    </a:lnB>
+                  </a:tcPr>
+                </a:tc>
+              </a:tr>
+              <a:tr h="384048">
+                <a:tc>
+                  <a:txBody>
+                    <a:bodyPr/>
+                    <a:lstStyle/>
+                    <a:p>
+                      <a:pPr>
+                        <a:defRPr sz="1200" b="1">
+                          <a:solidFill>
+                            <a:srgbClr val="F5F5F5"/>
+                          </a:solidFill>
+                          <a:latin typeface="Segoe UI"/>
+                        </a:defRPr>
+                      </a:pPr>
+                      <a:r>
+                        <a:t>Controlo</a:t>
+                      </a:r>
+                    </a:p>
+                  </a:txBody>
+                  <a:tcPr>
+                    <a:solidFill>
+                      <a:srgbClr val="0E0E0E"/>
+                    </a:solidFill>
+                    <a:lnL w="9525" cap="flat" cmpd="sng" algn="ctr">
+                      <a:solidFill>
+                        <a:srgbClr val="2E2E2E"/>
+                      </a:solidFill>
+                      <a:prstDash val="solid"/>
+                    </a:lnL>
+                    <a:lnR w="9525" cap="flat" cmpd="sng" algn="ctr">
+                      <a:solidFill>
+                        <a:srgbClr val="2E2E2E"/>
+                      </a:solidFill>
+                      <a:prstDash val="solid"/>
+                    </a:lnR>
+                    <a:lnT w="9525" cap="flat" cmpd="sng" algn="ctr">
+                      <a:solidFill>
+                        <a:srgbClr val="2E2E2E"/>
+                      </a:solidFill>
+                      <a:prstDash val="solid"/>
+                    </a:lnT>
+                    <a:lnB w="9525" cap="flat" cmpd="sng" algn="ctr">
+                      <a:solidFill>
+                        <a:srgbClr val="2E2E2E"/>
+                      </a:solidFill>
+                      <a:prstDash val="solid"/>
+                    </a:lnB>
+                  </a:tcPr>
+                </a:tc>
+                <a:tc>
+                  <a:txBody>
+                    <a:bodyPr/>
+                    <a:lstStyle/>
+                    <a:p>
+                      <a:pPr>
+                        <a:defRPr sz="1200" b="0">
+                          <a:solidFill>
+                            <a:srgbClr val="E2E2E2"/>
+                          </a:solidFill>
+                          <a:latin typeface="Segoe UI"/>
+                        </a:defRPr>
+                      </a:pPr>
+                      <a:r>
+                        <a:t>o mapa é sequer resolúvel?</a:t>
+                      </a:r>
+                    </a:p>
+                  </a:txBody>
+                  <a:tcPr>
+                    <a:solidFill>
+                      <a:srgbClr val="0E0E0E"/>
+                    </a:solidFill>
+                    <a:lnL w="9525" cap="flat" cmpd="sng" algn="ctr">
+                      <a:solidFill>
+                        <a:srgbClr val="2E2E2E"/>
+                      </a:solidFill>
+                      <a:prstDash val="solid"/>
+                    </a:lnL>
+                    <a:lnR w="9525" cap="flat" cmpd="sng" algn="ctr">
+                      <a:solidFill>
+                        <a:srgbClr val="2E2E2E"/>
+                      </a:solidFill>
+                      <a:prstDash val="solid"/>
+                    </a:lnR>
+                    <a:lnT w="9525" cap="flat" cmpd="sng" algn="ctr">
+                      <a:solidFill>
+                        <a:srgbClr val="2E2E2E"/>
+                      </a:solidFill>
+                      <a:prstDash val="solid"/>
+                    </a:lnT>
+                    <a:lnB w="9525" cap="flat" cmpd="sng" algn="ctr">
+                      <a:solidFill>
+                        <a:srgbClr val="2E2E2E"/>
+                      </a:solidFill>
+                      <a:prstDash val="solid"/>
+                    </a:lnB>
+                  </a:tcPr>
+                </a:tc>
+                <a:tc>
+                  <a:txBody>
+                    <a:bodyPr/>
+                    <a:lstStyle/>
+                    <a:p>
+                      <a:pPr>
+                        <a:defRPr sz="1200" b="0">
+                          <a:solidFill>
+                            <a:srgbClr val="E2E2E2"/>
+                          </a:solidFill>
+                          <a:latin typeface="Segoe UI"/>
+                        </a:defRPr>
+                      </a:pPr>
+                      <a:r>
+                        <a:t>navegador geodésico, sem aprendizagem: 53,0 rec/ep (82,0 nas Quatro Salas)</a:t>
+                      </a:r>
+                    </a:p>
+                  </a:txBody>
+                  <a:tcPr>
+                    <a:solidFill>
+                      <a:srgbClr val="0E0E0E"/>
+                    </a:solidFill>
+                    <a:lnL w="9525" cap="flat" cmpd="sng" algn="ctr">
+                      <a:solidFill>
+                        <a:srgbClr val="2E2E2E"/>
+                      </a:solidFill>
+                      <a:prstDash val="solid"/>
+                    </a:lnL>
+                    <a:lnR w="9525" cap="flat" cmpd="sng" algn="ctr">
+                      <a:solidFill>
+                        <a:srgbClr val="2E2E2E"/>
+                      </a:solidFill>
+                      <a:prstDash val="solid"/>
+                    </a:lnR>
+                    <a:lnT w="9525" cap="flat" cmpd="sng" algn="ctr">
+                      <a:solidFill>
+                        <a:srgbClr val="2E2E2E"/>
+                      </a:solidFill>
+                      <a:prstDash val="solid"/>
+                    </a:lnT>
+                    <a:lnB w="9525" cap="flat" cmpd="sng" algn="ctr">
+                      <a:solidFill>
+                        <a:srgbClr val="2E2E2E"/>
+                      </a:solidFill>
+                      <a:prstDash val="solid"/>
+                    </a:lnB>
+                  </a:tcPr>
+                </a:tc>
+              </a:tr>
+              <a:tr h="384048">
+                <a:tc>
+                  <a:txBody>
+                    <a:bodyPr/>
+                    <a:lstStyle/>
+                    <a:p>
+                      <a:pPr>
+                        <a:defRPr sz="1200" b="1">
+                          <a:solidFill>
+                            <a:srgbClr val="F5F5F5"/>
+                          </a:solidFill>
+                          <a:latin typeface="Segoe UI"/>
+                        </a:defRPr>
+                      </a:pPr>
+                      <a:r>
+                        <a:t>Fase 2 — treino nativo</a:t>
+                      </a:r>
+                    </a:p>
+                  </a:txBody>
+                  <a:tcPr>
+                    <a:solidFill>
+                      <a:srgbClr val="161616"/>
+                    </a:solidFill>
+                    <a:lnL w="9525" cap="flat" cmpd="sng" algn="ctr">
+                      <a:solidFill>
+                        <a:srgbClr val="2E2E2E"/>
+                      </a:solidFill>
+                      <a:prstDash val="solid"/>
+                    </a:lnL>
+                    <a:lnR w="9525" cap="flat" cmpd="sng" algn="ctr">
+                      <a:solidFill>
+                        <a:srgbClr val="2E2E2E"/>
+                      </a:solidFill>
+                      <a:prstDash val="solid"/>
+                    </a:lnR>
+                    <a:lnT w="9525" cap="flat" cmpd="sng" algn="ctr">
+                      <a:solidFill>
+                        <a:srgbClr val="2E2E2E"/>
+                      </a:solidFill>
+                      <a:prstDash val="solid"/>
+                    </a:lnT>
+                    <a:lnB w="9525" cap="flat" cmpd="sng" algn="ctr">
+                      <a:solidFill>
+                        <a:srgbClr val="2E2E2E"/>
+                      </a:solidFill>
+                      <a:prstDash val="solid"/>
+                    </a:lnB>
+                  </a:tcPr>
+                </a:tc>
+                <a:tc>
+                  <a:txBody>
+                    <a:bodyPr/>
+                    <a:lstStyle/>
+                    <a:p>
+                      <a:pPr>
+                        <a:defRPr sz="1200" b="0">
+                          <a:solidFill>
+                            <a:srgbClr val="E2E2E2"/>
+                          </a:solidFill>
+                          <a:latin typeface="Segoe UI"/>
+                        </a:defRPr>
+                      </a:pPr>
+                      <a:r>
+                        <a:t>21 execuções por algoritmo, 780 min cada</a:t>
+                      </a:r>
+                    </a:p>
+                  </a:txBody>
+                  <a:tcPr>
+                    <a:solidFill>
+                      <a:srgbClr val="161616"/>
+                    </a:solidFill>
+                    <a:lnL w="9525" cap="flat" cmpd="sng" algn="ctr">
+                      <a:solidFill>
+                        <a:srgbClr val="2E2E2E"/>
+                      </a:solidFill>
+                      <a:prstDash val="solid"/>
+                    </a:lnL>
+                    <a:lnR w="9525" cap="flat" cmpd="sng" algn="ctr">
+                      <a:solidFill>
+                        <a:srgbClr val="2E2E2E"/>
+                      </a:solidFill>
+                      <a:prstDash val="solid"/>
+                    </a:lnR>
+                    <a:lnT w="9525" cap="flat" cmpd="sng" algn="ctr">
+                      <a:solidFill>
+                        <a:srgbClr val="2E2E2E"/>
+                      </a:solidFill>
+                      <a:prstDash val="solid"/>
+                    </a:lnT>
+                    <a:lnB w="9525" cap="flat" cmpd="sng" algn="ctr">
+                      <a:solidFill>
+                        <a:srgbClr val="2E2E2E"/>
+                      </a:solidFill>
+                      <a:prstDash val="solid"/>
+                    </a:lnB>
+                  </a:tcPr>
+                </a:tc>
+                <a:tc>
+                  <a:txBody>
+                    <a:bodyPr/>
+                    <a:lstStyle/>
+                    <a:p>
+                      <a:pPr>
+                        <a:defRPr sz="1200" b="0">
+                          <a:solidFill>
+                            <a:srgbClr val="E2E2E2"/>
+                          </a:solidFill>
+                          <a:latin typeface="Segoe UI"/>
+                        </a:defRPr>
+                      </a:pPr>
+                      <a:r>
+                        <a:t>GNN 4/21 · 1,7 rec/ep  ·  PPO 0/21  ·  SAC 0/21</a:t>
+                      </a:r>
+                    </a:p>
+                  </a:txBody>
+                  <a:tcPr>
+                    <a:solidFill>
+                      <a:srgbClr val="161616"/>
+                    </a:solidFill>
+                    <a:lnL w="9525" cap="flat" cmpd="sng" algn="ctr">
+                      <a:solidFill>
+                        <a:srgbClr val="2E2E2E"/>
+                      </a:solidFill>
+                      <a:prstDash val="solid"/>
+                    </a:lnL>
+                    <a:lnR w="9525" cap="flat" cmpd="sng" algn="ctr">
+                      <a:solidFill>
+                        <a:srgbClr val="2E2E2E"/>
+                      </a:solidFill>
+                      <a:prstDash val="solid"/>
+                    </a:lnR>
+                    <a:lnT w="9525" cap="flat" cmpd="sng" algn="ctr">
+                      <a:solidFill>
+                        <a:srgbClr val="2E2E2E"/>
+                      </a:solidFill>
+                      <a:prstDash val="solid"/>
+                    </a:lnT>
+                    <a:lnB w="9525" cap="flat" cmpd="sng" algn="ctr">
+                      <a:solidFill>
+                        <a:srgbClr val="2E2E2E"/>
+                      </a:solidFill>
+                      <a:prstDash val="solid"/>
+                    </a:lnB>
+                  </a:tcPr>
+                </a:tc>
+              </a:tr>
+              <a:tr h="384048">
+                <a:tc>
+                  <a:txBody>
+                    <a:bodyPr/>
+                    <a:lstStyle/>
+                    <a:p>
+                      <a:pPr>
+                        <a:defRPr sz="1200" b="1">
+                          <a:solidFill>
+                            <a:srgbClr val="F5F5F5"/>
+                          </a:solidFill>
+                          <a:latin typeface="Segoe UI"/>
+                        </a:defRPr>
+                      </a:pPr>
+                      <a:r>
+                        <a:t>Regra de decisão</a:t>
+                      </a:r>
+                    </a:p>
+                  </a:txBody>
+                  <a:tcPr>
+                    <a:solidFill>
+                      <a:srgbClr val="0E0E0E"/>
+                    </a:solidFill>
+                    <a:lnL w="9525" cap="flat" cmpd="sng" algn="ctr">
+                      <a:solidFill>
+                        <a:srgbClr val="2E2E2E"/>
+                      </a:solidFill>
+                      <a:prstDash val="solid"/>
+                    </a:lnL>
+                    <a:lnR w="9525" cap="flat" cmpd="sng" algn="ctr">
+                      <a:solidFill>
+                        <a:srgbClr val="2E2E2E"/>
+                      </a:solidFill>
+                      <a:prstDash val="solid"/>
+                    </a:lnR>
+                    <a:lnT w="9525" cap="flat" cmpd="sng" algn="ctr">
+                      <a:solidFill>
+                        <a:srgbClr val="2E2E2E"/>
+                      </a:solidFill>
+                      <a:prstDash val="solid"/>
+                    </a:lnT>
+                    <a:lnB w="9525" cap="flat" cmpd="sng" algn="ctr">
+                      <a:solidFill>
+                        <a:srgbClr val="2E2E2E"/>
+                      </a:solidFill>
+                      <a:prstDash val="solid"/>
+                    </a:lnB>
+                  </a:tcPr>
+                </a:tc>
+                <a:tc>
+                  <a:txBody>
+                    <a:bodyPr/>
+                    <a:lstStyle/>
+                    <a:p>
+                      <a:pPr>
+                        <a:defRPr sz="1200" b="0">
+                          <a:solidFill>
+                            <a:srgbClr val="E2E2E2"/>
+                          </a:solidFill>
+                          <a:latin typeface="Segoe UI"/>
+                        </a:defRPr>
+                      </a:pPr>
+                      <a:r>
+                        <a:t>limiar fixado antes de haver dados</a:t>
+                      </a:r>
+                    </a:p>
+                  </a:txBody>
+                  <a:tcPr>
+                    <a:solidFill>
+                      <a:srgbClr val="0E0E0E"/>
+                    </a:solidFill>
+                    <a:lnL w="9525" cap="flat" cmpd="sng" algn="ctr">
+                      <a:solidFill>
+                        <a:srgbClr val="2E2E2E"/>
+                      </a:solidFill>
+                      <a:prstDash val="solid"/>
+                    </a:lnL>
+                    <a:lnR w="9525" cap="flat" cmpd="sng" algn="ctr">
+                      <a:solidFill>
+                        <a:srgbClr val="2E2E2E"/>
+                      </a:solidFill>
+                      <a:prstDash val="solid"/>
+                    </a:lnR>
+                    <a:lnT w="9525" cap="flat" cmpd="sng" algn="ctr">
+                      <a:solidFill>
+                        <a:srgbClr val="2E2E2E"/>
+                      </a:solidFill>
+                      <a:prstDash val="solid"/>
+                    </a:lnT>
+                    <a:lnB w="9525" cap="flat" cmpd="sng" algn="ctr">
+                      <a:solidFill>
+                        <a:srgbClr val="2E2E2E"/>
+                      </a:solidFill>
+                      <a:prstDash val="solid"/>
+                    </a:lnB>
+                  </a:tcPr>
+                </a:tc>
+                <a:tc>
+                  <a:txBody>
+                    <a:bodyPr/>
+                    <a:lstStyle/>
+                    <a:p>
+                      <a:pPr>
+                        <a:defRPr sz="1200" b="0">
+                          <a:solidFill>
+                            <a:srgbClr val="E2E2E2"/>
+                          </a:solidFill>
+                          <a:latin typeface="Segoe UI"/>
+                        </a:defRPr>
+                      </a:pPr>
+                      <a:r>
+                        <a:t>15 execuções convergentes em 21 — o resultado ficou em 4</a:t>
+                      </a:r>
+                    </a:p>
+                  </a:txBody>
+                  <a:tcPr>
+                    <a:solidFill>
+                      <a:srgbClr val="0E0E0E"/>
+                    </a:solidFill>
+                    <a:lnL w="9525" cap="flat" cmpd="sng" algn="ctr">
+                      <a:solidFill>
+                        <a:srgbClr val="2E2E2E"/>
+                      </a:solidFill>
+                      <a:prstDash val="solid"/>
+                    </a:lnL>
+                    <a:lnR w="9525" cap="flat" cmpd="sng" algn="ctr">
+                      <a:solidFill>
+                        <a:srgbClr val="2E2E2E"/>
+                      </a:solidFill>
+                      <a:prstDash val="solid"/>
+                    </a:lnR>
+                    <a:lnT w="9525" cap="flat" cmpd="sng" algn="ctr">
+                      <a:solidFill>
+                        <a:srgbClr val="2E2E2E"/>
+                      </a:solidFill>
+                      <a:prstDash val="solid"/>
+                    </a:lnT>
+                    <a:lnB w="9525" cap="flat" cmpd="sng" algn="ctr">
+                      <a:solidFill>
+                        <a:srgbClr val="2E2E2E"/>
+                      </a:solidFill>
+                      <a:prstDash val="solid"/>
+                    </a:lnB>
+                  </a:tcPr>
+                </a:tc>
+              </a:tr>
+              <a:tr h="384048">
+                <a:tc>
+                  <a:txBody>
+                    <a:bodyPr/>
+                    <a:lstStyle/>
+                    <a:p>
+                      <a:pPr>
+                        <a:defRPr sz="1200" b="1">
+                          <a:solidFill>
+                            <a:srgbClr val="F5F5F5"/>
+                          </a:solidFill>
+                          <a:latin typeface="Segoe UI"/>
+                        </a:defRPr>
+                      </a:pPr>
+                      <a:r>
+                        <a:t>Orçamento</a:t>
+                      </a:r>
+                    </a:p>
+                  </a:txBody>
+                  <a:tcPr>
+                    <a:solidFill>
+                      <a:srgbClr val="161616"/>
+                    </a:solidFill>
+                    <a:lnL w="9525" cap="flat" cmpd="sng" algn="ctr">
+                      <a:solidFill>
+                        <a:srgbClr val="2E2E2E"/>
+                      </a:solidFill>
+                      <a:prstDash val="solid"/>
+                    </a:lnL>
+                    <a:lnR w="9525" cap="flat" cmpd="sng" algn="ctr">
+                      <a:solidFill>
+                        <a:srgbClr val="2E2E2E"/>
+                      </a:solidFill>
+                      <a:prstDash val="solid"/>
+                    </a:lnR>
+                    <a:lnT w="9525" cap="flat" cmpd="sng" algn="ctr">
+                      <a:solidFill>
+                        <a:srgbClr val="2E2E2E"/>
+                      </a:solidFill>
+                      <a:prstDash val="solid"/>
+                    </a:lnT>
+                    <a:lnB w="9525" cap="flat" cmpd="sng" algn="ctr">
+                      <a:solidFill>
+                        <a:srgbClr val="2E2E2E"/>
+                      </a:solidFill>
+                      <a:prstDash val="solid"/>
+                    </a:lnB>
+                  </a:tcPr>
+                </a:tc>
+                <a:tc>
+                  <a:txBody>
+                    <a:bodyPr/>
+                    <a:lstStyle/>
+                    <a:p>
+                      <a:pPr>
+                        <a:defRPr sz="1200" b="0">
+                          <a:solidFill>
+                            <a:srgbClr val="E2E2E2"/>
+                          </a:solidFill>
+                          <a:latin typeface="Segoe UI"/>
+                        </a:defRPr>
+                      </a:pPr>
+                      <a:r>
+                        <a:t>o treino tinha acabado de convergir?</a:t>
+                      </a:r>
+                    </a:p>
+                  </a:txBody>
+                  <a:tcPr>
+                    <a:solidFill>
+                      <a:srgbClr val="161616"/>
+                    </a:solidFill>
+                    <a:lnL w="9525" cap="flat" cmpd="sng" algn="ctr">
+                      <a:solidFill>
+                        <a:srgbClr val="2E2E2E"/>
+                      </a:solidFill>
+                      <a:prstDash val="solid"/>
+                    </a:lnL>
+                    <a:lnR w="9525" cap="flat" cmpd="sng" algn="ctr">
+                      <a:solidFill>
+                        <a:srgbClr val="2E2E2E"/>
+                      </a:solidFill>
+                      <a:prstDash val="solid"/>
+                    </a:lnR>
+                    <a:lnT w="9525" cap="flat" cmpd="sng" algn="ctr">
+                      <a:solidFill>
+                        <a:srgbClr val="2E2E2E"/>
+                      </a:solidFill>
+                      <a:prstDash val="solid"/>
+                    </a:lnT>
+                    <a:lnB w="9525" cap="flat" cmpd="sng" algn="ctr">
+                      <a:solidFill>
+                        <a:srgbClr val="2E2E2E"/>
+                      </a:solidFill>
+                      <a:prstDash val="solid"/>
+                    </a:lnB>
+                  </a:tcPr>
+                </a:tc>
+                <a:tc>
+                  <a:txBody>
+                    <a:bodyPr/>
+                    <a:lstStyle/>
+                    <a:p>
+                      <a:pPr>
+                        <a:defRPr sz="1200" b="0">
+                          <a:solidFill>
+                            <a:srgbClr val="E2E2E2"/>
+                          </a:solidFill>
+                          <a:latin typeface="Segoe UI"/>
+                        </a:defRPr>
+                      </a:pPr>
+                      <a:r>
+                        <a:t>em 19 das 21 execuções o fitness ainda subia no último quinto</a:t>
+                      </a:r>
+                    </a:p>
+                  </a:txBody>
+                  <a:tcPr>
+                    <a:solidFill>
+                      <a:srgbClr val="161616"/>
+                    </a:solidFill>
+                    <a:lnL w="9525" cap="flat" cmpd="sng" algn="ctr">
+                      <a:solidFill>
+                        <a:srgbClr val="2E2E2E"/>
+                      </a:solidFill>
+                      <a:prstDash val="solid"/>
+                    </a:lnL>
+                    <a:lnR w="9525" cap="flat" cmpd="sng" algn="ctr">
+                      <a:solidFill>
+                        <a:srgbClr val="2E2E2E"/>
+                      </a:solidFill>
+                      <a:prstDash val="solid"/>
+                    </a:lnR>
+                    <a:lnT w="9525" cap="flat" cmpd="sng" algn="ctr">
+                      <a:solidFill>
+                        <a:srgbClr val="2E2E2E"/>
+                      </a:solidFill>
+                      <a:prstDash val="solid"/>
+                    </a:lnT>
+                    <a:lnB w="9525" cap="flat" cmpd="sng" algn="ctr">
+                      <a:solidFill>
+                        <a:srgbClr val="2E2E2E"/>
+                      </a:solidFill>
+                      <a:prstDash val="solid"/>
+                    </a:lnB>
+                  </a:tcPr>
+                </a:tc>
+              </a:tr>
+            </a:tbl>
+          </a:graphicData>
+        </a:graphic>
+      </p:graphicFrame>
+      <p:cxnSp>
+        <p:nvCxnSpPr>
+          <p:cNvPr id="9" name="Connector 8"/>
+          <p:cNvCxnSpPr/>
+          <p:nvPr/>
+        </p:nvCxnSpPr>
+        <p:spPr>
+          <a:xfrm>
+            <a:off x="548640" y="6355080"/>
+            <a:ext cx="11094415" cy="0"/>
+          </a:xfrm>
+          <a:prstGeom prst="line">
+            <a:avLst/>
+          </a:prstGeom>
+          <a:ln w="9525">
+            <a:solidFill>
+              <a:srgbClr val="2E2E2E"/>
+            </a:solidFill>
+          </a:ln>
+        </p:spPr>
+        <p:style>
+          <a:lnRef idx="2">
+            <a:schemeClr val="accent1"/>
+          </a:lnRef>
+          <a:fillRef idx="0">
+            <a:schemeClr val="accent1"/>
+          </a:fillRef>
+          <a:effectRef idx="1">
+            <a:schemeClr val="accent1"/>
+          </a:effectRef>
+          <a:fontRef idx="minor">
+            <a:schemeClr val="tx1"/>
+          </a:fontRef>
+        </p:style>
+      </p:cxnSp>
+      <p:sp>
+        <p:nvSpPr>
+          <p:cNvPr id="10" name="TextBox 9"/>
+          <p:cNvSpPr txBox="1"/>
+          <p:nvPr/>
+        </p:nvSpPr>
+        <p:spPr>
+          <a:xfrm>
+            <a:off x="548640" y="6400800"/>
+            <a:ext cx="8229600" cy="365760"/>
+          </a:xfrm>
+          <a:prstGeom prst="rect">
+            <a:avLst/>
+          </a:prstGeom>
+          <a:noFill/>
+        </p:spPr>
+        <p:txBody>
+          <a:bodyPr wrap="square" anchor="t">
+            <a:spAutoFit/>
+          </a:bodyPr>
+          <a:lstStyle/>
+          <a:p>
+            <a:pPr algn="l">
+              <a:spcAft>
+                <a:spcPts val="600"/>
+              </a:spcAft>
+            </a:pPr>
+            <a:r>
+              <a:rPr sz="1000" b="0">
+                <a:solidFill>
+                  <a:srgbClr val="9A9A9A"/>
+                </a:solidFill>
+                <a:latin typeface="Segoe UI"/>
+              </a:rPr>
+              <a:t>Slide de reserva · não faz parte da apresentação</a:t>
+            </a:r>
+          </a:p>
+        </p:txBody>
+      </p:sp>
+      <p:sp>
+        <p:nvSpPr>
+          <p:cNvPr id="11" name="TextBox 10"/>
+          <p:cNvSpPr txBox="1"/>
+          <p:nvPr/>
+        </p:nvSpPr>
+        <p:spPr>
+          <a:xfrm>
+            <a:off x="10728655" y="6400800"/>
+            <a:ext cx="914400" cy="365760"/>
+          </a:xfrm>
+          <a:prstGeom prst="rect">
+            <a:avLst/>
+          </a:prstGeom>
+          <a:noFill/>
+        </p:spPr>
+        <p:txBody>
+          <a:bodyPr wrap="square" anchor="t">
+            <a:spAutoFit/>
+          </a:bodyPr>
+          <a:lstStyle/>
+          <a:p>
+            <a:pPr algn="r">
+              <a:spcAft>
+                <a:spcPts val="600"/>
+              </a:spcAft>
+            </a:pPr>
+            <a:r>
+              <a:rPr sz="1000" b="0">
+                <a:solidFill>
+                  <a:srgbClr val="9A9A9A"/>
+                </a:solidFill>
+                <a:latin typeface="Consolas"/>
+              </a:rPr>
+              <a:t>A3</a:t>
+            </a:r>
+          </a:p>
+        </p:txBody>
+      </p:sp>
+    </p:spTree>
+  </p:cSld>
+  <p:clrMapOvr>
+    <a:masterClrMapping/>
+  </p:clrMapOvr>
+</p:sld>
+</file>
+
+<file path=ppt/slides/slide23.xml><?xml version="1.0" encoding="utf-8"?>
+<p:sld xmlns:a="http://schemas.openxmlformats.org/drawingml/2006/main" xmlns:p="http://schemas.openxmlformats.org/presentationml/2006/main" xmlns:r="http://schemas.openxmlformats.org/officeDocument/2006/relationships">
+  <p:cSld>
+    <p:spTree>
+      <p:nvGrpSpPr>
+        <p:cNvPr id="1" name=""/>
+        <p:cNvGrpSpPr/>
+        <p:nvPr/>
+      </p:nvGrpSpPr>
+      <p:grpSpPr/>
+      <p:sp>
+        <p:nvSpPr>
+          <p:cNvPr id="2" name="Rectangle 1"/>
+          <p:cNvSpPr/>
+          <p:nvPr/>
+        </p:nvSpPr>
+        <p:spPr>
+          <a:xfrm>
+            <a:off x="0" y="0"/>
+            <a:ext cx="12191695" cy="6858000"/>
+          </a:xfrm>
+          <a:prstGeom prst="rect">
+            <a:avLst/>
+          </a:prstGeom>
+          <a:solidFill>
+            <a:srgbClr val="050505"/>
+          </a:solidFill>
+          <a:ln>
+            <a:noFill/>
+          </a:ln>
+          <a:effectLst/>
+        </p:spPr>
+        <p:style>
+          <a:lnRef idx="1">
+            <a:schemeClr val="accent1"/>
+          </a:lnRef>
+          <a:fillRef idx="3">
+            <a:schemeClr val="accent1"/>
+          </a:fillRef>
+          <a:effectRef idx="2">
+            <a:schemeClr val="accent1"/>
+          </a:effectRef>
+          <a:fontRef idx="minor">
+            <a:schemeClr val="lt1"/>
+          </a:fontRef>
+        </p:style>
+        <p:txBody>
+          <a:bodyPr rtlCol="0" anchor="ctr"/>
+          <a:lstStyle/>
+          <a:p>
+            <a:pPr algn="ctr"/>
+          </a:p>
+        </p:txBody>
+      </p:sp>
+      <p:sp>
+        <p:nvSpPr>
+          <p:cNvPr id="3" name="TextBox 2"/>
+          <p:cNvSpPr txBox="1"/>
+          <p:nvPr/>
+        </p:nvSpPr>
+        <p:spPr>
+          <a:xfrm>
+            <a:off x="548640" y="292608"/>
+            <a:ext cx="11094415" cy="777240"/>
+          </a:xfrm>
+          <a:prstGeom prst="rect">
+            <a:avLst/>
+          </a:prstGeom>
+          <a:noFill/>
+        </p:spPr>
+        <p:txBody>
+          <a:bodyPr wrap="square" anchor="t">
+            <a:spAutoFit/>
+          </a:bodyPr>
+          <a:lstStyle/>
+          <a:p>
+            <a:pPr algn="l">
+              <a:spcAft>
+                <a:spcPts val="600"/>
+              </a:spcAft>
+            </a:pPr>
+            <a:r>
+              <a:rPr sz="3000" b="1">
+                <a:solidFill>
+                  <a:srgbClr val="F5F5F5"/>
+                </a:solidFill>
+                <a:latin typeface="Segoe UI Semibold"/>
+              </a:rPr>
+              <a:t>Reserva · Custo, orçamento e o que está declarado</a:t>
+            </a:r>
+          </a:p>
+        </p:txBody>
+      </p:sp>
+      <p:sp>
+        <p:nvSpPr>
+          <p:cNvPr id="4" name="TextBox 3"/>
+          <p:cNvSpPr txBox="1"/>
+          <p:nvPr/>
+        </p:nvSpPr>
+        <p:spPr>
+          <a:xfrm>
+            <a:off x="548640" y="932688"/>
+            <a:ext cx="11094415" cy="457200"/>
+          </a:xfrm>
+          <a:prstGeom prst="rect">
+            <a:avLst/>
+          </a:prstGeom>
+          <a:noFill/>
+        </p:spPr>
+        <p:txBody>
+          <a:bodyPr wrap="square" anchor="t">
+            <a:spAutoFit/>
+          </a:bodyPr>
+          <a:lstStyle/>
+          <a:p>
+            <a:pPr algn="l">
+              <a:spcAft>
+                <a:spcPts val="600"/>
+              </a:spcAft>
+            </a:pPr>
+            <a:r>
+              <a:rPr sz="1500" b="0">
+                <a:solidFill>
+                  <a:srgbClr val="9A9A9A"/>
+                </a:solidFill>
+                <a:latin typeface="Segoe UI"/>
+              </a:rPr>
+              <a:t>a assimetria de cómputo, medida — e a leitura que dela se tira</a:t>
+            </a:r>
+          </a:p>
+        </p:txBody>
+      </p:sp>
+      <p:cxnSp>
+        <p:nvCxnSpPr>
+          <p:cNvPr id="5" name="Connector 4"/>
+          <p:cNvCxnSpPr/>
+          <p:nvPr/>
+        </p:nvCxnSpPr>
+        <p:spPr>
+          <a:xfrm>
+            <a:off x="548640" y="1371600"/>
+            <a:ext cx="11094415" cy="0"/>
+          </a:xfrm>
+          <a:prstGeom prst="line">
+            <a:avLst/>
+          </a:prstGeom>
+          <a:ln w="9525">
+            <a:solidFill>
+              <a:srgbClr val="2E2E2E"/>
+            </a:solidFill>
+          </a:ln>
+        </p:spPr>
+        <p:style>
+          <a:lnRef idx="2">
+            <a:schemeClr val="accent1"/>
+          </a:lnRef>
+          <a:fillRef idx="0">
+            <a:schemeClr val="accent1"/>
+          </a:fillRef>
+          <a:effectRef idx="1">
+            <a:schemeClr val="accent1"/>
+          </a:effectRef>
+          <a:fontRef idx="minor">
+            <a:schemeClr val="tx1"/>
+          </a:fontRef>
+        </p:style>
+      </p:cxnSp>
+      <p:cxnSp>
+        <p:nvCxnSpPr>
+          <p:cNvPr id="6" name="Connector 5"/>
+          <p:cNvCxnSpPr/>
+          <p:nvPr/>
+        </p:nvCxnSpPr>
+        <p:spPr>
+          <a:xfrm>
+            <a:off x="548640" y="1371600"/>
+            <a:ext cx="1005840" cy="0"/>
+          </a:xfrm>
+          <a:prstGeom prst="line">
+            <a:avLst/>
+          </a:prstGeom>
+          <a:ln w="31750">
+            <a:solidFill>
+              <a:srgbClr val="F5F5F5"/>
+            </a:solidFill>
+          </a:ln>
+        </p:spPr>
+        <p:style>
+          <a:lnRef idx="2">
+            <a:schemeClr val="accent1"/>
+          </a:lnRef>
+          <a:fillRef idx="0">
+            <a:schemeClr val="accent1"/>
+          </a:fillRef>
+          <a:effectRef idx="1">
+            <a:schemeClr val="accent1"/>
+          </a:effectRef>
+          <a:fontRef idx="minor">
+            <a:schemeClr val="tx1"/>
+          </a:fontRef>
+        </p:style>
+      </p:cxnSp>
+      <p:sp>
+        <p:nvSpPr>
+          <p:cNvPr id="7" name="TextBox 6"/>
+          <p:cNvSpPr txBox="1"/>
+          <p:nvPr/>
+        </p:nvSpPr>
+        <p:spPr>
+          <a:xfrm>
+            <a:off x="548640" y="1600200"/>
+            <a:ext cx="11094415" cy="1645920"/>
+          </a:xfrm>
+          <a:prstGeom prst="rect">
+            <a:avLst/>
+          </a:prstGeom>
+          <a:noFill/>
+        </p:spPr>
+        <p:txBody>
+          <a:bodyPr wrap="square" anchor="t">
+            <a:spAutoFit/>
+          </a:bodyPr>
+          <a:lstStyle/>
+          <a:p>
+            <a:pPr algn="l">
+              <a:spcAft>
+                <a:spcPts val="600"/>
+              </a:spcAft>
+            </a:pPr>
+            <a:r>
+              <a:rPr sz="1600">
+                <a:solidFill>
+                  <a:srgbClr val="9A9A9A"/>
+                </a:solidFill>
+                <a:latin typeface="Segoe UI"/>
+              </a:rPr>
+              <a:t>▸  </a:t>
+            </a:r>
+            <a:r>
+              <a:rPr sz="1600" b="0">
+                <a:solidFill>
+                  <a:srgbClr val="E2E2E2"/>
+                </a:solidFill>
+                <a:latin typeface="Segoe UI"/>
+              </a:rPr>
+              <a:t>A leitura é a inversa da que favoreceria o evolutivo: com ≈ 8× menos núcleos-hora, os métodos de gradiente igualam ou superam o GNN em 4 dos 7 cenários.</a:t>
+            </a:r>
+          </a:p>
+          <a:p>
+            <a:pPr algn="l">
+              <a:spcAft>
+                <a:spcPts val="600"/>
+              </a:spcAft>
+            </a:pPr>
+            <a:r>
+              <a:rPr sz="1600">
+                <a:solidFill>
+                  <a:srgbClr val="9A9A9A"/>
+                </a:solidFill>
+                <a:latin typeface="Segoe UI"/>
+              </a:rPr>
+              <a:t>▸  </a:t>
+            </a:r>
+            <a:r>
+              <a:rPr sz="1600" b="0">
+                <a:solidFill>
+                  <a:srgbClr val="E2E2E2"/>
+                </a:solidFill>
+                <a:latin typeface="Segoe UI"/>
+              </a:rPr>
+              <a:t>Campanha principal: 147 treinos e 2 940 episódios de avaliação. Projeto inteiro: 28 sessões e 2 078 h de treino, das quais 341 h do mega-treino de um mês.</a:t>
+            </a:r>
+          </a:p>
+          <a:p>
+            <a:pPr algn="l">
+              <a:spcAft>
+                <a:spcPts val="600"/>
+              </a:spcAft>
+            </a:pPr>
+            <a:r>
+              <a:rPr sz="1600">
+                <a:solidFill>
+                  <a:srgbClr val="9A9A9A"/>
+                </a:solidFill>
+                <a:latin typeface="Segoe UI"/>
+              </a:rPr>
+              <a:t>▸  </a:t>
+            </a:r>
+            <a:r>
+              <a:rPr sz="1600" b="0">
+                <a:solidFill>
+                  <a:srgbClr val="E2E2E2"/>
+                </a:solidFill>
+                <a:latin typeface="Segoe UI"/>
+              </a:rPr>
+              <a:t>Sub-treino declarado, não escondido: 7 das 21 células ainda subiam no fim do orçamento, e o SAC nos gargalos lê-se como limite inferior (temperatura fixa, α = 0,1, sem o ajuste dual — p. 44).</a:t>
+            </a:r>
+          </a:p>
+        </p:txBody>
+      </p:sp>
+      <p:graphicFrame>
+        <p:nvGraphicFramePr>
+          <p:cNvPr id="8" name="Table 7"/>
+          <p:cNvGraphicFramePr>
+            <a:graphicFrameLocks noGrp="1"/>
+          </p:cNvGraphicFramePr>
+          <p:nvPr/>
+        </p:nvGraphicFramePr>
+        <p:xfrm>
+          <a:off x="548640" y="3584448"/>
+          <a:ext cx="11064238" cy="1920240"/>
+        </p:xfrm>
+        <a:graphic>
+          <a:graphicData uri="http://schemas.openxmlformats.org/drawingml/2006/table">
+            <a:tbl>
+              <a:tblPr>
+                <a:tableStyleId>{5C22544A-7EE6-4342-B048-85BDC9FD1C3A}</a:tableStyleId>
+              </a:tblPr>
+              <a:tblGrid>
+                <a:gridCol w="3566160"/>
+                <a:gridCol w="3749039"/>
+                <a:gridCol w="3749039"/>
+              </a:tblGrid>
+              <a:tr h="384048">
+                <a:tc>
+                  <a:txBody>
+                    <a:bodyPr/>
+                    <a:lstStyle/>
+                    <a:p>
+                      <a:pPr>
+                        <a:defRPr sz="1100" b="1">
+                          <a:solidFill>
+                            <a:srgbClr val="9A9A9A"/>
+                          </a:solidFill>
+                          <a:latin typeface="Consolas"/>
+                        </a:defRPr>
+                      </a:pPr>
+                    </a:p>
+                  </a:txBody>
+                  <a:tcPr>
+                    <a:solidFill>
+                      <a:srgbClr val="050505"/>
+                    </a:solidFill>
+                    <a:lnL w="9525" cap="flat" cmpd="sng" algn="ctr">
+                      <a:solidFill>
+                        <a:srgbClr val="2E2E2E"/>
+                      </a:solidFill>
+                      <a:prstDash val="solid"/>
+                    </a:lnL>
+                    <a:lnR w="9525" cap="flat" cmpd="sng" algn="ctr">
+                      <a:solidFill>
+                        <a:srgbClr val="2E2E2E"/>
+                      </a:solidFill>
+                      <a:prstDash val="solid"/>
+                    </a:lnR>
+                    <a:lnT w="9525" cap="flat" cmpd="sng" algn="ctr">
+                      <a:solidFill>
+                        <a:srgbClr val="2E2E2E"/>
+                      </a:solidFill>
+                      <a:prstDash val="solid"/>
+                    </a:lnT>
+                    <a:lnB w="9525" cap="flat" cmpd="sng" algn="ctr">
+                      <a:solidFill>
+                        <a:srgbClr val="2E2E2E"/>
+                      </a:solidFill>
+                      <a:prstDash val="solid"/>
+                    </a:lnB>
+                  </a:tcPr>
+                </a:tc>
+                <a:tc>
+                  <a:txBody>
+                    <a:bodyPr/>
+                    <a:lstStyle/>
+                    <a:p>
+                      <a:pPr>
+                        <a:defRPr sz="1100" b="1">
+                          <a:solidFill>
+                            <a:srgbClr val="9A9A9A"/>
+                          </a:solidFill>
+                          <a:latin typeface="Consolas"/>
+                        </a:defRPr>
+                      </a:pPr>
+                      <a:r>
+                        <a:t>GNN EVOLUTIVO</a:t>
+                      </a:r>
+                    </a:p>
+                  </a:txBody>
+                  <a:tcPr>
+                    <a:solidFill>
+                      <a:srgbClr val="050505"/>
+                    </a:solidFill>
+                    <a:lnL w="9525" cap="flat" cmpd="sng" algn="ctr">
+                      <a:solidFill>
+                        <a:srgbClr val="2E2E2E"/>
+                      </a:solidFill>
+                      <a:prstDash val="solid"/>
+                    </a:lnL>
+                    <a:lnR w="9525" cap="flat" cmpd="sng" algn="ctr">
+                      <a:solidFill>
+                        <a:srgbClr val="2E2E2E"/>
+                      </a:solidFill>
+                      <a:prstDash val="solid"/>
+                    </a:lnR>
+                    <a:lnT w="9525" cap="flat" cmpd="sng" algn="ctr">
+                      <a:solidFill>
+                        <a:srgbClr val="2E2E2E"/>
+                      </a:solidFill>
+                      <a:prstDash val="solid"/>
+                    </a:lnT>
+                    <a:lnB w="9525" cap="flat" cmpd="sng" algn="ctr">
+                      <a:solidFill>
+                        <a:srgbClr val="2E2E2E"/>
+                      </a:solidFill>
+                      <a:prstDash val="solid"/>
+                    </a:lnB>
+                  </a:tcPr>
+                </a:tc>
+                <a:tc>
+                  <a:txBody>
+                    <a:bodyPr/>
+                    <a:lstStyle/>
+                    <a:p>
+                      <a:pPr>
+                        <a:defRPr sz="1100" b="1">
+                          <a:solidFill>
+                            <a:srgbClr val="9A9A9A"/>
+                          </a:solidFill>
+                          <a:latin typeface="Consolas"/>
+                        </a:defRPr>
+                      </a:pPr>
+                      <a:r>
+                        <a:t>PPO / SAC</a:t>
+                      </a:r>
+                    </a:p>
+                  </a:txBody>
+                  <a:tcPr>
+                    <a:solidFill>
+                      <a:srgbClr val="050505"/>
+                    </a:solidFill>
+                    <a:lnL w="9525" cap="flat" cmpd="sng" algn="ctr">
+                      <a:solidFill>
+                        <a:srgbClr val="2E2E2E"/>
+                      </a:solidFill>
+                      <a:prstDash val="solid"/>
+                    </a:lnL>
+                    <a:lnR w="9525" cap="flat" cmpd="sng" algn="ctr">
+                      <a:solidFill>
+                        <a:srgbClr val="2E2E2E"/>
+                      </a:solidFill>
+                      <a:prstDash val="solid"/>
+                    </a:lnR>
+                    <a:lnT w="9525" cap="flat" cmpd="sng" algn="ctr">
+                      <a:solidFill>
+                        <a:srgbClr val="2E2E2E"/>
+                      </a:solidFill>
+                      <a:prstDash val="solid"/>
+                    </a:lnT>
+                    <a:lnB w="9525" cap="flat" cmpd="sng" algn="ctr">
+                      <a:solidFill>
+                        <a:srgbClr val="2E2E2E"/>
+                      </a:solidFill>
+                      <a:prstDash val="solid"/>
+                    </a:lnB>
+                  </a:tcPr>
+                </a:tc>
+              </a:tr>
+              <a:tr h="384048">
+                <a:tc>
+                  <a:txBody>
+                    <a:bodyPr/>
+                    <a:lstStyle/>
+                    <a:p>
+                      <a:pPr>
+                        <a:defRPr sz="1300" b="1">
+                          <a:solidFill>
+                            <a:srgbClr val="F5F5F5"/>
+                          </a:solidFill>
+                          <a:latin typeface="Segoe UI"/>
+                        </a:defRPr>
+                      </a:pPr>
+                      <a:r>
+                        <a:t>Tempo por execução</a:t>
+                      </a:r>
+                    </a:p>
+                  </a:txBody>
+                  <a:tcPr>
+                    <a:solidFill>
+                      <a:srgbClr val="161616"/>
+                    </a:solidFill>
+                    <a:lnL w="9525" cap="flat" cmpd="sng" algn="ctr">
+                      <a:solidFill>
+                        <a:srgbClr val="2E2E2E"/>
+                      </a:solidFill>
+                      <a:prstDash val="solid"/>
+                    </a:lnL>
+                    <a:lnR w="9525" cap="flat" cmpd="sng" algn="ctr">
+                      <a:solidFill>
+                        <a:srgbClr val="2E2E2E"/>
+                      </a:solidFill>
+                      <a:prstDash val="solid"/>
+                    </a:lnR>
+                    <a:lnT w="9525" cap="flat" cmpd="sng" algn="ctr">
+                      <a:solidFill>
+                        <a:srgbClr val="2E2E2E"/>
+                      </a:solidFill>
+                      <a:prstDash val="solid"/>
+                    </a:lnT>
+                    <a:lnB w="9525" cap="flat" cmpd="sng" algn="ctr">
+                      <a:solidFill>
+                        <a:srgbClr val="2E2E2E"/>
+                      </a:solidFill>
+                      <a:prstDash val="solid"/>
+                    </a:lnB>
+                  </a:tcPr>
+                </a:tc>
+                <a:tc>
+                  <a:txBody>
+                    <a:bodyPr/>
+                    <a:lstStyle/>
+                    <a:p>
+                      <a:pPr>
+                        <a:defRPr sz="1300" b="0">
+                          <a:solidFill>
+                            <a:srgbClr val="E2E2E2"/>
+                          </a:solidFill>
+                          <a:latin typeface="Segoe UI"/>
+                        </a:defRPr>
+                      </a:pPr>
+                      <a:r>
+                        <a:t>195 min</a:t>
+                      </a:r>
+                    </a:p>
+                  </a:txBody>
+                  <a:tcPr>
+                    <a:solidFill>
+                      <a:srgbClr val="161616"/>
+                    </a:solidFill>
+                    <a:lnL w="9525" cap="flat" cmpd="sng" algn="ctr">
+                      <a:solidFill>
+                        <a:srgbClr val="2E2E2E"/>
+                      </a:solidFill>
+                      <a:prstDash val="solid"/>
+                    </a:lnL>
+                    <a:lnR w="9525" cap="flat" cmpd="sng" algn="ctr">
+                      <a:solidFill>
+                        <a:srgbClr val="2E2E2E"/>
+                      </a:solidFill>
+                      <a:prstDash val="solid"/>
+                    </a:lnR>
+                    <a:lnT w="9525" cap="flat" cmpd="sng" algn="ctr">
+                      <a:solidFill>
+                        <a:srgbClr val="2E2E2E"/>
+                      </a:solidFill>
+                      <a:prstDash val="solid"/>
+                    </a:lnT>
+                    <a:lnB w="9525" cap="flat" cmpd="sng" algn="ctr">
+                      <a:solidFill>
+                        <a:srgbClr val="2E2E2E"/>
+                      </a:solidFill>
+                      <a:prstDash val="solid"/>
+                    </a:lnB>
+                  </a:tcPr>
+                </a:tc>
+                <a:tc>
+                  <a:txBody>
+                    <a:bodyPr/>
+                    <a:lstStyle/>
+                    <a:p>
+                      <a:pPr>
+                        <a:defRPr sz="1300" b="0">
+                          <a:solidFill>
+                            <a:srgbClr val="E2E2E2"/>
+                          </a:solidFill>
+                          <a:latin typeface="Segoe UI"/>
+                        </a:defRPr>
+                      </a:pPr>
+                      <a:r>
+                        <a:t>48 min</a:t>
+                      </a:r>
+                    </a:p>
+                  </a:txBody>
+                  <a:tcPr>
+                    <a:solidFill>
+                      <a:srgbClr val="161616"/>
+                    </a:solidFill>
+                    <a:lnL w="9525" cap="flat" cmpd="sng" algn="ctr">
+                      <a:solidFill>
+                        <a:srgbClr val="2E2E2E"/>
+                      </a:solidFill>
+                      <a:prstDash val="solid"/>
+                    </a:lnL>
+                    <a:lnR w="9525" cap="flat" cmpd="sng" algn="ctr">
+                      <a:solidFill>
+                        <a:srgbClr val="2E2E2E"/>
+                      </a:solidFill>
+                      <a:prstDash val="solid"/>
+                    </a:lnR>
+                    <a:lnT w="9525" cap="flat" cmpd="sng" algn="ctr">
+                      <a:solidFill>
+                        <a:srgbClr val="2E2E2E"/>
+                      </a:solidFill>
+                      <a:prstDash val="solid"/>
+                    </a:lnT>
+                    <a:lnB w="9525" cap="flat" cmpd="sng" algn="ctr">
+                      <a:solidFill>
+                        <a:srgbClr val="2E2E2E"/>
+                      </a:solidFill>
+                      <a:prstDash val="solid"/>
+                    </a:lnB>
+                  </a:tcPr>
+                </a:tc>
+              </a:tr>
+              <a:tr h="384048">
+                <a:tc>
+                  <a:txBody>
+                    <a:bodyPr/>
+                    <a:lstStyle/>
+                    <a:p>
+                      <a:pPr>
+                        <a:defRPr sz="1300" b="1">
+                          <a:solidFill>
+                            <a:srgbClr val="F5F5F5"/>
+                          </a:solidFill>
+                          <a:latin typeface="Segoe UI"/>
+                        </a:defRPr>
+                      </a:pPr>
+                      <a:r>
+                        <a:t>Paralelismo</a:t>
+                      </a:r>
+                    </a:p>
+                  </a:txBody>
+                  <a:tcPr>
+                    <a:solidFill>
+                      <a:srgbClr val="0E0E0E"/>
+                    </a:solidFill>
+                    <a:lnL w="9525" cap="flat" cmpd="sng" algn="ctr">
+                      <a:solidFill>
+                        <a:srgbClr val="2E2E2E"/>
+                      </a:solidFill>
+                      <a:prstDash val="solid"/>
+                    </a:lnL>
+                    <a:lnR w="9525" cap="flat" cmpd="sng" algn="ctr">
+                      <a:solidFill>
+                        <a:srgbClr val="2E2E2E"/>
+                      </a:solidFill>
+                      <a:prstDash val="solid"/>
+                    </a:lnR>
+                    <a:lnT w="9525" cap="flat" cmpd="sng" algn="ctr">
+                      <a:solidFill>
+                        <a:srgbClr val="2E2E2E"/>
+                      </a:solidFill>
+                      <a:prstDash val="solid"/>
+                    </a:lnT>
+                    <a:lnB w="9525" cap="flat" cmpd="sng" algn="ctr">
+                      <a:solidFill>
+                        <a:srgbClr val="2E2E2E"/>
+                      </a:solidFill>
+                      <a:prstDash val="solid"/>
+                    </a:lnB>
+                  </a:tcPr>
+                </a:tc>
+                <a:tc>
+                  <a:txBody>
+                    <a:bodyPr/>
+                    <a:lstStyle/>
+                    <a:p>
+                      <a:pPr>
+                        <a:defRPr sz="1300" b="0">
+                          <a:solidFill>
+                            <a:srgbClr val="E2E2E2"/>
+                          </a:solidFill>
+                          <a:latin typeface="Segoe UI"/>
+                        </a:defRPr>
+                      </a:pPr>
+                      <a:r>
+                        <a:t>população de 30 genomas</a:t>
+                      </a:r>
+                    </a:p>
+                  </a:txBody>
+                  <a:tcPr>
+                    <a:solidFill>
+                      <a:srgbClr val="0E0E0E"/>
+                    </a:solidFill>
+                    <a:lnL w="9525" cap="flat" cmpd="sng" algn="ctr">
+                      <a:solidFill>
+                        <a:srgbClr val="2E2E2E"/>
+                      </a:solidFill>
+                      <a:prstDash val="solid"/>
+                    </a:lnL>
+                    <a:lnR w="9525" cap="flat" cmpd="sng" algn="ctr">
+                      <a:solidFill>
+                        <a:srgbClr val="2E2E2E"/>
+                      </a:solidFill>
+                      <a:prstDash val="solid"/>
+                    </a:lnR>
+                    <a:lnT w="9525" cap="flat" cmpd="sng" algn="ctr">
+                      <a:solidFill>
+                        <a:srgbClr val="2E2E2E"/>
+                      </a:solidFill>
+                      <a:prstDash val="solid"/>
+                    </a:lnT>
+                    <a:lnB w="9525" cap="flat" cmpd="sng" algn="ctr">
+                      <a:solidFill>
+                        <a:srgbClr val="2E2E2E"/>
+                      </a:solidFill>
+                      <a:prstDash val="solid"/>
+                    </a:lnB>
+                  </a:tcPr>
+                </a:tc>
+                <a:tc>
+                  <a:txBody>
+                    <a:bodyPr/>
+                    <a:lstStyle/>
+                    <a:p>
+                      <a:pPr>
+                        <a:defRPr sz="1300" b="0">
+                          <a:solidFill>
+                            <a:srgbClr val="E2E2E2"/>
+                          </a:solidFill>
+                          <a:latin typeface="Segoe UI"/>
+                        </a:defRPr>
+                      </a:pPr>
+                      <a:r>
+                        <a:t>16 ambientes vetorizados</a:t>
+                      </a:r>
+                    </a:p>
+                  </a:txBody>
+                  <a:tcPr>
+                    <a:solidFill>
+                      <a:srgbClr val="0E0E0E"/>
+                    </a:solidFill>
+                    <a:lnL w="9525" cap="flat" cmpd="sng" algn="ctr">
+                      <a:solidFill>
+                        <a:srgbClr val="2E2E2E"/>
+                      </a:solidFill>
+                      <a:prstDash val="solid"/>
+                    </a:lnL>
+                    <a:lnR w="9525" cap="flat" cmpd="sng" algn="ctr">
+                      <a:solidFill>
+                        <a:srgbClr val="2E2E2E"/>
+                      </a:solidFill>
+                      <a:prstDash val="solid"/>
+                    </a:lnR>
+                    <a:lnT w="9525" cap="flat" cmpd="sng" algn="ctr">
+                      <a:solidFill>
+                        <a:srgbClr val="2E2E2E"/>
+                      </a:solidFill>
+                      <a:prstDash val="solid"/>
+                    </a:lnT>
+                    <a:lnB w="9525" cap="flat" cmpd="sng" algn="ctr">
+                      <a:solidFill>
+                        <a:srgbClr val="2E2E2E"/>
+                      </a:solidFill>
+                      <a:prstDash val="solid"/>
+                    </a:lnB>
+                  </a:tcPr>
+                </a:tc>
+              </a:tr>
+              <a:tr h="384048">
+                <a:tc>
+                  <a:txBody>
+                    <a:bodyPr/>
+                    <a:lstStyle/>
+                    <a:p>
+                      <a:pPr>
+                        <a:defRPr sz="1300" b="1">
+                          <a:solidFill>
+                            <a:srgbClr val="F5F5F5"/>
+                          </a:solidFill>
+                          <a:latin typeface="Segoe UI"/>
+                        </a:defRPr>
+                      </a:pPr>
+                      <a:r>
+                        <a:t>Núcleos-hora por execução</a:t>
+                      </a:r>
+                    </a:p>
+                  </a:txBody>
+                  <a:tcPr>
+                    <a:solidFill>
+                      <a:srgbClr val="161616"/>
+                    </a:solidFill>
+                    <a:lnL w="9525" cap="flat" cmpd="sng" algn="ctr">
+                      <a:solidFill>
+                        <a:srgbClr val="2E2E2E"/>
+                      </a:solidFill>
+                      <a:prstDash val="solid"/>
+                    </a:lnL>
+                    <a:lnR w="9525" cap="flat" cmpd="sng" algn="ctr">
+                      <a:solidFill>
+                        <a:srgbClr val="2E2E2E"/>
+                      </a:solidFill>
+                      <a:prstDash val="solid"/>
+                    </a:lnR>
+                    <a:lnT w="9525" cap="flat" cmpd="sng" algn="ctr">
+                      <a:solidFill>
+                        <a:srgbClr val="2E2E2E"/>
+                      </a:solidFill>
+                      <a:prstDash val="solid"/>
+                    </a:lnT>
+                    <a:lnB w="9525" cap="flat" cmpd="sng" algn="ctr">
+                      <a:solidFill>
+                        <a:srgbClr val="2E2E2E"/>
+                      </a:solidFill>
+                      <a:prstDash val="solid"/>
+                    </a:lnB>
+                  </a:tcPr>
+                </a:tc>
+                <a:tc>
+                  <a:txBody>
+                    <a:bodyPr/>
+                    <a:lstStyle/>
+                    <a:p>
+                      <a:pPr>
+                        <a:defRPr sz="1300" b="0">
+                          <a:solidFill>
+                            <a:srgbClr val="E2E2E2"/>
+                          </a:solidFill>
+                          <a:latin typeface="Consolas"/>
+                        </a:defRPr>
+                      </a:pPr>
+                      <a:r>
+                        <a:t>97,6</a:t>
+                      </a:r>
+                    </a:p>
+                  </a:txBody>
+                  <a:tcPr>
+                    <a:solidFill>
+                      <a:srgbClr val="161616"/>
+                    </a:solidFill>
+                    <a:lnL w="9525" cap="flat" cmpd="sng" algn="ctr">
+                      <a:solidFill>
+                        <a:srgbClr val="2E2E2E"/>
+                      </a:solidFill>
+                      <a:prstDash val="solid"/>
+                    </a:lnL>
+                    <a:lnR w="9525" cap="flat" cmpd="sng" algn="ctr">
+                      <a:solidFill>
+                        <a:srgbClr val="2E2E2E"/>
+                      </a:solidFill>
+                      <a:prstDash val="solid"/>
+                    </a:lnR>
+                    <a:lnT w="9525" cap="flat" cmpd="sng" algn="ctr">
+                      <a:solidFill>
+                        <a:srgbClr val="2E2E2E"/>
+                      </a:solidFill>
+                      <a:prstDash val="solid"/>
+                    </a:lnT>
+                    <a:lnB w="9525" cap="flat" cmpd="sng" algn="ctr">
+                      <a:solidFill>
+                        <a:srgbClr val="2E2E2E"/>
+                      </a:solidFill>
+                      <a:prstDash val="solid"/>
+                    </a:lnB>
+                  </a:tcPr>
+                </a:tc>
+                <a:tc>
+                  <a:txBody>
+                    <a:bodyPr/>
+                    <a:lstStyle/>
+                    <a:p>
+                      <a:pPr>
+                        <a:defRPr sz="1300" b="0">
+                          <a:solidFill>
+                            <a:srgbClr val="E2E2E2"/>
+                          </a:solidFill>
+                          <a:latin typeface="Consolas"/>
+                        </a:defRPr>
+                      </a:pPr>
+                      <a:r>
+                        <a:t>12,8</a:t>
+                      </a:r>
+                    </a:p>
+                  </a:txBody>
+                  <a:tcPr>
+                    <a:solidFill>
+                      <a:srgbClr val="161616"/>
+                    </a:solidFill>
+                    <a:lnL w="9525" cap="flat" cmpd="sng" algn="ctr">
+                      <a:solidFill>
+                        <a:srgbClr val="2E2E2E"/>
+                      </a:solidFill>
+                      <a:prstDash val="solid"/>
+                    </a:lnL>
+                    <a:lnR w="9525" cap="flat" cmpd="sng" algn="ctr">
+                      <a:solidFill>
+                        <a:srgbClr val="2E2E2E"/>
+                      </a:solidFill>
+                      <a:prstDash val="solid"/>
+                    </a:lnR>
+                    <a:lnT w="9525" cap="flat" cmpd="sng" algn="ctr">
+                      <a:solidFill>
+                        <a:srgbClr val="2E2E2E"/>
+                      </a:solidFill>
+                      <a:prstDash val="solid"/>
+                    </a:lnT>
+                    <a:lnB w="9525" cap="flat" cmpd="sng" algn="ctr">
+                      <a:solidFill>
+                        <a:srgbClr val="2E2E2E"/>
+                      </a:solidFill>
+                      <a:prstDash val="solid"/>
+                    </a:lnB>
+                  </a:tcPr>
+                </a:tc>
+              </a:tr>
+              <a:tr h="384048">
+                <a:tc>
+                  <a:txBody>
+                    <a:bodyPr/>
+                    <a:lstStyle/>
+                    <a:p>
+                      <a:pPr>
+                        <a:defRPr sz="1300" b="1">
+                          <a:solidFill>
+                            <a:srgbClr val="F5F5F5"/>
+                          </a:solidFill>
+                          <a:latin typeface="Segoe UI"/>
+                        </a:defRPr>
+                      </a:pPr>
+                      <a:r>
+                        <a:t>Rácio</a:t>
+                      </a:r>
+                    </a:p>
+                  </a:txBody>
+                  <a:tcPr>
+                    <a:solidFill>
+                      <a:srgbClr val="0E0E0E"/>
+                    </a:solidFill>
+                    <a:lnL w="9525" cap="flat" cmpd="sng" algn="ctr">
+                      <a:solidFill>
+                        <a:srgbClr val="2E2E2E"/>
+                      </a:solidFill>
+                      <a:prstDash val="solid"/>
+                    </a:lnL>
+                    <a:lnR w="9525" cap="flat" cmpd="sng" algn="ctr">
+                      <a:solidFill>
+                        <a:srgbClr val="2E2E2E"/>
+                      </a:solidFill>
+                      <a:prstDash val="solid"/>
+                    </a:lnR>
+                    <a:lnT w="9525" cap="flat" cmpd="sng" algn="ctr">
+                      <a:solidFill>
+                        <a:srgbClr val="2E2E2E"/>
+                      </a:solidFill>
+                      <a:prstDash val="solid"/>
+                    </a:lnT>
+                    <a:lnB w="9525" cap="flat" cmpd="sng" algn="ctr">
+                      <a:solidFill>
+                        <a:srgbClr val="2E2E2E"/>
+                      </a:solidFill>
+                      <a:prstDash val="solid"/>
+                    </a:lnB>
+                  </a:tcPr>
+                </a:tc>
+                <a:tc>
+                  <a:txBody>
+                    <a:bodyPr/>
+                    <a:lstStyle/>
+                    <a:p>
+                      <a:pPr>
+                        <a:defRPr sz="1300" b="0">
+                          <a:solidFill>
+                            <a:srgbClr val="E2E2E2"/>
+                          </a:solidFill>
+                          <a:latin typeface="Segoe UI"/>
+                        </a:defRPr>
+                      </a:pPr>
+                      <a:r>
+                        <a:t>≈ 7,6× mais caro  (≈ 8×)</a:t>
+                      </a:r>
+                    </a:p>
+                  </a:txBody>
+                  <a:tcPr>
+                    <a:solidFill>
+                      <a:srgbClr val="0E0E0E"/>
+                    </a:solidFill>
+                    <a:lnL w="9525" cap="flat" cmpd="sng" algn="ctr">
+                      <a:solidFill>
+                        <a:srgbClr val="2E2E2E"/>
+                      </a:solidFill>
+                      <a:prstDash val="solid"/>
+                    </a:lnL>
+                    <a:lnR w="9525" cap="flat" cmpd="sng" algn="ctr">
+                      <a:solidFill>
+                        <a:srgbClr val="2E2E2E"/>
+                      </a:solidFill>
+                      <a:prstDash val="solid"/>
+                    </a:lnR>
+                    <a:lnT w="9525" cap="flat" cmpd="sng" algn="ctr">
+                      <a:solidFill>
+                        <a:srgbClr val="2E2E2E"/>
+                      </a:solidFill>
+                      <a:prstDash val="solid"/>
+                    </a:lnT>
+                    <a:lnB w="9525" cap="flat" cmpd="sng" algn="ctr">
+                      <a:solidFill>
+                        <a:srgbClr val="2E2E2E"/>
+                      </a:solidFill>
+                      <a:prstDash val="solid"/>
+                    </a:lnB>
+                  </a:tcPr>
+                </a:tc>
+                <a:tc>
+                  <a:txBody>
+                    <a:bodyPr/>
+                    <a:lstStyle/>
+                    <a:p>
+                      <a:pPr>
+                        <a:defRPr sz="1300" b="0">
+                          <a:solidFill>
+                            <a:srgbClr val="E2E2E2"/>
+                          </a:solidFill>
+                          <a:latin typeface="Segoe UI"/>
+                        </a:defRPr>
+                      </a:pPr>
+                      <a:r>
+                        <a:t>—</a:t>
+                      </a:r>
+                    </a:p>
+                  </a:txBody>
+                  <a:tcPr>
+                    <a:solidFill>
+                      <a:srgbClr val="0E0E0E"/>
+                    </a:solidFill>
+                    <a:lnL w="9525" cap="flat" cmpd="sng" algn="ctr">
+                      <a:solidFill>
+                        <a:srgbClr val="2E2E2E"/>
+                      </a:solidFill>
+                      <a:prstDash val="solid"/>
+                    </a:lnL>
+                    <a:lnR w="9525" cap="flat" cmpd="sng" algn="ctr">
+                      <a:solidFill>
+                        <a:srgbClr val="2E2E2E"/>
+                      </a:solidFill>
+                      <a:prstDash val="solid"/>
+                    </a:lnR>
+                    <a:lnT w="9525" cap="flat" cmpd="sng" algn="ctr">
+                      <a:solidFill>
+                        <a:srgbClr val="2E2E2E"/>
+                      </a:solidFill>
+                      <a:prstDash val="solid"/>
+                    </a:lnT>
+                    <a:lnB w="9525" cap="flat" cmpd="sng" algn="ctr">
+                      <a:solidFill>
+                        <a:srgbClr val="2E2E2E"/>
+                      </a:solidFill>
+                      <a:prstDash val="solid"/>
+                    </a:lnB>
+                  </a:tcPr>
+                </a:tc>
+              </a:tr>
+            </a:tbl>
+          </a:graphicData>
+        </a:graphic>
+      </p:graphicFrame>
+      <p:cxnSp>
+        <p:nvCxnSpPr>
+          <p:cNvPr id="9" name="Connector 8"/>
+          <p:cNvCxnSpPr/>
+          <p:nvPr/>
+        </p:nvCxnSpPr>
+        <p:spPr>
+          <a:xfrm>
+            <a:off x="548640" y="6355080"/>
+            <a:ext cx="11094415" cy="0"/>
+          </a:xfrm>
+          <a:prstGeom prst="line">
+            <a:avLst/>
+          </a:prstGeom>
+          <a:ln w="9525">
+            <a:solidFill>
+              <a:srgbClr val="2E2E2E"/>
+            </a:solidFill>
+          </a:ln>
+        </p:spPr>
+        <p:style>
+          <a:lnRef idx="2">
+            <a:schemeClr val="accent1"/>
+          </a:lnRef>
+          <a:fillRef idx="0">
+            <a:schemeClr val="accent1"/>
+          </a:fillRef>
+          <a:effectRef idx="1">
+            <a:schemeClr val="accent1"/>
+          </a:effectRef>
+          <a:fontRef idx="minor">
+            <a:schemeClr val="tx1"/>
+          </a:fontRef>
+        </p:style>
+      </p:cxnSp>
+      <p:sp>
+        <p:nvSpPr>
+          <p:cNvPr id="10" name="TextBox 9"/>
+          <p:cNvSpPr txBox="1"/>
+          <p:nvPr/>
+        </p:nvSpPr>
+        <p:spPr>
+          <a:xfrm>
+            <a:off x="548640" y="6400800"/>
+            <a:ext cx="8229600" cy="365760"/>
+          </a:xfrm>
+          <a:prstGeom prst="rect">
+            <a:avLst/>
+          </a:prstGeom>
+          <a:noFill/>
+        </p:spPr>
+        <p:txBody>
+          <a:bodyPr wrap="square" anchor="t">
+            <a:spAutoFit/>
+          </a:bodyPr>
+          <a:lstStyle/>
+          <a:p>
+            <a:pPr algn="l">
+              <a:spcAft>
+                <a:spcPts val="600"/>
+              </a:spcAft>
+            </a:pPr>
+            <a:r>
+              <a:rPr sz="1000" b="0">
+                <a:solidFill>
+                  <a:srgbClr val="9A9A9A"/>
+                </a:solidFill>
+                <a:latin typeface="Segoe UI"/>
+              </a:rPr>
+              <a:t>Slide de reserva · não faz parte da apresentação</a:t>
+            </a:r>
+          </a:p>
+        </p:txBody>
+      </p:sp>
+      <p:sp>
+        <p:nvSpPr>
+          <p:cNvPr id="11" name="TextBox 10"/>
+          <p:cNvSpPr txBox="1"/>
+          <p:nvPr/>
+        </p:nvSpPr>
+        <p:spPr>
+          <a:xfrm>
+            <a:off x="10728655" y="6400800"/>
+            <a:ext cx="914400" cy="365760"/>
+          </a:xfrm>
+          <a:prstGeom prst="rect">
+            <a:avLst/>
+          </a:prstGeom>
+          <a:noFill/>
+        </p:spPr>
+        <p:txBody>
+          <a:bodyPr wrap="square" anchor="t">
+            <a:spAutoFit/>
+          </a:bodyPr>
+          <a:lstStyle/>
+          <a:p>
+            <a:pPr algn="r">
+              <a:spcAft>
+                <a:spcPts val="600"/>
+              </a:spcAft>
+            </a:pPr>
+            <a:r>
+              <a:rPr sz="1000" b="0">
+                <a:solidFill>
+                  <a:srgbClr val="9A9A9A"/>
+                </a:solidFill>
+                <a:latin typeface="Consolas"/>
+              </a:rPr>
+              <a:t>A4</a:t>
+            </a:r>
+          </a:p>
+        </p:txBody>
+      </p:sp>
+    </p:spTree>
+  </p:cSld>
+  <p:clrMapOvr>
+    <a:masterClrMapping/>
+  </p:clrMapOvr>
+</p:sld>
+</file>
+
+<file path=ppt/slides/slide24.xml><?xml version="1.0" encoding="utf-8"?>
+<p:sld xmlns:a="http://schemas.openxmlformats.org/drawingml/2006/main" xmlns:p="http://schemas.openxmlformats.org/presentationml/2006/main" xmlns:r="http://schemas.openxmlformats.org/officeDocument/2006/relationships">
+  <p:cSld>
+    <p:spTree>
+      <p:nvGrpSpPr>
+        <p:cNvPr id="1" name=""/>
+        <p:cNvGrpSpPr/>
+        <p:nvPr/>
+      </p:nvGrpSpPr>
+      <p:grpSpPr/>
+      <p:sp>
+        <p:nvSpPr>
+          <p:cNvPr id="2" name="Rectangle 1"/>
+          <p:cNvSpPr/>
+          <p:nvPr/>
+        </p:nvSpPr>
+        <p:spPr>
+          <a:xfrm>
+            <a:off x="0" y="0"/>
+            <a:ext cx="12191695" cy="6858000"/>
+          </a:xfrm>
+          <a:prstGeom prst="rect">
+            <a:avLst/>
+          </a:prstGeom>
+          <a:solidFill>
+            <a:srgbClr val="050505"/>
+          </a:solidFill>
+          <a:ln>
+            <a:noFill/>
+          </a:ln>
+          <a:effectLst/>
+        </p:spPr>
+        <p:style>
+          <a:lnRef idx="1">
+            <a:schemeClr val="accent1"/>
+          </a:lnRef>
+          <a:fillRef idx="3">
+            <a:schemeClr val="accent1"/>
+          </a:fillRef>
+          <a:effectRef idx="2">
+            <a:schemeClr val="accent1"/>
+          </a:effectRef>
+          <a:fontRef idx="minor">
+            <a:schemeClr val="lt1"/>
+          </a:fontRef>
+        </p:style>
+        <p:txBody>
+          <a:bodyPr rtlCol="0" anchor="ctr"/>
+          <a:lstStyle/>
+          <a:p>
+            <a:pPr algn="ctr"/>
+          </a:p>
+        </p:txBody>
+      </p:sp>
+      <p:sp>
+        <p:nvSpPr>
+          <p:cNvPr id="3" name="TextBox 2"/>
+          <p:cNvSpPr txBox="1"/>
+          <p:nvPr/>
+        </p:nvSpPr>
+        <p:spPr>
+          <a:xfrm>
+            <a:off x="548640" y="292608"/>
+            <a:ext cx="11094415" cy="777240"/>
+          </a:xfrm>
+          <a:prstGeom prst="rect">
+            <a:avLst/>
+          </a:prstGeom>
+          <a:noFill/>
+        </p:spPr>
+        <p:txBody>
+          <a:bodyPr wrap="square" anchor="t">
+            <a:spAutoFit/>
+          </a:bodyPr>
+          <a:lstStyle/>
+          <a:p>
+            <a:pPr algn="l">
+              <a:spcAft>
+                <a:spcPts val="600"/>
+              </a:spcAft>
+            </a:pPr>
+            <a:r>
+              <a:rPr sz="3000" b="1">
+                <a:solidFill>
+                  <a:srgbClr val="F5F5F5"/>
+                </a:solidFill>
+                <a:latin typeface="Segoe UI Semibold"/>
+              </a:rPr>
+              <a:t>Reserva · O Muro em U por dentro</a:t>
+            </a:r>
+          </a:p>
+        </p:txBody>
+      </p:sp>
+      <p:sp>
+        <p:nvSpPr>
+          <p:cNvPr id="4" name="TextBox 3"/>
+          <p:cNvSpPr txBox="1"/>
+          <p:nvPr/>
+        </p:nvSpPr>
+        <p:spPr>
+          <a:xfrm>
+            <a:off x="548640" y="932688"/>
+            <a:ext cx="11094415" cy="457200"/>
+          </a:xfrm>
+          <a:prstGeom prst="rect">
+            <a:avLst/>
+          </a:prstGeom>
+          <a:noFill/>
+        </p:spPr>
+        <p:txBody>
+          <a:bodyPr wrap="square" anchor="t">
+            <a:spAutoFit/>
+          </a:bodyPr>
+          <a:lstStyle/>
+          <a:p>
+            <a:pPr algn="l">
+              <a:spcAft>
+                <a:spcPts val="600"/>
+              </a:spcAft>
+            </a:pPr>
+            <a:r>
+              <a:rPr sz="1500" b="0">
+                <a:solidFill>
+                  <a:srgbClr val="9A9A9A"/>
+                </a:solidFill>
+                <a:latin typeface="Segoe UI"/>
+              </a:rPr>
+              <a:t>ocupação média do enxame ao longo do episódio — modelos campeões, 6 episódios cada</a:t>
+            </a:r>
+          </a:p>
+        </p:txBody>
+      </p:sp>
+      <p:cxnSp>
+        <p:nvCxnSpPr>
+          <p:cNvPr id="5" name="Connector 4"/>
+          <p:cNvCxnSpPr/>
+          <p:nvPr/>
+        </p:nvCxnSpPr>
+        <p:spPr>
+          <a:xfrm>
+            <a:off x="548640" y="1371600"/>
+            <a:ext cx="11094415" cy="0"/>
+          </a:xfrm>
+          <a:prstGeom prst="line">
+            <a:avLst/>
+          </a:prstGeom>
+          <a:ln w="9525">
+            <a:solidFill>
+              <a:srgbClr val="2E2E2E"/>
+            </a:solidFill>
+          </a:ln>
+        </p:spPr>
+        <p:style>
+          <a:lnRef idx="2">
+            <a:schemeClr val="accent1"/>
+          </a:lnRef>
+          <a:fillRef idx="0">
+            <a:schemeClr val="accent1"/>
+          </a:fillRef>
+          <a:effectRef idx="1">
+            <a:schemeClr val="accent1"/>
+          </a:effectRef>
+          <a:fontRef idx="minor">
+            <a:schemeClr val="tx1"/>
+          </a:fontRef>
+        </p:style>
+      </p:cxnSp>
+      <p:cxnSp>
+        <p:nvCxnSpPr>
+          <p:cNvPr id="6" name="Connector 5"/>
+          <p:cNvCxnSpPr/>
+          <p:nvPr/>
+        </p:nvCxnSpPr>
+        <p:spPr>
+          <a:xfrm>
+            <a:off x="548640" y="1371600"/>
+            <a:ext cx="1005840" cy="0"/>
+          </a:xfrm>
+          <a:prstGeom prst="line">
+            <a:avLst/>
+          </a:prstGeom>
+          <a:ln w="31750">
+            <a:solidFill>
+              <a:srgbClr val="F5F5F5"/>
+            </a:solidFill>
+          </a:ln>
+        </p:spPr>
+        <p:style>
+          <a:lnRef idx="2">
+            <a:schemeClr val="accent1"/>
+          </a:lnRef>
+          <a:fillRef idx="0">
+            <a:schemeClr val="accent1"/>
+          </a:fillRef>
+          <a:effectRef idx="1">
+            <a:schemeClr val="accent1"/>
+          </a:effectRef>
+          <a:fontRef idx="minor">
+            <a:schemeClr val="tx1"/>
+          </a:fontRef>
+        </p:style>
+      </p:cxnSp>
+      <p:sp>
+        <p:nvSpPr>
+          <p:cNvPr id="7" name="TextBox 6"/>
+          <p:cNvSpPr txBox="1"/>
+          <p:nvPr/>
+        </p:nvSpPr>
+        <p:spPr>
+          <a:xfrm>
+            <a:off x="548640" y="1536192"/>
+            <a:ext cx="3611880" cy="292608"/>
+          </a:xfrm>
+          <a:prstGeom prst="rect">
+            <a:avLst/>
+          </a:prstGeom>
+          <a:noFill/>
+        </p:spPr>
+        <p:txBody>
+          <a:bodyPr wrap="square" anchor="t">
+            <a:spAutoFit/>
+          </a:bodyPr>
+          <a:lstStyle/>
+          <a:p>
+            <a:pPr algn="ctr">
+              <a:spcAft>
+                <a:spcPts val="600"/>
+              </a:spcAft>
+            </a:pPr>
+            <a:r>
+              <a:rPr sz="1500" b="1">
+                <a:solidFill>
+                  <a:srgbClr val="2FB583"/>
+                </a:solidFill>
+                <a:latin typeface="Segoe UI"/>
+              </a:rPr>
+              <a:t>GNN evolutivo</a:t>
+            </a:r>
+          </a:p>
+        </p:txBody>
+      </p:sp>
+      <p:sp>
+        <p:nvSpPr>
+          <p:cNvPr id="8" name="Rounded Rectangle 7"/>
+          <p:cNvSpPr/>
+          <p:nvPr/>
+        </p:nvSpPr>
+        <p:spPr>
+          <a:xfrm>
+            <a:off x="548640" y="1998534"/>
+            <a:ext cx="3611879" cy="3180969"/>
+          </a:xfrm>
+          <a:prstGeom prst="roundRect">
+            <a:avLst>
+              <a:gd name="adj" fmla="val 2491"/>
+            </a:avLst>
+          </a:prstGeom>
+          <a:solidFill>
+            <a:srgbClr val="FFFFFF"/>
+          </a:solidFill>
+          <a:ln w="9525">
+            <a:solidFill>
+              <a:srgbClr val="2E2E2E"/>
+            </a:solidFill>
+          </a:ln>
+          <a:effectLst/>
+        </p:spPr>
+        <p:style>
+          <a:lnRef idx="1">
+            <a:schemeClr val="accent1"/>
+          </a:lnRef>
+          <a:fillRef idx="3">
+            <a:schemeClr val="accent1"/>
+          </a:fillRef>
+          <a:effectRef idx="2">
+            <a:schemeClr val="accent1"/>
+          </a:effectRef>
+          <a:fontRef idx="minor">
+            <a:schemeClr val="lt1"/>
+          </a:fontRef>
+        </p:style>
+        <p:txBody>
+          <a:bodyPr rtlCol="0" anchor="ctr"/>
+          <a:lstStyle/>
+          <a:p>
+            <a:pPr algn="ctr"/>
+          </a:p>
+        </p:txBody>
+      </p:sp>
+      <p:pic>
+        <p:nvPicPr>
+          <p:cNvPr id="9" name="Picture 8" descr="heatmap_ocupacao_gnn_u_wall.png"/>
+          <p:cNvPicPr>
+            <a:picLocks noChangeAspect="1"/>
+          </p:cNvPicPr>
+          <p:nvPr/>
+        </p:nvPicPr>
+        <p:blipFill>
+          <a:blip r:embed="rId2"/>
+          <a:stretch>
+            <a:fillRect/>
+          </a:stretch>
+        </p:blipFill>
+        <p:spPr>
+          <a:xfrm>
+            <a:off x="630936" y="2080830"/>
+            <a:ext cx="3447287" cy="3016377"/>
+          </a:xfrm>
+          <a:prstGeom prst="rect">
+            <a:avLst/>
+          </a:prstGeom>
+        </p:spPr>
+      </p:pic>
+      <p:sp>
+        <p:nvSpPr>
+          <p:cNvPr id="10" name="TextBox 9"/>
+          <p:cNvSpPr txBox="1"/>
+          <p:nvPr/>
+        </p:nvSpPr>
+        <p:spPr>
+          <a:xfrm>
+            <a:off x="4288536" y="1536192"/>
+            <a:ext cx="3611880" cy="292608"/>
+          </a:xfrm>
+          <a:prstGeom prst="rect">
+            <a:avLst/>
+          </a:prstGeom>
+          <a:noFill/>
+        </p:spPr>
+        <p:txBody>
+          <a:bodyPr wrap="square" anchor="t">
+            <a:spAutoFit/>
+          </a:bodyPr>
+          <a:lstStyle/>
+          <a:p>
+            <a:pPr algn="ctr">
+              <a:spcAft>
+                <a:spcPts val="600"/>
+              </a:spcAft>
+            </a:pPr>
+            <a:r>
+              <a:rPr sz="1500" b="1">
+                <a:solidFill>
+                  <a:srgbClr val="EF7850"/>
+                </a:solidFill>
+                <a:latin typeface="Segoe UI"/>
+              </a:rPr>
+              <a:t>PPO</a:t>
+            </a:r>
+          </a:p>
+        </p:txBody>
+      </p:sp>
+      <p:sp>
+        <p:nvSpPr>
+          <p:cNvPr id="11" name="Rounded Rectangle 10"/>
+          <p:cNvSpPr/>
+          <p:nvPr/>
+        </p:nvSpPr>
+        <p:spPr>
+          <a:xfrm>
+            <a:off x="4288536" y="1998534"/>
+            <a:ext cx="3611879" cy="3180969"/>
+          </a:xfrm>
+          <a:prstGeom prst="roundRect">
+            <a:avLst>
+              <a:gd name="adj" fmla="val 2491"/>
+            </a:avLst>
+          </a:prstGeom>
+          <a:solidFill>
+            <a:srgbClr val="FFFFFF"/>
+          </a:solidFill>
+          <a:ln w="9525">
+            <a:solidFill>
+              <a:srgbClr val="2E2E2E"/>
+            </a:solidFill>
+          </a:ln>
+          <a:effectLst/>
+        </p:spPr>
+        <p:style>
+          <a:lnRef idx="1">
+            <a:schemeClr val="accent1"/>
+          </a:lnRef>
+          <a:fillRef idx="3">
+            <a:schemeClr val="accent1"/>
+          </a:fillRef>
+          <a:effectRef idx="2">
+            <a:schemeClr val="accent1"/>
+          </a:effectRef>
+          <a:fontRef idx="minor">
+            <a:schemeClr val="lt1"/>
+          </a:fontRef>
+        </p:style>
+        <p:txBody>
+          <a:bodyPr rtlCol="0" anchor="ctr"/>
+          <a:lstStyle/>
+          <a:p>
+            <a:pPr algn="ctr"/>
+          </a:p>
+        </p:txBody>
+      </p:sp>
+      <p:pic>
+        <p:nvPicPr>
+          <p:cNvPr id="12" name="Picture 11" descr="heatmap_ocupacao_ppo_u_wall.png"/>
+          <p:cNvPicPr>
+            <a:picLocks noChangeAspect="1"/>
+          </p:cNvPicPr>
+          <p:nvPr/>
+        </p:nvPicPr>
+        <p:blipFill>
+          <a:blip r:embed="rId3"/>
+          <a:stretch>
+            <a:fillRect/>
+          </a:stretch>
+        </p:blipFill>
+        <p:spPr>
+          <a:xfrm>
+            <a:off x="4370832" y="2080830"/>
+            <a:ext cx="3447287" cy="3016377"/>
+          </a:xfrm>
+          <a:prstGeom prst="rect">
+            <a:avLst/>
+          </a:prstGeom>
+        </p:spPr>
+      </p:pic>
+      <p:sp>
+        <p:nvSpPr>
+          <p:cNvPr id="13" name="TextBox 12"/>
+          <p:cNvSpPr txBox="1"/>
+          <p:nvPr/>
+        </p:nvSpPr>
+        <p:spPr>
+          <a:xfrm>
+            <a:off x="8028432" y="1536192"/>
+            <a:ext cx="3611880" cy="292608"/>
+          </a:xfrm>
+          <a:prstGeom prst="rect">
+            <a:avLst/>
+          </a:prstGeom>
+          <a:noFill/>
+        </p:spPr>
+        <p:txBody>
+          <a:bodyPr wrap="square" anchor="t">
+            <a:spAutoFit/>
+          </a:bodyPr>
+          <a:lstStyle/>
+          <a:p>
+            <a:pPr algn="ctr">
+              <a:spcAft>
+                <a:spcPts val="600"/>
+              </a:spcAft>
+            </a:pPr>
+            <a:r>
+              <a:rPr sz="1500" b="1">
+                <a:solidFill>
+                  <a:srgbClr val="5F9FE4"/>
+                </a:solidFill>
+                <a:latin typeface="Segoe UI"/>
+              </a:rPr>
+              <a:t>SAC</a:t>
+            </a:r>
+          </a:p>
+        </p:txBody>
+      </p:sp>
+      <p:sp>
+        <p:nvSpPr>
+          <p:cNvPr id="14" name="Rounded Rectangle 13"/>
+          <p:cNvSpPr/>
+          <p:nvPr/>
+        </p:nvSpPr>
+        <p:spPr>
+          <a:xfrm>
+            <a:off x="8028432" y="1998534"/>
+            <a:ext cx="3611879" cy="3180969"/>
+          </a:xfrm>
+          <a:prstGeom prst="roundRect">
+            <a:avLst>
+              <a:gd name="adj" fmla="val 2491"/>
+            </a:avLst>
+          </a:prstGeom>
+          <a:solidFill>
+            <a:srgbClr val="FFFFFF"/>
+          </a:solidFill>
+          <a:ln w="9525">
+            <a:solidFill>
+              <a:srgbClr val="2E2E2E"/>
+            </a:solidFill>
+          </a:ln>
+          <a:effectLst/>
+        </p:spPr>
+        <p:style>
+          <a:lnRef idx="1">
+            <a:schemeClr val="accent1"/>
+          </a:lnRef>
+          <a:fillRef idx="3">
+            <a:schemeClr val="accent1"/>
+          </a:fillRef>
+          <a:effectRef idx="2">
+            <a:schemeClr val="accent1"/>
+          </a:effectRef>
+          <a:fontRef idx="minor">
+            <a:schemeClr val="lt1"/>
+          </a:fontRef>
+        </p:style>
+        <p:txBody>
+          <a:bodyPr rtlCol="0" anchor="ctr"/>
+          <a:lstStyle/>
+          <a:p>
+            <a:pPr algn="ctr"/>
+          </a:p>
+        </p:txBody>
+      </p:sp>
+      <p:pic>
+        <p:nvPicPr>
+          <p:cNvPr id="15" name="Picture 14" descr="heatmap_ocupacao_sac_u_wall.png"/>
+          <p:cNvPicPr>
+            <a:picLocks noChangeAspect="1"/>
+          </p:cNvPicPr>
+          <p:nvPr/>
+        </p:nvPicPr>
+        <p:blipFill>
+          <a:blip r:embed="rId4"/>
+          <a:stretch>
+            <a:fillRect/>
+          </a:stretch>
+        </p:blipFill>
+        <p:spPr>
+          <a:xfrm>
+            <a:off x="8110728" y="2080830"/>
+            <a:ext cx="3447287" cy="3016377"/>
+          </a:xfrm>
+          <a:prstGeom prst="rect">
+            <a:avLst/>
+          </a:prstGeom>
+        </p:spPr>
+      </p:pic>
+      <p:sp>
+        <p:nvSpPr>
+          <p:cNvPr id="16" name="TextBox 15"/>
+          <p:cNvSpPr txBox="1"/>
+          <p:nvPr/>
+        </p:nvSpPr>
+        <p:spPr>
+          <a:xfrm>
+            <a:off x="548640" y="5760720"/>
+            <a:ext cx="11094415" cy="548640"/>
+          </a:xfrm>
+          <a:prstGeom prst="rect">
+            <a:avLst/>
+          </a:prstGeom>
+          <a:noFill/>
+        </p:spPr>
+        <p:txBody>
+          <a:bodyPr wrap="square" anchor="t">
+            <a:spAutoFit/>
+          </a:bodyPr>
+          <a:lstStyle/>
+          <a:p>
+            <a:pPr algn="ctr">
+              <a:spcAft>
+                <a:spcPts val="600"/>
+              </a:spcAft>
+            </a:pPr>
+            <a:r>
+              <a:rPr sz="1300" b="0">
+                <a:solidFill>
+                  <a:srgbClr val="9A9A9A"/>
+                </a:solidFill>
+                <a:latin typeface="Segoe UI"/>
+              </a:rPr>
+              <a:t>O corredor que contorna o muro é o que separa quem resolve de quem não resolve: o GNN e o PPO desenham-no (473 e 412 recolhas em 6 episódios); o SAC nunca o encontra e faz zero.</a:t>
+            </a:r>
+          </a:p>
+        </p:txBody>
+      </p:sp>
+      <p:cxnSp>
+        <p:nvCxnSpPr>
+          <p:cNvPr id="17" name="Connector 16"/>
+          <p:cNvCxnSpPr/>
+          <p:nvPr/>
+        </p:nvCxnSpPr>
+        <p:spPr>
+          <a:xfrm>
+            <a:off x="548640" y="6355080"/>
+            <a:ext cx="11094415" cy="0"/>
+          </a:xfrm>
+          <a:prstGeom prst="line">
+            <a:avLst/>
+          </a:prstGeom>
+          <a:ln w="9525">
+            <a:solidFill>
+              <a:srgbClr val="2E2E2E"/>
+            </a:solidFill>
+          </a:ln>
+        </p:spPr>
+        <p:style>
+          <a:lnRef idx="2">
+            <a:schemeClr val="accent1"/>
+          </a:lnRef>
+          <a:fillRef idx="0">
+            <a:schemeClr val="accent1"/>
+          </a:fillRef>
+          <a:effectRef idx="1">
+            <a:schemeClr val="accent1"/>
+          </a:effectRef>
+          <a:fontRef idx="minor">
+            <a:schemeClr val="tx1"/>
+          </a:fontRef>
+        </p:style>
+      </p:cxnSp>
+      <p:sp>
+        <p:nvSpPr>
+          <p:cNvPr id="18" name="TextBox 17"/>
+          <p:cNvSpPr txBox="1"/>
+          <p:nvPr/>
+        </p:nvSpPr>
+        <p:spPr>
+          <a:xfrm>
+            <a:off x="548640" y="6400800"/>
+            <a:ext cx="8229600" cy="365760"/>
+          </a:xfrm>
+          <a:prstGeom prst="rect">
+            <a:avLst/>
+          </a:prstGeom>
+          <a:noFill/>
+        </p:spPr>
+        <p:txBody>
+          <a:bodyPr wrap="square" anchor="t">
+            <a:spAutoFit/>
+          </a:bodyPr>
+          <a:lstStyle/>
+          <a:p>
+            <a:pPr algn="l">
+              <a:spcAft>
+                <a:spcPts val="600"/>
+              </a:spcAft>
+            </a:pPr>
+            <a:r>
+              <a:rPr sz="1000" b="0">
+                <a:solidFill>
+                  <a:srgbClr val="9A9A9A"/>
+                </a:solidFill>
+                <a:latin typeface="Segoe UI"/>
+              </a:rPr>
+              <a:t>Slide de reserva · não faz parte da apresentação</a:t>
+            </a:r>
+          </a:p>
+        </p:txBody>
+      </p:sp>
+      <p:sp>
+        <p:nvSpPr>
+          <p:cNvPr id="19" name="TextBox 18"/>
+          <p:cNvSpPr txBox="1"/>
+          <p:nvPr/>
+        </p:nvSpPr>
+        <p:spPr>
+          <a:xfrm>
+            <a:off x="10728655" y="6400800"/>
+            <a:ext cx="914400" cy="365760"/>
+          </a:xfrm>
+          <a:prstGeom prst="rect">
+            <a:avLst/>
+          </a:prstGeom>
+          <a:noFill/>
+        </p:spPr>
+        <p:txBody>
+          <a:bodyPr wrap="square" anchor="t">
+            <a:spAutoFit/>
+          </a:bodyPr>
+          <a:lstStyle/>
+          <a:p>
+            <a:pPr algn="r">
+              <a:spcAft>
+                <a:spcPts val="600"/>
+              </a:spcAft>
+            </a:pPr>
+            <a:r>
+              <a:rPr sz="1000" b="0">
+                <a:solidFill>
+                  <a:srgbClr val="9A9A9A"/>
+                </a:solidFill>
+                <a:latin typeface="Consolas"/>
+              </a:rPr>
+              <a:t>A5</a:t>
+            </a:r>
+          </a:p>
+        </p:txBody>
+      </p:sp>
+    </p:spTree>
+  </p:cSld>
+  <p:clrMapOvr>
+    <a:masterClrMapping/>
+  </p:clrMapOvr>
+</p:sld>
+</file>
+
+<file path=ppt/slides/slide25.xml><?xml version="1.0" encoding="utf-8"?>
+<p:sld xmlns:a="http://schemas.openxmlformats.org/drawingml/2006/main" xmlns:p="http://schemas.openxmlformats.org/presentationml/2006/main" xmlns:r="http://schemas.openxmlformats.org/officeDocument/2006/relationships">
+  <p:cSld>
+    <p:spTree>
+      <p:nvGrpSpPr>
+        <p:cNvPr id="1" name=""/>
+        <p:cNvGrpSpPr/>
+        <p:nvPr/>
+      </p:nvGrpSpPr>
+      <p:grpSpPr/>
+      <p:sp>
+        <p:nvSpPr>
+          <p:cNvPr id="2" name="Rectangle 1"/>
+          <p:cNvSpPr/>
+          <p:nvPr/>
+        </p:nvSpPr>
+        <p:spPr>
+          <a:xfrm>
+            <a:off x="0" y="0"/>
+            <a:ext cx="12191695" cy="6858000"/>
+          </a:xfrm>
+          <a:prstGeom prst="rect">
+            <a:avLst/>
+          </a:prstGeom>
+          <a:solidFill>
+            <a:srgbClr val="050505"/>
+          </a:solidFill>
+          <a:ln>
+            <a:noFill/>
+          </a:ln>
+          <a:effectLst/>
+        </p:spPr>
+        <p:style>
+          <a:lnRef idx="1">
+            <a:schemeClr val="accent1"/>
+          </a:lnRef>
+          <a:fillRef idx="3">
+            <a:schemeClr val="accent1"/>
+          </a:fillRef>
+          <a:effectRef idx="2">
+            <a:schemeClr val="accent1"/>
+          </a:effectRef>
+          <a:fontRef idx="minor">
+            <a:schemeClr val="lt1"/>
+          </a:fontRef>
+        </p:style>
+        <p:txBody>
+          <a:bodyPr rtlCol="0" anchor="ctr"/>
+          <a:lstStyle/>
+          <a:p>
+            <a:pPr algn="ctr"/>
+          </a:p>
+        </p:txBody>
+      </p:sp>
+      <p:sp>
+        <p:nvSpPr>
+          <p:cNvPr id="3" name="TextBox 2"/>
+          <p:cNvSpPr txBox="1"/>
+          <p:nvPr/>
+        </p:nvSpPr>
+        <p:spPr>
+          <a:xfrm>
+            <a:off x="548640" y="292608"/>
+            <a:ext cx="11094415" cy="777240"/>
+          </a:xfrm>
+          <a:prstGeom prst="rect">
+            <a:avLst/>
+          </a:prstGeom>
+          <a:noFill/>
+        </p:spPr>
+        <p:txBody>
+          <a:bodyPr wrap="square" anchor="t">
+            <a:spAutoFit/>
+          </a:bodyPr>
+          <a:lstStyle/>
+          <a:p>
+            <a:pPr algn="l">
+              <a:spcAft>
+                <a:spcPts val="600"/>
+              </a:spcAft>
+            </a:pPr>
+            <a:r>
+              <a:rPr sz="3000" b="1">
+                <a:solidFill>
+                  <a:srgbClr val="F5F5F5"/>
+                </a:solidFill>
+                <a:latin typeface="Segoe UI Semibold"/>
+              </a:rPr>
+              <a:t>Reserva · Como sei que os números são os dos dados</a:t>
+            </a:r>
+          </a:p>
+        </p:txBody>
+      </p:sp>
+      <p:sp>
+        <p:nvSpPr>
+          <p:cNvPr id="4" name="TextBox 3"/>
+          <p:cNvSpPr txBox="1"/>
+          <p:nvPr/>
+        </p:nvSpPr>
+        <p:spPr>
+          <a:xfrm>
+            <a:off x="548640" y="932688"/>
+            <a:ext cx="11094415" cy="457200"/>
+          </a:xfrm>
+          <a:prstGeom prst="rect">
+            <a:avLst/>
+          </a:prstGeom>
+          <a:noFill/>
+        </p:spPr>
+        <p:txBody>
+          <a:bodyPr wrap="square" anchor="t">
+            <a:spAutoFit/>
+          </a:bodyPr>
+          <a:lstStyle/>
+          <a:p>
+            <a:pPr algn="l">
+              <a:spcAft>
+                <a:spcPts val="600"/>
+              </a:spcAft>
+            </a:pPr>
+            <a:r>
+              <a:rPr sz="1500" b="0">
+                <a:solidFill>
+                  <a:srgbClr val="9A9A9A"/>
+                </a:solidFill>
+                <a:latin typeface="Segoe UI"/>
+              </a:rPr>
+              <a:t>a verificação, medida e ensaiada — não alegada</a:t>
+            </a:r>
+          </a:p>
+        </p:txBody>
+      </p:sp>
+      <p:cxnSp>
+        <p:nvCxnSpPr>
+          <p:cNvPr id="5" name="Connector 4"/>
+          <p:cNvCxnSpPr/>
+          <p:nvPr/>
+        </p:nvCxnSpPr>
+        <p:spPr>
+          <a:xfrm>
+            <a:off x="548640" y="1371600"/>
+            <a:ext cx="11094415" cy="0"/>
+          </a:xfrm>
+          <a:prstGeom prst="line">
+            <a:avLst/>
+          </a:prstGeom>
+          <a:ln w="9525">
+            <a:solidFill>
+              <a:srgbClr val="2E2E2E"/>
+            </a:solidFill>
+          </a:ln>
+        </p:spPr>
+        <p:style>
+          <a:lnRef idx="2">
+            <a:schemeClr val="accent1"/>
+          </a:lnRef>
+          <a:fillRef idx="0">
+            <a:schemeClr val="accent1"/>
+          </a:fillRef>
+          <a:effectRef idx="1">
+            <a:schemeClr val="accent1"/>
+          </a:effectRef>
+          <a:fontRef idx="minor">
+            <a:schemeClr val="tx1"/>
+          </a:fontRef>
+        </p:style>
+      </p:cxnSp>
+      <p:cxnSp>
+        <p:nvCxnSpPr>
+          <p:cNvPr id="6" name="Connector 5"/>
+          <p:cNvCxnSpPr/>
+          <p:nvPr/>
+        </p:nvCxnSpPr>
+        <p:spPr>
+          <a:xfrm>
+            <a:off x="548640" y="1371600"/>
+            <a:ext cx="1005840" cy="0"/>
+          </a:xfrm>
+          <a:prstGeom prst="line">
+            <a:avLst/>
+          </a:prstGeom>
+          <a:ln w="31750">
+            <a:solidFill>
+              <a:srgbClr val="F5F5F5"/>
+            </a:solidFill>
+          </a:ln>
+        </p:spPr>
+        <p:style>
+          <a:lnRef idx="2">
+            <a:schemeClr val="accent1"/>
+          </a:lnRef>
+          <a:fillRef idx="0">
+            <a:schemeClr val="accent1"/>
+          </a:fillRef>
+          <a:effectRef idx="1">
+            <a:schemeClr val="accent1"/>
+          </a:effectRef>
+          <a:fontRef idx="minor">
+            <a:schemeClr val="tx1"/>
+          </a:fontRef>
+        </p:style>
+      </p:cxnSp>
+      <p:sp>
+        <p:nvSpPr>
+          <p:cNvPr id="7" name="TextBox 6"/>
+          <p:cNvSpPr txBox="1"/>
+          <p:nvPr/>
+        </p:nvSpPr>
+        <p:spPr>
+          <a:xfrm>
+            <a:off x="548640" y="1600200"/>
+            <a:ext cx="11094415" cy="4480560"/>
+          </a:xfrm>
+          <a:prstGeom prst="rect">
+            <a:avLst/>
+          </a:prstGeom>
+          <a:noFill/>
+        </p:spPr>
+        <p:txBody>
+          <a:bodyPr wrap="square" anchor="t">
+            <a:spAutoFit/>
+          </a:bodyPr>
+          <a:lstStyle/>
+          <a:p>
+            <a:pPr algn="l">
+              <a:spcAft>
+                <a:spcPts val="800"/>
+              </a:spcAft>
+            </a:pPr>
+            <a:r>
+              <a:rPr sz="1600">
+                <a:solidFill>
+                  <a:srgbClr val="9A9A9A"/>
+                </a:solidFill>
+                <a:latin typeface="Segoe UI"/>
+              </a:rPr>
+              <a:t>▸  </a:t>
+            </a:r>
+            <a:r>
+              <a:rPr sz="1600" b="0">
+                <a:solidFill>
+                  <a:srgbClr val="E2E2E2"/>
+                </a:solidFill>
+                <a:latin typeface="Segoe UI"/>
+              </a:rPr>
+              <a:t>27 verificadores automáticos; 19 correm no hook de pre-commit e recusam o commit se um número da tese deixar de bater com o CSV que o produziu</a:t>
+            </a:r>
+          </a:p>
+          <a:p>
+            <a:pPr algn="l">
+              <a:spcAft>
+                <a:spcPts val="800"/>
+              </a:spcAft>
+            </a:pPr>
+            <a:r>
+              <a:rPr sz="1600">
+                <a:solidFill>
+                  <a:srgbClr val="9A9A9A"/>
+                </a:solidFill>
+                <a:latin typeface="Segoe UI"/>
+              </a:rPr>
+              <a:t>▸  </a:t>
+            </a:r>
+            <a:r>
+              <a:rPr sz="1600" b="0">
+                <a:solidFill>
+                  <a:srgbClr val="E2E2E2"/>
+                </a:solidFill>
+                <a:latin typeface="Segoe UI"/>
+              </a:rPr>
+              <a:t>O principal confere ~965 valores do main.tex; o do mapa composto, 72; o da configuração, 45 — física, recompensa e hiperparâmetros dos três algoritmos, lidos do foraging.yaml</a:t>
+            </a:r>
+          </a:p>
+          <a:p>
+            <a:pPr algn="l">
+              <a:spcAft>
+                <a:spcPts val="800"/>
+              </a:spcAft>
+            </a:pPr>
+            <a:r>
+              <a:rPr sz="1600">
+                <a:solidFill>
+                  <a:srgbClr val="9A9A9A"/>
+                </a:solidFill>
+                <a:latin typeface="Segoe UI"/>
+              </a:rPr>
+              <a:t>▸  </a:t>
+            </a:r>
+            <a:r>
+              <a:rPr sz="1600" b="0">
+                <a:solidFill>
+                  <a:srgbClr val="E2E2E2"/>
+                </a:solidFill>
+                <a:latin typeface="Segoe UI"/>
+              </a:rPr>
+              <a:t>Ensaio de mutação: a tese é estragada de propósito, 92 mutações, uma de cada vez, e o ensaio exige que todas sejam acusadas. Um verificador que nunca falhou não está provado — está por testar</a:t>
+            </a:r>
+          </a:p>
+          <a:p>
+            <a:pPr algn="l">
+              <a:spcAft>
+                <a:spcPts val="800"/>
+              </a:spcAft>
+            </a:pPr>
+            <a:r>
+              <a:rPr sz="1600">
+                <a:solidFill>
+                  <a:srgbClr val="9A9A9A"/>
+                </a:solidFill>
+                <a:latin typeface="Segoe UI"/>
+              </a:rPr>
+              <a:t>▸  </a:t>
+            </a:r>
+            <a:r>
+              <a:rPr sz="1600" b="0">
+                <a:solidFill>
+                  <a:srgbClr val="E2E2E2"/>
+                </a:solidFill>
+                <a:latin typeface="Segoe UI"/>
+              </a:rPr>
+              <a:t>Cobertura medida, não alegada: 1 043 dos 2 286 tokens numéricos do corpo do main.tex são lidos por algum verificador (46 %), e os 193 automatizáveis que faltam estão listados, um a um, em docs/COBERTURA_VERIFICADOR.md</a:t>
+            </a:r>
+          </a:p>
+          <a:p>
+            <a:pPr algn="l">
+              <a:spcAft>
+                <a:spcPts val="800"/>
+              </a:spcAft>
+            </a:pPr>
+            <a:r>
+              <a:rPr sz="1600">
+                <a:solidFill>
+                  <a:srgbClr val="9A9A9A"/>
+                </a:solidFill>
+                <a:latin typeface="Segoe UI"/>
+              </a:rPr>
+              <a:t>▸  </a:t>
+            </a:r>
+            <a:r>
+              <a:rPr sz="1600" b="0">
+                <a:solidFill>
+                  <a:srgbClr val="E2E2E2"/>
+                </a:solidFill>
+                <a:latin typeface="Segoe UI"/>
+              </a:rPr>
+              <a:t>Três pré-registos: hipótese, testes e regra de decisão escritos antes de haver dados</a:t>
+            </a:r>
+          </a:p>
+          <a:p>
+            <a:pPr algn="l">
+              <a:spcAft>
+                <a:spcPts val="800"/>
+              </a:spcAft>
+            </a:pPr>
+            <a:r>
+              <a:rPr sz="1600">
+                <a:solidFill>
+                  <a:srgbClr val="9A9A9A"/>
+                </a:solidFill>
+                <a:latin typeface="Segoe UI"/>
+              </a:rPr>
+              <a:t>▸  </a:t>
+            </a:r>
+            <a:r>
+              <a:rPr sz="1600" b="0">
+                <a:solidFill>
+                  <a:srgbClr val="E2E2E2"/>
+                </a:solidFill>
+                <a:latin typeface="Segoe UI"/>
+              </a:rPr>
+              <a:t>docs/REPRODUZIR.md refaz o percurso comando a comando — e é ele próprio ensaiado contra o disco</a:t>
+            </a:r>
+          </a:p>
+        </p:txBody>
+      </p:sp>
+      <p:cxnSp>
+        <p:nvCxnSpPr>
+          <p:cNvPr id="8" name="Connector 7"/>
+          <p:cNvCxnSpPr/>
+          <p:nvPr/>
+        </p:nvCxnSpPr>
+        <p:spPr>
+          <a:xfrm>
+            <a:off x="548640" y="6355080"/>
+            <a:ext cx="11094415" cy="0"/>
+          </a:xfrm>
+          <a:prstGeom prst="line">
+            <a:avLst/>
+          </a:prstGeom>
+          <a:ln w="9525">
+            <a:solidFill>
+              <a:srgbClr val="2E2E2E"/>
+            </a:solidFill>
+          </a:ln>
+        </p:spPr>
+        <p:style>
+          <a:lnRef idx="2">
+            <a:schemeClr val="accent1"/>
+          </a:lnRef>
+          <a:fillRef idx="0">
+            <a:schemeClr val="accent1"/>
+          </a:fillRef>
+          <a:effectRef idx="1">
+            <a:schemeClr val="accent1"/>
+          </a:effectRef>
+          <a:fontRef idx="minor">
+            <a:schemeClr val="tx1"/>
+          </a:fontRef>
+        </p:style>
+      </p:cxnSp>
+      <p:sp>
+        <p:nvSpPr>
+          <p:cNvPr id="9" name="TextBox 8"/>
+          <p:cNvSpPr txBox="1"/>
+          <p:nvPr/>
+        </p:nvSpPr>
+        <p:spPr>
+          <a:xfrm>
+            <a:off x="548640" y="6400800"/>
+            <a:ext cx="8229600" cy="365760"/>
+          </a:xfrm>
+          <a:prstGeom prst="rect">
+            <a:avLst/>
+          </a:prstGeom>
+          <a:noFill/>
+        </p:spPr>
+        <p:txBody>
+          <a:bodyPr wrap="square" anchor="t">
+            <a:spAutoFit/>
+          </a:bodyPr>
+          <a:lstStyle/>
+          <a:p>
+            <a:pPr algn="l">
+              <a:spcAft>
+                <a:spcPts val="600"/>
+              </a:spcAft>
+            </a:pPr>
+            <a:r>
+              <a:rPr sz="1000" b="0">
+                <a:solidFill>
+                  <a:srgbClr val="9A9A9A"/>
+                </a:solidFill>
+                <a:latin typeface="Segoe UI"/>
+              </a:rPr>
+              <a:t>Slide de reserva · não faz parte da apresentação</a:t>
+            </a:r>
+          </a:p>
+        </p:txBody>
+      </p:sp>
+      <p:sp>
+        <p:nvSpPr>
+          <p:cNvPr id="10" name="TextBox 9"/>
+          <p:cNvSpPr txBox="1"/>
+          <p:nvPr/>
+        </p:nvSpPr>
+        <p:spPr>
+          <a:xfrm>
+            <a:off x="10728655" y="6400800"/>
+            <a:ext cx="914400" cy="365760"/>
+          </a:xfrm>
+          <a:prstGeom prst="rect">
+            <a:avLst/>
+          </a:prstGeom>
+          <a:noFill/>
+        </p:spPr>
+        <p:txBody>
+          <a:bodyPr wrap="square" anchor="t">
+            <a:spAutoFit/>
+          </a:bodyPr>
+          <a:lstStyle/>
+          <a:p>
+            <a:pPr algn="r">
+              <a:spcAft>
+                <a:spcPts val="600"/>
+              </a:spcAft>
+            </a:pPr>
+            <a:r>
+              <a:rPr sz="1000" b="0">
+                <a:solidFill>
+                  <a:srgbClr val="9A9A9A"/>
+                </a:solidFill>
+                <a:latin typeface="Consolas"/>
+              </a:rPr>
+              <a:t>A6</a:t>
             </a:r>
           </a:p>
         </p:txBody>
@@ -17418,7 +25330,7 @@
                 </a:solidFill>
                 <a:latin typeface="Segoe UI"/>
               </a:rPr>
-              <a:t>Dezoito verificadores automáticos: cada número da dissertação é conferido contra os CSV a cada commit</a:t>
+              <a:t>27 verificadores automáticos, 19 no hook de pre-commit: cada número da tese é recalculado a partir dos CSV, e o commit é recusado se algum deixar de bater</a:t>
             </a:r>
           </a:p>
         </p:txBody>

--- a/Defesa/slides_defesa.pptx
+++ b/Defesa/slides_defesa.pptx
@@ -553,6 +553,141 @@
           <a:p>
             <a:r>
               <a:t>cenários. Quinze minutos: o problema, o método, sete perguntas e as respostas.</a:t>
+            </a:r>
+          </a:p>
+          <a:p/>
+          <a:p>
+            <a:r>
+              <a:t>- - - NÃO É PARA DIZER: o Resumo da dissertação, que o júri leu (245 palavras) - - -</a:t>
+            </a:r>
+          </a:p>
+          <a:p/>
+          <a:p>
+            <a:r>
+              <a:t>Para comparar a Aprendizagem por Reforço Multiagente e a Otimização Bio-inspirada</a:t>
+            </a:r>
+          </a:p>
+          <a:p>
+            <a:r>
+              <a:t>no controlo de enxames robóticos, implementou-se num simulador de alta fidelidade</a:t>
+            </a:r>
+          </a:p>
+          <a:p>
+            <a:r>
+              <a:t>o framework descentralizado Robust and Scalable Swarm Control (partilha de</a:t>
+            </a:r>
+          </a:p>
+          <a:p>
+            <a:r>
+              <a:t>parâmetros; PPO e SAC) e um controlador neuroevolutivo sobre grafos com atenção,</a:t>
+            </a:r>
+          </a:p>
+          <a:p>
+            <a:r>
+              <a:t>invariante à dimensão do enxame. Avaliaram-se em sete cenários de dificuldade</a:t>
+            </a:r>
+          </a:p>
+          <a:p>
+            <a:r>
+              <a:t>crescente (7 execuções independentes por combinação), sob estatística</a:t>
+            </a:r>
+          </a:p>
+          <a:p>
+            <a:r>
+              <a:t>não-paramétrica.</a:t>
+            </a:r>
+          </a:p>
+          <a:p/>
+          <a:p>
+            <a:r>
+              <a:t>Com homing geodésico na função de fitness, o controlador evolutivo supera os</a:t>
+            </a:r>
+          </a:p>
+          <a:p>
+            <a:r>
+              <a:t>métodos de gradiente em três cenários, iguala o melhor deles noutros dois e</a:t>
+            </a:r>
+          </a:p>
+          <a:p>
+            <a:r>
+              <a:t>transfere, sozinho, sem retreino para dimensões não vistas (N de 10 a 100, com</a:t>
+            </a:r>
+          </a:p>
+          <a:p>
+            <a:r>
+              <a:t>100% de sucesso); os de gradiente mantêm a fiabilidade em espaço aberto e a</a:t>
+            </a:r>
+          </a:p>
+          <a:p>
+            <a:r>
+              <a:t>eficiência. O cenário de deceção espacial, bimodal nos três algoritmos base, só</a:t>
+            </a:r>
+          </a:p>
+          <a:p>
+            <a:r>
+              <a:t>cedeu à novidade doseada adaptativamente: preserva os 7/7 execuções no Muro em U</a:t>
+            </a:r>
+          </a:p>
+          <a:p>
+            <a:r>
+              <a:t>e atinge, na Porta com Alternativa, o melhor resultado de toda a dissertação</a:t>
+            </a:r>
+          </a:p>
+          <a:p>
+            <a:r>
+              <a:t>(88,7 recolhas/ep); uma replicação pré-registada com 28 execuções por braço</a:t>
+            </a:r>
+          </a:p>
+          <a:p>
+            <a:r>
+              <a:t>confirmou-o (28/28, contra 15/28 do objetivo puro, 14/28 do PPO e 14/28 do SAC).</a:t>
+            </a:r>
+          </a:p>
+          <a:p>
+            <a:r>
+              <a:t>Um oitavo cenário, compondo num labirinto de 103 x 62 m as dificuldades dos sete,</a:t>
+            </a:r>
+          </a:p>
+          <a:p>
+            <a:r>
+              <a:t>degrada a fiabilidade e não a magnitude: é resolvido em 4 das 21 execuções</a:t>
+            </a:r>
+          </a:p>
+          <a:p>
+            <a:r>
+              <a:t>independentes, abaixo do limiar pré-registado.</a:t>
+            </a:r>
+          </a:p>
+          <a:p/>
+          <a:p>
+            <a:r>
+              <a:t>A hipótese de que a inteligência adaptativa supera a robustez estática confirma-se</a:t>
+            </a:r>
+          </a:p>
+          <a:p>
+            <a:r>
+              <a:t>apenas em parte: a escala decide-se na representação e não no otimizador; sob</a:t>
+            </a:r>
+          </a:p>
+          <a:p>
+            <a:r>
+              <a:t>gradientes enganadores, no sinal de treino.</a:t>
+            </a:r>
+          </a:p>
+          <a:p/>
+          <a:p>
+            <a:r>
+              <a:t>É daqui que saem, quase sempre, as primeiras perguntas. Cada afirmação deste</a:t>
+            </a:r>
+          </a:p>
+          <a:p>
+            <a:r>
+              <a:t>Resumo tem o seu slide: a fitness no 9, a novidade no 10, a escala no 11, o mapa</a:t>
+            </a:r>
+          </a:p>
+          <a:p>
+            <a:r>
+              <a:t>composto no 13, e a frase final é o slide 17.</a:t>
             </a:r>
           </a:p>
         </p:txBody>

--- a/Defesa/slides_defesa.pptx
+++ b/Defesa/slides_defesa.pptx
@@ -533,12 +533,12 @@
           <a:p/>
           <a:p>
             <a:r>
-              <a:t>Bom dia. Vou apresentar a dissertação «Aprendizagem por Reforço para Controlo de</a:t>
-            </a:r>
-          </a:p>
-          <a:p>
-            <a:r>
-              <a:t>Enxames»: uma comparação, no mesmo simulador e com o mesmo protocolo, entre dois</a:t>
+              <a:t>Bom dia. Vou apresentar a dissertação «Aprendizagem por Reforço Multiagente e Neuroevolução no Controlo de Enxames de Robôs: Desempenho,</a:t>
+            </a:r>
+          </a:p>
+          <a:p>
+            <a:r>
+              <a:t>Escalabilidade e Robustez»: uma comparação, no mesmo simulador e com o mesmo protocolo, entre dois</a:t>
             </a:r>
           </a:p>
           <a:p>
@@ -6992,13 +6992,13 @@
               </a:spcAft>
             </a:pPr>
             <a:r>
-              <a:rPr sz="4000" b="1">
+              <a:rPr sz="2800" b="1">
                 <a:solidFill>
                   <a:srgbClr val="F5F5F5"/>
                 </a:solidFill>
                 <a:latin typeface="Segoe UI Semibold"/>
               </a:rPr>
-              <a:t>Aprendizagem por Reforço para Controlo de Enxames</a:t>
+              <a:t>Aprendizagem por Reforço Multiagente e Neuroevolução no Controlo de Enxames de Robôs:</a:t>
             </a:r>
           </a:p>
         </p:txBody>
@@ -7031,13 +7031,13 @@
               </a:spcAft>
             </a:pPr>
             <a:r>
-              <a:rPr sz="1900" b="0">
+              <a:rPr sz="2200" b="0">
                 <a:solidFill>
                   <a:srgbClr val="9A9A9A"/>
                 </a:solidFill>
                 <a:latin typeface="Segoe UI"/>
               </a:rPr>
-              <a:t>Aprendizagem por reforço multiagente por gradiente vs. neuroevolução com atenção sobre grafo, em oito cenários de dificuldade crescente</a:t>
+              <a:t>Desempenho, Escalabilidade e Robustez</a:t>
             </a:r>
           </a:p>
         </p:txBody>
@@ -7565,7 +7565,7 @@
                 </a:solidFill>
                 <a:latin typeface="Segoe UI"/>
               </a:rPr>
-              <a:t>Aprendizagem por Reforço para Controlo de Enxames · ISCTE-IUL 2026</a:t>
+              <a:t>Aprendizagem por Reforço Multiagente e Neuroevolução · ISCTE-IUL 2026</a:t>
             </a:r>
           </a:p>
         </p:txBody>
@@ -9150,7 +9150,7 @@
                 </a:solidFill>
                 <a:latin typeface="Segoe UI"/>
               </a:rPr>
-              <a:t>Aprendizagem por Reforço para Controlo de Enxames · ISCTE-IUL 2026</a:t>
+              <a:t>Aprendizagem por Reforço Multiagente e Neuroevolução · ISCTE-IUL 2026</a:t>
             </a:r>
           </a:p>
         </p:txBody>
@@ -11921,7 +11921,7 @@
                 </a:solidFill>
                 <a:latin typeface="Segoe UI"/>
               </a:rPr>
-              <a:t>Aprendizagem por Reforço para Controlo de Enxames · ISCTE-IUL 2026</a:t>
+              <a:t>Aprendizagem por Reforço Multiagente e Neuroevolução · ISCTE-IUL 2026</a:t>
             </a:r>
           </a:p>
         </p:txBody>
@@ -12439,7 +12439,7 @@
                 </a:solidFill>
                 <a:latin typeface="Segoe UI"/>
               </a:rPr>
-              <a:t>Aprendizagem por Reforço para Controlo de Enxames · ISCTE-IUL 2026</a:t>
+              <a:t>Aprendizagem por Reforço Multiagente e Neuroevolução · ISCTE-IUL 2026</a:t>
             </a:r>
           </a:p>
         </p:txBody>
@@ -13108,7 +13108,7 @@
                 </a:solidFill>
                 <a:latin typeface="Segoe UI"/>
               </a:rPr>
-              <a:t>Sem retreino: zero chegadas em 84 de 84 células (1 680 episódios) — e o mapa é resolúvel: um navegador geodésico sem aprendizagem faz 53,0 chegadas/ep</a:t>
+              <a:t>Sem retreino: zero chegadas em 84 de 84 células (1 680 episódios) — e o mapa é resolúvel: um navegador geodésico sem aprendizagem faz 53,0 chegadas/ep</a:t>
             </a:r>
           </a:p>
           <a:p>
@@ -13223,7 +13223,7 @@
                 </a:solidFill>
                 <a:latin typeface="Segoe UI"/>
               </a:rPr>
-              <a:t>Aprendizagem por Reforço para Controlo de Enxames · ISCTE-IUL 2026</a:t>
+              <a:t>Aprendizagem por Reforço Multiagente e Neuroevolução · ISCTE-IUL 2026</a:t>
             </a:r>
           </a:p>
         </p:txBody>
@@ -14449,7 +14449,7 @@
                 </a:solidFill>
                 <a:latin typeface="Segoe UI"/>
               </a:rPr>
-              <a:t>Aprendizagem por Reforço para Controlo de Enxames · ISCTE-IUL 2026</a:t>
+              <a:t>Aprendizagem por Reforço Multiagente e Neuroevolução · ISCTE-IUL 2026</a:t>
             </a:r>
           </a:p>
         </p:txBody>
@@ -15017,7 +15017,7 @@
                 </a:solidFill>
                 <a:latin typeface="Segoe UI"/>
               </a:rPr>
-              <a:t>Aprendizagem por Reforço para Controlo de Enxames · ISCTE-IUL 2026</a:t>
+              <a:t>Aprendizagem por Reforço Multiagente e Neuroevolução · ISCTE-IUL 2026</a:t>
             </a:r>
           </a:p>
         </p:txBody>
@@ -15524,7 +15524,7 @@
                 </a:solidFill>
                 <a:latin typeface="Segoe UI"/>
               </a:rPr>
-              <a:t>Aprendizagem por Reforço para Controlo de Enxames · ISCTE-IUL 2026</a:t>
+              <a:t>Aprendizagem por Reforço Multiagente e Neuroevolução · ISCTE-IUL 2026</a:t>
             </a:r>
           </a:p>
         </p:txBody>
@@ -15934,7 +15934,7 @@
                 </a:solidFill>
                 <a:latin typeface="Segoe UI"/>
               </a:rPr>
-              <a:t>Aprendizagem por Reforço para Controlo de Enxames · ISCTE-IUL 2026</a:t>
+              <a:t>Aprendizagem por Reforço Multiagente e Neuroevolução · ISCTE-IUL 2026</a:t>
             </a:r>
           </a:p>
         </p:txBody>
@@ -16496,7 +16496,7 @@
                 </a:solidFill>
                 <a:latin typeface="Segoe UI"/>
               </a:rPr>
-              <a:t>Aprendizagem por Reforço para Controlo de Enxames · ISCTE-IUL 2026</a:t>
+              <a:t>Aprendizagem por Reforço Multiagente e Neuroevolução · ISCTE-IUL 2026</a:t>
             </a:r>
           </a:p>
         </p:txBody>
@@ -17739,7 +17739,7 @@
                 </a:solidFill>
                 <a:latin typeface="Segoe UI"/>
               </a:rPr>
-              <a:t>Aprendizagem por Reforço para Controlo de Enxames · ISCTE-IUL 2026</a:t>
+              <a:t>Aprendizagem por Reforço Multiagente e Neuroevolução · ISCTE-IUL 2026</a:t>
             </a:r>
           </a:p>
         </p:txBody>
@@ -22099,7 +22099,7 @@
                         </a:defRPr>
                       </a:pPr>
                       <a:r>
-                        <a:t>zero chegadas em 84/84 células · 1 680 episódios</a:t>
+                        <a:t>zero chegadas em 84/84 células · 1 680 episódios</a:t>
                       </a:r>
                     </a:p>
                   </a:txBody>
@@ -22683,7 +22683,7 @@
                         </a:defRPr>
                       </a:pPr>
                       <a:r>
-                        <a:t>em 19 das 21 execuções o fitness ainda subia no último quinto</a:t>
+                        <a:t>em 19 das 21 execuções a fitness ainda subia no último quinto</a:t>
                       </a:r>
                     </a:p>
                   </a:txBody>
@@ -23113,7 +23113,7 @@
                 </a:solidFill>
                 <a:latin typeface="Segoe UI"/>
               </a:rPr>
-              <a:t>Campanha principal: 147 treinos e 2 940 episódios de avaliação. Projeto inteiro: 28 sessões e 2 078 h de treino, das quais 341 h do mega-treino de um mês.</a:t>
+              <a:t>Campanha principal: 147 treinos e 2 940 episódios de avaliação. Projeto inteiro: 28 sessões e 2 078 h de treino, das quais 341 h do mega-treino de um mês.</a:t>
             </a:r>
           </a:p>
           <a:p>
@@ -25033,7 +25033,7 @@
                 </a:solidFill>
                 <a:latin typeface="Segoe UI"/>
               </a:rPr>
-              <a:t>Cobertura medida, não alegada: 1 043 dos 2 286 tokens numéricos do corpo do main.tex são lidos por algum verificador (46 %), e os 193 automatizáveis que faltam estão listados, um a um, em docs/COBERTURA_VERIFICADOR.md</a:t>
+              <a:t>Cobertura medida, não alegada: 1 043 dos 2 286 tokens numéricos do corpo do main.tex são lidos por algum verificador (46 %), e os 193 automatizáveis que faltam estão listados, um a um, em docs/COBERTURA_VERIFICADOR.md</a:t>
             </a:r>
           </a:p>
           <a:p>
@@ -25723,7 +25723,7 @@
                 </a:solidFill>
                 <a:latin typeface="Segoe UI"/>
               </a:rPr>
-              <a:t>Aprendizagem por Reforço para Controlo de Enxames · ISCTE-IUL 2026</a:t>
+              <a:t>Aprendizagem por Reforço Multiagente e Neuroevolução · ISCTE-IUL 2026</a:t>
             </a:r>
           </a:p>
         </p:txBody>
@@ -26276,7 +26276,7 @@
                 </a:solidFill>
                 <a:latin typeface="Segoe UI"/>
               </a:rPr>
-              <a:t>Aprendizagem por Reforço para Controlo de Enxames · ISCTE-IUL 2026</a:t>
+              <a:t>Aprendizagem por Reforço Multiagente e Neuroevolução · ISCTE-IUL 2026</a:t>
             </a:r>
           </a:p>
         </p:txBody>
@@ -27355,7 +27355,7 @@
                 </a:solidFill>
                 <a:latin typeface="Segoe UI"/>
               </a:rPr>
-              <a:t>Aprendizagem por Reforço para Controlo de Enxames · ISCTE-IUL 2026</a:t>
+              <a:t>Aprendizagem por Reforço Multiagente e Neuroevolução · ISCTE-IUL 2026</a:t>
             </a:r>
           </a:p>
         </p:txBody>
@@ -28617,7 +28617,7 @@
                 </a:solidFill>
                 <a:latin typeface="Segoe UI"/>
               </a:rPr>
-              <a:t>Aprendizagem por Reforço para Controlo de Enxames · ISCTE-IUL 2026</a:t>
+              <a:t>Aprendizagem por Reforço Multiagente e Neuroevolução · ISCTE-IUL 2026</a:t>
             </a:r>
           </a:p>
         </p:txBody>
@@ -28939,7 +28939,7 @@
                 </a:solidFill>
                 <a:latin typeface="Segoe UI"/>
               </a:rPr>
-              <a:t>Avaliação determinística: 20 episódios emparelhados por modelo (sementes comuns) — 2 940 episódios na campanha principal</a:t>
+              <a:t>Avaliação determinística: 20 episódios emparelhados por modelo (sementes comuns) — 2 940 episódios na campanha principal</a:t>
             </a:r>
           </a:p>
           <a:p>
@@ -29185,7 +29185,7 @@
                 </a:solidFill>
                 <a:latin typeface="Segoe UI"/>
               </a:rPr>
-              <a:t>Aprendizagem por Reforço para Controlo de Enxames · ISCTE-IUL 2026</a:t>
+              <a:t>Aprendizagem por Reforço Multiagente e Neuroevolução · ISCTE-IUL 2026</a:t>
             </a:r>
           </a:p>
         </p:txBody>
@@ -29812,7 +29812,7 @@
                 </a:solidFill>
                 <a:latin typeface="Segoe UI"/>
               </a:rPr>
-              <a:t>Aprendizagem por Reforço para Controlo de Enxames · ISCTE-IUL 2026</a:t>
+              <a:t>Aprendizagem por Reforço Multiagente e Neuroevolução · ISCTE-IUL 2026</a:t>
             </a:r>
           </a:p>
         </p:txBody>
@@ -30402,7 +30402,7 @@
                 </a:solidFill>
                 <a:latin typeface="Segoe UI"/>
               </a:rPr>
-              <a:t>Aprendizagem por Reforço para Controlo de Enxames · ISCTE-IUL 2026</a:t>
+              <a:t>Aprendizagem por Reforço Multiagente e Neuroevolução · ISCTE-IUL 2026</a:t>
             </a:r>
           </a:p>
         </p:txBody>

--- a/Defesa/slides_defesa.pptx
+++ b/Defesa/slides_defesa.pptx
@@ -2674,7 +2674,7 @@
           </a:p>
           <a:p>
             <a:r>
-              <a:t>mostra onde o enxame passa o episódio, no modelo campeão de cada algoritmo. O GNN</a:t>
+              <a:t>mostra onde o enxame passa o episódio, num modelo da campanha de cada algoritmo. O GNN</a:t>
             </a:r>
           </a:p>
           <a:p>
@@ -2694,7 +2694,7 @@
           </a:p>
           <a:p>
             <a:r>
-              <a:t>é zero. Não é uma diferença de magnitude, é outro comportamento — e é esta a</a:t>
+              <a:t>é zero — como em cinco das sete execuções do SAC. Não é uma diferença de magnitude, é outro comportamento — e é esta a</a:t>
             </a:r>
           </a:p>
           <a:p>
@@ -24145,7 +24145,7 @@
                 </a:solidFill>
                 <a:latin typeface="Segoe UI"/>
               </a:rPr>
-              <a:t>ocupação média do enxame ao longo do episódio — modelos campeões, 6 episódios cada</a:t>
+              <a:t>ocupação média do enxame ao longo do episódio — um modelo da campanha por algoritmo, 6 episódios cada</a:t>
             </a:r>
           </a:p>
         </p:txBody>
@@ -24587,7 +24587,7 @@
                 </a:solidFill>
                 <a:latin typeface="Segoe UI"/>
               </a:rPr>
-              <a:t>O corredor que contorna o muro é o que separa quem resolve de quem não resolve: o GNN e o PPO desenham-no (476 e 419 chegadas em 6 episódios); o SAC nunca o encontra e faz zero.</a:t>
+              <a:t>O corredor que contorna o muro é o que separa quem resolve de quem não resolve: o GNN e o PPO desenham-no (476 e 419 chegadas em 6 episódios); este SAC, como 5 das suas 7 execuções, nunca o encontra e faz zero.</a:t>
             </a:r>
           </a:p>
         </p:txBody>

--- a/Defesa/slides_defesa.pptx
+++ b/Defesa/slides_defesa.pptx
@@ -774,12 +774,22 @@
           </a:p>
           <a:p>
             <a:r>
-              <a:t>ninho no fim, medido num potencial geodésico que contorna as paredes. Vinte e</a:t>
-            </a:r>
-          </a:p>
-          <a:p>
-            <a:r>
-              <a:t>oito execuções de zero para cem por cento. Mas é condição necessária, não</a:t>
+              <a:t>ninho no fim, medido num potencial geodésico que contorna as paredes. Na última</a:t>
+            </a:r>
+          </a:p>
+          <a:p>
+            <a:r>
+              <a:t>campanha com a fitness antiga, só três de doze execuções destes cenários chegavam</a:t>
+            </a:r>
+          </a:p>
+          <a:p>
+            <a:r>
+              <a:t>ao ninho; com o homing, as vinte e oito convergem. É uma comparação entre</a:t>
+            </a:r>
+          </a:p>
+          <a:p>
+            <a:r>
+              <a:t>campanhas, não uma ablação — mudou também o decaimento do sigma. Mas é condição necessária, não</a:t>
             </a:r>
           </a:p>
           <a:p>
@@ -1898,7 +1908,7 @@
           </a:p>
           <a:p>
             <a:r>
-              <a:t>fiabilidade antes da magnitude — um resultado negativo, reportado como tal.</a:t>
+              <a:t>fiabilidade, sobretudo — um resultado negativo, reportado como tal.</a:t>
             </a:r>
           </a:p>
         </p:txBody>
@@ -3209,7 +3219,7 @@
           </a:p>
           <a:p>
             <a:r>
-              <a:t>• Observação local e parcial — cada robô só vê à sua volta e em relação a si (egocêntrica), nunca o mapa inteiro</a:t>
+              <a:t>• Observação parcial — as paredes só pelo LiDAR (8 m), nunca o mapa inteiro; os outros robôs, todos, sem limite de alcance</a:t>
             </a:r>
           </a:p>
           <a:p>
@@ -7466,7 +7476,7 @@
                 </a:solidFill>
                 <a:latin typeface="Segoe UI"/>
               </a:rPr>
-              <a:t>Resultado: de 0 % para 100 % de sucesso nas 28 execuções dos quatro cenários de gargalo.</a:t>
+              <a:t>Resultado: de 3 em 12 execuções que chegavam ao ninho para 28 em 28 a 100 % de sucesso.</a:t>
             </a:r>
           </a:p>
           <a:p>
@@ -7691,7 +7701,7 @@
                 </a:solidFill>
                 <a:latin typeface="Consolas"/>
               </a:rPr>
-              <a:t>TAXA DE SUCESSO DO GNN EVOLUTIVO</a:t>
+              <a:t>EXECUÇÕES DO GNN QUE CHEGAM AO NINHO</a:t>
             </a:r>
           </a:p>
         </p:txBody>
@@ -7914,7 +7924,7 @@
                 </a:solidFill>
                 <a:latin typeface="Consolas"/>
               </a:rPr>
-              <a:t>0 %</a:t>
+              <a:t>1/3</a:t>
             </a:r>
           </a:p>
         </p:txBody>
@@ -7992,7 +8002,7 @@
                 </a:solidFill>
                 <a:latin typeface="Consolas"/>
               </a:rPr>
-              <a:t>100 %</a:t>
+              <a:t>7/7</a:t>
             </a:r>
           </a:p>
         </p:txBody>
@@ -8105,7 +8115,7 @@
                 </a:solidFill>
                 <a:latin typeface="Consolas"/>
               </a:rPr>
-              <a:t>0 %</a:t>
+              <a:t>0/3</a:t>
             </a:r>
           </a:p>
         </p:txBody>
@@ -8183,7 +8193,7 @@
                 </a:solidFill>
                 <a:latin typeface="Consolas"/>
               </a:rPr>
-              <a:t>100 %</a:t>
+              <a:t>7/7</a:t>
             </a:r>
           </a:p>
         </p:txBody>
@@ -8296,7 +8306,7 @@
                 </a:solidFill>
                 <a:latin typeface="Consolas"/>
               </a:rPr>
-              <a:t>0 %</a:t>
+              <a:t>1/3</a:t>
             </a:r>
           </a:p>
         </p:txBody>
@@ -8374,7 +8384,7 @@
                 </a:solidFill>
                 <a:latin typeface="Consolas"/>
               </a:rPr>
-              <a:t>100 %</a:t>
+              <a:t>7/7</a:t>
             </a:r>
           </a:p>
         </p:txBody>
@@ -8487,7 +8497,7 @@
                 </a:solidFill>
                 <a:latin typeface="Consolas"/>
               </a:rPr>
-              <a:t>0 %</a:t>
+              <a:t>1/3</a:t>
             </a:r>
           </a:p>
         </p:txBody>
@@ -8565,7 +8575,7 @@
                 </a:solidFill>
                 <a:latin typeface="Consolas"/>
               </a:rPr>
-              <a:t>100 %</a:t>
+              <a:t>7/7</a:t>
             </a:r>
           </a:p>
         </p:txBody>
@@ -8649,13 +8659,13 @@
               </a:spcAft>
             </a:pPr>
             <a:r>
-              <a:rPr sz="1400" b="0">
+              <a:rPr sz="1300" b="0">
                 <a:solidFill>
                   <a:srgbClr val="9A9A9A"/>
                 </a:solidFill>
                 <a:latin typeface="Segoe UI"/>
               </a:rPr>
-              <a:t>Muro em U, com o mesmo homing: 3/7 — bimodal</a:t>
+              <a:t>antes: treino de 28 jun, sem avaliação determinística · Muro em U com homing: 3/7</a:t>
             </a:r>
           </a:p>
         </p:txBody>
@@ -13149,7 +13159,7 @@
                 </a:solidFill>
                 <a:latin typeface="Segoe UI"/>
               </a:rPr>
-              <a:t>A resposta à QI7 é negativa: a composição degrada a fiabilidade, não a magnitude — a bimodalidade do Muro em U em ponto grande.</a:t>
+              <a:t>A resposta à QI7 é negativa: a composição degrada sobretudo a fiabilidade — a bimodalidade do Muro em U em ponto grande.</a:t>
             </a:r>
           </a:p>
         </p:txBody>
@@ -14746,7 +14756,7 @@
                 </a:solidFill>
                 <a:latin typeface="Segoe UI"/>
               </a:rPr>
-              <a:t>Arquitetura assimétrica: atenção sobre grafo só no evolutivo; PPO/SAC com MLP — a comparação combina otimizador e representação (trabalho futuro n.º 1: a mesma arquitetura por gradiente)</a:t>
+              <a:t>Arquitetura assimétrica: atenção sobre grafo só no evolutivo; PPO/SAC com MLP — a comparação combina otimizador e representação (trabalho futuro n.º 2: a mesma arquitetura por gradiente)</a:t>
             </a:r>
           </a:p>
           <a:p>
@@ -15282,7 +15292,7 @@
                 </a:solidFill>
                 <a:latin typeface="Segoe UI"/>
               </a:rPr>
-              <a:t>  o homing terminal no potencial geodésico levou 28 execuções de 0 % a 100 % — o principal contributo metodológico</a:t>
+              <a:t>  com o homing terminal no potencial geodésico, os quatro cenários de gargalo passam de 3/12 execuções com chegadas a 28/28 a 100 %</a:t>
             </a:r>
           </a:p>
           <a:p>
@@ -15860,7 +15870,7 @@
                 </a:solidFill>
                 <a:latin typeface="Segoe UI"/>
               </a:rPr>
-              <a:t>A composição de dificuldades degrada a fiabilidade antes da magnitude — e isso está reportado como resultado negativo, com o número à vista.</a:t>
+              <a:t>A composição de dificuldades degrada sobretudo a fiabilidade — e isso está reportado como resultado negativo, com o número à vista.</a:t>
             </a:r>
           </a:p>
         </p:txBody>
@@ -26455,7 +26465,7 @@
                 </a:solidFill>
                 <a:latin typeface="Segoe UI"/>
               </a:rPr>
-              <a:t>navegação cooperativa até ao ninho em 3D, 20 agentes, observação local (LiDAR 8 m)</a:t>
+              <a:t>navegação cooperativa até ao ninho em 3D, 20 agentes, obstáculos só pelo LiDAR (8 m)</a:t>
             </a:r>
           </a:p>
         </p:txBody>
@@ -26598,7 +26608,7 @@
                 </a:solidFill>
                 <a:latin typeface="Segoe UI"/>
               </a:rPr>
-              <a:t>Observação local e parcial: LiDAR, bússola ao ninho, vizinhos</a:t>
+              <a:t>Observação: LiDAR local (8 m), bússola ao ninho e a posição de todos os outros robôs</a:t>
             </a:r>
           </a:p>
           <a:p>

--- a/Defesa/slides_defesa.pptx
+++ b/Defesa/slides_defesa.pptx
@@ -1218,7 +1218,7 @@
           </a:p>
           <a:p>
             <a:r>
-              <a:t>três robôs. A redundância vem da partilha de parâmetros e da observação local.</a:t>
+              <a:t>três robôs. A redundância vem da partilha de parâmetros.</a:t>
             </a:r>
           </a:p>
           <a:p>
@@ -12278,7 +12278,7 @@
                 </a:solidFill>
                 <a:latin typeface="Segoe UI"/>
               </a:rPr>
-              <a:t>Transversal aos paradigmas: a redundância vem do parameter sharing e da observação local — nenhum agente é insubstituível</a:t>
+              <a:t>Transversal aos paradigmas: a redundância vem do parameter sharing — nenhum agente é insubstituível</a:t>
             </a:r>
           </a:p>
           <a:p>

--- a/Defesa/slides_defesa.pptx
+++ b/Defesa/slides_defesa.pptx
@@ -1622,7 +1622,17 @@
           </a:p>
           <a:p>
             <a:r>
-              <a:t>fim do orçamento; o SAC nos gargalos é limite inferior. Tudo é simulação. E a</a:t>
+              <a:t>fim do orçamento; o SAC nos gargalos é limite inferior. A observação do enxame</a:t>
+            </a:r>
+          </a:p>
+          <a:p>
+            <a:r>
+              <a:t>é global: cada robô recebe todos os outros, sem alcance nem paredes — igual para</a:t>
+            </a:r>
+          </a:p>
+          <a:p>
+            <a:r>
+              <a:t>os três, mas não é o que um enxame real teria. Tudo é simulação. E a</a:t>
             </a:r>
           </a:p>
           <a:p>
@@ -7414,32 +7424,73 @@
           </a:bodyPr>
           <a:lstStyle/>
           <a:p>
+            <a:pPr algn="l" marL="254000" indent="-254000">
+              <a:spcAft>
+                <a:spcPts val="800"/>
+              </a:spcAft>
+            </a:pPr>
+            <a:r>
+              <a:rPr sz="1600">
+                <a:solidFill>
+                  <a:srgbClr val="9A9A9A"/>
+                </a:solidFill>
+                <a:latin typeface="Segoe UI"/>
+              </a:rPr>
+              <a:t>▸	</a:t>
+            </a:r>
+            <a:r>
+              <a:rPr sz="1600" b="0">
+                <a:solidFill>
+                  <a:srgbClr val="E2E2E2"/>
+                </a:solidFill>
+                <a:latin typeface="Segoe UI"/>
+              </a:rPr>
+              <a:t>Fitness inicial: chegadas + retorno acumulado do episódio — farmável por deambulação; a população satura num planalto sem pressão seletiva (fitness exploitation)</a:t>
+            </a:r>
+          </a:p>
+          <a:p>
+            <a:pPr algn="l" marL="254000" indent="-254000">
+              <a:spcAft>
+                <a:spcPts val="800"/>
+              </a:spcAft>
+            </a:pPr>
+            <a:r>
+              <a:rPr sz="1600">
+                <a:solidFill>
+                  <a:srgbClr val="9A9A9A"/>
+                </a:solidFill>
+                <a:latin typeface="Segoe UI"/>
+              </a:rPr>
+              <a:t>▸	</a:t>
+            </a:r>
+            <a:r>
+              <a:rPr sz="1600" b="0">
+                <a:solidFill>
+                  <a:srgbClr val="E2E2E2"/>
+                </a:solidFill>
+                <a:latin typeface="Segoe UI"/>
+              </a:rPr>
+              <a:t>Cura: substituir o retorno pelo homing terminal — proximidade ao ninho no fim do episódio, medida no potencial geodésico (contorna paredes; o euclidiano atrai para dentro do beco)</a:t>
+            </a:r>
+          </a:p>
+          <a:p>
             <a:pPr algn="l">
               <a:spcAft>
                 <a:spcPts val="800"/>
               </a:spcAft>
             </a:pPr>
             <a:r>
-              <a:rPr sz="1600">
-                <a:solidFill>
-                  <a:srgbClr val="9A9A9A"/>
+              <a:rPr sz="1600" b="1">
+                <a:solidFill>
+                  <a:srgbClr val="2FB583"/>
                 </a:solidFill>
                 <a:latin typeface="Segoe UI"/>
               </a:rPr>
-              <a:t>▸  </a:t>
-            </a:r>
-            <a:r>
-              <a:rPr sz="1600" b="0">
-                <a:solidFill>
-                  <a:srgbClr val="E2E2E2"/>
-                </a:solidFill>
-                <a:latin typeface="Segoe UI"/>
-              </a:rPr>
-              <a:t>Fitness inicial: chegadas + retorno acumulado do episódio — farmável por deambulação; a população satura num planalto sem pressão seletiva (fitness exploitation)</a:t>
-            </a:r>
-          </a:p>
-          <a:p>
-            <a:pPr algn="l">
+              <a:t>Resultado: de 3 em 12 execuções que chegavam ao ninho para 28 em 28 a 100 % de sucesso.</a:t>
+            </a:r>
+          </a:p>
+          <a:p>
+            <a:pPr algn="l" marL="254000" indent="-254000">
               <a:spcAft>
                 <a:spcPts val="800"/>
               </a:spcAft>
@@ -7451,48 +7502,7 @@
                 </a:solidFill>
                 <a:latin typeface="Segoe UI"/>
               </a:rPr>
-              <a:t>▸  </a:t>
-            </a:r>
-            <a:r>
-              <a:rPr sz="1600" b="0">
-                <a:solidFill>
-                  <a:srgbClr val="E2E2E2"/>
-                </a:solidFill>
-                <a:latin typeface="Segoe UI"/>
-              </a:rPr>
-              <a:t>Cura: substituir o retorno pelo homing terminal — proximidade ao ninho no fim do episódio, medida no potencial geodésico (contorna paredes; o euclidiano atrai para dentro do beco)</a:t>
-            </a:r>
-          </a:p>
-          <a:p>
-            <a:pPr algn="l">
-              <a:spcAft>
-                <a:spcPts val="800"/>
-              </a:spcAft>
-            </a:pPr>
-            <a:r>
-              <a:rPr sz="1600" b="1">
-                <a:solidFill>
-                  <a:srgbClr val="2FB583"/>
-                </a:solidFill>
-                <a:latin typeface="Segoe UI"/>
-              </a:rPr>
-              <a:t>Resultado: de 3 em 12 execuções que chegavam ao ninho para 28 em 28 a 100 % de sucesso.</a:t>
-            </a:r>
-          </a:p>
-          <a:p>
-            <a:pPr algn="l">
-              <a:spcAft>
-                <a:spcPts val="800"/>
-              </a:spcAft>
-            </a:pPr>
-            <a:r>
-              <a:rPr sz="1600">
-                <a:solidFill>
-                  <a:srgbClr val="9A9A9A"/>
-                </a:solidFill>
-                <a:latin typeface="Segoe UI"/>
-              </a:rPr>
-              <a:t>▸  </a:t>
+              <a:t>▸	</a:t>
             </a:r>
             <a:r>
               <a:rPr sz="1600" b="0">
@@ -8902,32 +8912,98 @@
           </a:bodyPr>
           <a:lstStyle/>
           <a:p>
+            <a:pPr algn="l" marL="238125" indent="-238125">
+              <a:spcAft>
+                <a:spcPts val="800"/>
+              </a:spcAft>
+            </a:pPr>
+            <a:r>
+              <a:rPr sz="1500">
+                <a:solidFill>
+                  <a:srgbClr val="9A9A9A"/>
+                </a:solidFill>
+                <a:latin typeface="Segoe UI"/>
+              </a:rPr>
+              <a:t>▸	</a:t>
+            </a:r>
+            <a:r>
+              <a:rPr sz="1500" b="0">
+                <a:solidFill>
+                  <a:srgbClr val="E2E2E2"/>
+                </a:solidFill>
+                <a:latin typeface="Segoe UI"/>
+              </a:rPr>
+              <a:t>Novidade com peso fixo (w = 0,5), orçamento igualado: Muro em U passa de 3/7 para 7/7 (69,8 vs 24,5; p = 0,026, δ = +0,71) — mas custa na Porta com Alternativa (63,0 vs 86,7; δ = −1,00)</a:t>
+            </a:r>
+          </a:p>
+          <a:p>
+            <a:pPr algn="l" marL="238125" indent="-238125">
+              <a:spcAft>
+                <a:spcPts val="800"/>
+              </a:spcAft>
+            </a:pPr>
+            <a:r>
+              <a:rPr sz="1500">
+                <a:solidFill>
+                  <a:srgbClr val="9A9A9A"/>
+                </a:solidFill>
+                <a:latin typeface="Segoe UI"/>
+              </a:rPr>
+              <a:t>▸	</a:t>
+            </a:r>
+            <a:r>
+              <a:rPr sz="1500" b="0">
+                <a:solidFill>
+                  <a:srgbClr val="E2E2E2"/>
+                </a:solidFill>
+                <a:latin typeface="Segoe UI"/>
+              </a:rPr>
+              <a:t>Dosagem adaptativa (pré-registada): w decai após a descoberta sustentada → mantém 7/7 no Muro em U, sem custo significativo em nenhum dos outros seis; com o dobro do orçamento, 88,7 ± 0,6 — o melhor resultado da dissertação</a:t>
+            </a:r>
+          </a:p>
+          <a:p>
+            <a:pPr algn="l" marL="238125" indent="-238125">
+              <a:spcAft>
+                <a:spcPts val="800"/>
+              </a:spcAft>
+            </a:pPr>
+            <a:r>
+              <a:rPr sz="1500">
+                <a:solidFill>
+                  <a:srgbClr val="9A9A9A"/>
+                </a:solidFill>
+                <a:latin typeface="Segoe UI"/>
+              </a:rPr>
+              <a:t>▸	</a:t>
+            </a:r>
+            <a:r>
+              <a:rPr sz="1500" b="0">
+                <a:solidFill>
+                  <a:srgbClr val="E2E2E2"/>
+                </a:solidFill>
+                <a:latin typeface="Segoe UI"/>
+              </a:rPr>
+              <a:t>O ganho não se compra com orçamento: o objetivo puro com 390 min continua bimodal (4/7)</a:t>
+            </a:r>
+          </a:p>
+          <a:p>
             <a:pPr algn="l">
               <a:spcAft>
                 <a:spcPts val="800"/>
               </a:spcAft>
             </a:pPr>
             <a:r>
-              <a:rPr sz="1500">
-                <a:solidFill>
-                  <a:srgbClr val="9A9A9A"/>
+              <a:rPr sz="1500" b="1">
+                <a:solidFill>
+                  <a:srgbClr val="F5F5F5"/>
                 </a:solidFill>
                 <a:latin typeface="Segoe UI"/>
               </a:rPr>
-              <a:t>▸  </a:t>
-            </a:r>
-            <a:r>
-              <a:rPr sz="1500" b="0">
-                <a:solidFill>
-                  <a:srgbClr val="E2E2E2"/>
-                </a:solidFill>
-                <a:latin typeface="Segoe UI"/>
-              </a:rPr>
-              <a:t>Novidade com peso fixo (w = 0,5), orçamento igualado: Muro em U passa de 3/7 para 7/7 (69,8 vs 24,5; p = 0,026, δ = +0,71) — mas custa na Porta com Alternativa (63,0 vs 86,7; δ = −1,00)</a:t>
-            </a:r>
-          </a:p>
-          <a:p>
-            <a:pPr algn="l">
+              <a:t>Replicação a n = 28: 28/28 execuções resolvidas, contra 15/28 do objetivo puro e 14/28 do PPO e do SAC (Fisher exato, p &lt; 0,0001).</a:t>
+            </a:r>
+          </a:p>
+          <a:p>
+            <a:pPr algn="l" marL="238125" indent="-238125">
               <a:spcAft>
                 <a:spcPts val="800"/>
               </a:spcAft>
@@ -8939,73 +9015,7 @@
                 </a:solidFill>
                 <a:latin typeface="Segoe UI"/>
               </a:rPr>
-              <a:t>▸  </a:t>
-            </a:r>
-            <a:r>
-              <a:rPr sz="1500" b="0">
-                <a:solidFill>
-                  <a:srgbClr val="E2E2E2"/>
-                </a:solidFill>
-                <a:latin typeface="Segoe UI"/>
-              </a:rPr>
-              <a:t>Dosagem adaptativa (pré-registada): w decai após a descoberta sustentada → mantém 7/7 no Muro em U, sem custo significativo em nenhum dos outros seis; com o dobro do orçamento, 88,7 ± 0,6 — o melhor resultado da dissertação</a:t>
-            </a:r>
-          </a:p>
-          <a:p>
-            <a:pPr algn="l">
-              <a:spcAft>
-                <a:spcPts val="800"/>
-              </a:spcAft>
-            </a:pPr>
-            <a:r>
-              <a:rPr sz="1500">
-                <a:solidFill>
-                  <a:srgbClr val="9A9A9A"/>
-                </a:solidFill>
-                <a:latin typeface="Segoe UI"/>
-              </a:rPr>
-              <a:t>▸  </a:t>
-            </a:r>
-            <a:r>
-              <a:rPr sz="1500" b="0">
-                <a:solidFill>
-                  <a:srgbClr val="E2E2E2"/>
-                </a:solidFill>
-                <a:latin typeface="Segoe UI"/>
-              </a:rPr>
-              <a:t>O ganho não se compra com orçamento: o objetivo puro com 390 min continua bimodal (4/7)</a:t>
-            </a:r>
-          </a:p>
-          <a:p>
-            <a:pPr algn="l">
-              <a:spcAft>
-                <a:spcPts val="800"/>
-              </a:spcAft>
-            </a:pPr>
-            <a:r>
-              <a:rPr sz="1500" b="1">
-                <a:solidFill>
-                  <a:srgbClr val="F5F5F5"/>
-                </a:solidFill>
-                <a:latin typeface="Segoe UI"/>
-              </a:rPr>
-              <a:t>Replicação a n = 28: 28/28 execuções resolvidas, contra 15/28 do objetivo puro e 14/28 do PPO e do SAC (Fisher exato, p &lt; 0,0001).</a:t>
-            </a:r>
-          </a:p>
-          <a:p>
-            <a:pPr algn="l">
-              <a:spcAft>
-                <a:spcPts val="800"/>
-              </a:spcAft>
-            </a:pPr>
-            <a:r>
-              <a:rPr sz="1500">
-                <a:solidFill>
-                  <a:srgbClr val="9A9A9A"/>
-                </a:solidFill>
-                <a:latin typeface="Segoe UI"/>
-              </a:rPr>
-              <a:t>▸  </a:t>
+              <a:t>▸	</a:t>
             </a:r>
             <a:r>
               <a:rPr sz="1500" b="0">
@@ -9436,7 +9446,7 @@
           </a:bodyPr>
           <a:lstStyle/>
           <a:p>
-            <a:pPr algn="l">
+            <a:pPr algn="l" marL="254000" indent="-254000">
               <a:spcAft>
                 <a:spcPts val="600"/>
               </a:spcAft>
@@ -9448,7 +9458,7 @@
                 </a:solidFill>
                 <a:latin typeface="Segoe UI"/>
               </a:rPr>
-              <a:t>▸  </a:t>
+              <a:t>▸	</a:t>
             </a:r>
             <a:r>
               <a:rPr sz="1600" b="0">
@@ -9461,7 +9471,7 @@
             </a:r>
           </a:p>
           <a:p>
-            <a:pPr algn="l">
+            <a:pPr algn="l" marL="254000" indent="-254000">
               <a:spcAft>
                 <a:spcPts val="600"/>
               </a:spcAft>
@@ -9473,7 +9483,7 @@
                 </a:solidFill>
                 <a:latin typeface="Segoe UI"/>
               </a:rPr>
-              <a:t>▸  </a:t>
+              <a:t>▸	</a:t>
             </a:r>
             <a:r>
               <a:rPr sz="1600" b="0">
@@ -9486,7 +9496,7 @@
             </a:r>
           </a:p>
           <a:p>
-            <a:pPr algn="l">
+            <a:pPr algn="l" marL="254000" indent="-254000">
               <a:spcAft>
                 <a:spcPts val="600"/>
               </a:spcAft>
@@ -9498,7 +9508,7 @@
                 </a:solidFill>
                 <a:latin typeface="Segoe UI"/>
               </a:rPr>
-              <a:t>▸  </a:t>
+              <a:t>▸	</a:t>
             </a:r>
             <a:r>
               <a:rPr sz="1600" b="1">
@@ -12207,7 +12217,7 @@
           </a:bodyPr>
           <a:lstStyle/>
           <a:p>
-            <a:pPr algn="l">
+            <a:pPr algn="l" marL="269875" indent="-269875">
               <a:spcAft>
                 <a:spcPts val="800"/>
               </a:spcAft>
@@ -12219,7 +12229,7 @@
                 </a:solidFill>
                 <a:latin typeface="Segoe UI"/>
               </a:rPr>
-              <a:t>▸  </a:t>
+              <a:t>▸	</a:t>
             </a:r>
             <a:r>
               <a:rPr sz="1700" b="0">
@@ -12232,7 +12242,7 @@
             </a:r>
           </a:p>
           <a:p>
-            <a:pPr algn="l">
+            <a:pPr algn="l" marL="269875" indent="-269875">
               <a:spcAft>
                 <a:spcPts val="800"/>
               </a:spcAft>
@@ -12244,7 +12254,7 @@
                 </a:solidFill>
                 <a:latin typeface="Segoe UI"/>
               </a:rPr>
-              <a:t>▸  </a:t>
+              <a:t>▸	</a:t>
             </a:r>
             <a:r>
               <a:rPr sz="1700" b="0">
@@ -12257,7 +12267,7 @@
             </a:r>
           </a:p>
           <a:p>
-            <a:pPr algn="l">
+            <a:pPr algn="l" marL="269875" indent="-269875">
               <a:spcAft>
                 <a:spcPts val="800"/>
               </a:spcAft>
@@ -12269,7 +12279,7 @@
                 </a:solidFill>
                 <a:latin typeface="Segoe UI"/>
               </a:rPr>
-              <a:t>▸  </a:t>
+              <a:t>▸	</a:t>
             </a:r>
             <a:r>
               <a:rPr sz="1700" b="0">
@@ -12282,7 +12292,7 @@
             </a:r>
           </a:p>
           <a:p>
-            <a:pPr algn="l">
+            <a:pPr algn="l" marL="269875" indent="-269875">
               <a:spcAft>
                 <a:spcPts val="800"/>
               </a:spcAft>
@@ -12294,7 +12304,7 @@
                 </a:solidFill>
                 <a:latin typeface="Segoe UI"/>
               </a:rPr>
-              <a:t>▸  </a:t>
+              <a:t>▸	</a:t>
             </a:r>
             <a:r>
               <a:rPr sz="1700" b="0">
@@ -13097,7 +13107,7 @@
           </a:bodyPr>
           <a:lstStyle/>
           <a:p>
-            <a:pPr algn="l">
+            <a:pPr algn="l" marL="238125" indent="-238125">
               <a:spcAft>
                 <a:spcPts val="600"/>
               </a:spcAft>
@@ -13109,7 +13119,7 @@
                 </a:solidFill>
                 <a:latin typeface="Segoe UI"/>
               </a:rPr>
-              <a:t>▸  </a:t>
+              <a:t>▸	</a:t>
             </a:r>
             <a:r>
               <a:rPr sz="1500" b="0">
@@ -13122,7 +13132,7 @@
             </a:r>
           </a:p>
           <a:p>
-            <a:pPr algn="l">
+            <a:pPr algn="l" marL="238125" indent="-238125">
               <a:spcAft>
                 <a:spcPts val="600"/>
               </a:spcAft>
@@ -13134,7 +13144,7 @@
                 </a:solidFill>
                 <a:latin typeface="Segoe UI"/>
               </a:rPr>
-              <a:t>▸  </a:t>
+              <a:t>▸	</a:t>
             </a:r>
             <a:r>
               <a:rPr sz="1500" b="0">
@@ -14735,7 +14745,7 @@
           </a:bodyPr>
           <a:lstStyle/>
           <a:p>
-            <a:pPr algn="l">
+            <a:pPr algn="l" marL="238125" indent="-238125">
               <a:spcAft>
                 <a:spcPts val="800"/>
               </a:spcAft>
@@ -14747,7 +14757,7 @@
                 </a:solidFill>
                 <a:latin typeface="Segoe UI"/>
               </a:rPr>
-              <a:t>▸  </a:t>
+              <a:t>▸	</a:t>
             </a:r>
             <a:r>
               <a:rPr sz="1500" b="0">
@@ -14760,7 +14770,7 @@
             </a:r>
           </a:p>
           <a:p>
-            <a:pPr algn="l">
+            <a:pPr algn="l" marL="238125" indent="-238125">
               <a:spcAft>
                 <a:spcPts val="800"/>
               </a:spcAft>
@@ -14772,7 +14782,7 @@
                 </a:solidFill>
                 <a:latin typeface="Segoe UI"/>
               </a:rPr>
-              <a:t>▸  </a:t>
+              <a:t>▸	</a:t>
             </a:r>
             <a:r>
               <a:rPr sz="1500" b="0">
@@ -14785,7 +14795,7 @@
             </a:r>
           </a:p>
           <a:p>
-            <a:pPr algn="l">
+            <a:pPr algn="l" marL="238125" indent="-238125">
               <a:spcAft>
                 <a:spcPts val="800"/>
               </a:spcAft>
@@ -14797,7 +14807,7 @@
                 </a:solidFill>
                 <a:latin typeface="Segoe UI"/>
               </a:rPr>
-              <a:t>▸  </a:t>
+              <a:t>▸	</a:t>
             </a:r>
             <a:r>
               <a:rPr sz="1500" b="0">
@@ -14810,7 +14820,7 @@
             </a:r>
           </a:p>
           <a:p>
-            <a:pPr algn="l">
+            <a:pPr algn="l" marL="238125" indent="-238125">
               <a:spcAft>
                 <a:spcPts val="800"/>
               </a:spcAft>
@@ -14822,7 +14832,7 @@
                 </a:solidFill>
                 <a:latin typeface="Segoe UI"/>
               </a:rPr>
-              <a:t>▸  </a:t>
+              <a:t>▸	</a:t>
             </a:r>
             <a:r>
               <a:rPr sz="1500" b="0">
@@ -14831,11 +14841,11 @@
                 </a:solidFill>
                 <a:latin typeface="Segoe UI"/>
               </a:rPr>
-              <a:t>Só simulação: o fosso de implantação fica por validar</a:t>
-            </a:r>
-          </a:p>
-          <a:p>
-            <a:pPr algn="l">
+              <a:t>Perceção do enxame global: cada robô vê todos os outros, sem alcance nem oclusão (igual nos três; local é só o LiDAR)</a:t>
+            </a:r>
+          </a:p>
+          <a:p>
+            <a:pPr algn="l" marL="238125" indent="-238125">
               <a:spcAft>
                 <a:spcPts val="800"/>
               </a:spcAft>
@@ -14847,7 +14857,7 @@
                 </a:solidFill>
                 <a:latin typeface="Segoe UI"/>
               </a:rPr>
-              <a:t>▸  </a:t>
+              <a:t>▸	</a:t>
             </a:r>
             <a:r>
               <a:rPr sz="1500" b="0">
@@ -14856,11 +14866,11 @@
                 </a:solidFill>
                 <a:latin typeface="Segoe UI"/>
               </a:rPr>
-              <a:t>Dimensão vertical usada mas não observada; duas costuras na física das paredes — 11 de 343 modelos arquivados atravessam-nas, todos do evolutivo; na campanha final são 3 de 70 (Quatro Salas), e não as tornam melhores (55,7 vs 60,3 chegadas/ep). Onde a costura pesa é numa célula da campanha adaptativa — Quatro Salas —, declarada como contaminada</a:t>
-            </a:r>
-          </a:p>
-          <a:p>
-            <a:pPr algn="l">
+              <a:t>Só simulação: o fosso de implantação fica por validar</a:t>
+            </a:r>
+          </a:p>
+          <a:p>
+            <a:pPr algn="l" marL="238125" indent="-238125">
               <a:spcAft>
                 <a:spcPts val="800"/>
               </a:spcAft>
@@ -14872,7 +14882,32 @@
                 </a:solidFill>
                 <a:latin typeface="Segoe UI"/>
               </a:rPr>
-              <a:t>▸  </a:t>
+              <a:t>▸	</a:t>
+            </a:r>
+            <a:r>
+              <a:rPr sz="1500" b="0">
+                <a:solidFill>
+                  <a:srgbClr val="E2E2E2"/>
+                </a:solidFill>
+                <a:latin typeface="Segoe UI"/>
+              </a:rPr>
+              <a:t>Física: altitude usada mas não observada; costuras nas paredes — 3 de 70 modelos da campanha final, sem ficarem melhores (55,7 vs 60,3)</a:t>
+            </a:r>
+          </a:p>
+          <a:p>
+            <a:pPr algn="l" marL="238125" indent="-238125">
+              <a:spcAft>
+                <a:spcPts val="800"/>
+              </a:spcAft>
+            </a:pPr>
+            <a:r>
+              <a:rPr sz="1500">
+                <a:solidFill>
+                  <a:srgbClr val="9A9A9A"/>
+                </a:solidFill>
+                <a:latin typeface="Segoe UI"/>
+              </a:rPr>
+              <a:t>▸	</a:t>
             </a:r>
             <a:r>
               <a:rPr sz="1500" b="0">
@@ -15388,7 +15423,7 @@
                 </a:solidFill>
                 <a:latin typeface="Segoe UI"/>
               </a:rPr>
-              <a:t>  simulador, oito cenários, RS2C e neuroevolução; 27 verificadores ligam cada número aos dados</a:t>
+              <a:t>  simulador, oito cenários, RS2C e neuroevolução; 29 verificadores ligam cada número aos dados</a:t>
             </a:r>
           </a:p>
         </p:txBody>
@@ -20199,7 +20234,7 @@
           </a:bodyPr>
           <a:lstStyle/>
           <a:p>
-            <a:pPr algn="l">
+            <a:pPr algn="l" marL="254000" indent="-254000">
               <a:spcAft>
                 <a:spcPts val="600"/>
               </a:spcAft>
@@ -20211,7 +20246,7 @@
                 </a:solidFill>
                 <a:latin typeface="Segoe UI"/>
               </a:rPr>
-              <a:t>▸  </a:t>
+              <a:t>▸	</a:t>
             </a:r>
             <a:r>
               <a:rPr sz="1600" b="0">
@@ -20224,7 +20259,7 @@
             </a:r>
           </a:p>
           <a:p>
-            <a:pPr algn="l">
+            <a:pPr algn="l" marL="254000" indent="-254000">
               <a:spcAft>
                 <a:spcPts val="600"/>
               </a:spcAft>
@@ -20236,7 +20271,7 @@
                 </a:solidFill>
                 <a:latin typeface="Segoe UI"/>
               </a:rPr>
-              <a:t>▸  </a:t>
+              <a:t>▸	</a:t>
             </a:r>
             <a:r>
               <a:rPr sz="1600" b="0">
@@ -20249,7 +20284,7 @@
             </a:r>
           </a:p>
           <a:p>
-            <a:pPr algn="l">
+            <a:pPr algn="l" marL="254000" indent="-254000">
               <a:spcAft>
                 <a:spcPts val="600"/>
               </a:spcAft>
@@ -20261,7 +20296,7 @@
                 </a:solidFill>
                 <a:latin typeface="Segoe UI"/>
               </a:rPr>
-              <a:t>▸  </a:t>
+              <a:t>▸	</a:t>
             </a:r>
             <a:r>
               <a:rPr sz="1600" b="0">
@@ -23077,7 +23112,7 @@
           </a:bodyPr>
           <a:lstStyle/>
           <a:p>
-            <a:pPr algn="l">
+            <a:pPr algn="l" marL="254000" indent="-254000">
               <a:spcAft>
                 <a:spcPts val="600"/>
               </a:spcAft>
@@ -23089,7 +23124,7 @@
                 </a:solidFill>
                 <a:latin typeface="Segoe UI"/>
               </a:rPr>
-              <a:t>▸  </a:t>
+              <a:t>▸	</a:t>
             </a:r>
             <a:r>
               <a:rPr sz="1600" b="0">
@@ -23102,7 +23137,7 @@
             </a:r>
           </a:p>
           <a:p>
-            <a:pPr algn="l">
+            <a:pPr algn="l" marL="254000" indent="-254000">
               <a:spcAft>
                 <a:spcPts val="600"/>
               </a:spcAft>
@@ -23114,7 +23149,7 @@
                 </a:solidFill>
                 <a:latin typeface="Segoe UI"/>
               </a:rPr>
-              <a:t>▸  </a:t>
+              <a:t>▸	</a:t>
             </a:r>
             <a:r>
               <a:rPr sz="1600" b="0">
@@ -23127,7 +23162,7 @@
             </a:r>
           </a:p>
           <a:p>
-            <a:pPr algn="l">
+            <a:pPr algn="l" marL="254000" indent="-254000">
               <a:spcAft>
                 <a:spcPts val="600"/>
               </a:spcAft>
@@ -23139,7 +23174,7 @@
                 </a:solidFill>
                 <a:latin typeface="Segoe UI"/>
               </a:rPr>
-              <a:t>▸  </a:t>
+              <a:t>▸	</a:t>
             </a:r>
             <a:r>
               <a:rPr sz="1600" b="0">
@@ -24947,7 +24982,7 @@
           </a:bodyPr>
           <a:lstStyle/>
           <a:p>
-            <a:pPr algn="l">
+            <a:pPr algn="l" marL="254000" indent="-254000">
               <a:spcAft>
                 <a:spcPts val="800"/>
               </a:spcAft>
@@ -24959,7 +24994,7 @@
                 </a:solidFill>
                 <a:latin typeface="Segoe UI"/>
               </a:rPr>
-              <a:t>▸  </a:t>
+              <a:t>▸	</a:t>
             </a:r>
             <a:r>
               <a:rPr sz="1600" b="0">
@@ -24968,11 +25003,11 @@
                 </a:solidFill>
                 <a:latin typeface="Segoe UI"/>
               </a:rPr>
-              <a:t>27 verificadores automáticos; 19 correm no hook de pre-commit e recusam o commit se um número da tese deixar de bater com o CSV que o produziu</a:t>
-            </a:r>
-          </a:p>
-          <a:p>
-            <a:pPr algn="l">
+              <a:t>29 verificadores automáticos; 22 correm no hook de pre-commit e recusam o commit se um número da tese deixar de bater com o CSV que o produziu</a:t>
+            </a:r>
+          </a:p>
+          <a:p>
+            <a:pPr algn="l" marL="254000" indent="-254000">
               <a:spcAft>
                 <a:spcPts val="800"/>
               </a:spcAft>
@@ -24984,7 +25019,7 @@
                 </a:solidFill>
                 <a:latin typeface="Segoe UI"/>
               </a:rPr>
-              <a:t>▸  </a:t>
+              <a:t>▸	</a:t>
             </a:r>
             <a:r>
               <a:rPr sz="1600" b="0">
@@ -24997,7 +25032,7 @@
             </a:r>
           </a:p>
           <a:p>
-            <a:pPr algn="l">
+            <a:pPr algn="l" marL="254000" indent="-254000">
               <a:spcAft>
                 <a:spcPts val="800"/>
               </a:spcAft>
@@ -25009,7 +25044,7 @@
                 </a:solidFill>
                 <a:latin typeface="Segoe UI"/>
               </a:rPr>
-              <a:t>▸  </a:t>
+              <a:t>▸	</a:t>
             </a:r>
             <a:r>
               <a:rPr sz="1600" b="0">
@@ -25022,7 +25057,7 @@
             </a:r>
           </a:p>
           <a:p>
-            <a:pPr algn="l">
+            <a:pPr algn="l" marL="254000" indent="-254000">
               <a:spcAft>
                 <a:spcPts val="800"/>
               </a:spcAft>
@@ -25034,7 +25069,7 @@
                 </a:solidFill>
                 <a:latin typeface="Segoe UI"/>
               </a:rPr>
-              <a:t>▸  </a:t>
+              <a:t>▸	</a:t>
             </a:r>
             <a:r>
               <a:rPr sz="1600" b="0">
@@ -25047,7 +25082,7 @@
             </a:r>
           </a:p>
           <a:p>
-            <a:pPr algn="l">
+            <a:pPr algn="l" marL="254000" indent="-254000">
               <a:spcAft>
                 <a:spcPts val="800"/>
               </a:spcAft>
@@ -25059,7 +25094,7 @@
                 </a:solidFill>
                 <a:latin typeface="Segoe UI"/>
               </a:rPr>
-              <a:t>▸  </a:t>
+              <a:t>▸	</a:t>
             </a:r>
             <a:r>
               <a:rPr sz="1600" b="0">
@@ -25072,7 +25107,7 @@
             </a:r>
           </a:p>
           <a:p>
-            <a:pPr algn="l">
+            <a:pPr algn="l" marL="254000" indent="-254000">
               <a:spcAft>
                 <a:spcPts val="800"/>
               </a:spcAft>
@@ -25084,7 +25119,7 @@
                 </a:solidFill>
                 <a:latin typeface="Segoe UI"/>
               </a:rPr>
-              <a:t>▸  </a:t>
+              <a:t>▸	</a:t>
             </a:r>
             <a:r>
               <a:rPr sz="1600" b="0">
@@ -25443,7 +25478,7 @@
           </a:bodyPr>
           <a:lstStyle/>
           <a:p>
-            <a:pPr algn="l">
+            <a:pPr algn="l" marL="269875" indent="-269875">
               <a:spcAft>
                 <a:spcPts val="800"/>
               </a:spcAft>
@@ -25455,7 +25490,7 @@
                 </a:solidFill>
                 <a:latin typeface="Segoe UI"/>
               </a:rPr>
-              <a:t>▸  </a:t>
+              <a:t>▸	</a:t>
             </a:r>
             <a:r>
               <a:rPr sz="1700" b="0">
@@ -25468,7 +25503,7 @@
             </a:r>
           </a:p>
           <a:p>
-            <a:pPr algn="l">
+            <a:pPr algn="l" marL="269875" indent="-269875">
               <a:spcAft>
                 <a:spcPts val="800"/>
               </a:spcAft>
@@ -25480,7 +25515,7 @@
                 </a:solidFill>
                 <a:latin typeface="Segoe UI"/>
               </a:rPr>
-              <a:t>▸  </a:t>
+              <a:t>▸	</a:t>
             </a:r>
             <a:r>
               <a:rPr sz="1700" b="0">
@@ -25525,7 +25560,7 @@
             </a:r>
           </a:p>
           <a:p>
-            <a:pPr algn="l">
+            <a:pPr algn="l" marL="269875" indent="-269875">
               <a:spcAft>
                 <a:spcPts val="800"/>
               </a:spcAft>
@@ -25537,7 +25572,7 @@
                 </a:solidFill>
                 <a:latin typeface="Segoe UI"/>
               </a:rPr>
-              <a:t>▸  </a:t>
+              <a:t>▸	</a:t>
             </a:r>
             <a:r>
               <a:rPr sz="1700" b="0">
@@ -25550,7 +25585,7 @@
             </a:r>
           </a:p>
           <a:p>
-            <a:pPr algn="l">
+            <a:pPr algn="l" marL="269875" indent="-269875">
               <a:spcAft>
                 <a:spcPts val="800"/>
               </a:spcAft>
@@ -25562,7 +25597,7 @@
                 </a:solidFill>
                 <a:latin typeface="Segoe UI"/>
               </a:rPr>
-              <a:t>▸  </a:t>
+              <a:t>▸	</a:t>
             </a:r>
             <a:r>
               <a:rPr sz="1700" b="0">
@@ -26025,32 +26060,123 @@
             </a:r>
           </a:p>
           <a:p>
+            <a:pPr algn="l" marL="269875" indent="-269875">
+              <a:spcAft>
+                <a:spcPts val="800"/>
+              </a:spcAft>
+            </a:pPr>
+            <a:r>
+              <a:rPr sz="1700">
+                <a:solidFill>
+                  <a:srgbClr val="9A9A9A"/>
+                </a:solidFill>
+                <a:latin typeface="Segoe UI"/>
+              </a:rPr>
+              <a:t>▸	</a:t>
+            </a:r>
+            <a:r>
+              <a:rPr sz="1700" b="0">
+                <a:solidFill>
+                  <a:srgbClr val="E2E2E2"/>
+                </a:solidFill>
+                <a:latin typeface="Segoe UI"/>
+              </a:rPr>
+              <a:t>QI1  Desempenho de tarefa: qual paradigma é mais eficaz, e em que cenários?</a:t>
+            </a:r>
+          </a:p>
+          <a:p>
+            <a:pPr algn="l" marL="269875" indent="-269875">
+              <a:spcAft>
+                <a:spcPts val="800"/>
+              </a:spcAft>
+            </a:pPr>
+            <a:r>
+              <a:rPr sz="1700">
+                <a:solidFill>
+                  <a:srgbClr val="9A9A9A"/>
+                </a:solidFill>
+                <a:latin typeface="Segoe UI"/>
+              </a:rPr>
+              <a:t>▸	</a:t>
+            </a:r>
+            <a:r>
+              <a:rPr sz="1700" b="0">
+                <a:solidFill>
+                  <a:srgbClr val="E2E2E2"/>
+                </a:solidFill>
+                <a:latin typeface="Segoe UI"/>
+              </a:rPr>
+              <a:t>QI2  Escalabilidade: uma política treinada com N=20 transfere-se para N=10…100 sem retreino?</a:t>
+            </a:r>
+          </a:p>
+          <a:p>
+            <a:pPr algn="l" marL="269875" indent="-269875">
+              <a:spcAft>
+                <a:spcPts val="800"/>
+              </a:spcAft>
+            </a:pPr>
+            <a:r>
+              <a:rPr sz="1700">
+                <a:solidFill>
+                  <a:srgbClr val="9A9A9A"/>
+                </a:solidFill>
+                <a:latin typeface="Segoe UI"/>
+              </a:rPr>
+              <a:t>▸	</a:t>
+            </a:r>
+            <a:r>
+              <a:rPr sz="1700" b="0">
+                <a:solidFill>
+                  <a:srgbClr val="E2E2E2"/>
+                </a:solidFill>
+                <a:latin typeface="Segoe UI"/>
+              </a:rPr>
+              <a:t>QI3  Robustez: o que acontece quando 10 % dos agentes falham a meio?</a:t>
+            </a:r>
+          </a:p>
+          <a:p>
+            <a:pPr algn="l" marL="269875" indent="-269875">
+              <a:spcAft>
+                <a:spcPts val="800"/>
+              </a:spcAft>
+            </a:pPr>
+            <a:r>
+              <a:rPr sz="1700">
+                <a:solidFill>
+                  <a:srgbClr val="9A9A9A"/>
+                </a:solidFill>
+                <a:latin typeface="Segoe UI"/>
+              </a:rPr>
+              <a:t>▸	</a:t>
+            </a:r>
+            <a:r>
+              <a:rPr sz="1700" b="0">
+                <a:solidFill>
+                  <a:srgbClr val="E2E2E2"/>
+                </a:solidFill>
+                <a:latin typeface="Segoe UI"/>
+              </a:rPr>
+              <a:t>QI4  Critério de escolha: quando preferir um ao outro?</a:t>
+            </a:r>
+          </a:p>
+          <a:p>
             <a:pPr algn="l">
               <a:spcAft>
                 <a:spcPts val="800"/>
               </a:spcAft>
             </a:pPr>
             <a:r>
-              <a:rPr sz="1700">
-                <a:solidFill>
-                  <a:srgbClr val="9A9A9A"/>
+              <a:rPr sz="1700" b="1">
+                <a:solidFill>
+                  <a:srgbClr val="F5F5F5"/>
                 </a:solidFill>
                 <a:latin typeface="Segoe UI"/>
               </a:rPr>
-              <a:t>▸  </a:t>
-            </a:r>
-            <a:r>
-              <a:rPr sz="1700" b="0">
-                <a:solidFill>
-                  <a:srgbClr val="E2E2E2"/>
-                </a:solidFill>
-                <a:latin typeface="Segoe UI"/>
-              </a:rPr>
-              <a:t>QI1  Desempenho de tarefa: qual paradigma é mais eficaz, e em que cenários?</a:t>
-            </a:r>
-          </a:p>
-          <a:p>
-            <a:pPr algn="l">
+              <a:t>Nível 2 — mecanismos</a:t>
+            </a:r>
+          </a:p>
+          <a:p>
+            <a:pPr algn="l" marL="269875" indent="-269875">
               <a:spcAft>
                 <a:spcPts val="800"/>
               </a:spcAft>
@@ -26062,7 +26188,7 @@
                 </a:solidFill>
                 <a:latin typeface="Segoe UI"/>
               </a:rPr>
-              <a:t>▸  </a:t>
+              <a:t>▸	</a:t>
             </a:r>
             <a:r>
               <a:rPr sz="1700" b="0">
@@ -26071,11 +26197,11 @@
                 </a:solidFill>
                 <a:latin typeface="Segoe UI"/>
               </a:rPr>
-              <a:t>QI2  Escalabilidade: uma política treinada com N=20 transfere-se para N=10…100 sem retreino?</a:t>
-            </a:r>
-          </a:p>
-          <a:p>
-            <a:pPr algn="l">
+              <a:t>QI5  Desenho da fitness: um shaping de homing desbloqueia o que a fitness pura não resolve?</a:t>
+            </a:r>
+          </a:p>
+          <a:p>
+            <a:pPr algn="l" marL="269875" indent="-269875">
               <a:spcAft>
                 <a:spcPts val="800"/>
               </a:spcAft>
@@ -26087,7 +26213,7 @@
                 </a:solidFill>
                 <a:latin typeface="Segoe UI"/>
               </a:rPr>
-              <a:t>▸  </a:t>
+              <a:t>▸	</a:t>
             </a:r>
             <a:r>
               <a:rPr sz="1700" b="0">
@@ -26096,11 +26222,11 @@
                 </a:solidFill>
                 <a:latin typeface="Segoe UI"/>
               </a:rPr>
-              <a:t>QI3  Robustez: o que acontece quando 10 % dos agentes falham a meio?</a:t>
-            </a:r>
-          </a:p>
-          <a:p>
-            <a:pPr algn="l">
+              <a:t>QI6  Deceção: a procura por novidade ajuda onde o gradiente engana?</a:t>
+            </a:r>
+          </a:p>
+          <a:p>
+            <a:pPr algn="l" marL="269875" indent="-269875">
               <a:spcAft>
                 <a:spcPts val="800"/>
               </a:spcAft>
@@ -26112,98 +26238,7 @@
                 </a:solidFill>
                 <a:latin typeface="Segoe UI"/>
               </a:rPr>
-              <a:t>▸  </a:t>
-            </a:r>
-            <a:r>
-              <a:rPr sz="1700" b="0">
-                <a:solidFill>
-                  <a:srgbClr val="E2E2E2"/>
-                </a:solidFill>
-                <a:latin typeface="Segoe UI"/>
-              </a:rPr>
-              <a:t>QI4  Critério de escolha: quando preferir um ao outro?</a:t>
-            </a:r>
-          </a:p>
-          <a:p>
-            <a:pPr algn="l">
-              <a:spcAft>
-                <a:spcPts val="800"/>
-              </a:spcAft>
-            </a:pPr>
-            <a:r>
-              <a:rPr sz="1700" b="1">
-                <a:solidFill>
-                  <a:srgbClr val="F5F5F5"/>
-                </a:solidFill>
-                <a:latin typeface="Segoe UI"/>
-              </a:rPr>
-              <a:t>Nível 2 — mecanismos</a:t>
-            </a:r>
-          </a:p>
-          <a:p>
-            <a:pPr algn="l">
-              <a:spcAft>
-                <a:spcPts val="800"/>
-              </a:spcAft>
-            </a:pPr>
-            <a:r>
-              <a:rPr sz="1700">
-                <a:solidFill>
-                  <a:srgbClr val="9A9A9A"/>
-                </a:solidFill>
-                <a:latin typeface="Segoe UI"/>
-              </a:rPr>
-              <a:t>▸  </a:t>
-            </a:r>
-            <a:r>
-              <a:rPr sz="1700" b="0">
-                <a:solidFill>
-                  <a:srgbClr val="E2E2E2"/>
-                </a:solidFill>
-                <a:latin typeface="Segoe UI"/>
-              </a:rPr>
-              <a:t>QI5  Desenho da fitness: um shaping de homing desbloqueia o que a fitness pura não resolve?</a:t>
-            </a:r>
-          </a:p>
-          <a:p>
-            <a:pPr algn="l">
-              <a:spcAft>
-                <a:spcPts val="800"/>
-              </a:spcAft>
-            </a:pPr>
-            <a:r>
-              <a:rPr sz="1700">
-                <a:solidFill>
-                  <a:srgbClr val="9A9A9A"/>
-                </a:solidFill>
-                <a:latin typeface="Segoe UI"/>
-              </a:rPr>
-              <a:t>▸  </a:t>
-            </a:r>
-            <a:r>
-              <a:rPr sz="1700" b="0">
-                <a:solidFill>
-                  <a:srgbClr val="E2E2E2"/>
-                </a:solidFill>
-                <a:latin typeface="Segoe UI"/>
-              </a:rPr>
-              <a:t>QI6  Deceção: a procura por novidade ajuda onde o gradiente engana?</a:t>
-            </a:r>
-          </a:p>
-          <a:p>
-            <a:pPr algn="l">
-              <a:spcAft>
-                <a:spcPts val="800"/>
-              </a:spcAft>
-            </a:pPr>
-            <a:r>
-              <a:rPr sz="1700">
-                <a:solidFill>
-                  <a:srgbClr val="9A9A9A"/>
-                </a:solidFill>
-                <a:latin typeface="Segoe UI"/>
-              </a:rPr>
-              <a:t>▸  </a:t>
+              <a:t>▸	</a:t>
             </a:r>
             <a:r>
               <a:rPr sz="1700" b="0">
@@ -26562,7 +26597,7 @@
           </a:bodyPr>
           <a:lstStyle/>
           <a:p>
-            <a:pPr algn="l">
+            <a:pPr algn="l" marL="254000" indent="-254000">
               <a:spcAft>
                 <a:spcPts val="800"/>
               </a:spcAft>
@@ -26574,7 +26609,7 @@
                 </a:solidFill>
                 <a:latin typeface="Segoe UI"/>
               </a:rPr>
-              <a:t>▸  </a:t>
+              <a:t>▸	</a:t>
             </a:r>
             <a:r>
               <a:rPr sz="1600" b="0">
@@ -26587,7 +26622,7 @@
             </a:r>
           </a:p>
           <a:p>
-            <a:pPr algn="l">
+            <a:pPr algn="l" marL="254000" indent="-254000">
               <a:spcAft>
                 <a:spcPts val="800"/>
               </a:spcAft>
@@ -26599,7 +26634,7 @@
                 </a:solidFill>
                 <a:latin typeface="Segoe UI"/>
               </a:rPr>
-              <a:t>▸  </a:t>
+              <a:t>▸	</a:t>
             </a:r>
             <a:r>
               <a:rPr sz="1600" b="0">
@@ -26612,7 +26647,7 @@
             </a:r>
           </a:p>
           <a:p>
-            <a:pPr algn="l">
+            <a:pPr algn="l" marL="254000" indent="-254000">
               <a:spcAft>
                 <a:spcPts val="800"/>
               </a:spcAft>
@@ -26624,7 +26659,7 @@
                 </a:solidFill>
                 <a:latin typeface="Segoe UI"/>
               </a:rPr>
-              <a:t>▸  </a:t>
+              <a:t>▸	</a:t>
             </a:r>
             <a:r>
               <a:rPr sz="1600" b="0">
@@ -26669,7 +26704,7 @@
             </a:r>
           </a:p>
           <a:p>
-            <a:pPr algn="l">
+            <a:pPr algn="l" marL="254000" indent="-254000">
               <a:spcAft>
                 <a:spcPts val="800"/>
               </a:spcAft>
@@ -26681,7 +26716,7 @@
                 </a:solidFill>
                 <a:latin typeface="Segoe UI"/>
               </a:rPr>
-              <a:t>▸  </a:t>
+              <a:t>▸	</a:t>
             </a:r>
             <a:r>
               <a:rPr sz="1600" b="0">
@@ -26694,7 +26729,7 @@
             </a:r>
           </a:p>
           <a:p>
-            <a:pPr algn="l">
+            <a:pPr algn="l" marL="254000" indent="-254000">
               <a:spcAft>
                 <a:spcPts val="800"/>
               </a:spcAft>
@@ -26706,7 +26741,7 @@
                 </a:solidFill>
                 <a:latin typeface="Segoe UI"/>
               </a:rPr>
-              <a:t>▸  </a:t>
+              <a:t>▸	</a:t>
             </a:r>
             <a:r>
               <a:rPr sz="1600" b="0">
@@ -28903,7 +28938,7 @@
           </a:bodyPr>
           <a:lstStyle/>
           <a:p>
-            <a:pPr algn="l">
+            <a:pPr algn="l" marL="269875" indent="-269875">
               <a:spcAft>
                 <a:spcPts val="800"/>
               </a:spcAft>
@@ -28915,7 +28950,7 @@
                 </a:solidFill>
                 <a:latin typeface="Segoe UI"/>
               </a:rPr>
-              <a:t>▸  </a:t>
+              <a:t>▸	</a:t>
             </a:r>
             <a:r>
               <a:rPr sz="1700" b="0">
@@ -28928,7 +28963,7 @@
             </a:r>
           </a:p>
           <a:p>
-            <a:pPr algn="l">
+            <a:pPr algn="l" marL="269875" indent="-269875">
               <a:spcAft>
                 <a:spcPts val="800"/>
               </a:spcAft>
@@ -28940,7 +28975,7 @@
                 </a:solidFill>
                 <a:latin typeface="Segoe UI"/>
               </a:rPr>
-              <a:t>▸  </a:t>
+              <a:t>▸	</a:t>
             </a:r>
             <a:r>
               <a:rPr sz="1700" b="0">
@@ -28953,7 +28988,7 @@
             </a:r>
           </a:p>
           <a:p>
-            <a:pPr algn="l">
+            <a:pPr algn="l" marL="269875" indent="-269875">
               <a:spcAft>
                 <a:spcPts val="800"/>
               </a:spcAft>
@@ -28965,7 +29000,7 @@
                 </a:solidFill>
                 <a:latin typeface="Segoe UI"/>
               </a:rPr>
-              <a:t>▸  </a:t>
+              <a:t>▸	</a:t>
             </a:r>
             <a:r>
               <a:rPr sz="1700" b="0">
@@ -28978,7 +29013,7 @@
             </a:r>
           </a:p>
           <a:p>
-            <a:pPr algn="l">
+            <a:pPr algn="l" marL="269875" indent="-269875">
               <a:spcAft>
                 <a:spcPts val="800"/>
               </a:spcAft>
@@ -28990,7 +29025,7 @@
                 </a:solidFill>
                 <a:latin typeface="Segoe UI"/>
               </a:rPr>
-              <a:t>▸  </a:t>
+              <a:t>▸	</a:t>
             </a:r>
             <a:r>
               <a:rPr sz="1700" b="0">
@@ -29003,7 +29038,7 @@
             </a:r>
           </a:p>
           <a:p>
-            <a:pPr algn="l">
+            <a:pPr algn="l" marL="269875" indent="-269875">
               <a:spcAft>
                 <a:spcPts val="800"/>
               </a:spcAft>
@@ -29015,7 +29050,7 @@
                 </a:solidFill>
                 <a:latin typeface="Segoe UI"/>
               </a:rPr>
-              <a:t>▸  </a:t>
+              <a:t>▸	</a:t>
             </a:r>
             <a:r>
               <a:rPr sz="1700" b="0">
@@ -29024,11 +29059,11 @@
                 </a:solidFill>
                 <a:latin typeface="Segoe UI"/>
               </a:rPr>
-              <a:t>Três campanhas pré-registadas (hipótese, testes e regra de decisão fixados antes dos dados)</a:t>
-            </a:r>
-          </a:p>
-          <a:p>
-            <a:pPr algn="l">
+              <a:t>Três campanhas pré-registadas: hipótese, testes e regra de decisão antes dos dados</a:t>
+            </a:r>
+          </a:p>
+          <a:p>
+            <a:pPr algn="l" marL="269875" indent="-269875">
               <a:spcAft>
                 <a:spcPts val="800"/>
               </a:spcAft>
@@ -29040,7 +29075,7 @@
                 </a:solidFill>
                 <a:latin typeface="Segoe UI"/>
               </a:rPr>
-              <a:t>▸  </a:t>
+              <a:t>▸	</a:t>
             </a:r>
             <a:r>
               <a:rPr sz="1700" b="0">
@@ -29049,7 +29084,7 @@
                 </a:solidFill>
                 <a:latin typeface="Segoe UI"/>
               </a:rPr>
-              <a:t>27 verificadores automáticos, 19 no hook de pre-commit: cada número da tese é recalculado a partir dos CSV, e o commit é recusado se algum deixar de bater</a:t>
+              <a:t>29 verificadores, 22 no hook de pre-commit: cada número da tese é recalculado dos CSV</a:t>
             </a:r>
           </a:p>
         </p:txBody>
@@ -29471,7 +29506,7 @@
           </a:bodyPr>
           <a:lstStyle/>
           <a:p>
-            <a:pPr algn="l">
+            <a:pPr algn="l" marL="238125" indent="-238125">
               <a:spcAft>
                 <a:spcPts val="800"/>
               </a:spcAft>
@@ -29483,7 +29518,7 @@
                 </a:solidFill>
                 <a:latin typeface="Segoe UI"/>
               </a:rPr>
-              <a:t>▸  </a:t>
+              <a:t>▸	</a:t>
             </a:r>
             <a:r>
               <a:rPr sz="1500" b="0">
@@ -30098,7 +30133,7 @@
           </a:bodyPr>
           <a:lstStyle/>
           <a:p>
-            <a:pPr algn="l">
+            <a:pPr algn="l" marL="269875" indent="-269875">
               <a:spcAft>
                 <a:spcPts val="800"/>
               </a:spcAft>
@@ -30110,7 +30145,7 @@
                 </a:solidFill>
                 <a:latin typeface="Segoe UI"/>
               </a:rPr>
-              <a:t>▸  </a:t>
+              <a:t>▸	</a:t>
             </a:r>
             <a:r>
               <a:rPr sz="1700" b="0">
@@ -30123,7 +30158,7 @@
             </a:r>
           </a:p>
           <a:p>
-            <a:pPr algn="l">
+            <a:pPr algn="l" marL="269875" indent="-269875">
               <a:spcAft>
                 <a:spcPts val="800"/>
               </a:spcAft>
@@ -30135,7 +30170,7 @@
                 </a:solidFill>
                 <a:latin typeface="Segoe UI"/>
               </a:rPr>
-              <a:t>▸  </a:t>
+              <a:t>▸	</a:t>
             </a:r>
             <a:r>
               <a:rPr sz="1700" b="0">
@@ -30148,7 +30183,7 @@
             </a:r>
           </a:p>
           <a:p>
-            <a:pPr algn="l">
+            <a:pPr algn="l" marL="269875" indent="-269875">
               <a:spcAft>
                 <a:spcPts val="800"/>
               </a:spcAft>
@@ -30160,7 +30195,7 @@
                 </a:solidFill>
                 <a:latin typeface="Segoe UI"/>
               </a:rPr>
-              <a:t>▸  </a:t>
+              <a:t>▸	</a:t>
             </a:r>
             <a:r>
               <a:rPr sz="1700" b="0">
@@ -30173,7 +30208,7 @@
             </a:r>
           </a:p>
           <a:p>
-            <a:pPr algn="l">
+            <a:pPr algn="l" marL="269875" indent="-269875">
               <a:spcAft>
                 <a:spcPts val="800"/>
               </a:spcAft>
@@ -30185,7 +30220,7 @@
                 </a:solidFill>
                 <a:latin typeface="Segoe UI"/>
               </a:rPr>
-              <a:t>▸  </a:t>
+              <a:t>▸	</a:t>
             </a:r>
             <a:r>
               <a:rPr sz="1700" b="0">

--- a/Defesa/slides_defesa.pptx
+++ b/Defesa/slides_defesa.pptx
@@ -12326,12 +12326,12 @@
         </p:nvSpPr>
         <p:spPr>
           <a:xfrm>
-            <a:off x="7003564" y="1600200"/>
-            <a:ext cx="3243942" cy="4206240"/>
+            <a:off x="5608015" y="1859362"/>
+            <a:ext cx="6035040" cy="4053676"/>
           </a:xfrm>
           <a:prstGeom prst="roundRect">
             <a:avLst>
-              <a:gd name="adj" fmla="val 2774"/>
+              <a:gd name="adj" fmla="val 1491"/>
             </a:avLst>
           </a:prstGeom>
           <a:solidFill>
@@ -12368,7 +12368,7 @@
       </p:sp>
       <p:pic>
         <p:nvPicPr>
-          <p:cNvPr id="9" name="Picture 8" descr="robustez_falhas.png"/>
+          <p:cNvPr id="9" name="Picture 8" descr="slide_robustez.png"/>
           <p:cNvPicPr>
             <a:picLocks noChangeAspect="1"/>
           </p:cNvPicPr>
@@ -12382,8 +12382,8 @@
         </p:blipFill>
         <p:spPr>
           <a:xfrm>
-            <a:off x="7085860" y="1682496"/>
-            <a:ext cx="3079350" cy="4041648"/>
+            <a:off x="5690311" y="1941658"/>
+            <a:ext cx="5870448" cy="3889084"/>
           </a:xfrm>
           <a:prstGeom prst="rect">
             <a:avLst/>
@@ -29493,7 +29493,7 @@
         <p:spPr>
           <a:xfrm>
             <a:off x="548640" y="1600200"/>
-            <a:ext cx="5608015" cy="4480560"/>
+            <a:ext cx="4693615" cy="4480560"/>
           </a:xfrm>
           <a:prstGeom prst="rect">
             <a:avLst/>
@@ -29652,12 +29652,12 @@
         </p:nvSpPr>
         <p:spPr>
           <a:xfrm>
-            <a:off x="7405849" y="1600200"/>
-            <a:ext cx="3353771" cy="2194560"/>
+            <a:off x="5608015" y="1810607"/>
+            <a:ext cx="6035040" cy="4151185"/>
           </a:xfrm>
           <a:prstGeom prst="roundRect">
             <a:avLst>
-              <a:gd name="adj" fmla="val 2683"/>
+              <a:gd name="adj" fmla="val 1491"/>
             </a:avLst>
           </a:prstGeom>
           <a:solidFill>
@@ -29694,7 +29694,7 @@
       </p:sp>
       <p:pic>
         <p:nvPicPr>
-          <p:cNvPr id="9" name="Picture 8" descr="taxa_sucesso_por_cenario.png"/>
+          <p:cNvPr id="9" name="Picture 8" descr="slide_qi1_chegadas.png"/>
           <p:cNvPicPr>
             <a:picLocks noChangeAspect="1"/>
           </p:cNvPicPr>
@@ -29708,80 +29708,8 @@
         </p:blipFill>
         <p:spPr>
           <a:xfrm>
-            <a:off x="7488145" y="1682496"/>
-            <a:ext cx="3189179" cy="2029968"/>
-          </a:xfrm>
-          <a:prstGeom prst="rect">
-            <a:avLst/>
-          </a:prstGeom>
-        </p:spPr>
-      </p:pic>
-      <p:sp>
-        <p:nvSpPr>
-          <p:cNvPr id="10" name="Rounded Rectangle 9"/>
-          <p:cNvSpPr/>
-          <p:nvPr/>
-        </p:nvSpPr>
-        <p:spPr>
-          <a:xfrm>
-            <a:off x="7221858" y="3977640"/>
-            <a:ext cx="3721753" cy="2194560"/>
-          </a:xfrm>
-          <a:prstGeom prst="roundRect">
-            <a:avLst>
-              <a:gd name="adj" fmla="val 2418"/>
-            </a:avLst>
-          </a:prstGeom>
-          <a:solidFill>
-            <a:srgbClr val="FFFFFF"/>
-          </a:solidFill>
-          <a:ln w="9525">
-            <a:solidFill>
-              <a:srgbClr val="2E2E2E"/>
-            </a:solidFill>
-          </a:ln>
-          <a:effectLst/>
-        </p:spPr>
-        <p:style>
-          <a:lnRef idx="1">
-            <a:schemeClr val="accent1"/>
-          </a:lnRef>
-          <a:fillRef idx="3">
-            <a:schemeClr val="accent1"/>
-          </a:fillRef>
-          <a:effectRef idx="2">
-            <a:schemeClr val="accent1"/>
-          </a:effectRef>
-          <a:fontRef idx="minor">
-            <a:schemeClr val="lt1"/>
-          </a:fontRef>
-        </p:style>
-        <p:txBody>
-          <a:bodyPr rtlCol="0" anchor="ctr"/>
-          <a:lstStyle/>
-          <a:p>
-            <a:pPr algn="ctr"/>
-          </a:p>
-        </p:txBody>
-      </p:sp>
-      <p:pic>
-        <p:nvPicPr>
-          <p:cNvPr id="11" name="Picture 10" descr="recolhas_por_cenario.png"/>
-          <p:cNvPicPr>
-            <a:picLocks noChangeAspect="1"/>
-          </p:cNvPicPr>
-          <p:nvPr/>
-        </p:nvPicPr>
-        <p:blipFill>
-          <a:blip r:embed="rId3"/>
-          <a:stretch>
-            <a:fillRect/>
-          </a:stretch>
-        </p:blipFill>
-        <p:spPr>
-          <a:xfrm>
-            <a:off x="7304154" y="4059936"/>
-            <a:ext cx="3557161" cy="2029968"/>
+            <a:off x="5690311" y="1892903"/>
+            <a:ext cx="5870448" cy="3986593"/>
           </a:xfrm>
           <a:prstGeom prst="rect">
             <a:avLst/>
@@ -29790,7 +29718,7 @@
       </p:pic>
       <p:cxnSp>
         <p:nvCxnSpPr>
-          <p:cNvPr id="12" name="Connector 11"/>
+          <p:cNvPr id="10" name="Connector 9"/>
           <p:cNvCxnSpPr/>
           <p:nvPr/>
         </p:nvCxnSpPr>
@@ -29825,7 +29753,7 @@
       </p:cxnSp>
       <p:sp>
         <p:nvSpPr>
-          <p:cNvPr id="13" name="TextBox 12"/>
+          <p:cNvPr id="11" name="TextBox 10"/>
           <p:cNvSpPr txBox="1"/>
           <p:nvPr/>
         </p:nvSpPr>
@@ -29864,7 +29792,7 @@
       </p:sp>
       <p:sp>
         <p:nvSpPr>
-          <p:cNvPr id="14" name="TextBox 13"/>
+          <p:cNvPr id="12" name="TextBox 11"/>
           <p:cNvSpPr txBox="1"/>
           <p:nvPr/>
         </p:nvSpPr>
@@ -30120,7 +30048,7 @@
         <p:spPr>
           <a:xfrm>
             <a:off x="548640" y="1600200"/>
-            <a:ext cx="5790895" cy="4480560"/>
+            <a:ext cx="4876495" cy="4480560"/>
           </a:xfrm>
           <a:prstGeom prst="rect">
             <a:avLst/>
@@ -30242,12 +30170,12 @@
         </p:nvSpPr>
         <p:spPr>
           <a:xfrm>
-            <a:off x="7860102" y="1600200"/>
-            <a:ext cx="2628145" cy="2194560"/>
+            <a:off x="5803338" y="1600200"/>
+            <a:ext cx="5827274" cy="4572000"/>
           </a:xfrm>
           <a:prstGeom prst="roundRect">
             <a:avLst>
-              <a:gd name="adj" fmla="val 3424"/>
+              <a:gd name="adj" fmla="val 1544"/>
             </a:avLst>
           </a:prstGeom>
           <a:solidFill>
@@ -30284,7 +30212,7 @@
       </p:sp>
       <p:pic>
         <p:nvPicPr>
-          <p:cNvPr id="9" name="Picture 8" descr="dotplot_eval_u_wall.png"/>
+          <p:cNvPr id="9" name="Picture 8" descr="slide_bimodal.png"/>
           <p:cNvPicPr>
             <a:picLocks noChangeAspect="1"/>
           </p:cNvPicPr>
@@ -30298,80 +30226,8 @@
         </p:blipFill>
         <p:spPr>
           <a:xfrm>
-            <a:off x="7942398" y="1682496"/>
-            <a:ext cx="2463553" cy="2029968"/>
-          </a:xfrm>
-          <a:prstGeom prst="rect">
-            <a:avLst/>
-          </a:prstGeom>
-        </p:spPr>
-      </p:pic>
-      <p:sp>
-        <p:nvSpPr>
-          <p:cNvPr id="10" name="Rounded Rectangle 9"/>
-          <p:cNvSpPr/>
-          <p:nvPr/>
-        </p:nvSpPr>
-        <p:spPr>
-          <a:xfrm>
-            <a:off x="7860102" y="3977640"/>
-            <a:ext cx="2628145" cy="2194560"/>
-          </a:xfrm>
-          <a:prstGeom prst="roundRect">
-            <a:avLst>
-              <a:gd name="adj" fmla="val 3424"/>
-            </a:avLst>
-          </a:prstGeom>
-          <a:solidFill>
-            <a:srgbClr val="FFFFFF"/>
-          </a:solidFill>
-          <a:ln w="9525">
-            <a:solidFill>
-              <a:srgbClr val="2E2E2E"/>
-            </a:solidFill>
-          </a:ln>
-          <a:effectLst/>
-        </p:spPr>
-        <p:style>
-          <a:lnRef idx="1">
-            <a:schemeClr val="accent1"/>
-          </a:lnRef>
-          <a:fillRef idx="3">
-            <a:schemeClr val="accent1"/>
-          </a:fillRef>
-          <a:effectRef idx="2">
-            <a:schemeClr val="accent1"/>
-          </a:effectRef>
-          <a:fontRef idx="minor">
-            <a:schemeClr val="lt1"/>
-          </a:fontRef>
-        </p:style>
-        <p:txBody>
-          <a:bodyPr rtlCol="0" anchor="ctr"/>
-          <a:lstStyle/>
-          <a:p>
-            <a:pPr algn="ctr"/>
-          </a:p>
-        </p:txBody>
-      </p:sp>
-      <p:pic>
-        <p:nvPicPr>
-          <p:cNvPr id="11" name="Picture 10" descr="dotplot_eval_none.png"/>
-          <p:cNvPicPr>
-            <a:picLocks noChangeAspect="1"/>
-          </p:cNvPicPr>
-          <p:nvPr/>
-        </p:nvPicPr>
-        <p:blipFill>
-          <a:blip r:embed="rId3"/>
-          <a:stretch>
-            <a:fillRect/>
-          </a:stretch>
-        </p:blipFill>
-        <p:spPr>
-          <a:xfrm>
-            <a:off x="7942398" y="4059936"/>
-            <a:ext cx="2463553" cy="2029968"/>
+            <a:off x="5885634" y="1682496"/>
+            <a:ext cx="5662682" cy="4407408"/>
           </a:xfrm>
           <a:prstGeom prst="rect">
             <a:avLst/>
@@ -30380,7 +30236,7 @@
       </p:pic>
       <p:cxnSp>
         <p:nvCxnSpPr>
-          <p:cNvPr id="12" name="Connector 11"/>
+          <p:cNvPr id="10" name="Connector 9"/>
           <p:cNvCxnSpPr/>
           <p:nvPr/>
         </p:nvCxnSpPr>
@@ -30415,7 +30271,7 @@
       </p:cxnSp>
       <p:sp>
         <p:nvSpPr>
-          <p:cNvPr id="13" name="TextBox 12"/>
+          <p:cNvPr id="11" name="TextBox 10"/>
           <p:cNvSpPr txBox="1"/>
           <p:nvPr/>
         </p:nvSpPr>
@@ -30454,7 +30310,7 @@
       </p:sp>
       <p:sp>
         <p:nvSpPr>
-          <p:cNvPr id="14" name="TextBox 13"/>
+          <p:cNvPr id="12" name="TextBox 11"/>
           <p:cNvSpPr txBox="1"/>
           <p:nvPr/>
         </p:nvSpPr>

--- a/Defesa/slides_defesa.pptx
+++ b/Defesa/slides_defesa.pptx
@@ -1356,7 +1356,12 @@
           </a:p>
           <a:p>
             <a:r>
-              <a:t>pré-registado. Os três mapas mostram um episódio de cada: o evolutivo atravessa</a:t>
+              <a:t>pré-registado. E note-se: o evolutivo já treinou aqui com a novidade doseada</a:t>
+            </a:r>
+          </a:p>
+          <a:p>
+            <a:r>
+              <a:t>adaptativamente, o mecanismo que deu vinte e oito em vinte e oito no Muro em U. Os três mapas mostram um episódio de cada: o evolutivo atravessa</a:t>
             </a:r>
           </a:p>
           <a:p>
